--- a/audio_engine_architecture/output/PreeAudio_补充分享_JACK与PipeWire架构详解.pptx
+++ b/audio_engine_architecture/output/PreeAudio_补充分享_JACK与PipeWire架构详解.pptx
@@ -2,27 +2,27 @@
 <file path=ppt/presentation.xml><?xml version="1.0" encoding="utf-8"?>
 <p:presentation xmlns:p="http://schemas.openxmlformats.org/presentationml/2006/main">
   <p:sldMasterIdLst>
-    <p:sldMasterId xmlns:r="http://schemas.openxmlformats.org/officeDocument/2006/relationships" id="2147483648" r:id="R8b01eeab3da04ef8"/>
+    <p:sldMasterId xmlns:r="http://schemas.openxmlformats.org/officeDocument/2006/relationships" id="2147483648" r:id="R29a42de77e304a4a"/>
   </p:sldMasterIdLst>
   <p:notesMasterIdLst>
-    <p:notesMasterId xmlns:r="http://schemas.openxmlformats.org/officeDocument/2006/relationships" r:id="R468c84c7aaee4e5b"/>
+    <p:notesMasterId xmlns:r="http://schemas.openxmlformats.org/officeDocument/2006/relationships" r:id="Re0e1f3c2cedb4223"/>
   </p:notesMasterIdLst>
   <p:sldIdLst>
-    <p:sldId xmlns:r="http://schemas.openxmlformats.org/officeDocument/2006/relationships" id="256" r:id="Rbcd82baa41f14ef1"/>
-    <p:sldId xmlns:r="http://schemas.openxmlformats.org/officeDocument/2006/relationships" id="257" r:id="R9484754963294331"/>
-    <p:sldId xmlns:r="http://schemas.openxmlformats.org/officeDocument/2006/relationships" id="258" r:id="Rd5f417ad519445ef"/>
-    <p:sldId xmlns:r="http://schemas.openxmlformats.org/officeDocument/2006/relationships" id="259" r:id="Rc37235794aeb41f9"/>
-    <p:sldId xmlns:r="http://schemas.openxmlformats.org/officeDocument/2006/relationships" id="260" r:id="R89fbb2896139473d"/>
-    <p:sldId xmlns:r="http://schemas.openxmlformats.org/officeDocument/2006/relationships" id="261" r:id="R6c690edc54bc487f"/>
-    <p:sldId xmlns:r="http://schemas.openxmlformats.org/officeDocument/2006/relationships" id="262" r:id="R7e7965f712f74cd4"/>
-    <p:sldId xmlns:r="http://schemas.openxmlformats.org/officeDocument/2006/relationships" id="263" r:id="R483cb18b52874fb9"/>
-    <p:sldId xmlns:r="http://schemas.openxmlformats.org/officeDocument/2006/relationships" id="264" r:id="R05189023ede642bd"/>
-    <p:sldId xmlns:r="http://schemas.openxmlformats.org/officeDocument/2006/relationships" id="265" r:id="R5406b890ded94eb8"/>
-    <p:sldId xmlns:r="http://schemas.openxmlformats.org/officeDocument/2006/relationships" id="266" r:id="R653f054e7c1e4890"/>
-    <p:sldId xmlns:r="http://schemas.openxmlformats.org/officeDocument/2006/relationships" id="267" r:id="R22ba4f5e373543fe"/>
-    <p:sldId xmlns:r="http://schemas.openxmlformats.org/officeDocument/2006/relationships" id="268" r:id="R0d59a2a3763049be"/>
-    <p:sldId xmlns:r="http://schemas.openxmlformats.org/officeDocument/2006/relationships" id="269" r:id="R4957cdafa8da45dc"/>
-    <p:sldId xmlns:r="http://schemas.openxmlformats.org/officeDocument/2006/relationships" id="270" r:id="R989de0332eae45b9"/>
+    <p:sldId xmlns:r="http://schemas.openxmlformats.org/officeDocument/2006/relationships" id="256" r:id="R174d3c0a330e4d00"/>
+    <p:sldId xmlns:r="http://schemas.openxmlformats.org/officeDocument/2006/relationships" id="257" r:id="R49134c2b39384e65"/>
+    <p:sldId xmlns:r="http://schemas.openxmlformats.org/officeDocument/2006/relationships" id="258" r:id="Rf5825b9a906445b8"/>
+    <p:sldId xmlns:r="http://schemas.openxmlformats.org/officeDocument/2006/relationships" id="259" r:id="R926728679f964e95"/>
+    <p:sldId xmlns:r="http://schemas.openxmlformats.org/officeDocument/2006/relationships" id="260" r:id="R0ebcfe66a84b4228"/>
+    <p:sldId xmlns:r="http://schemas.openxmlformats.org/officeDocument/2006/relationships" id="261" r:id="R8d63f5fbf1a640d4"/>
+    <p:sldId xmlns:r="http://schemas.openxmlformats.org/officeDocument/2006/relationships" id="262" r:id="Ra9d0f72eac3642c3"/>
+    <p:sldId xmlns:r="http://schemas.openxmlformats.org/officeDocument/2006/relationships" id="263" r:id="R010eb5b1c55d4594"/>
+    <p:sldId xmlns:r="http://schemas.openxmlformats.org/officeDocument/2006/relationships" id="264" r:id="R206c53f99be840f5"/>
+    <p:sldId xmlns:r="http://schemas.openxmlformats.org/officeDocument/2006/relationships" id="265" r:id="R554c693bdfb143f8"/>
+    <p:sldId xmlns:r="http://schemas.openxmlformats.org/officeDocument/2006/relationships" id="266" r:id="R0edf22404e274842"/>
+    <p:sldId xmlns:r="http://schemas.openxmlformats.org/officeDocument/2006/relationships" id="267" r:id="R73de18cf88c04728"/>
+    <p:sldId xmlns:r="http://schemas.openxmlformats.org/officeDocument/2006/relationships" id="268" r:id="Rd8b35097cc744747"/>
+    <p:sldId xmlns:r="http://schemas.openxmlformats.org/officeDocument/2006/relationships" id="269" r:id="R75d2d9d51ade44bd"/>
+    <p:sldId xmlns:r="http://schemas.openxmlformats.org/officeDocument/2006/relationships" id="270" r:id="R8264016804274ff2"/>
   </p:sldIdLst>
   <p:sldSz cx="12192000" cy="6858000"/>
   <p:notesSz cx="6858000" cy="9144000"/>
@@ -456,7 +456,57 @@
           <a:lstStyle xmlns:a="http://schemas.openxmlformats.org/drawingml/2006/main"/>
           <a:p xmlns:a="http://schemas.openxmlformats.org/drawingml/2006/main">
             <a:r>
-              <a:t>建议讲述 2 分钟。这里梳理系统音频软件架构，不是播放器、编解码器或音效算法的历史。1990 年代常见设备接口以 OSS 为例，后续 ALSA 提供驱动及用户态接口。设备抽象层并没有被用户态音频服务取代，现代 Linux 音频服务仍常通过 ALSA 对接设备。2000 年代形成两种侧重：PulseAudio 解决桌面多应用共享与流管理，JACK 侧重专业音频的同步回调与应用互连。PulseAudio 在 2006 年从 Polypaudio 更名，不能把更名年份写成前身诞生年份。PipeWire 在 2017 年正式发布项目，2023 年发布 1.0，逐步在统一媒体图里兼顾桌面与专业用途。PreeAudio 放在当代终端系统路线单独说明，不暗示其由 PipeWire 继承，也不给未经核实的首发年份。</a:t>
+              <a:t>在看 PreeAudio 之前，我们先把时间拉长一点，看看操作系统里的声音处理是怎么发展起来的。这里主要沿着 Linux 和 POSIX 系统这条路线看，关注的是软件怎样组织工作。</a:t>
+            </a:r>
+          </a:p>
+          <a:p xmlns:a="http://schemas.openxmlformats.org/drawingml/2006/main">
+            <a:r>
+              <a:t/>
+            </a:r>
+          </a:p>
+          <a:p xmlns:a="http://schemas.openxmlformats.org/drawingml/2006/main">
+            <a:r>
+              <a:t>最左边的 OSS，全称是 Open Sound System，中文可以叫开放声音系统。它提供一套录音和播放接口。早期常见的用法，是应用打开像 /dev/dsp 这样的设备入口，再通过读写操作交换音频数据。这里写进去的一般是准备好的数字音频样本，不能把一个 MP3 文件原样写进去，就期待设备自动完成所有解码。</a:t>
+            </a:r>
+          </a:p>
+          <a:p xmlns:a="http://schemas.openxmlformats.org/drawingml/2006/main">
+            <a:r>
+              <a:t/>
+            </a:r>
+          </a:p>
+          <a:p xmlns:a="http://schemas.openxmlformats.org/drawingml/2006/main">
+            <a:r>
+              <a:t>接下来是 ALSA，全称是 Advanced Linux Sound Architecture，也就是高级 Linux 声音架构。它既包括内核里的音频驱动体系，也有应用使用的库。不同声卡怎么访问、缓冲区怎么管理，这些底层问题有了更统一的组织方式。不过，多应用的音量、路由和交互规则，仍然需要上层协调。</a:t>
+            </a:r>
+          </a:p>
+          <a:p xmlns:a="http://schemas.openxmlformats.org/drawingml/2006/main">
+            <a:r>
+              <a:t/>
+            </a:r>
+          </a:p>
+          <a:p xmlns:a="http://schemas.openxmlformats.org/drawingml/2006/main">
+            <a:r>
+              <a:t>到了用户态音频服务这一阶段，需求开始分成不同侧重。桌面上，我们希望浏览器、播放器和通知音能共用设备，还能分别调音量，PulseAudio 就很关注这些问题。音乐制作里，我们更在意多个处理程序能不能按统一节奏合作，JACK 把同步处理和低延迟放在了很核心的位置。</a:t>
+            </a:r>
+          </a:p>
+          <a:p xmlns:a="http://schemas.openxmlformats.org/drawingml/2006/main">
+            <a:r>
+              <a:t/>
+            </a:r>
+          </a:p>
+          <a:p xmlns:a="http://schemas.openxmlformats.org/drawingml/2006/main">
+            <a:r>
+              <a:t>再往右是 PipeWire。它把音频、视频等媒体处理统一放进节点和连接组成的图中，同时考虑桌面和专业音频需求。PreeAudio 则放在当代终端音频框架这条线上，重点看鸿蒙框架内部怎样组织节点、处理簇和运行状态。</a:t>
+            </a:r>
+          </a:p>
+          <a:p xmlns:a="http://schemas.openxmlformats.org/drawingml/2006/main">
+            <a:r>
+              <a:t/>
+            </a:r>
+          </a:p>
+          <a:p xmlns:a="http://schemas.openxmlformats.org/drawingml/2006/main">
+            <a:r>
+              <a:t>这张图里的演进，是系统承担的职责逐渐丰富。今天的 PipeWire 在 Linux 上仍然可以通过 ALSA 使用硬件。带着这层关系，我们再看下一页：这些需求到底让软件架构发生了哪些变化。</a:t>
             </a:r>
           </a:p>
           <a:p xmlns:a="http://schemas.openxmlformats.org/drawingml/2006/main">
@@ -566,7 +616,57 @@
           <a:lstStyle xmlns:a="http://schemas.openxmlformats.org/drawingml/2006/main"/>
           <a:p xmlns:a="http://schemas.openxmlformats.org/drawingml/2006/main">
             <a:r>
-              <a:t>JACK2 README 区分两种服务器级激活模式。同步模式在当前周期等待图内客户端完成，然后使用当前周期的输出。异步模式使用上一周期算好的输出，并在当前周期运行新一轮图，从而解耦设备交付和当前计算。代价是相对同步模型多一个处理周期的流水线等待。若某一客户端未能按期运行，其他客户端仍可能继续并产生部分输出，这不构成任意负载下无断音的保证。同步/异步与串行/并行是不同维度，不可把异步等同于多核并行，也不能把异步理解成没有实时截止期。块周期为2.67ms的教学例子中，这一流水线代价约为2.67ms，设备及其它缓冲时延另计。作者论文讨论各模式的容错行为，不能把所有晚到问题都视为被隔离。</a:t>
+              <a:t>上一页讲的是一轮里哪些工作可以同时做。这一页再换一个角度：设备这一轮拿到的，究竟是哪一轮的计算结果。</a:t>
+            </a:r>
+          </a:p>
+          <a:p xmlns:a="http://schemas.openxmlformats.org/drawingml/2006/main">
+            <a:r>
+              <a:t/>
+            </a:r>
+          </a:p>
+          <a:p xmlns:a="http://schemas.openxmlformats.org/drawingml/2006/main">
+            <a:r>
+              <a:t>先看蓝色的同步模式。在周期 n 中，系统完成这一轮图的计算，然后使用这一轮的结果。图里写成“计算 n，写出 n”。当前结果能直接参与交付，但交付也需要等这一轮相关工作完成。</a:t>
+            </a:r>
+          </a:p>
+          <a:p xmlns:a="http://schemas.openxmlformats.org/drawingml/2006/main">
+            <a:r>
+              <a:t/>
+            </a:r>
+          </a:p>
+          <a:p xmlns:a="http://schemas.openxmlformats.org/drawingml/2006/main">
+            <a:r>
+              <a:t>再看绿色的异步模式。在周期 n 中，系统运行新一轮计算，同时使用前一周期已经算好的结果。因此图里写成“计算 n，写出 n 减一”。到下一个周期，再把这一轮的结果交出去。</a:t>
+            </a:r>
+          </a:p>
+          <a:p xmlns:a="http://schemas.openxmlformats.org/drawingml/2006/main">
+            <a:r>
+              <a:t/>
+            </a:r>
+          </a:p>
+          <a:p xmlns:a="http://schemas.openxmlformats.org/drawingml/2006/main">
+            <a:r>
+              <a:t>这样一来，设备交付与当前计算之间多了一层跨周期安排，代价是相对于同步模型多一个处理周期的流水线延迟。假设一个周期是二点六七毫秒，这部分代价大约就是二点六七毫秒，但设备和其它缓冲产生的时延还要另外考虑。</a:t>
+            </a:r>
+          </a:p>
+          <a:p xmlns:a="http://schemas.openxmlformats.org/drawingml/2006/main">
+            <a:r>
+              <a:t/>
+            </a:r>
+          </a:p>
+          <a:p xmlns:a="http://schemas.openxmlformats.org/drawingml/2006/main">
+            <a:r>
+              <a:t>异步模式下，一个客户端这一轮没有及时运行，其它客户端仍然可能继续并形成部分输出。它提供了不同的运行取舍，不过迟到部分的内容仍然可能有问题，不能理解成系统从此就没有断音风险。</a:t>
+            </a:r>
+          </a:p>
+          <a:p xmlns:a="http://schemas.openxmlformats.org/drawingml/2006/main">
+            <a:r>
+              <a:t/>
+            </a:r>
+          </a:p>
+          <a:p xmlns:a="http://schemas.openxmlformats.org/drawingml/2006/main">
+            <a:r>
+              <a:t>所以，并行和异步要分开理解。并行说的是 A、B 能不能同时计算，异步说的是结果跨哪一个周期交付。异步也不意味着计算没有截止时间。两个维度分清以后，我们再看 PipeWire 里的异步节点和异步连接，就更容易识别它们的作用范围。</a:t>
             </a:r>
           </a:p>
           <a:p xmlns:a="http://schemas.openxmlformats.org/drawingml/2006/main">
@@ -656,7 +756,57 @@
           <a:lstStyle xmlns:a="http://schemas.openxmlformats.org/drawingml/2006/main"/>
           <a:p xmlns:a="http://schemas.openxmlformats.org/drawingml/2006/main">
             <a:r>
-              <a:t>WirePlumber 的会话管理不仅是连线，还包括设备启用、配置、部分访问控制、节点配置、链接及元数据管理。用设备变化的概念示例串起这些职责：监视器发现设备，策略依据配置和偏好作选择，配置节点格式与端口，管理连接，使媒体图满足当前场景。实际实现是持续事件处理，图中顺序用于理解职责，不表示每次热插拔都严格走同一调用链。控制决策不需要逐块参与音频运算。PipeWire 的主线程处理对象与配置，数据线程执行已准备好的图。对照 PreeAudio：Policy/Service 与引擎也有职责分工，具体差异应看规则如何转化为 Manager 的连接和状态更新，不能把策略分离当作 PipeWire 独有特性。</a:t>
+              <a:t>接下来把 PipeWire 的策略层展开。可以想象用户正在听音乐，这时一个新的输出设备出现了。系统首先要知道设备可用，然后决定是不是使用它、采用什么配置，以及已有音频应该怎样连接。</a:t>
+            </a:r>
+          </a:p>
+          <a:p xmlns:a="http://schemas.openxmlformats.org/drawingml/2006/main">
+            <a:r>
+              <a:t/>
+            </a:r>
+          </a:p>
+          <a:p xmlns:a="http://schemas.openxmlformats.org/drawingml/2006/main">
+            <a:r>
+              <a:t>这些工作包含不少策略因素。比如默认设备偏好、设备的不同工作配置，以及节点应该提供什么格式和端口。WirePlumber 作为会话管理器，会持续监视相关事件，管理设备、节点和连接，还会维护默认输入输出之类的元数据。</a:t>
+            </a:r>
+          </a:p>
+          <a:p xmlns:a="http://schemas.openxmlformats.org/drawingml/2006/main">
+            <a:r>
+              <a:t/>
+            </a:r>
+          </a:p>
+          <a:p xmlns:a="http://schemas.openxmlformats.org/drawingml/2006/main">
+            <a:r>
+              <a:t>这里的元数据，是描述状态和偏好的信息。它可以记录“默认输出选谁”，里面并不装音乐样本本身。</a:t>
+            </a:r>
+          </a:p>
+          <a:p xmlns:a="http://schemas.openxmlformats.org/drawingml/2006/main">
+            <a:r>
+              <a:t/>
+            </a:r>
+          </a:p>
+          <a:p xmlns:a="http://schemas.openxmlformats.org/drawingml/2006/main">
+            <a:r>
+              <a:t>上面这四步，是帮助我们理解职责的概念顺序。实际系统是持续处理事件，未必每次都按同一条简单的调用链运行。创建连接之前，节点可能还需要配置格式和端口。创建连接之后，设备或节点配置也可能继续调整。</a:t>
+            </a:r>
+          </a:p>
+          <a:p xmlns:a="http://schemas.openxmlformats.org/drawingml/2006/main">
+            <a:r>
+              <a:t/>
+            </a:r>
+          </a:p>
+          <a:p xmlns:a="http://schemas.openxmlformats.org/drawingml/2006/main">
+            <a:r>
+              <a:t>下面的实时执行层，在这些对象和资源准备好以后，按图持续处理音频。每一块样本通常不需要再让会话管理器重新判断一次设备偏好。策略逻辑和逐块计算因此有了不同的执行职责。</a:t>
+            </a:r>
+          </a:p>
+          <a:p xmlns:a="http://schemas.openxmlformats.org/drawingml/2006/main">
+            <a:r>
+              <a:t/>
+            </a:r>
+          </a:p>
+          <a:p xmlns:a="http://schemas.openxmlformats.org/drawingml/2006/main">
+            <a:r>
+              <a:t>与 PreeAudio 联系起来，我们也会看到上层策略与引擎之间的协作。真正值得比较的，是一次规则变化怎样转成节点连接、状态和输出资源的更新。策略分离这个思想可以出现在多种框架中，具体的软件边界和执行机制则各有实现。是否能平顺切换，还需要看设备、缓冲衔接和实际运行条件。</a:t>
             </a:r>
           </a:p>
           <a:p xmlns:a="http://schemas.openxmlformats.org/drawingml/2006/main">
@@ -751,7 +901,67 @@
           <a:lstStyle xmlns:a="http://schemas.openxmlformats.org/drawingml/2006/main"/>
           <a:p xmlns:a="http://schemas.openxmlformats.org/drawingml/2006/main">
             <a:r>
-              <a:t>依据 Graph Scheduling 文档解释同步图。Driver 由硬件事件或定时器等发起处理周期；节点激活记录包含 required 与 pending 等状态，依赖未满足时不能执行。图中 A、B 可运行，C 依赖两者。示例在 Driver 发起周期并释放其门控依赖后，只显示上游工作依赖，因此 C 从2到1再到0。A完成会减少C的待满足依赖数，B完成后C就绪，通过eventfd触发处理。这个简化计数不能直接当作真实activation结构完整数值，因为真实图还包括Driver相关依赖及完成回报。节点完成后继续传播就绪条件，周期结束时Driver可统计处理情况。异步节点不遵循同一同步依赖链，第14页另讲。与HPAE相比，应具体核对其Manager如何驱动OutputCluster并向上游取数，不因两者都叫处理图就假定调度器相同。</a:t>
+              <a:t>有了图以后，运行系统还需要回答一个很具体的问题：某个节点现在到底能不能开始。</a:t>
+            </a:r>
+          </a:p>
+          <a:p xmlns:a="http://schemas.openxmlformats.org/drawingml/2006/main">
+            <a:r>
+              <a:t/>
+            </a:r>
+          </a:p>
+          <a:p xmlns:a="http://schemas.openxmlformats.org/drawingml/2006/main">
+            <a:r>
+              <a:t>先看左边的 Driver。它发起这一轮处理，之后 A 和 B 都已经具备各自的运行条件。C 则需要 A 和 B 两份结果，所以它暂时要等。</a:t>
+            </a:r>
+          </a:p>
+          <a:p xmlns:a="http://schemas.openxmlformats.org/drawingml/2006/main">
+            <a:r>
+              <a:t/>
+            </a:r>
+          </a:p>
+          <a:p xmlns:a="http://schemas.openxmlformats.org/drawingml/2006/main">
+            <a:r>
+              <a:t>下面的 pending，可以读成“还有多少个前置条件没有满足”。这个例子从 Driver 已经发起周期以后看，只计算 C 尚未满足的上游依赖。A 和 B 都没完成时，C 的 pending 是二。A 完成以后，变成一。B 也完成以后，变成零，C 才具备运行条件。</a:t>
+            </a:r>
+          </a:p>
+          <a:p xmlns:a="http://schemas.openxmlformats.org/drawingml/2006/main">
+            <a:r>
+              <a:t/>
+            </a:r>
+          </a:p>
+          <a:p xmlns:a="http://schemas.openxmlformats.org/drawingml/2006/main">
+            <a:r>
+              <a:t>这种状态保存在 activation 记录中。activation 是节点运行时的激活记录，其中除了依赖计数，还可以有执行状态和时间相关信息。上游完成以后更新相关状态，再通过 eventfd 等机制通知可以继续运行的后继节点。</a:t>
+            </a:r>
+          </a:p>
+          <a:p xmlns:a="http://schemas.openxmlformats.org/drawingml/2006/main">
+            <a:r>
+              <a:t/>
+            </a:r>
+          </a:p>
+          <a:p xmlns:a="http://schemas.openxmlformats.org/drawingml/2006/main">
+            <a:r>
+              <a:t>eventfd 可以先理解成 Linux 提供的一种可等待的计数通知机制。它告诉对方有事情发生，音频样本仍然保存在相应的数据缓冲中。把数据和通知分开，就能让唤醒不必携带整块音频。</a:t>
+            </a:r>
+          </a:p>
+          <a:p xmlns:a="http://schemas.openxmlformats.org/drawingml/2006/main">
+            <a:r>
+              <a:t/>
+            </a:r>
+          </a:p>
+          <a:p xmlns:a="http://schemas.openxmlformats.org/drawingml/2006/main">
+            <a:r>
+              <a:t>这里的数字是简化后的工作依赖。完整实现还有 Driver 相关的依赖和周期完成回报，不能把图上的二、一、零直接当成整个激活结构的全部计数。</a:t>
+            </a:r>
+          </a:p>
+          <a:p xmlns:a="http://schemas.openxmlformats.org/drawingml/2006/main">
+            <a:r>
+              <a:t/>
+            </a:r>
+          </a:p>
+          <a:p xmlns:a="http://schemas.openxmlformats.org/drawingml/2006/main">
+            <a:r>
+              <a:t>这套方式的核心，是让数据依赖参与运行条件判断。与 PreeAudio 比较时，需要具体看 Manager 怎样驱动处理簇、输出处理怎样带动上游取数。都有节点和连线，并不意味着它们使用同一种调度器。</a:t>
             </a:r>
           </a:p>
           <a:p xmlns:a="http://schemas.openxmlformats.org/drawingml/2006/main">
@@ -841,7 +1051,57 @@
           <a:lstStyle xmlns:a="http://schemas.openxmlformats.org/drawingml/2006/main"/>
           <a:p xmlns:a="http://schemas.openxmlformats.org/drawingml/2006/main">
             <a:r>
-              <a:t>依据 Design、Objects Design 与 Graph Scheduling 文档。PipeWire节点可以位于服务进程或客户端进程。主线程先进行IPC与图配置，在处理开始前准备缓冲、I/O区域和激活记录。对远端节点，此处远端指其它本机进程，eventfd与activation记录可传递给客户端；客户端可以直接唤醒相连节点，不要求每一步都回服务器中转。样本数据与唤醒信号是两类信息：共享缓冲承载媒体块，eventfd传递运行通知，activation记录保存执行及依赖状态。图中只画主要关系，未列所有映射、权限与驱动节点。共享内存不是全链零拷贝保证，媒体转换和混音可能产生新的缓冲或复制。对PreeAudio的比较应落在图执行者的分布及缓冲所有权，而不是应用调用哪个API。</a:t>
+              <a:t>这一页进一步看，图里的两个节点如果处在不同进程里，该怎样合作。</a:t>
+            </a:r>
+          </a:p>
+          <a:p xmlns:a="http://schemas.openxmlformats.org/drawingml/2006/main">
+            <a:r>
+              <a:t/>
+            </a:r>
+          </a:p>
+          <a:p xmlns:a="http://schemas.openxmlformats.org/drawingml/2006/main">
+            <a:r>
+              <a:t>先看上面的主线程，它负责对象、连接和共享资源的配置。左右两边是进程 A 和进程 B，它们都有参与实时处理的线程。进程之间默认有各自独立的地址空间，因此不能随意把一个进程中的普通指针交给另一个进程使用。</a:t>
+            </a:r>
+          </a:p>
+          <a:p xmlns:a="http://schemas.openxmlformats.org/drawingml/2006/main">
+            <a:r>
+              <a:t/>
+            </a:r>
+          </a:p>
+          <a:p xmlns:a="http://schemas.openxmlformats.org/drawingml/2006/main">
+            <a:r>
+              <a:t>中间的共享资源解决了其中一部分问题。系统把适合共享的底层内存映射到相关进程里，这样双方可以访问约定的缓冲区域。共享资源中既有媒体数据使用的缓冲和 I/O 区，也有 activation 这类执行协作状态。它们共同帮助节点交换结果并判断运行条件。</a:t>
+            </a:r>
+          </a:p>
+          <a:p xmlns:a="http://schemas.openxmlformats.org/drawingml/2006/main">
+            <a:r>
+              <a:t/>
+            </a:r>
+          </a:p>
+          <a:p xmlns:a="http://schemas.openxmlformats.org/drawingml/2006/main">
+            <a:r>
+              <a:t>下面的虚线表示唤醒协作。节点 A 完成后，可以通过传递好的 eventfd 去触发相连的后继。在这样的执行路径里，不要求每一步都先回到服务主线程，再由主线程逐个转发。这里的跨进程，指同一台机器上的不同进程，不能据此推断节点可以直接跨互联网共享一片内存。</a:t>
+            </a:r>
+          </a:p>
+          <a:p xmlns:a="http://schemas.openxmlformats.org/drawingml/2006/main">
+            <a:r>
+              <a:t/>
+            </a:r>
+          </a:p>
+          <a:p xmlns:a="http://schemas.openxmlformats.org/drawingml/2006/main">
+            <a:r>
+              <a:t>我们还要注意，共享内存减少的是某些数据传输开销。重采样、混音或格式转换可能需要生成新结果，设备路径也可能存在复制，所以它并不能保证全链零拷贝。</a:t>
+            </a:r>
+          </a:p>
+          <a:p xmlns:a="http://schemas.openxmlformats.org/drawingml/2006/main">
+            <a:r>
+              <a:t/>
+            </a:r>
+          </a:p>
+          <a:p xmlns:a="http://schemas.openxmlformats.org/drawingml/2006/main">
+            <a:r>
+              <a:t>这张图体现的架构选择，是把媒体处理分布到不同执行者，再通过共享数据和运行通知协作。对比 PreeAudio 时，我们要继续看处理者分布在哪里、缓冲由谁持有，以及完成信号怎样推动后续工作。这些问题决定了运行成本和状态管理方式。</a:t>
             </a:r>
           </a:p>
           <a:p xmlns:a="http://schemas.openxmlformats.org/drawingml/2006/main">
@@ -936,7 +1196,57 @@
           <a:lstStyle xmlns:a="http://schemas.openxmlformats.org/drawingml/2006/main"/>
           <a:p xmlns:a="http://schemas.openxmlformats.org/drawingml/2006/main">
             <a:r>
-              <a:t>依据Graph Scheduling的Async scheduling章节。异步节点不计入普通同步节点之间的依赖，完成与否不影响同步图周期完成。为避免并行读写同一块数据，异步链接使用两个I/O缓冲槽：周期计数为c时，输出使用(c+1)&amp;1槽，输入使用c&amp;1槽。因而消费者读取上一周期的结果，通常每条异步Link增加一个图周期的延迟。这里采用稳态示例，周期0的槽0中已有上一周期的数据；启动时可能为空。Driver输出存在特殊处理，未在该页展开。异步处理可隔离同步图对该节点的完成依赖，但不保证晚到节点内容始终完整或无失真。JACK2服务器级同步/异步激活与这里的节点/Link级异步机制作用范围不同，不能直接等同。PreeAudio若要做类似比较，需要核实是否存在对应的跨周期缓冲和调度边界，不能仅凭异步消息队列类名推断。</a:t>
+              <a:t>前面主要讨论同步依赖图。现在假设某个处理节点很难稳定跟上同步节奏，PipeWire 还提供了异步节点和异步连接的安排。</a:t>
+            </a:r>
+          </a:p>
+          <a:p xmlns:a="http://schemas.openxmlformats.org/drawingml/2006/main">
+            <a:r>
+              <a:t/>
+            </a:r>
+          </a:p>
+          <a:p xmlns:a="http://schemas.openxmlformats.org/drawingml/2006/main">
+            <a:r>
+              <a:t>这时，异步节点与普通同步链之间的完成依赖会解耦。为了让两边并行读写时不冲突，异步 Link 使用两个交接槽位。这里的槽位是 I/O 缓冲交接位置，可以保存正在交接的缓冲信息，不能简单理解成整个系统总共只有两块音频内存。</a:t>
+            </a:r>
+          </a:p>
+          <a:p xmlns:a="http://schemas.openxmlformats.org/drawingml/2006/main">
+            <a:r>
+              <a:t/>
+            </a:r>
+          </a:p>
+          <a:p xmlns:a="http://schemas.openxmlformats.org/drawingml/2006/main">
+            <a:r>
+              <a:t>看表格的周期零。生产节点 A 把数据零写到槽一，消费节点 B 此时读槽零，拿到的是上一周期已经准备好的数据。到了周期一，A 改写槽零里的新结果，B 则从槽一读到数据零。再下一个周期，两边继续交换角色。</a:t>
+            </a:r>
+          </a:p>
+          <a:p xmlns:a="http://schemas.openxmlformats.org/drawingml/2006/main">
+            <a:r>
+              <a:t/>
+            </a:r>
+          </a:p>
+          <a:p xmlns:a="http://schemas.openxmlformats.org/drawingml/2006/main">
+            <a:r>
+              <a:t>这样安排以后，生产者和消费者在同一个周期使用不同槽位。消费者使用的结果比当前生产晚一个图周期，因此一般每经过一条这样的异步 Link，都会增加一个周期的延迟。表格按已经稳定运行的情况画，启动时的初始数据和 Driver 输出的特殊处理没有展开。</a:t>
+            </a:r>
+          </a:p>
+          <a:p xmlns:a="http://schemas.openxmlformats.org/drawingml/2006/main">
+            <a:r>
+              <a:t/>
+            </a:r>
+          </a:p>
+          <a:p xmlns:a="http://schemas.openxmlformats.org/drawingml/2006/main">
+            <a:r>
+              <a:t>这项取舍带来的自由度，是同步图不用等这个异步节点完成同一轮工作。但迟到部分的数据仍然可能不完整，它也没有消除系统的实时要求。</a:t>
+            </a:r>
+          </a:p>
+          <a:p xmlns:a="http://schemas.openxmlformats.org/drawingml/2006/main">
+            <a:r>
+              <a:t/>
+            </a:r>
+          </a:p>
+          <a:p xmlns:a="http://schemas.openxmlformats.org/drawingml/2006/main">
+            <a:r>
+              <a:t>最后，把它和 JACK2 对照。JACK2 前面讲的是服务器级的同步或异步激活，这里讲的是节点和 Link 级的异步机制。我们可以比较它们怎样安排跨周期交付，但不能把两种模式直接视为同一套实现，更不能因为 PreeAudio 使用异步消息队列，就推断它采用了同样的音频跨周期处理方式。</a:t>
             </a:r>
           </a:p>
           <a:p xmlns:a="http://schemas.openxmlformats.org/drawingml/2006/main">
@@ -1026,7 +1336,57 @@
           <a:lstStyle xmlns:a="http://schemas.openxmlformats.org/drawingml/2006/main"/>
           <a:p xmlns:a="http://schemas.openxmlformats.org/drawingml/2006/main">
             <a:r>
-              <a:t>保留作者 Overview 架构图原页，作为可放大阅读的素材参考。该图同时展示音频与视频生态，包含应用兼容接口、WirePlumber、媒体图、SPA、ALSA-lib、BlueZ、libcamera 与内核设备。它属于 2024 年讲义快照，不把当年的实现细节或状态列表当作当前版本承诺。主稿第 5 页展开策略、控制与图执行的架构分工，原图用于补充整体背景。</a:t>
+              <a:t>最后用作者这张整体架构图，把前面拆开的几部分重新放回系统里。原图信息比较多，我们按层来看。</a:t>
+            </a:r>
+          </a:p>
+          <a:p xmlns:a="http://schemas.openxmlformats.org/drawingml/2006/main">
+            <a:r>
+              <a:t/>
+            </a:r>
+          </a:p>
+          <a:p xmlns:a="http://schemas.openxmlformats.org/drawingml/2006/main">
+            <a:r>
+              <a:t>最上面是不同类型的应用和媒体来源，包括音频应用、视频应用，以及与桌面画面共享有关的组件。它们可能使用不同的现有接口。对理解架构来说，更重要的是这些需求最终怎样参与媒体图。</a:t>
+            </a:r>
+          </a:p>
+          <a:p xmlns:a="http://schemas.openxmlformats.org/drawingml/2006/main">
+            <a:r>
+              <a:t/>
+            </a:r>
+          </a:p>
+          <a:p xmlns:a="http://schemas.openxmlformats.org/drawingml/2006/main">
+            <a:r>
+              <a:t>中间的 PipeWire 区域画出了节点和端口连接。旁边的 WirePlumber 负责前面讲过的设备配置与会话策略。结合刚才的附录，可以把这层理解成两件彼此协作的事：一边维护图和运行资源，一边按依赖与周期执行媒体处理。节点本身还可能位于其它进程，不能把中间画在同一区域，就理解成所有计算都在一个线程里完成。</a:t>
+            </a:r>
+          </a:p>
+          <a:p xmlns:a="http://schemas.openxmlformats.org/drawingml/2006/main">
+            <a:r>
+              <a:t/>
+            </a:r>
+          </a:p>
+          <a:p xmlns:a="http://schemas.openxmlformats.org/drawingml/2006/main">
+            <a:r>
+              <a:t>再往下看 SPA，全称是 Simple Plugin API。它给设备和媒体处理单元提供插件接口。这里可以把插件理解成按约定接进框架的一类功能实现，既可以对接设备能力，也可以提供相关处理。</a:t>
+            </a:r>
+          </a:p>
+          <a:p xmlns:a="http://schemas.openxmlformats.org/drawingml/2006/main">
+            <a:r>
+              <a:t/>
+            </a:r>
+          </a:p>
+          <a:p xmlns:a="http://schemas.openxmlformats.org/drawingml/2006/main">
+            <a:r>
+              <a:t>底下还有 ALSA-lib、BlueZ、libcamera 等不同的系统组件。ALSA-lib 参与 Linux 音频设备访问，BlueZ 是 Linux 的蓝牙协议栈，libcamera 提供相机相关的用户态框架。更下面才是内核中的不同设备支持。它们承担的媒体类型和设备职责并不一样。</a:t>
+            </a:r>
+          </a:p>
+          <a:p xmlns:a="http://schemas.openxmlformats.org/drawingml/2006/main">
+            <a:r>
+              <a:t/>
+            </a:r>
+          </a:p>
+          <a:p xmlns:a="http://schemas.openxmlformats.org/drawingml/2006/main">
+            <a:r>
+              <a:t>这张图来自二〇二四年的演讲，用来帮助我们理解整体组织。具体模块和能力要结合实际版本核对。回到这次与 PreeAudio 的比较，值得带走的问题是：一个框架怎样划分策略、图管理与实时执行，怎样在设备变化时维持处理，以及怎样让新的场景进入既有处理结构。带着这些问题，再看源码中的 Manager、Node 和 Cluster，它们就有了更具体的意义。</a:t>
             </a:r>
           </a:p>
           <a:p xmlns:a="http://schemas.openxmlformats.org/drawingml/2006/main">
@@ -1111,7 +1471,57 @@
           <a:lstStyle xmlns:a="http://schemas.openxmlformats.org/drawingml/2006/main"/>
           <a:p xmlns:a="http://schemas.openxmlformats.org/drawingml/2006/main">
             <a:r>
-              <a:t>建议讲述 2 分钟。第一行说明硬件差异与服务职责逐步分离。第二行说明多应用共享催生流、Sink 和 Source 等管理对象。第三行说明专业处理要求应用在音频周期内合作，图不只是画出来的连接，还涉及运行依赖。第四行强调控制与数据处理分工。这不是严格按年份逐一发生的替换过程，JACK 的图和实时回调在 2000 年代已经出现。对 PreeAudio 可映射到 Manager 管理连接与状态、Node 承担处理、Cluster 组织一组处理，以及 Policy/Service 与引擎间的职责分工。线程实现不可简单等同，HPAE 原有源码资料显示消息与数据处理在同一工作循环中衔接，不能宣称它完全复制 PipeWire 的主线程/数据线程结构。</a:t>
+              <a:t>前面列了很多名字，这一页把它们背后的变化归纳成四个软件问题。</a:t>
+            </a:r>
+          </a:p>
+          <a:p xmlns:a="http://schemas.openxmlformats.org/drawingml/2006/main">
+            <a:r>
+              <a:t/>
+            </a:r>
+          </a:p>
+          <a:p xmlns:a="http://schemas.openxmlformats.org/drawingml/2006/main">
+            <a:r>
+              <a:t>第一个问题，是怎样访问硬件。应用如果要分别理解每一种声卡，开发和维护都会很困难。驱动、库和上层服务逐步分层，就是为了让硬件差异尽量留在下面。这里的驱动，指的是操作系统用来控制具体硬件的软件。</a:t>
+            </a:r>
+          </a:p>
+          <a:p xmlns:a="http://schemas.openxmlformats.org/drawingml/2006/main">
+            <a:r>
+              <a:t/>
+            </a:r>
+          </a:p>
+          <a:p xmlns:a="http://schemas.openxmlformats.org/drawingml/2006/main">
+            <a:r>
+              <a:t>第二个问题，是怎样让多应用共享声音设备。播放器、游戏和通知音都在输出数据时，系统需要管理每一路流，再把适合同时播放的声音汇合起来。流可以理解为一条持续产生或者消费音频数据的逻辑通道，混音就是把对齐后的多路样本按音量权重合在一起。</a:t>
+            </a:r>
+          </a:p>
+          <a:p xmlns:a="http://schemas.openxmlformats.org/drawingml/2006/main">
+            <a:r>
+              <a:t/>
+            </a:r>
+          </a:p>
+          <a:p xmlns:a="http://schemas.openxmlformats.org/drawingml/2006/main">
+            <a:r>
+              <a:t>第三个问题，是怎样组织越来越复杂的处理。我们可以把重采样、增益、混音和音效分别做成处理单元，再根据数据关系连接起来。这里说的图，是数据流图。它既描述数据往哪里走，也可能影响谁先执行、谁必须等待。PreeAudio 里的 Node 承担处理，Cluster 把一组相关处理组织起来，Manager 负责连接和状态等管理工作。</a:t>
+            </a:r>
+          </a:p>
+          <a:p xmlns:a="http://schemas.openxmlformats.org/drawingml/2006/main">
+            <a:r>
+              <a:t/>
+            </a:r>
+          </a:p>
+          <a:p xmlns:a="http://schemas.openxmlformats.org/drawingml/2006/main">
+            <a:r>
+              <a:t>第四个问题，是系统运行时还会发生变化。用户暂停播放、调音量、切换输出设备，这些属于控制工作。持续处理音频样本，则属于数据工作。两类工作的时限和执行特点不同，架构需要安排它们怎样协作，避免一次复杂的状态更新让送数失去节奏。</a:t>
+            </a:r>
+          </a:p>
+          <a:p xmlns:a="http://schemas.openxmlformats.org/drawingml/2006/main">
+            <a:r>
+              <a:t/>
+            </a:r>
+          </a:p>
+          <a:p xmlns:a="http://schemas.openxmlformats.org/drawingml/2006/main">
+            <a:r>
+              <a:t>所以，后面的对比我会围绕三个具体对象展开：每个方案把什么当作核心单元，怎样安排执行，以及怎样让动态控制影响正在运行的处理。这样比单看类名或者接口名更容易理解它为什么长成现在的样子。</a:t>
             </a:r>
           </a:p>
           <a:p xmlns:a="http://schemas.openxmlformats.org/drawingml/2006/main">
@@ -1221,7 +1631,57 @@
           <a:lstStyle xmlns:a="http://schemas.openxmlformats.org/drawingml/2006/main"/>
           <a:p xmlns:a="http://schemas.openxmlformats.org/drawingml/2006/main">
             <a:r>
-              <a:t>图据 Gavv 的源码阅读和实验文章 High-level components、Buffering、Threads 整理，并使用官方 Threading 文档交叉核对。原文版本为 PulseAudio 11.1，不将所有模块细节当作当前产品配置。客户端通过 libpulse 接入 Native 协议，控制和流管理由服务主循环协调，实时 I/O 线程面向 Sink 处理音频。共享内存可以运送 PCM，socket 仍承担协议通信，具体传输取决于环境。sink-input 包含流级格式适配等职责，Sink 汇合多流，经后端输出到 ALSA。图只展开一个常见输出方向。PA 主循环/实时线程分工与 HPAE 的消息/数据执行机制不一一对应。</a:t>
+              <a:t>先看 PulseAudio。假设一台电脑同时播放音乐和浏览器里的声音，用户希望它们共用扬声器，又能分别调节音量。PulseAudio 的很多核心对象，都围绕这种流与设备的关系组织。</a:t>
+            </a:r>
+          </a:p>
+          <a:p xmlns:a="http://schemas.openxmlformats.org/drawingml/2006/main">
+            <a:r>
+              <a:t/>
+            </a:r>
+          </a:p>
+          <a:p xmlns:a="http://schemas.openxmlformats.org/drawingml/2006/main">
+            <a:r>
+              <a:t>图的左侧是应用进程，libpulse 是应用使用的客户端库。右侧是 PulseAudio 服务进程。进程可以先理解成一个相对独立运行的程序，它有自己的地址空间。应用和服务之间要通过进程间通信来交换信息。</a:t>
+            </a:r>
+          </a:p>
+          <a:p xmlns:a="http://schemas.openxmlformats.org/drawingml/2006/main">
+            <a:r>
+              <a:t/>
+            </a:r>
+          </a:p>
+          <a:p xmlns:a="http://schemas.openxmlformats.org/drawingml/2006/main">
+            <a:r>
+              <a:t>图中的紫色部分主要表示控制。应用发出请求，服务的主循环处理对象、连接和模块管理。主循环是一段持续等待事件、分派处理的执行流程。真正面向设备持续处理音频的，是下面的实时 I/O 线程。线程是进程内部的执行单元，这两类线程之间通过消息机制协作。pa_asyncmsgq 就是这里使用的一种消息队列。</a:t>
+            </a:r>
+          </a:p>
+          <a:p xmlns:a="http://schemas.openxmlformats.org/drawingml/2006/main">
+            <a:r>
+              <a:t/>
+            </a:r>
+          </a:p>
+          <a:p xmlns:a="http://schemas.openxmlformats.org/drawingml/2006/main">
+            <a:r>
+              <a:t>蓝色部分表示音频数据。sink-input 这个名字容易绕，它在这里代表送入输出端的一路播放流。Sink 可以理解为接收音频的输出端，常见情况是对应某个播放设备。多路流经过必要的适配和音量处理，汇入 Sink，再由后端送往设备。图里的 ALSA 后端，就是 Linux 上连接底层声音系统的一条路径。</a:t>
+            </a:r>
+          </a:p>
+          <a:p xmlns:a="http://schemas.openxmlformats.org/drawingml/2006/main">
+            <a:r>
+              <a:t/>
+            </a:r>
+          </a:p>
+          <a:p xmlns:a="http://schemas.openxmlformats.org/drawingml/2006/main">
+            <a:r>
+              <a:t>共享内存的作用，是让不同进程可以访问同一片底层存储，减少搬运音频数据的开销。它与控制消息有不同职责，也不能据此推断整条链路完全没有复制。</a:t>
+            </a:r>
+          </a:p>
+          <a:p xmlns:a="http://schemas.openxmlformats.org/drawingml/2006/main">
+            <a:r>
+              <a:t/>
+            </a:r>
+          </a:p>
+          <a:p xmlns:a="http://schemas.openxmlformats.org/drawingml/2006/main">
+            <a:r>
+              <a:t>与 PreeAudio 对照，PulseAudio 的公开模型很鲜明地围绕流、Sink 和设备时钟组织服务。PreeAudio 的公开结构则把引擎内的计算进一步组织为 Node 和 Cluster，再由 Manager 协调连接与状态。比较的重点是处理职责怎样组织，不能从这张图直接判断谁的时延一定更低。</a:t>
             </a:r>
           </a:p>
           <a:p xmlns:a="http://schemas.openxmlformats.org/drawingml/2006/main">
@@ -1316,7 +1776,57 @@
           <a:lstStyle xmlns:a="http://schemas.openxmlformats.org/drawingml/2006/main"/>
           <a:p xmlns:a="http://schemas.openxmlformats.org/drawingml/2006/main">
             <a:r>
-              <a:t>主图是根据 Fons Adriaensen 的 A quick introduction to Jack 的客户端、端口、处理周期和调度说明重绘的教学图，不是 JACK 某一版本的完整内部类图。输入端口把采集结果交给 A、B 两个客户端，C 在两者结果可用后处理，最后写往播放端口。每个客户端链接 libjack 并注册 process() 回调，应用的实时处理线程参与执行；音频端口缓冲可位于共享内存，控制消息与音频样本传输需要区分。JACK server 管理连接和运行周期，Backend 抽象设备访问。JACK1 与 JACK2 的调度实现不同，JACK2 在依赖允许时可并行，不能把所有 JACK 系统概括为固定串行执行，也不能断言任何分支一定同时运行。与 PreeAudio 的主要差异是客户端应用互连图与系统引擎内部处理图的集成边界。</a:t>
+              <a:t>JACK 的全称是 JACK Audio Connection Kit。它很适合帮助我们理解另一种设计出发点：多个音频处理者怎样在同一套节奏下合作。</a:t>
+            </a:r>
+          </a:p>
+          <a:p xmlns:a="http://schemas.openxmlformats.org/drawingml/2006/main">
+            <a:r>
+              <a:t/>
+            </a:r>
+          </a:p>
+          <a:p xmlns:a="http://schemas.openxmlformats.org/drawingml/2006/main">
+            <a:r>
+              <a:t>举个音乐制作的例子，采集到的声音可以分别交给两个效果处理程序，再把它们的结果交给一个汇合处理程序。图里的 A 和 B 没有彼此的数据依赖，所以它们有机会并行。C 需要 A 和 B 的结果，就必须等上游完成。</a:t>
+            </a:r>
+          </a:p>
+          <a:p xmlns:a="http://schemas.openxmlformats.org/drawingml/2006/main">
+            <a:r>
+              <a:t/>
+            </a:r>
+          </a:p>
+          <a:p xmlns:a="http://schemas.openxmlformats.org/drawingml/2006/main">
+            <a:r>
+              <a:t>每个处理者通过端口读写音频。这里的端口是软件的数据入口和出口，和网络端口号是不同概念。libjack 是客户端库，process 回调则是每一块音频需要处理时执行的函数。回调的意思，就是应用先提供一段处理逻辑，运行系统在合适的时机调用它。</a:t>
+            </a:r>
+          </a:p>
+          <a:p xmlns:a="http://schemas.openxmlformats.org/drawingml/2006/main">
+            <a:r>
+              <a:t/>
+            </a:r>
+          </a:p>
+          <a:p xmlns:a="http://schemas.openxmlformats.org/drawingml/2006/main">
+            <a:r>
+              <a:t>这就把应用组织成一张带执行依赖的处理图。连接既表示声音从哪里送到哪里，也意味着下游什么时候才具备运行条件。端口缓冲可以通过共享内存交换数据，从而减少进程间反复搬运。</a:t>
+            </a:r>
+          </a:p>
+          <a:p xmlns:a="http://schemas.openxmlformats.org/drawingml/2006/main">
+            <a:r>
+              <a:t/>
+            </a:r>
+          </a:p>
+          <a:p xmlns:a="http://schemas.openxmlformats.org/drawingml/2006/main">
+            <a:r>
+              <a:t>JACK1 和 JACK2 在运行机制上有差别。经典 JACK1 模型按照满足依赖的顺序串行激活客户端。JACK2 使用数据流激活，在依赖和处理器资源允许时，可以让独立分支同时执行。有多核和有可并行分支，是利用这种能力的条件。</a:t>
+            </a:r>
+          </a:p>
+          <a:p xmlns:a="http://schemas.openxmlformats.org/drawingml/2006/main">
+            <a:r>
+              <a:t/>
+            </a:r>
+          </a:p>
+          <a:p xmlns:a="http://schemas.openxmlformats.org/drawingml/2006/main">
+            <a:r>
+              <a:t>回到 PreeAudio，二者都会面对实时预算，也都有处理图。JACK 的图里，参与者可以是分别运行的音频应用。PreeAudio 这里关注的是系统引擎内部的节点与处理簇，以及 Manager 怎样管理它们的生命周期。核心差异落在图的组织尺度和运行职责。后面的三页附录，会把周期、并行和同步方式分别展开。</a:t>
             </a:r>
           </a:p>
           <a:p xmlns:a="http://schemas.openxmlformats.org/drawingml/2006/main">
@@ -1406,7 +1916,57 @@
           <a:lstStyle xmlns:a="http://schemas.openxmlformats.org/drawingml/2006/main"/>
           <a:p xmlns:a="http://schemas.openxmlformats.org/drawingml/2006/main">
             <a:r>
-              <a:t>以机制和策略分工解释 PipeWire 的设计理念。WirePlumber 决定设备与连接策略，PipeWire 的主线程处理对象配置与 IPC，数据线程执行已准备好的图。Driver 发起周期，节点在依赖满足后运行，通过共享的 activation 记录及 eventfd 协调，缓冲等资源预先准备。图中的依赖唤醒是同步图的简化示例，异步节点另有处理方式。与 PreeAudio 对比：二者都有节点与图，不应把节点化本身当作区别。PipeWire 以通用媒体图为中心，可以跨进程组织媒体处理；本次公开 HPAE 实现以 Manager 组织 Node/Cluster，在工作循环中衔接消息与 Process。PreeAudio 的策略规则由 Policy/Service 与引擎协作，不能宣称策略与机制分工是某一方独有。差异落在图的组织尺度、控制到执行的职责分配，以及场景处理单元的组织。</a:t>
+              <a:t>PipeWire 的设计，可以先沿着图里的上下两层来看。上面解决图怎么组织，下面解决已经组织好的图怎样运行。</a:t>
+            </a:r>
+          </a:p>
+          <a:p xmlns:a="http://schemas.openxmlformats.org/drawingml/2006/main">
+            <a:r>
+              <a:t/>
+            </a:r>
+          </a:p>
+          <a:p xmlns:a="http://schemas.openxmlformats.org/drawingml/2006/main">
+            <a:r>
+              <a:t>先看 WirePlumber。它是 PipeWire 生态中的会话管理器。会话管理在这里包含设备选择、连接策略和一些运行状态管理。例如新设备出现后，哪些流适合送过去，应该采用什么配置，这些都需要策略判断。</a:t>
+            </a:r>
+          </a:p>
+          <a:p xmlns:a="http://schemas.openxmlformats.org/drawingml/2006/main">
+            <a:r>
+              <a:t/>
+            </a:r>
+          </a:p>
+          <a:p xmlns:a="http://schemas.openxmlformats.org/drawingml/2006/main">
+            <a:r>
+              <a:t>PipeWire 核心提供节点、端口和连接等机制。主线程处理对象配置和进程间通信，为图准备缓冲等运行资源。下面的数据线程则尽量专注于媒体处理，按照图里的依赖关系执行节点。这样的分工，让设备规则和偏好逻辑可以在控制侧管理，逐块计算则保持相对明确的执行路径。</a:t>
+            </a:r>
+          </a:p>
+          <a:p xmlns:a="http://schemas.openxmlformats.org/drawingml/2006/main">
+            <a:r>
+              <a:t/>
+            </a:r>
+          </a:p>
+          <a:p xmlns:a="http://schemas.openxmlformats.org/drawingml/2006/main">
+            <a:r>
+              <a:t>下面这个 Driver 需要特别解释。它是发起图处理周期的驱动节点，可以由硬件事件或者定时器触发。这个名字在这里指运行图的节拍发起者，不能直接等同于内核里的声卡驱动。</a:t>
+            </a:r>
+          </a:p>
+          <a:p xmlns:a="http://schemas.openxmlformats.org/drawingml/2006/main">
+            <a:r>
+              <a:t/>
+            </a:r>
+          </a:p>
+          <a:p xmlns:a="http://schemas.openxmlformats.org/drawingml/2006/main">
+            <a:r>
+              <a:t>节点运行所需的共享资源里，activation 记录保存执行和依赖状态，eventfd 用于传递就绪或完成的唤醒通知。音频样本和“现在可以继续运行”的信号各有各的承载方式。</a:t>
+            </a:r>
+          </a:p>
+          <a:p xmlns:a="http://schemas.openxmlformats.org/drawingml/2006/main">
+            <a:r>
+              <a:t/>
+            </a:r>
+          </a:p>
+          <a:p xmlns:a="http://schemas.openxmlformats.org/drawingml/2006/main">
+            <a:r>
+              <a:t>与 PreeAudio 对照，处理图和策略分工都是可以共同讨论的机制。PipeWire 围绕较通用的媒体图分配控制与实时执行职责，节点还可以分布在不同进程里。本次看到的 PreeAudio 公开实现，则由 Manager 组织 Node 和 Cluster，并在相应工作循环中衔接消息处理与数据处理。理解差异，需要继续追问图由谁驱动、状态由谁修改，以及处理单元按什么范围组织。</a:t>
             </a:r>
           </a:p>
           <a:p xmlns:a="http://schemas.openxmlformats.org/drawingml/2006/main">
@@ -1506,7 +2066,67 @@
           <a:lstStyle xmlns:a="http://schemas.openxmlformats.org/drawingml/2006/main"/>
           <a:p xmlns:a="http://schemas.openxmlformats.org/drawingml/2006/main">
             <a:r>
-              <a:t>建议讲述 2 分钟。这里对比可观察到的架构重心，设计出发点和取舍是基于机制的归纳，不冒充内部设计目标声明。PA 围绕流与设备组织通用音频服务，JACK 把各处理者纳入共同周期及依赖约束，PipeWire 把通用媒体图执行与会话策略分工，PreeAudio 的公开 HPAE 结构体现 Manager、Node、Cluster 对场景处理及状态的组织。四者都有实时性、缓冲和动态控制问题，不把任何共性包装成独有优势。本次 HPAE 工作循环是消息处理后衔接数据处理，不能泛化为整个系统只有一个线程。没有统一测量时不宣称谁的时延、功耗或音质更好。</a:t>
+              <a:t>把三个方案放在一起，我们就能看到，同样是让声音持续输出，架构重心可以很不一样。</a:t>
+            </a:r>
+          </a:p>
+          <a:p xmlns:a="http://schemas.openxmlformats.org/drawingml/2006/main">
+            <a:r>
+              <a:t/>
+            </a:r>
+          </a:p>
+          <a:p xmlns:a="http://schemas.openxmlformats.org/drawingml/2006/main">
+            <a:r>
+              <a:t>PulseAudio 的这一列，先看多流共享和动态设备管理。它用流、Sink 和 Source 描述音频生产与消费，再安排设备 I/O 线程处理适配和汇合。这里的 Source 是产生音频数据的输入端，例如一个录音输入。它需要协调设备时钟、缓冲和用户操作的响应。</a:t>
+            </a:r>
+          </a:p>
+          <a:p xmlns:a="http://schemas.openxmlformats.org/drawingml/2006/main">
+            <a:r>
+              <a:t/>
+            </a:r>
+          </a:p>
+          <a:p xmlns:a="http://schemas.openxmlformats.org/drawingml/2006/main">
+            <a:r>
+              <a:t>JACK 的这一列，重心是周期内协作。各处理者通过端口形成依赖图，系统需要让这轮工作及时完成。独立分支能不能并行，哪一条路径决定最早完成时间，就会直接影响这套系统的运行方式。</a:t>
+            </a:r>
+          </a:p>
+          <a:p xmlns:a="http://schemas.openxmlformats.org/drawingml/2006/main">
+            <a:r>
+              <a:t/>
+            </a:r>
+          </a:p>
+          <a:p xmlns:a="http://schemas.openxmlformats.org/drawingml/2006/main">
+            <a:r>
+              <a:t>PipeWire 的这一列，围绕通用媒体图展开。会话管理器负责策略，主线程配置图，数据线程执行图。它还要处理节点分布在不同进程中时的资源共享与执行协作。</a:t>
+            </a:r>
+          </a:p>
+          <a:p xmlns:a="http://schemas.openxmlformats.org/drawingml/2006/main">
+            <a:r>
+              <a:t/>
+            </a:r>
+          </a:p>
+          <a:p xmlns:a="http://schemas.openxmlformats.org/drawingml/2006/main">
+            <a:r>
+              <a:t>PreeAudio 这一列，是根据公开 HPAE 结构归纳出来的。Manager 负责连接和状态，Node 承担处理，Cluster 组织一组相关处理，上层 Policy 和 Service 与引擎协同。它反映的是系统音频框架里对场景处理和状态组织的关注。</a:t>
+            </a:r>
+          </a:p>
+          <a:p xmlns:a="http://schemas.openxmlformats.org/drawingml/2006/main">
+            <a:r>
+              <a:t/>
+            </a:r>
+          </a:p>
+          <a:p xmlns:a="http://schemas.openxmlformats.org/drawingml/2006/main">
+            <a:r>
+              <a:t>这些列的职责范围并不完全相同，所以表格更适合帮助我们理解设计选择。比如同样写着节点图，节点代表什么、谁来推动计算、控制变化怎样进入实时路径，答案仍然可能不同。至于哪种方案实际更快、更省电，或者切换更平顺，还需要在同样的设备和场景下测量。</a:t>
+            </a:r>
+          </a:p>
+          <a:p xmlns:a="http://schemas.openxmlformats.org/drawingml/2006/main">
+            <a:r>
+              <a:t/>
+            </a:r>
+          </a:p>
+          <a:p xmlns:a="http://schemas.openxmlformats.org/drawingml/2006/main">
+            <a:r>
+              <a:t>接下来的附录，我们把这些抽象往下落一层。先看 PulseAudio 的缓冲，再看 JACK 和 PipeWire 是怎样把图真正跑起来的。</a:t>
             </a:r>
           </a:p>
           <a:p xmlns:a="http://schemas.openxmlformats.org/drawingml/2006/main">
@@ -1626,7 +2246,57 @@
           <a:lstStyle xmlns:a="http://schemas.openxmlformats.org/drawingml/2006/main"/>
           <a:p xmlns:a="http://schemas.openxmlformats.org/drawingml/2006/main">
             <a:r>
-              <a:t>来源原图，未重绘。阅读顺序为 client、transport、server、alsa。原图区分 socket buffers 与共享内存池，继而展示 stream buffer、resampler buffer、render queue 和 device buffer。适合在需要解释多级缓冲时作为备份素材使用，不能把原图当作当前所有 PA 配置的唯一实现。</a:t>
+              <a:t>这张原图把 PulseAudio 的缓冲层次展开了。我们沿着声音从应用走到设备的方向看，会更容易理解为什么说“有一个缓冲区”还不够具体。</a:t>
+            </a:r>
+          </a:p>
+          <a:p xmlns:a="http://schemas.openxmlformats.org/drawingml/2006/main">
+            <a:r>
+              <a:t/>
+            </a:r>
+          </a:p>
+          <a:p xmlns:a="http://schemas.openxmlformats.org/drawingml/2006/main">
+            <a:r>
+              <a:t>最左侧是应用准备好的音频块。中间的 transport 表示传输边界。这里画了 socket 缓冲和共享内存池两种相关机制：一种保存需要通过通信通道交换的内容，另一种让不同进程共享音频块。不能只看见图上同时出现两个框，就认定每一个样本都按同一种方式依次复制两遍。</a:t>
+            </a:r>
+          </a:p>
+          <a:p xmlns:a="http://schemas.openxmlformats.org/drawingml/2006/main">
+            <a:r>
+              <a:t/>
+            </a:r>
+          </a:p>
+          <a:p xmlns:a="http://schemas.openxmlformats.org/drawingml/2006/main">
+            <a:r>
+              <a:t>进入服务端以后，先看 stream buffer，也就是流缓冲。它保存这一路流提供的数据。然后是 resampler buffer，也就是重采样相关缓冲。重采样解决的是采样率不一致的问题，例如一段每秒四万四千一百个采样时刻的音乐，需要适配每秒四万八千个采样时刻的输出节奏。系统要根据原始样本计算新采样位置对应的值。</a:t>
+            </a:r>
+          </a:p>
+          <a:p xmlns:a="http://schemas.openxmlformats.org/drawingml/2006/main">
+            <a:r>
+              <a:t/>
+            </a:r>
+          </a:p>
+          <a:p xmlns:a="http://schemas.openxmlformats.org/drawingml/2006/main">
+            <a:r>
+              <a:t>再往右是 render queue，可以理解为准备供输出端读取的渲染队列。最后是 device buffer，也就是设备侧使用的缓冲。不同缓冲承担传输、计算和设备交付的不同职责。</a:t>
+            </a:r>
+          </a:p>
+          <a:p xmlns:a="http://schemas.openxmlformats.org/drawingml/2006/main">
+            <a:r>
+              <a:t/>
+            </a:r>
+          </a:p>
+          <a:p xmlns:a="http://schemas.openxmlformats.org/drawingml/2006/main">
+            <a:r>
+              <a:t>这里最容易混淆的，是缓冲容量和当前排队数据量。一个缓冲能装一百毫秒，不意味着此刻一定有一百毫秒的数据在等待。我们分析时延，要看各层实际存了多少还没播放的数据，以及数据处理和设备传输需要多少时间。</a:t>
+            </a:r>
+          </a:p>
+          <a:p xmlns:a="http://schemas.openxmlformats.org/drawingml/2006/main">
+            <a:r>
+              <a:t/>
+            </a:r>
+          </a:p>
+          <a:p xmlns:a="http://schemas.openxmlformats.org/drawingml/2006/main">
+            <a:r>
+              <a:t>这也解释了为什么调大缓冲可能降低断供风险，却可能增加等待。真正的工程问题，是在稳定性和响应之间找到适合场景的安排。这张图来自面向 PulseAudio 11.1 的分析材料，我们用它理解这些层次，具体版本仍要结合实际实现核对。</a:t>
             </a:r>
           </a:p>
           <a:p xmlns:a="http://schemas.openxmlformats.org/drawingml/2006/main">
@@ -1716,7 +2386,57 @@
           <a:lstStyle xmlns:a="http://schemas.openxmlformats.org/drawingml/2006/main"/>
           <a:p xmlns:a="http://schemas.openxmlformats.org/drawingml/2006/main">
             <a:r>
-              <a:t>原图给出多个客户端和端口的分支、汇合关系。同步处理周期的概念顺序是采集就绪、运行满足依赖的客户端、完成下游处理、向设备提交结果。process(nframes) 在实时线程内读取输入端口缓冲、执行本块 DSP、填充输出端口缓冲。不要在回调中引入可能阻塞的磁盘 I/O、分配或锁等待，具体限制见官方 jack_set_process_callback 文档。假设块长 N=128、采样率 48kHz，名义周期 T=N/fs 约为2.67ms，这只是块周期；读写设备、驱动、安全缓冲与运行模式还会影响端到端时延。整个图、同步与调度开销需要放进预算，不能给每个节点都独占2.67ms。</a:t>
+              <a:t>这一页把 JACK 的一轮工作展开。先按同步模式理解：设备有了这一轮输入数据，系统运行图里满足依赖的处理者，结果继续交给下游，最后提交这一轮输出。</a:t>
+            </a:r>
+          </a:p>
+          <a:p xmlns:a="http://schemas.openxmlformats.org/drawingml/2006/main">
+            <a:r>
+              <a:t/>
+            </a:r>
+          </a:p>
+          <a:p xmlns:a="http://schemas.openxmlformats.org/drawingml/2006/main">
+            <a:r>
+              <a:t>看左边的连接图，有些节点可以独立开始，有些节点要等别人的输出。这个关系决定了运行顺序的约束。端口连线画的是数据关系，实际执行还需要运行系统去安排唤醒和同步。</a:t>
+            </a:r>
+          </a:p>
+          <a:p xmlns:a="http://schemas.openxmlformats.org/drawingml/2006/main">
+            <a:r>
+              <a:t/>
+            </a:r>
+          </a:p>
+          <a:p xmlns:a="http://schemas.openxmlformats.org/drawingml/2006/main">
+            <a:r>
+              <a:t>右边的 process(nframes)，就是客户端处理一块音频的回调。nframes 告诉它这次需要处理多少帧。在 PCM 音频里，一帧包含同一采样时刻的所有声道样本。比如双声道的一帧里有左声道和右声道两个样本，所以一百二十八帧双声道音频，一共有二百五十六个样本值。</a:t>
+            </a:r>
+          </a:p>
+          <a:p xmlns:a="http://schemas.openxmlformats.org/drawingml/2006/main">
+            <a:r>
+              <a:t/>
+            </a:r>
+          </a:p>
+          <a:p xmlns:a="http://schemas.openxmlformats.org/drawingml/2006/main">
+            <a:r>
+              <a:t>回调会读取输入端口的缓冲，完成本块计算，再填好输出端口缓冲。它处在实时处理路径上，应该避免磁盘访问、可能等待的锁和不可预测的内存分配。原因是即使算法平时很快，一次偶发的长等待也可能让整轮结果交付迟到。</a:t>
+            </a:r>
+          </a:p>
+          <a:p xmlns:a="http://schemas.openxmlformats.org/drawingml/2006/main">
+            <a:r>
+              <a:t/>
+            </a:r>
+          </a:p>
+          <a:p xmlns:a="http://schemas.openxmlformats.org/drawingml/2006/main">
+            <a:r>
+              <a:t>下面算一个例子。假设每块一百二十八帧，采样率是四万八千赫兹，那么一块代表的时间大约是二点六七毫秒。这是名义块周期。图处理的关键路径、唤醒和同步都要占用可用时间，不能让每个节点都各自独占二点六七毫秒。</a:t>
+            </a:r>
+          </a:p>
+          <a:p xmlns:a="http://schemas.openxmlformats.org/drawingml/2006/main">
+            <a:r>
+              <a:t/>
+            </a:r>
+          </a:p>
+          <a:p xmlns:a="http://schemas.openxmlformats.org/drawingml/2006/main">
+            <a:r>
+              <a:t>同时，这个数字也不能直接当作从麦克风到扬声器的总时延。其它缓冲、设备传输和运行模式都会参与。理解了这一轮的预算，下一页就能进一步回答：多核到底能帮助我们缩短哪一部分时间。</a:t>
             </a:r>
           </a:p>
           <a:p xmlns:a="http://schemas.openxmlformats.org/drawingml/2006/main">
@@ -1811,7 +2531,57 @@
           <a:lstStyle xmlns:a="http://schemas.openxmlformats.org/drawingml/2006/main"/>
           <a:p xmlns:a="http://schemas.openxmlformats.org/drawingml/2006/main">
             <a:r>
-              <a:t>依据 jackdmp 2005 原始论文及 JACK2 README 解释数据流激活。JACK1 的经典模型把客户图排列成串行激活顺序；JACK2 允许依赖已满足的独立客户端同时运行，能否并行取决于图、可用核和系统调度。上图选取 A 然后 B 然后 C 然后 D 的一种合法串行顺序，计算工作合计8单位。下图假设两个工作核可用，A与B从0同时开始，C必须等B在第3单位完成，再运行2单位，D最后运行1单位，总计6单位。关键路径为max(A,B)+C+D，不能把所有节点的计算时间简单除以核数，也不能从该算例推导真实加速比。JACK2 的图访问使用无锁技术，目的是减少图变化干扰实时执行，此描述只针对图访问，不等同于全引擎所有路径无锁。</a:t>
+              <a:t>我们用四个处理者做一个简化例子。A 和 B 可以独立执行，C 需要它们两者的结果，D 再等待 C。为了看清依赖的影响，假设 A 需要两个时间单位，B 需要三个，C 需要两个，D 需要一个。</a:t>
+            </a:r>
+          </a:p>
+          <a:p xmlns:a="http://schemas.openxmlformats.org/drawingml/2006/main">
+            <a:r>
+              <a:t/>
+            </a:r>
+          </a:p>
+          <a:p xmlns:a="http://schemas.openxmlformats.org/drawingml/2006/main">
+            <a:r>
+              <a:t>上面是一种合法的串行顺序：A 做完再做 B，然后是 C，最后是 D。四段加起来，一共需要八个时间单位。经典 JACK1 模型按满足连接依赖的顺序激活客户端，我们用这条顺序表示它的特点。</a:t>
+            </a:r>
+          </a:p>
+          <a:p xmlns:a="http://schemas.openxmlformats.org/drawingml/2006/main">
+            <a:r>
+              <a:t/>
+            </a:r>
+          </a:p>
+          <a:p xmlns:a="http://schemas.openxmlformats.org/drawingml/2006/main">
+            <a:r>
+              <a:t>下面换成 JACK2 的依赖驱动方式。如果有两个工作核，而且调度条件允许，A 和 B 就可以从同一个起点开始。A 在第二个单位结束，但 C 还不能开始，因为 B 要到第三个单位才结束。等 B 也完成，C 才运行两个单位，接着 D 再运行一个，最终在第六个单位结束。</a:t>
+            </a:r>
+          </a:p>
+          <a:p xmlns:a="http://schemas.openxmlformats.org/drawingml/2006/main">
+            <a:r>
+              <a:t/>
+            </a:r>
+          </a:p>
+          <a:p xmlns:a="http://schemas.openxmlformats.org/drawingml/2006/main">
+            <a:r>
+              <a:t>这里决定最早完成时间的，是关键路径。这个例子里，它等于 A、B 中较长的那段，再加 C 和 D。所以我们不能简单地把所有计算时间除以处理器核数。图中有多少真正独立的工作，以及汇合点前哪条分支最慢，会限制并行收益。</a:t>
+            </a:r>
+          </a:p>
+          <a:p xmlns:a="http://schemas.openxmlformats.org/drawingml/2006/main">
+            <a:r>
+              <a:t/>
+            </a:r>
+          </a:p>
+          <a:p xmlns:a="http://schemas.openxmlformats.org/drawingml/2006/main">
+            <a:r>
+              <a:t>真实系统还会付出唤醒、同步和缓存访问的开销，因此八和六只是帮助理解机制的教学数字。</a:t>
+            </a:r>
+          </a:p>
+          <a:p xmlns:a="http://schemas.openxmlformats.org/drawingml/2006/main">
+            <a:r>
+              <a:t/>
+            </a:r>
+          </a:p>
+          <a:p xmlns:a="http://schemas.openxmlformats.org/drawingml/2006/main">
+            <a:r>
+              <a:t>JACK2 还针对图访问采用无锁技术，减少连接变化对实时执行的干扰。这里的无锁有明确作用范围，不能把它扩展成整个引擎永远没有任何等待。把依赖并行和图变化管理放在一起，就能看到 JACK2 的架构演进关注的是怎样让图在多处理器和动态变化下继续运行。</a:t>
             </a:r>
           </a:p>
           <a:p xmlns:a="http://schemas.openxmlformats.org/drawingml/2006/main">
@@ -1878,7 +2648,7 @@
           <p:cNvPr id="3" name="Title">
             <a:extLst xmlns:a="http://schemas.openxmlformats.org/drawingml/2006/main">
               <a:ext uri="{FF2B5EF4-FFF2-40B4-BE49-F238E27FC236}">
-                <a16:creationId xmlns:a16="http://schemas.microsoft.com/office/drawing/2014/main" id="{C3A779B8-499D-462C-B769-D26FFF19AE07}"/>
+                <a16:creationId xmlns:a16="http://schemas.microsoft.com/office/drawing/2014/main" id="{78A0BC2C-52CD-4F54-93B9-41F4BDDFF206}"/>
               </a:ext>
             </a:extLst>
           </p:cNvPr>
@@ -2035,7 +2805,7 @@
           <p:cNvPr id="2" name="Subtitle">
             <a:extLst xmlns:a="http://schemas.openxmlformats.org/drawingml/2006/main">
               <a:ext uri="{FF2B5EF4-FFF2-40B4-BE49-F238E27FC236}">
-                <a16:creationId xmlns:a16="http://schemas.microsoft.com/office/drawing/2014/main" id="{D0CB5F71-60B4-4339-9F31-D685AE94A928}"/>
+                <a16:creationId xmlns:a16="http://schemas.microsoft.com/office/drawing/2014/main" id="{96976991-20BA-4EB1-B518-B37B37358007}"/>
               </a:ext>
             </a:extLst>
           </p:cNvPr>
@@ -2209,7 +2979,7 @@
           <p:cNvPr id="2" name="Section title">
             <a:extLst xmlns:a="http://schemas.openxmlformats.org/drawingml/2006/main">
               <a:ext uri="{FF2B5EF4-FFF2-40B4-BE49-F238E27FC236}">
-                <a16:creationId xmlns:a16="http://schemas.microsoft.com/office/drawing/2014/main" id="{28E6946F-54E8-4EE1-BE84-2EF904F16780}"/>
+                <a16:creationId xmlns:a16="http://schemas.microsoft.com/office/drawing/2014/main" id="{8695533E-3317-4778-AF57-6EEF62E52012}"/>
               </a:ext>
             </a:extLst>
           </p:cNvPr>
@@ -2383,7 +3153,7 @@
           <p:cNvPr id="3" name="Title">
             <a:extLst xmlns:a="http://schemas.openxmlformats.org/drawingml/2006/main">
               <a:ext uri="{FF2B5EF4-FFF2-40B4-BE49-F238E27FC236}">
-                <a16:creationId xmlns:a16="http://schemas.microsoft.com/office/drawing/2014/main" id="{FFFEDCAC-B112-4B86-B051-8A5EBC56927C}"/>
+                <a16:creationId xmlns:a16="http://schemas.microsoft.com/office/drawing/2014/main" id="{E71F5DF5-B962-4124-9E00-9F2D9CDBD486}"/>
               </a:ext>
             </a:extLst>
           </p:cNvPr>
@@ -2540,7 +3310,7 @@
           <p:cNvPr id="2" name="Body">
             <a:extLst xmlns:a="http://schemas.openxmlformats.org/drawingml/2006/main">
               <a:ext uri="{FF2B5EF4-FFF2-40B4-BE49-F238E27FC236}">
-                <a16:creationId xmlns:a16="http://schemas.microsoft.com/office/drawing/2014/main" id="{74DDFD25-3BB3-4AE6-83DD-F030F65FF4F3}"/>
+                <a16:creationId xmlns:a16="http://schemas.microsoft.com/office/drawing/2014/main" id="{AC266B86-BC45-4C30-BA84-E986A91D2FAA}"/>
               </a:ext>
             </a:extLst>
           </p:cNvPr>
@@ -2714,7 +3484,7 @@
           <p:cNvPr id="4" name="Title">
             <a:extLst xmlns:a="http://schemas.openxmlformats.org/drawingml/2006/main">
               <a:ext uri="{FF2B5EF4-FFF2-40B4-BE49-F238E27FC236}">
-                <a16:creationId xmlns:a16="http://schemas.microsoft.com/office/drawing/2014/main" id="{96346E43-09CD-413A-B84B-D98969211611}"/>
+                <a16:creationId xmlns:a16="http://schemas.microsoft.com/office/drawing/2014/main" id="{0D20FC0B-64AD-4E89-A65B-129548A596FC}"/>
               </a:ext>
             </a:extLst>
           </p:cNvPr>
@@ -2871,7 +3641,7 @@
           <p:cNvPr id="2" name="Left column">
             <a:extLst xmlns:a="http://schemas.openxmlformats.org/drawingml/2006/main">
               <a:ext uri="{FF2B5EF4-FFF2-40B4-BE49-F238E27FC236}">
-                <a16:creationId xmlns:a16="http://schemas.microsoft.com/office/drawing/2014/main" id="{A5FF6EAE-A15D-4BCF-BE1E-DC9E959C6E16}"/>
+                <a16:creationId xmlns:a16="http://schemas.microsoft.com/office/drawing/2014/main" id="{54B97061-21FD-451C-A968-56B4114BEAC5}"/>
               </a:ext>
             </a:extLst>
           </p:cNvPr>
@@ -3028,7 +3798,7 @@
           <p:cNvPr id="3" name="Right column">
             <a:extLst xmlns:a="http://schemas.openxmlformats.org/drawingml/2006/main">
               <a:ext uri="{FF2B5EF4-FFF2-40B4-BE49-F238E27FC236}">
-                <a16:creationId xmlns:a16="http://schemas.microsoft.com/office/drawing/2014/main" id="{0A5170F1-8368-40BE-9BC1-97F2A69B508C}"/>
+                <a16:creationId xmlns:a16="http://schemas.microsoft.com/office/drawing/2014/main" id="{B5889972-949D-4C01-8012-D8B9F64795E8}"/>
               </a:ext>
             </a:extLst>
           </p:cNvPr>
@@ -3202,7 +3972,7 @@
           <p:cNvPr id="3" name="Title">
             <a:extLst xmlns:a="http://schemas.openxmlformats.org/drawingml/2006/main">
               <a:ext uri="{FF2B5EF4-FFF2-40B4-BE49-F238E27FC236}">
-                <a16:creationId xmlns:a16="http://schemas.microsoft.com/office/drawing/2014/main" id="{8F200635-824B-4B0D-9CA4-40961D03D93E}"/>
+                <a16:creationId xmlns:a16="http://schemas.microsoft.com/office/drawing/2014/main" id="{6EF4CD14-0B04-40D4-957D-45FB91F23C2A}"/>
               </a:ext>
             </a:extLst>
           </p:cNvPr>
@@ -3359,7 +4129,7 @@
           <p:cNvPr id="2" name="Left column">
             <a:extLst xmlns:a="http://schemas.openxmlformats.org/drawingml/2006/main">
               <a:ext uri="{FF2B5EF4-FFF2-40B4-BE49-F238E27FC236}">
-                <a16:creationId xmlns:a16="http://schemas.microsoft.com/office/drawing/2014/main" id="{255859C1-7968-4442-B39F-B6B01401C26A}"/>
+                <a16:creationId xmlns:a16="http://schemas.microsoft.com/office/drawing/2014/main" id="{F6FFC444-7570-4680-9176-990E8BF8A199}"/>
               </a:ext>
             </a:extLst>
           </p:cNvPr>
@@ -3554,12 +4324,12 @@
   </p:cSld>
   <p:clrMap bg1="lt1" tx1="dk1" bg2="lt2" tx2="dk2" accent1="accent1" accent2="accent2" accent3="accent3" accent4="accent4" accent5="accent5" accent6="accent6" hlink="hlink" folHlink="folHlink"/>
   <p:sldLayoutIdLst>
-    <p:sldLayoutId xmlns:r="http://schemas.openxmlformats.org/officeDocument/2006/relationships" id="2147483649" r:id="R01f829977f8c4914"/>
-    <p:sldLayoutId xmlns:r="http://schemas.openxmlformats.org/officeDocument/2006/relationships" id="2147483650" r:id="Reffb35c6ab174635"/>
-    <p:sldLayoutId xmlns:r="http://schemas.openxmlformats.org/officeDocument/2006/relationships" id="2147483651" r:id="R2765f1845d1a4718"/>
-    <p:sldLayoutId xmlns:r="http://schemas.openxmlformats.org/officeDocument/2006/relationships" id="2147483652" r:id="R101e38c0e7fb4f91"/>
-    <p:sldLayoutId xmlns:r="http://schemas.openxmlformats.org/officeDocument/2006/relationships" id="2147483653" r:id="R80316797eefb4b65"/>
-    <p:sldLayoutId xmlns:r="http://schemas.openxmlformats.org/officeDocument/2006/relationships" id="2147483654" r:id="Rd103957eb3aa4885"/>
+    <p:sldLayoutId xmlns:r="http://schemas.openxmlformats.org/officeDocument/2006/relationships" id="2147483649" r:id="Rfd2a3ac0993e4e5e"/>
+    <p:sldLayoutId xmlns:r="http://schemas.openxmlformats.org/officeDocument/2006/relationships" id="2147483650" r:id="Rb02bf0e6937d426a"/>
+    <p:sldLayoutId xmlns:r="http://schemas.openxmlformats.org/officeDocument/2006/relationships" id="2147483651" r:id="R178768c6722c4326"/>
+    <p:sldLayoutId xmlns:r="http://schemas.openxmlformats.org/officeDocument/2006/relationships" id="2147483652" r:id="R72bbb093c3514a59"/>
+    <p:sldLayoutId xmlns:r="http://schemas.openxmlformats.org/officeDocument/2006/relationships" id="2147483653" r:id="R6e3b7f0b900d4fa0"/>
+    <p:sldLayoutId xmlns:r="http://schemas.openxmlformats.org/officeDocument/2006/relationships" id="2147483654" r:id="Rd597035076b04493"/>
   </p:sldLayoutIdLst>
   <p:txStyles>
     <p:titleStyle>
@@ -4110,7 +4880,7 @@
           <p:cNvPr id="40" name="">
             <a:extLst xmlns:a="http://schemas.openxmlformats.org/drawingml/2006/main">
               <a:ext uri="{FF2B5EF4-FFF2-40B4-BE49-F238E27FC236}">
-                <a16:creationId xmlns:a16="http://schemas.microsoft.com/office/drawing/2014/main" id="{3D0979BB-B71C-4B4B-BBC6-B520E64D4598}"/>
+                <a16:creationId xmlns:a16="http://schemas.microsoft.com/office/drawing/2014/main" id="{6D02A663-24C9-4B8B-8910-AAD4B7C96921}"/>
               </a:ext>
             </a:extLst>
           </p:cNvPr>
@@ -4178,7 +4948,7 @@
           <p:cNvPr id="2" name="">
             <a:extLst xmlns:a="http://schemas.openxmlformats.org/drawingml/2006/main">
               <a:ext uri="{FF2B5EF4-FFF2-40B4-BE49-F238E27FC236}">
-                <a16:creationId xmlns:a16="http://schemas.microsoft.com/office/drawing/2014/main" id="{EF366064-BB62-412B-A189-D17F898EB329}"/>
+                <a16:creationId xmlns:a16="http://schemas.microsoft.com/office/drawing/2014/main" id="{7035DED6-2B0C-4941-BDE7-F5287EFDB7CC}"/>
               </a:ext>
             </a:extLst>
           </p:cNvPr>
@@ -4246,7 +5016,7 @@
           <p:cNvPr id="3" name="">
             <a:extLst xmlns:a="http://schemas.openxmlformats.org/drawingml/2006/main">
               <a:ext uri="{FF2B5EF4-FFF2-40B4-BE49-F238E27FC236}">
-                <a16:creationId xmlns:a16="http://schemas.microsoft.com/office/drawing/2014/main" id="{440ECB36-0553-4D86-BDC8-55BEBC25044D}"/>
+                <a16:creationId xmlns:a16="http://schemas.microsoft.com/office/drawing/2014/main" id="{8BCCE7D3-12D5-4488-9350-5C0EAAA7599B}"/>
               </a:ext>
             </a:extLst>
           </p:cNvPr>
@@ -4277,7 +5047,7 @@
           <p:cNvPr id="4" name="">
             <a:extLst xmlns:a="http://schemas.openxmlformats.org/drawingml/2006/main">
               <a:ext uri="{FF2B5EF4-FFF2-40B4-BE49-F238E27FC236}">
-                <a16:creationId xmlns:a16="http://schemas.microsoft.com/office/drawing/2014/main" id="{FE4E8358-AF28-4BC7-BC0A-FE3E5736D4C5}"/>
+                <a16:creationId xmlns:a16="http://schemas.microsoft.com/office/drawing/2014/main" id="{76B2E685-C0BD-4EF6-901C-EFD15082AFC5}"/>
               </a:ext>
             </a:extLst>
           </p:cNvPr>
@@ -4345,7 +5115,7 @@
           <p:cNvPr id="5" name="">
             <a:extLst xmlns:a="http://schemas.openxmlformats.org/drawingml/2006/main">
               <a:ext uri="{FF2B5EF4-FFF2-40B4-BE49-F238E27FC236}">
-                <a16:creationId xmlns:a16="http://schemas.microsoft.com/office/drawing/2014/main" id="{1F5BD632-A527-47BB-A8D4-87F1E22C0D86}"/>
+                <a16:creationId xmlns:a16="http://schemas.microsoft.com/office/drawing/2014/main" id="{431ACE03-01E2-48C0-8D4D-C6C29BE845A0}"/>
               </a:ext>
             </a:extLst>
           </p:cNvPr>
@@ -4413,7 +5183,7 @@
           <p:cNvPr id="6" name="">
             <a:extLst xmlns:a="http://schemas.openxmlformats.org/drawingml/2006/main">
               <a:ext uri="{FF2B5EF4-FFF2-40B4-BE49-F238E27FC236}">
-                <a16:creationId xmlns:a16="http://schemas.microsoft.com/office/drawing/2014/main" id="{88A6122B-2EAD-4A52-B023-CF8DAFE53F73}"/>
+                <a16:creationId xmlns:a16="http://schemas.microsoft.com/office/drawing/2014/main" id="{D01158B4-65CE-409A-B6DD-C2A743A6C8C4}"/>
               </a:ext>
             </a:extLst>
           </p:cNvPr>
@@ -4481,7 +5251,7 @@
           <p:cNvPr id="7" name="">
             <a:extLst xmlns:a="http://schemas.openxmlformats.org/drawingml/2006/main">
               <a:ext uri="{FF2B5EF4-FFF2-40B4-BE49-F238E27FC236}">
-                <a16:creationId xmlns:a16="http://schemas.microsoft.com/office/drawing/2014/main" id="{CF2BA202-228E-49CA-ABA5-5C751690CCF3}"/>
+                <a16:creationId xmlns:a16="http://schemas.microsoft.com/office/drawing/2014/main" id="{044D4975-B0CC-4CB7-915B-12CDB157AC84}"/>
               </a:ext>
             </a:extLst>
           </p:cNvPr>
@@ -4512,7 +5282,7 @@
           <p:cNvPr id="8" name="">
             <a:extLst xmlns:a="http://schemas.openxmlformats.org/drawingml/2006/main">
               <a:ext uri="{FF2B5EF4-FFF2-40B4-BE49-F238E27FC236}">
-                <a16:creationId xmlns:a16="http://schemas.microsoft.com/office/drawing/2014/main" id="{A493A92F-7C0E-4B12-B7CD-198506DDAC12}"/>
+                <a16:creationId xmlns:a16="http://schemas.microsoft.com/office/drawing/2014/main" id="{5EDCA727-D4FE-4DB0-8BCB-61FA095DBE33}"/>
               </a:ext>
             </a:extLst>
           </p:cNvPr>
@@ -4543,7 +5313,7 @@
           <p:cNvPr id="9" name="">
             <a:extLst xmlns:a="http://schemas.openxmlformats.org/drawingml/2006/main">
               <a:ext uri="{FF2B5EF4-FFF2-40B4-BE49-F238E27FC236}">
-                <a16:creationId xmlns:a16="http://schemas.microsoft.com/office/drawing/2014/main" id="{7DC224BE-F64F-4BFE-AB5D-E66F0A27F079}"/>
+                <a16:creationId xmlns:a16="http://schemas.microsoft.com/office/drawing/2014/main" id="{C7CFE6E4-705F-4A5D-839B-B1A2C82C9123}"/>
               </a:ext>
             </a:extLst>
           </p:cNvPr>
@@ -4574,7 +5344,7 @@
           <p:cNvPr id="10" name="">
             <a:extLst xmlns:a="http://schemas.openxmlformats.org/drawingml/2006/main">
               <a:ext uri="{FF2B5EF4-FFF2-40B4-BE49-F238E27FC236}">
-                <a16:creationId xmlns:a16="http://schemas.microsoft.com/office/drawing/2014/main" id="{108F8604-5120-40CB-9323-4E3CB2886F8B}"/>
+                <a16:creationId xmlns:a16="http://schemas.microsoft.com/office/drawing/2014/main" id="{3FA04824-F782-479F-95EC-A3355D228F92}"/>
               </a:ext>
             </a:extLst>
           </p:cNvPr>
@@ -4605,7 +5375,7 @@
           <p:cNvPr id="11" name="">
             <a:extLst xmlns:a="http://schemas.openxmlformats.org/drawingml/2006/main">
               <a:ext uri="{FF2B5EF4-FFF2-40B4-BE49-F238E27FC236}">
-                <a16:creationId xmlns:a16="http://schemas.microsoft.com/office/drawing/2014/main" id="{D8A7578C-0062-4F04-BF3B-D925858AF6FD}"/>
+                <a16:creationId xmlns:a16="http://schemas.microsoft.com/office/drawing/2014/main" id="{8E8F1CFA-CDE8-4768-9DFE-CBC67D2001B7}"/>
               </a:ext>
             </a:extLst>
           </p:cNvPr>
@@ -4673,7 +5443,7 @@
           <p:cNvPr id="12" name="">
             <a:extLst xmlns:a="http://schemas.openxmlformats.org/drawingml/2006/main">
               <a:ext uri="{FF2B5EF4-FFF2-40B4-BE49-F238E27FC236}">
-                <a16:creationId xmlns:a16="http://schemas.microsoft.com/office/drawing/2014/main" id="{93B5AA48-6839-442B-AE21-F891DEF597DA}"/>
+                <a16:creationId xmlns:a16="http://schemas.microsoft.com/office/drawing/2014/main" id="{4EBBDC04-06DA-446F-87E5-376DB2D25763}"/>
               </a:ext>
             </a:extLst>
           </p:cNvPr>
@@ -4741,7 +5511,7 @@
           <p:cNvPr id="13" name="">
             <a:extLst xmlns:a="http://schemas.openxmlformats.org/drawingml/2006/main">
               <a:ext uri="{FF2B5EF4-FFF2-40B4-BE49-F238E27FC236}">
-                <a16:creationId xmlns:a16="http://schemas.microsoft.com/office/drawing/2014/main" id="{88FCE163-3629-44D4-AB14-CD27825E956F}"/>
+                <a16:creationId xmlns:a16="http://schemas.microsoft.com/office/drawing/2014/main" id="{E92E1BAE-8762-44F1-92D1-DD3D854BFF84}"/>
               </a:ext>
             </a:extLst>
           </p:cNvPr>
@@ -4832,7 +5602,7 @@
           <p:cNvPr id="14" name="">
             <a:extLst xmlns:a="http://schemas.openxmlformats.org/drawingml/2006/main">
               <a:ext uri="{FF2B5EF4-FFF2-40B4-BE49-F238E27FC236}">
-                <a16:creationId xmlns:a16="http://schemas.microsoft.com/office/drawing/2014/main" id="{4A847457-3A21-4D11-8ACA-35F2D5BFC877}"/>
+                <a16:creationId xmlns:a16="http://schemas.microsoft.com/office/drawing/2014/main" id="{0558A9A3-10D6-4C89-A857-499F81922BA4}"/>
               </a:ext>
             </a:extLst>
           </p:cNvPr>
@@ -4900,7 +5670,7 @@
           <p:cNvPr id="15" name="">
             <a:extLst xmlns:a="http://schemas.openxmlformats.org/drawingml/2006/main">
               <a:ext uri="{FF2B5EF4-FFF2-40B4-BE49-F238E27FC236}">
-                <a16:creationId xmlns:a16="http://schemas.microsoft.com/office/drawing/2014/main" id="{0AFEEE40-1320-4D09-8E8C-3A174BBA330C}"/>
+                <a16:creationId xmlns:a16="http://schemas.microsoft.com/office/drawing/2014/main" id="{A0CE2F9B-C029-4AF6-ADC3-A91B13CD75A5}"/>
               </a:ext>
             </a:extLst>
           </p:cNvPr>
@@ -4931,7 +5701,7 @@
           <p:cNvPr id="16" name="">
             <a:extLst xmlns:a="http://schemas.openxmlformats.org/drawingml/2006/main">
               <a:ext uri="{FF2B5EF4-FFF2-40B4-BE49-F238E27FC236}">
-                <a16:creationId xmlns:a16="http://schemas.microsoft.com/office/drawing/2014/main" id="{90F547AE-D869-49D8-A5FD-7F1C3A9FCE80}"/>
+                <a16:creationId xmlns:a16="http://schemas.microsoft.com/office/drawing/2014/main" id="{1628B00E-F6D2-41DC-96C5-718E837DC237}"/>
               </a:ext>
             </a:extLst>
           </p:cNvPr>
@@ -4962,7 +5732,7 @@
           <p:cNvPr id="17" name="">
             <a:extLst xmlns:a="http://schemas.openxmlformats.org/drawingml/2006/main">
               <a:ext uri="{FF2B5EF4-FFF2-40B4-BE49-F238E27FC236}">
-                <a16:creationId xmlns:a16="http://schemas.microsoft.com/office/drawing/2014/main" id="{905A4884-8B78-4BE3-966F-5F209C47A7A6}"/>
+                <a16:creationId xmlns:a16="http://schemas.microsoft.com/office/drawing/2014/main" id="{67CAF27B-9802-4C22-9668-726F515557F3}"/>
               </a:ext>
             </a:extLst>
           </p:cNvPr>
@@ -4993,7 +5763,7 @@
           <p:cNvPr id="18" name="">
             <a:extLst xmlns:a="http://schemas.openxmlformats.org/drawingml/2006/main">
               <a:ext uri="{FF2B5EF4-FFF2-40B4-BE49-F238E27FC236}">
-                <a16:creationId xmlns:a16="http://schemas.microsoft.com/office/drawing/2014/main" id="{9DE21ED5-03AB-4D9C-83AC-DBDE69AD45CE}"/>
+                <a16:creationId xmlns:a16="http://schemas.microsoft.com/office/drawing/2014/main" id="{C10CBFBB-77D3-4D6A-8A79-5B3E193295F5}"/>
               </a:ext>
             </a:extLst>
           </p:cNvPr>
@@ -5024,7 +5794,7 @@
           <p:cNvPr id="19" name="">
             <a:extLst xmlns:a="http://schemas.openxmlformats.org/drawingml/2006/main">
               <a:ext uri="{FF2B5EF4-FFF2-40B4-BE49-F238E27FC236}">
-                <a16:creationId xmlns:a16="http://schemas.microsoft.com/office/drawing/2014/main" id="{3878C80F-8B42-46BA-9E45-AC2FA528890C}"/>
+                <a16:creationId xmlns:a16="http://schemas.microsoft.com/office/drawing/2014/main" id="{CAF81C8F-B743-4A43-9FD8-B9D6357A8883}"/>
               </a:ext>
             </a:extLst>
           </p:cNvPr>
@@ -5092,7 +5862,7 @@
           <p:cNvPr id="20" name="">
             <a:extLst xmlns:a="http://schemas.openxmlformats.org/drawingml/2006/main">
               <a:ext uri="{FF2B5EF4-FFF2-40B4-BE49-F238E27FC236}">
-                <a16:creationId xmlns:a16="http://schemas.microsoft.com/office/drawing/2014/main" id="{38E4D995-4192-45A1-B468-2DE3CF676BBF}"/>
+                <a16:creationId xmlns:a16="http://schemas.microsoft.com/office/drawing/2014/main" id="{58150408-6DBF-4042-A6E3-ADA7F2AFE0D6}"/>
               </a:ext>
             </a:extLst>
           </p:cNvPr>
@@ -5160,7 +5930,7 @@
           <p:cNvPr id="21" name="">
             <a:extLst xmlns:a="http://schemas.openxmlformats.org/drawingml/2006/main">
               <a:ext uri="{FF2B5EF4-FFF2-40B4-BE49-F238E27FC236}">
-                <a16:creationId xmlns:a16="http://schemas.microsoft.com/office/drawing/2014/main" id="{7A8A61A4-9B1B-4C00-97CA-AC1F5966B881}"/>
+                <a16:creationId xmlns:a16="http://schemas.microsoft.com/office/drawing/2014/main" id="{9D0F901C-4564-48B0-A693-225D004A584A}"/>
               </a:ext>
             </a:extLst>
           </p:cNvPr>
@@ -5251,7 +6021,7 @@
           <p:cNvPr id="22" name="">
             <a:extLst xmlns:a="http://schemas.openxmlformats.org/drawingml/2006/main">
               <a:ext uri="{FF2B5EF4-FFF2-40B4-BE49-F238E27FC236}">
-                <a16:creationId xmlns:a16="http://schemas.microsoft.com/office/drawing/2014/main" id="{9D17DFA9-3F9E-4C5E-8FE6-6A3C4AB62397}"/>
+                <a16:creationId xmlns:a16="http://schemas.microsoft.com/office/drawing/2014/main" id="{0A13A0C8-9693-4028-AA83-D54FE5B44014}"/>
               </a:ext>
             </a:extLst>
           </p:cNvPr>
@@ -5319,7 +6089,7 @@
           <p:cNvPr id="23" name="">
             <a:extLst xmlns:a="http://schemas.openxmlformats.org/drawingml/2006/main">
               <a:ext uri="{FF2B5EF4-FFF2-40B4-BE49-F238E27FC236}">
-                <a16:creationId xmlns:a16="http://schemas.microsoft.com/office/drawing/2014/main" id="{70B25F20-286F-449A-8BFE-663146E9AAB7}"/>
+                <a16:creationId xmlns:a16="http://schemas.microsoft.com/office/drawing/2014/main" id="{2B847064-3AA5-42E5-9042-E6D0CE1D1B56}"/>
               </a:ext>
             </a:extLst>
           </p:cNvPr>
@@ -5350,7 +6120,7 @@
           <p:cNvPr id="24" name="">
             <a:extLst xmlns:a="http://schemas.openxmlformats.org/drawingml/2006/main">
               <a:ext uri="{FF2B5EF4-FFF2-40B4-BE49-F238E27FC236}">
-                <a16:creationId xmlns:a16="http://schemas.microsoft.com/office/drawing/2014/main" id="{873D61C2-2582-47BC-88FE-8EA186991EE1}"/>
+                <a16:creationId xmlns:a16="http://schemas.microsoft.com/office/drawing/2014/main" id="{32531679-1714-4CD6-ACAF-20C800D8EDAC}"/>
               </a:ext>
             </a:extLst>
           </p:cNvPr>
@@ -5381,7 +6151,7 @@
           <p:cNvPr id="25" name="">
             <a:extLst xmlns:a="http://schemas.openxmlformats.org/drawingml/2006/main">
               <a:ext uri="{FF2B5EF4-FFF2-40B4-BE49-F238E27FC236}">
-                <a16:creationId xmlns:a16="http://schemas.microsoft.com/office/drawing/2014/main" id="{617460A5-B05E-43DA-8EFB-CDFEDCF335C4}"/>
+                <a16:creationId xmlns:a16="http://schemas.microsoft.com/office/drawing/2014/main" id="{29F2D35B-E7BB-4425-9C22-4E3B551BFA7B}"/>
               </a:ext>
             </a:extLst>
           </p:cNvPr>
@@ -5412,7 +6182,7 @@
           <p:cNvPr id="26" name="">
             <a:extLst xmlns:a="http://schemas.openxmlformats.org/drawingml/2006/main">
               <a:ext uri="{FF2B5EF4-FFF2-40B4-BE49-F238E27FC236}">
-                <a16:creationId xmlns:a16="http://schemas.microsoft.com/office/drawing/2014/main" id="{3F514F23-0A2E-459D-931D-A7553372EDA6}"/>
+                <a16:creationId xmlns:a16="http://schemas.microsoft.com/office/drawing/2014/main" id="{C17EDD62-81EC-41F2-9E8A-B09C6807577F}"/>
               </a:ext>
             </a:extLst>
           </p:cNvPr>
@@ -5443,7 +6213,7 @@
           <p:cNvPr id="27" name="">
             <a:extLst xmlns:a="http://schemas.openxmlformats.org/drawingml/2006/main">
               <a:ext uri="{FF2B5EF4-FFF2-40B4-BE49-F238E27FC236}">
-                <a16:creationId xmlns:a16="http://schemas.microsoft.com/office/drawing/2014/main" id="{D78FA39F-7050-4B56-99CE-A589ABC76079}"/>
+                <a16:creationId xmlns:a16="http://schemas.microsoft.com/office/drawing/2014/main" id="{64D5E610-8373-49EA-8CCD-93159C01281E}"/>
               </a:ext>
             </a:extLst>
           </p:cNvPr>
@@ -5511,7 +6281,7 @@
           <p:cNvPr id="28" name="">
             <a:extLst xmlns:a="http://schemas.openxmlformats.org/drawingml/2006/main">
               <a:ext uri="{FF2B5EF4-FFF2-40B4-BE49-F238E27FC236}">
-                <a16:creationId xmlns:a16="http://schemas.microsoft.com/office/drawing/2014/main" id="{247534E8-ABE8-48FF-B78D-6B87CC8ECB82}"/>
+                <a16:creationId xmlns:a16="http://schemas.microsoft.com/office/drawing/2014/main" id="{7B472750-E7AD-4F76-B070-952D4908B2B8}"/>
               </a:ext>
             </a:extLst>
           </p:cNvPr>
@@ -5579,7 +6349,7 @@
           <p:cNvPr id="29" name="">
             <a:extLst xmlns:a="http://schemas.openxmlformats.org/drawingml/2006/main">
               <a:ext uri="{FF2B5EF4-FFF2-40B4-BE49-F238E27FC236}">
-                <a16:creationId xmlns:a16="http://schemas.microsoft.com/office/drawing/2014/main" id="{3C4872BD-4917-4D00-B697-9DBEC4196D39}"/>
+                <a16:creationId xmlns:a16="http://schemas.microsoft.com/office/drawing/2014/main" id="{A17327D3-960D-4324-9D5A-7F0E7C0F9B1D}"/>
               </a:ext>
             </a:extLst>
           </p:cNvPr>
@@ -5670,7 +6440,7 @@
           <p:cNvPr id="30" name="">
             <a:extLst xmlns:a="http://schemas.openxmlformats.org/drawingml/2006/main">
               <a:ext uri="{FF2B5EF4-FFF2-40B4-BE49-F238E27FC236}">
-                <a16:creationId xmlns:a16="http://schemas.microsoft.com/office/drawing/2014/main" id="{D59EC647-FCDB-413A-AE9B-D1E8F997FD4F}"/>
+                <a16:creationId xmlns:a16="http://schemas.microsoft.com/office/drawing/2014/main" id="{82DDC92A-DAAB-4EDC-A2DD-0A426ABB5537}"/>
               </a:ext>
             </a:extLst>
           </p:cNvPr>
@@ -5738,7 +6508,7 @@
           <p:cNvPr id="31" name="">
             <a:extLst xmlns:a="http://schemas.openxmlformats.org/drawingml/2006/main">
               <a:ext uri="{FF2B5EF4-FFF2-40B4-BE49-F238E27FC236}">
-                <a16:creationId xmlns:a16="http://schemas.microsoft.com/office/drawing/2014/main" id="{F5B32C8F-CBA1-42D3-88AF-F30D9946E93E}"/>
+                <a16:creationId xmlns:a16="http://schemas.microsoft.com/office/drawing/2014/main" id="{6862D11E-FA63-4CB1-9B69-17BC5BD18A4C}"/>
               </a:ext>
             </a:extLst>
           </p:cNvPr>
@@ -5769,7 +6539,7 @@
           <p:cNvPr id="32" name="">
             <a:extLst xmlns:a="http://schemas.openxmlformats.org/drawingml/2006/main">
               <a:ext uri="{FF2B5EF4-FFF2-40B4-BE49-F238E27FC236}">
-                <a16:creationId xmlns:a16="http://schemas.microsoft.com/office/drawing/2014/main" id="{2F21EA9F-BE31-4A87-97B4-96B921AD20A1}"/>
+                <a16:creationId xmlns:a16="http://schemas.microsoft.com/office/drawing/2014/main" id="{644D4426-1FD9-48C6-94E1-251E65AE7695}"/>
               </a:ext>
             </a:extLst>
           </p:cNvPr>
@@ -5837,7 +6607,7 @@
           <p:cNvPr id="33" name="">
             <a:extLst xmlns:a="http://schemas.openxmlformats.org/drawingml/2006/main">
               <a:ext uri="{FF2B5EF4-FFF2-40B4-BE49-F238E27FC236}">
-                <a16:creationId xmlns:a16="http://schemas.microsoft.com/office/drawing/2014/main" id="{CD93DB35-0797-43AA-BFA3-03AB9821F6C6}"/>
+                <a16:creationId xmlns:a16="http://schemas.microsoft.com/office/drawing/2014/main" id="{6EDF7003-F741-40D8-AC7F-81A5DF9861A0}"/>
               </a:ext>
             </a:extLst>
           </p:cNvPr>
@@ -5905,7 +6675,7 @@
           <p:cNvPr id="34" name="">
             <a:extLst xmlns:a="http://schemas.openxmlformats.org/drawingml/2006/main">
               <a:ext uri="{FF2B5EF4-FFF2-40B4-BE49-F238E27FC236}">
-                <a16:creationId xmlns:a16="http://schemas.microsoft.com/office/drawing/2014/main" id="{47EB2B72-02EC-435A-8355-7DA0F7D8F02F}"/>
+                <a16:creationId xmlns:a16="http://schemas.microsoft.com/office/drawing/2014/main" id="{F7854EFB-FF95-409A-B2F8-E412EFF6AC8D}"/>
               </a:ext>
             </a:extLst>
           </p:cNvPr>
@@ -5996,7 +6766,7 @@
           <p:cNvPr id="35" name="">
             <a:extLst xmlns:a="http://schemas.openxmlformats.org/drawingml/2006/main">
               <a:ext uri="{FF2B5EF4-FFF2-40B4-BE49-F238E27FC236}">
-                <a16:creationId xmlns:a16="http://schemas.microsoft.com/office/drawing/2014/main" id="{3222EE16-D030-4208-83B8-89D969F1D6D8}"/>
+                <a16:creationId xmlns:a16="http://schemas.microsoft.com/office/drawing/2014/main" id="{072410DF-7828-4BDC-8564-8D1E641BD4FF}"/>
               </a:ext>
             </a:extLst>
           </p:cNvPr>
@@ -6064,7 +6834,7 @@
           <p:cNvPr id="36" name="">
             <a:extLst xmlns:a="http://schemas.openxmlformats.org/drawingml/2006/main">
               <a:ext uri="{FF2B5EF4-FFF2-40B4-BE49-F238E27FC236}">
-                <a16:creationId xmlns:a16="http://schemas.microsoft.com/office/drawing/2014/main" id="{34B68336-7D1A-472C-858A-BECDDEFAE9EE}"/>
+                <a16:creationId xmlns:a16="http://schemas.microsoft.com/office/drawing/2014/main" id="{BD76EEE2-3BD1-47AF-97A4-8023DD6F2D4F}"/>
               </a:ext>
             </a:extLst>
           </p:cNvPr>
@@ -6132,7 +6902,7 @@
           <p:cNvPr id="37" name="">
             <a:extLst xmlns:a="http://schemas.openxmlformats.org/drawingml/2006/main">
               <a:ext uri="{FF2B5EF4-FFF2-40B4-BE49-F238E27FC236}">
-                <a16:creationId xmlns:a16="http://schemas.microsoft.com/office/drawing/2014/main" id="{3F4D4B5D-E874-4CBE-8082-A4E08357D224}"/>
+                <a16:creationId xmlns:a16="http://schemas.microsoft.com/office/drawing/2014/main" id="{EE6A00FD-0E81-49F7-B5FF-208A3B1950AA}"/>
               </a:ext>
             </a:extLst>
           </p:cNvPr>
@@ -6163,7 +6933,7 @@
           <p:cNvPr id="38" name="">
             <a:extLst xmlns:a="http://schemas.openxmlformats.org/drawingml/2006/main">
               <a:ext uri="{FF2B5EF4-FFF2-40B4-BE49-F238E27FC236}">
-                <a16:creationId xmlns:a16="http://schemas.microsoft.com/office/drawing/2014/main" id="{C7105A4A-6D0B-46CC-87CA-5EC1C1665177}"/>
+                <a16:creationId xmlns:a16="http://schemas.microsoft.com/office/drawing/2014/main" id="{CEF42971-EBD0-4C93-B25E-C285A9E92BDB}"/>
               </a:ext>
             </a:extLst>
           </p:cNvPr>
@@ -6231,7 +7001,7 @@
           <p:cNvPr id="39" name="">
             <a:extLst xmlns:a="http://schemas.openxmlformats.org/drawingml/2006/main">
               <a:ext uri="{FF2B5EF4-FFF2-40B4-BE49-F238E27FC236}">
-                <a16:creationId xmlns:a16="http://schemas.microsoft.com/office/drawing/2014/main" id="{32AFA6D5-445B-43F5-AB4B-E949DEC00909}"/>
+                <a16:creationId xmlns:a16="http://schemas.microsoft.com/office/drawing/2014/main" id="{610F716F-902F-41E2-951E-2DAA4FF9F759}"/>
               </a:ext>
             </a:extLst>
           </p:cNvPr>
@@ -6297,7 +7067,7 @@
     </p:spTree>
     <p:extLst>
       <p:ext uri="{BB962C8B-B14F-4D97-AF65-F5344CB8AC3E}">
-        <p14:creationId xmlns:p14="http://schemas.microsoft.com/office/powerpoint/2010/main" val="1999545208"/>
+        <p14:creationId xmlns:p14="http://schemas.microsoft.com/office/powerpoint/2010/main" val="529401145"/>
       </p:ext>
     </p:extLst>
   </p:cSld>
@@ -6328,7 +7098,7 @@
           <p:cNvPr id="39" name="">
             <a:extLst xmlns:a="http://schemas.openxmlformats.org/drawingml/2006/main">
               <a:ext uri="{FF2B5EF4-FFF2-40B4-BE49-F238E27FC236}">
-                <a16:creationId xmlns:a16="http://schemas.microsoft.com/office/drawing/2014/main" id="{2B038764-3AFC-4B58-BBD7-44B61F6AD9CE}"/>
+                <a16:creationId xmlns:a16="http://schemas.microsoft.com/office/drawing/2014/main" id="{EB70115C-6AAD-4E74-B5B4-14077C4F776F}"/>
               </a:ext>
             </a:extLst>
           </p:cNvPr>
@@ -6396,7 +7166,7 @@
           <p:cNvPr id="2" name="">
             <a:extLst xmlns:a="http://schemas.openxmlformats.org/drawingml/2006/main">
               <a:ext uri="{FF2B5EF4-FFF2-40B4-BE49-F238E27FC236}">
-                <a16:creationId xmlns:a16="http://schemas.microsoft.com/office/drawing/2014/main" id="{2DFE93BC-F22B-4970-A339-25C09EAFEC26}"/>
+                <a16:creationId xmlns:a16="http://schemas.microsoft.com/office/drawing/2014/main" id="{607499C5-36AF-468A-9FFB-777239F5613A}"/>
               </a:ext>
             </a:extLst>
           </p:cNvPr>
@@ -6464,7 +7234,7 @@
           <p:cNvPr id="3" name="">
             <a:extLst xmlns:a="http://schemas.openxmlformats.org/drawingml/2006/main">
               <a:ext uri="{FF2B5EF4-FFF2-40B4-BE49-F238E27FC236}">
-                <a16:creationId xmlns:a16="http://schemas.microsoft.com/office/drawing/2014/main" id="{25FD68FD-E7E7-47F8-B20A-8EAF0416E668}"/>
+                <a16:creationId xmlns:a16="http://schemas.microsoft.com/office/drawing/2014/main" id="{8DDB3D84-6942-418F-A8FC-EA1431D1BCB4}"/>
               </a:ext>
             </a:extLst>
           </p:cNvPr>
@@ -6495,7 +7265,7 @@
           <p:cNvPr id="4" name="">
             <a:extLst xmlns:a="http://schemas.openxmlformats.org/drawingml/2006/main">
               <a:ext uri="{FF2B5EF4-FFF2-40B4-BE49-F238E27FC236}">
-                <a16:creationId xmlns:a16="http://schemas.microsoft.com/office/drawing/2014/main" id="{42619472-E769-472F-A713-D0CC1E2FDA07}"/>
+                <a16:creationId xmlns:a16="http://schemas.microsoft.com/office/drawing/2014/main" id="{5B8E0C50-5D7B-44D1-BC80-D1944E0D1299}"/>
               </a:ext>
             </a:extLst>
           </p:cNvPr>
@@ -6563,7 +7333,7 @@
           <p:cNvPr id="5" name="">
             <a:extLst xmlns:a="http://schemas.openxmlformats.org/drawingml/2006/main">
               <a:ext uri="{FF2B5EF4-FFF2-40B4-BE49-F238E27FC236}">
-                <a16:creationId xmlns:a16="http://schemas.microsoft.com/office/drawing/2014/main" id="{C52EE014-DF09-48F3-8C5B-C3D53095BF2E}"/>
+                <a16:creationId xmlns:a16="http://schemas.microsoft.com/office/drawing/2014/main" id="{F04E9BEA-6151-4A19-8318-95B9F8874D6D}"/>
               </a:ext>
             </a:extLst>
           </p:cNvPr>
@@ -6631,7 +7401,7 @@
           <p:cNvPr id="6" name="">
             <a:extLst xmlns:a="http://schemas.openxmlformats.org/drawingml/2006/main">
               <a:ext uri="{FF2B5EF4-FFF2-40B4-BE49-F238E27FC236}">
-                <a16:creationId xmlns:a16="http://schemas.microsoft.com/office/drawing/2014/main" id="{E4F12837-B8CF-4143-BEF9-5A78847667DB}"/>
+                <a16:creationId xmlns:a16="http://schemas.microsoft.com/office/drawing/2014/main" id="{25B39D8B-DD3F-46C0-9969-A7DEF26CF020}"/>
               </a:ext>
             </a:extLst>
           </p:cNvPr>
@@ -6699,7 +7469,7 @@
           <p:cNvPr id="7" name="">
             <a:extLst xmlns:a="http://schemas.openxmlformats.org/drawingml/2006/main">
               <a:ext uri="{FF2B5EF4-FFF2-40B4-BE49-F238E27FC236}">
-                <a16:creationId xmlns:a16="http://schemas.microsoft.com/office/drawing/2014/main" id="{4E33F3A8-E521-466B-80C7-D1F22615D421}"/>
+                <a16:creationId xmlns:a16="http://schemas.microsoft.com/office/drawing/2014/main" id="{37D71609-7AD5-4FE3-A391-C14028D22827}"/>
               </a:ext>
             </a:extLst>
           </p:cNvPr>
@@ -6767,7 +7537,7 @@
           <p:cNvPr id="8" name="">
             <a:extLst xmlns:a="http://schemas.openxmlformats.org/drawingml/2006/main">
               <a:ext uri="{FF2B5EF4-FFF2-40B4-BE49-F238E27FC236}">
-                <a16:creationId xmlns:a16="http://schemas.microsoft.com/office/drawing/2014/main" id="{7A691083-F285-47A7-9401-2BDB459BB5A8}"/>
+                <a16:creationId xmlns:a16="http://schemas.microsoft.com/office/drawing/2014/main" id="{8C95F7B3-8585-4E28-B2E4-593650BF77C1}"/>
               </a:ext>
             </a:extLst>
           </p:cNvPr>
@@ -6835,7 +7605,7 @@
           <p:cNvPr id="9" name="">
             <a:extLst xmlns:a="http://schemas.openxmlformats.org/drawingml/2006/main">
               <a:ext uri="{FF2B5EF4-FFF2-40B4-BE49-F238E27FC236}">
-                <a16:creationId xmlns:a16="http://schemas.microsoft.com/office/drawing/2014/main" id="{CE94F638-8010-4B75-AF0A-C4E77844D54A}"/>
+                <a16:creationId xmlns:a16="http://schemas.microsoft.com/office/drawing/2014/main" id="{B254A725-3F56-4688-A24F-C511C63A1E50}"/>
               </a:ext>
             </a:extLst>
           </p:cNvPr>
@@ -6903,7 +7673,7 @@
           <p:cNvPr id="10" name="">
             <a:extLst xmlns:a="http://schemas.openxmlformats.org/drawingml/2006/main">
               <a:ext uri="{FF2B5EF4-FFF2-40B4-BE49-F238E27FC236}">
-                <a16:creationId xmlns:a16="http://schemas.microsoft.com/office/drawing/2014/main" id="{B8386DA7-CBBC-4B53-8D32-2ED038227A78}"/>
+                <a16:creationId xmlns:a16="http://schemas.microsoft.com/office/drawing/2014/main" id="{DB5C1690-E5A8-4620-AE84-805FCFB7A5D2}"/>
               </a:ext>
             </a:extLst>
           </p:cNvPr>
@@ -6971,7 +7741,7 @@
           <p:cNvPr id="11" name="">
             <a:extLst xmlns:a="http://schemas.openxmlformats.org/drawingml/2006/main">
               <a:ext uri="{FF2B5EF4-FFF2-40B4-BE49-F238E27FC236}">
-                <a16:creationId xmlns:a16="http://schemas.microsoft.com/office/drawing/2014/main" id="{A03E5C36-4354-4216-B00B-B8D00242E15B}"/>
+                <a16:creationId xmlns:a16="http://schemas.microsoft.com/office/drawing/2014/main" id="{96046C3D-85DD-458C-A18F-BB71E4E34193}"/>
               </a:ext>
             </a:extLst>
           </p:cNvPr>
@@ -7039,7 +7809,7 @@
           <p:cNvPr id="12" name="">
             <a:extLst xmlns:a="http://schemas.openxmlformats.org/drawingml/2006/main">
               <a:ext uri="{FF2B5EF4-FFF2-40B4-BE49-F238E27FC236}">
-                <a16:creationId xmlns:a16="http://schemas.microsoft.com/office/drawing/2014/main" id="{88FCFE05-DF75-43FC-B011-985FFE8A2AA3}"/>
+                <a16:creationId xmlns:a16="http://schemas.microsoft.com/office/drawing/2014/main" id="{2D9799FC-BF41-4FFB-A1D7-ED211DA76490}"/>
               </a:ext>
             </a:extLst>
           </p:cNvPr>
@@ -7107,7 +7877,7 @@
           <p:cNvPr id="13" name="">
             <a:extLst xmlns:a="http://schemas.openxmlformats.org/drawingml/2006/main">
               <a:ext uri="{FF2B5EF4-FFF2-40B4-BE49-F238E27FC236}">
-                <a16:creationId xmlns:a16="http://schemas.microsoft.com/office/drawing/2014/main" id="{7867EFCA-03FB-4670-B8F7-7DE860DD3AD5}"/>
+                <a16:creationId xmlns:a16="http://schemas.microsoft.com/office/drawing/2014/main" id="{2C7D539B-9FCA-4DDE-BA47-BE692D23C6C8}"/>
               </a:ext>
             </a:extLst>
           </p:cNvPr>
@@ -7137,7 +7907,7 @@
           <p:cNvPr id="14" name="">
             <a:extLst xmlns:a="http://schemas.openxmlformats.org/drawingml/2006/main">
               <a:ext uri="{FF2B5EF4-FFF2-40B4-BE49-F238E27FC236}">
-                <a16:creationId xmlns:a16="http://schemas.microsoft.com/office/drawing/2014/main" id="{06FB2691-00E7-4405-BF8F-60B0AF8BF2FB}"/>
+                <a16:creationId xmlns:a16="http://schemas.microsoft.com/office/drawing/2014/main" id="{3984DC92-B05C-4A24-AF84-881DD5710F88}"/>
               </a:ext>
             </a:extLst>
           </p:cNvPr>
@@ -7228,7 +7998,7 @@
           <p:cNvPr id="15" name="">
             <a:extLst xmlns:a="http://schemas.openxmlformats.org/drawingml/2006/main">
               <a:ext uri="{FF2B5EF4-FFF2-40B4-BE49-F238E27FC236}">
-                <a16:creationId xmlns:a16="http://schemas.microsoft.com/office/drawing/2014/main" id="{6B396B64-3C05-45AB-8739-50D77167DE82}"/>
+                <a16:creationId xmlns:a16="http://schemas.microsoft.com/office/drawing/2014/main" id="{E72D99B6-2188-4DEA-82EF-12E4D4B6BEA3}"/>
               </a:ext>
             </a:extLst>
           </p:cNvPr>
@@ -7258,7 +8028,7 @@
           <p:cNvPr id="16" name="">
             <a:extLst xmlns:a="http://schemas.openxmlformats.org/drawingml/2006/main">
               <a:ext uri="{FF2B5EF4-FFF2-40B4-BE49-F238E27FC236}">
-                <a16:creationId xmlns:a16="http://schemas.microsoft.com/office/drawing/2014/main" id="{D6D17242-8D71-4E67-8980-C68DB23A44B4}"/>
+                <a16:creationId xmlns:a16="http://schemas.microsoft.com/office/drawing/2014/main" id="{49B2397C-3204-486B-9DFC-F3668854C6F2}"/>
               </a:ext>
             </a:extLst>
           </p:cNvPr>
@@ -7349,7 +8119,7 @@
           <p:cNvPr id="17" name="">
             <a:extLst xmlns:a="http://schemas.openxmlformats.org/drawingml/2006/main">
               <a:ext uri="{FF2B5EF4-FFF2-40B4-BE49-F238E27FC236}">
-                <a16:creationId xmlns:a16="http://schemas.microsoft.com/office/drawing/2014/main" id="{CFB2067C-75E8-4453-A6DD-E6D2460DC6F5}"/>
+                <a16:creationId xmlns:a16="http://schemas.microsoft.com/office/drawing/2014/main" id="{58CA1CD4-C102-4695-A22D-A6758D3AB02F}"/>
               </a:ext>
             </a:extLst>
           </p:cNvPr>
@@ -7380,7 +8150,7 @@
           <p:cNvPr id="18" name="">
             <a:extLst xmlns:a="http://schemas.openxmlformats.org/drawingml/2006/main">
               <a:ext uri="{FF2B5EF4-FFF2-40B4-BE49-F238E27FC236}">
-                <a16:creationId xmlns:a16="http://schemas.microsoft.com/office/drawing/2014/main" id="{4C5835BA-A674-47B8-AAD2-51A13E8B1196}"/>
+                <a16:creationId xmlns:a16="http://schemas.microsoft.com/office/drawing/2014/main" id="{833D9C3A-60A3-492B-A937-807575C54DF0}"/>
               </a:ext>
             </a:extLst>
           </p:cNvPr>
@@ -7411,7 +8181,7 @@
           <p:cNvPr id="19" name="">
             <a:extLst xmlns:a="http://schemas.openxmlformats.org/drawingml/2006/main">
               <a:ext uri="{FF2B5EF4-FFF2-40B4-BE49-F238E27FC236}">
-                <a16:creationId xmlns:a16="http://schemas.microsoft.com/office/drawing/2014/main" id="{44ACD649-2840-49AE-9D7C-751201356AD5}"/>
+                <a16:creationId xmlns:a16="http://schemas.microsoft.com/office/drawing/2014/main" id="{9585AA5E-80E5-480D-B850-A4C009536E61}"/>
               </a:ext>
             </a:extLst>
           </p:cNvPr>
@@ -7442,7 +8212,7 @@
           <p:cNvPr id="20" name="">
             <a:extLst xmlns:a="http://schemas.openxmlformats.org/drawingml/2006/main">
               <a:ext uri="{FF2B5EF4-FFF2-40B4-BE49-F238E27FC236}">
-                <a16:creationId xmlns:a16="http://schemas.microsoft.com/office/drawing/2014/main" id="{ED5ADB6C-C4FC-4BB9-8275-478ADAF0CF3C}"/>
+                <a16:creationId xmlns:a16="http://schemas.microsoft.com/office/drawing/2014/main" id="{6159D2F4-B29E-406F-AC01-83189906415D}"/>
               </a:ext>
             </a:extLst>
           </p:cNvPr>
@@ -7473,7 +8243,7 @@
           <p:cNvPr id="21" name="">
             <a:extLst xmlns:a="http://schemas.openxmlformats.org/drawingml/2006/main">
               <a:ext uri="{FF2B5EF4-FFF2-40B4-BE49-F238E27FC236}">
-                <a16:creationId xmlns:a16="http://schemas.microsoft.com/office/drawing/2014/main" id="{5A09079B-39B7-4D7E-8BB0-5BB5A58278AF}"/>
+                <a16:creationId xmlns:a16="http://schemas.microsoft.com/office/drawing/2014/main" id="{AD616E4A-56F2-47EF-A55B-03C6265F28B6}"/>
               </a:ext>
             </a:extLst>
           </p:cNvPr>
@@ -7504,7 +8274,7 @@
           <p:cNvPr id="22" name="">
             <a:extLst xmlns:a="http://schemas.openxmlformats.org/drawingml/2006/main">
               <a:ext uri="{FF2B5EF4-FFF2-40B4-BE49-F238E27FC236}">
-                <a16:creationId xmlns:a16="http://schemas.microsoft.com/office/drawing/2014/main" id="{FDC9E29E-5580-4AD9-B13D-C8329A380748}"/>
+                <a16:creationId xmlns:a16="http://schemas.microsoft.com/office/drawing/2014/main" id="{5B40E092-8C19-44EF-9E8B-99224A782C5A}"/>
               </a:ext>
             </a:extLst>
           </p:cNvPr>
@@ -7535,7 +8305,7 @@
           <p:cNvPr id="23" name="">
             <a:extLst xmlns:a="http://schemas.openxmlformats.org/drawingml/2006/main">
               <a:ext uri="{FF2B5EF4-FFF2-40B4-BE49-F238E27FC236}">
-                <a16:creationId xmlns:a16="http://schemas.microsoft.com/office/drawing/2014/main" id="{37D772A2-3764-4A10-A837-9CB5929640D9}"/>
+                <a16:creationId xmlns:a16="http://schemas.microsoft.com/office/drawing/2014/main" id="{0435EDA2-F39E-48E9-9961-B81CF52BBF7B}"/>
               </a:ext>
             </a:extLst>
           </p:cNvPr>
@@ -7565,7 +8335,7 @@
           <p:cNvPr id="24" name="">
             <a:extLst xmlns:a="http://schemas.openxmlformats.org/drawingml/2006/main">
               <a:ext uri="{FF2B5EF4-FFF2-40B4-BE49-F238E27FC236}">
-                <a16:creationId xmlns:a16="http://schemas.microsoft.com/office/drawing/2014/main" id="{9A5C827A-1F51-4F27-9837-A5D8B5546624}"/>
+                <a16:creationId xmlns:a16="http://schemas.microsoft.com/office/drawing/2014/main" id="{579588B8-C4DE-41FF-96DA-C008B480DBA7}"/>
               </a:ext>
             </a:extLst>
           </p:cNvPr>
@@ -7656,7 +8426,7 @@
           <p:cNvPr id="25" name="">
             <a:extLst xmlns:a="http://schemas.openxmlformats.org/drawingml/2006/main">
               <a:ext uri="{FF2B5EF4-FFF2-40B4-BE49-F238E27FC236}">
-                <a16:creationId xmlns:a16="http://schemas.microsoft.com/office/drawing/2014/main" id="{45E52E4A-FC37-487C-9975-4D750FA03591}"/>
+                <a16:creationId xmlns:a16="http://schemas.microsoft.com/office/drawing/2014/main" id="{DD69A807-98E7-476B-BF37-4E2A0155AD3E}"/>
               </a:ext>
             </a:extLst>
           </p:cNvPr>
@@ -7686,7 +8456,7 @@
           <p:cNvPr id="26" name="">
             <a:extLst xmlns:a="http://schemas.openxmlformats.org/drawingml/2006/main">
               <a:ext uri="{FF2B5EF4-FFF2-40B4-BE49-F238E27FC236}">
-                <a16:creationId xmlns:a16="http://schemas.microsoft.com/office/drawing/2014/main" id="{49FED102-6DCB-4BD7-941E-4378843267AD}"/>
+                <a16:creationId xmlns:a16="http://schemas.microsoft.com/office/drawing/2014/main" id="{A749C597-8090-4835-A71C-D5EAEDB8FD85}"/>
               </a:ext>
             </a:extLst>
           </p:cNvPr>
@@ -7777,7 +8547,7 @@
           <p:cNvPr id="27" name="">
             <a:extLst xmlns:a="http://schemas.openxmlformats.org/drawingml/2006/main">
               <a:ext uri="{FF2B5EF4-FFF2-40B4-BE49-F238E27FC236}">
-                <a16:creationId xmlns:a16="http://schemas.microsoft.com/office/drawing/2014/main" id="{5576E94E-6AEB-493F-BF0C-669DA51FFA09}"/>
+                <a16:creationId xmlns:a16="http://schemas.microsoft.com/office/drawing/2014/main" id="{5E3A2932-5C44-46EF-B72B-D916D4C4B847}"/>
               </a:ext>
             </a:extLst>
           </p:cNvPr>
@@ -7808,7 +8578,7 @@
           <p:cNvPr id="28" name="">
             <a:extLst xmlns:a="http://schemas.openxmlformats.org/drawingml/2006/main">
               <a:ext uri="{FF2B5EF4-FFF2-40B4-BE49-F238E27FC236}">
-                <a16:creationId xmlns:a16="http://schemas.microsoft.com/office/drawing/2014/main" id="{7BF020E1-22D2-4D31-936C-A9F335E7B748}"/>
+                <a16:creationId xmlns:a16="http://schemas.microsoft.com/office/drawing/2014/main" id="{7A1C1D9C-5D90-4431-BBDD-DC45A91F6151}"/>
               </a:ext>
             </a:extLst>
           </p:cNvPr>
@@ -7839,7 +8609,7 @@
           <p:cNvPr id="29" name="">
             <a:extLst xmlns:a="http://schemas.openxmlformats.org/drawingml/2006/main">
               <a:ext uri="{FF2B5EF4-FFF2-40B4-BE49-F238E27FC236}">
-                <a16:creationId xmlns:a16="http://schemas.microsoft.com/office/drawing/2014/main" id="{86616E8B-E912-47BA-8B7A-A80AFB216EE9}"/>
+                <a16:creationId xmlns:a16="http://schemas.microsoft.com/office/drawing/2014/main" id="{30D3E889-C5C1-4427-B968-EF45DB61F7BC}"/>
               </a:ext>
             </a:extLst>
           </p:cNvPr>
@@ -7870,7 +8640,7 @@
           <p:cNvPr id="30" name="">
             <a:extLst xmlns:a="http://schemas.openxmlformats.org/drawingml/2006/main">
               <a:ext uri="{FF2B5EF4-FFF2-40B4-BE49-F238E27FC236}">
-                <a16:creationId xmlns:a16="http://schemas.microsoft.com/office/drawing/2014/main" id="{1452920A-CAF1-4773-AEF6-C249B195307B}"/>
+                <a16:creationId xmlns:a16="http://schemas.microsoft.com/office/drawing/2014/main" id="{E32FB86F-3FAE-448D-AB41-E89440B71B01}"/>
               </a:ext>
             </a:extLst>
           </p:cNvPr>
@@ -7901,7 +8671,7 @@
           <p:cNvPr id="31" name="">
             <a:extLst xmlns:a="http://schemas.openxmlformats.org/drawingml/2006/main">
               <a:ext uri="{FF2B5EF4-FFF2-40B4-BE49-F238E27FC236}">
-                <a16:creationId xmlns:a16="http://schemas.microsoft.com/office/drawing/2014/main" id="{F9BEDC76-B6FF-436C-BC3C-109B5C551261}"/>
+                <a16:creationId xmlns:a16="http://schemas.microsoft.com/office/drawing/2014/main" id="{1242D2C2-1440-412D-A1B1-597942D00324}"/>
               </a:ext>
             </a:extLst>
           </p:cNvPr>
@@ -7932,7 +8702,7 @@
           <p:cNvPr id="32" name="">
             <a:extLst xmlns:a="http://schemas.openxmlformats.org/drawingml/2006/main">
               <a:ext uri="{FF2B5EF4-FFF2-40B4-BE49-F238E27FC236}">
-                <a16:creationId xmlns:a16="http://schemas.microsoft.com/office/drawing/2014/main" id="{096C0853-B6F8-47DE-B99A-878C833B0B5E}"/>
+                <a16:creationId xmlns:a16="http://schemas.microsoft.com/office/drawing/2014/main" id="{BF1FE3B3-7A9A-4FD0-B652-2161F339EB62}"/>
               </a:ext>
             </a:extLst>
           </p:cNvPr>
@@ -7963,7 +8733,7 @@
           <p:cNvPr id="33" name="">
             <a:extLst xmlns:a="http://schemas.openxmlformats.org/drawingml/2006/main">
               <a:ext uri="{FF2B5EF4-FFF2-40B4-BE49-F238E27FC236}">
-                <a16:creationId xmlns:a16="http://schemas.microsoft.com/office/drawing/2014/main" id="{D0C66BEE-84FB-4E1F-9634-0F7002228C5A}"/>
+                <a16:creationId xmlns:a16="http://schemas.microsoft.com/office/drawing/2014/main" id="{C20A4727-DC4B-4301-99BC-3C4C46970449}"/>
               </a:ext>
             </a:extLst>
           </p:cNvPr>
@@ -7993,7 +8763,7 @@
           <p:cNvPr id="34" name="">
             <a:extLst xmlns:a="http://schemas.openxmlformats.org/drawingml/2006/main">
               <a:ext uri="{FF2B5EF4-FFF2-40B4-BE49-F238E27FC236}">
-                <a16:creationId xmlns:a16="http://schemas.microsoft.com/office/drawing/2014/main" id="{CA108602-F4D0-42C7-B5AE-285218329B9D}"/>
+                <a16:creationId xmlns:a16="http://schemas.microsoft.com/office/drawing/2014/main" id="{BA47F7C1-4975-4918-A590-92962737F7A6}"/>
               </a:ext>
             </a:extLst>
           </p:cNvPr>
@@ -8084,7 +8854,7 @@
           <p:cNvPr id="35" name="">
             <a:extLst xmlns:a="http://schemas.openxmlformats.org/drawingml/2006/main">
               <a:ext uri="{FF2B5EF4-FFF2-40B4-BE49-F238E27FC236}">
-                <a16:creationId xmlns:a16="http://schemas.microsoft.com/office/drawing/2014/main" id="{E78F6676-1372-404D-8624-00AE533DA401}"/>
+                <a16:creationId xmlns:a16="http://schemas.microsoft.com/office/drawing/2014/main" id="{2B4E8EC2-4122-4993-B3B7-23E12B20DB01}"/>
               </a:ext>
             </a:extLst>
           </p:cNvPr>
@@ -8114,7 +8884,7 @@
           <p:cNvPr id="36" name="">
             <a:extLst xmlns:a="http://schemas.openxmlformats.org/drawingml/2006/main">
               <a:ext uri="{FF2B5EF4-FFF2-40B4-BE49-F238E27FC236}">
-                <a16:creationId xmlns:a16="http://schemas.microsoft.com/office/drawing/2014/main" id="{FF5BFB71-23A5-4313-B4D6-B77431B9AAD8}"/>
+                <a16:creationId xmlns:a16="http://schemas.microsoft.com/office/drawing/2014/main" id="{04775F5D-E420-44A4-8CF1-70F3B2744B6E}"/>
               </a:ext>
             </a:extLst>
           </p:cNvPr>
@@ -8205,7 +8975,7 @@
           <p:cNvPr id="37" name="">
             <a:extLst xmlns:a="http://schemas.openxmlformats.org/drawingml/2006/main">
               <a:ext uri="{FF2B5EF4-FFF2-40B4-BE49-F238E27FC236}">
-                <a16:creationId xmlns:a16="http://schemas.microsoft.com/office/drawing/2014/main" id="{F0321C0F-B5B8-4B65-813F-83E5057D4FF4}"/>
+                <a16:creationId xmlns:a16="http://schemas.microsoft.com/office/drawing/2014/main" id="{2EEC1202-9599-4B50-8752-935E88D457EC}"/>
               </a:ext>
             </a:extLst>
           </p:cNvPr>
@@ -8273,7 +9043,7 @@
           <p:cNvPr id="38" name="">
             <a:extLst xmlns:a="http://schemas.openxmlformats.org/drawingml/2006/main">
               <a:ext uri="{FF2B5EF4-FFF2-40B4-BE49-F238E27FC236}">
-                <a16:creationId xmlns:a16="http://schemas.microsoft.com/office/drawing/2014/main" id="{1B43F5A8-1676-4A00-B24A-C4E31F790821}"/>
+                <a16:creationId xmlns:a16="http://schemas.microsoft.com/office/drawing/2014/main" id="{1409FF78-AE10-4371-B1DD-993092A87453}"/>
               </a:ext>
             </a:extLst>
           </p:cNvPr>
@@ -8339,7 +9109,7 @@
     </p:spTree>
     <p:extLst>
       <p:ext uri="{BB962C8B-B14F-4D97-AF65-F5344CB8AC3E}">
-        <p14:creationId xmlns:p14="http://schemas.microsoft.com/office/powerpoint/2010/main" val="1882413571"/>
+        <p14:creationId xmlns:p14="http://schemas.microsoft.com/office/powerpoint/2010/main" val="2042788621"/>
       </p:ext>
     </p:extLst>
   </p:cSld>
@@ -8370,7 +9140,7 @@
           <p:cNvPr id="44" name="">
             <a:extLst xmlns:a="http://schemas.openxmlformats.org/drawingml/2006/main">
               <a:ext uri="{FF2B5EF4-FFF2-40B4-BE49-F238E27FC236}">
-                <a16:creationId xmlns:a16="http://schemas.microsoft.com/office/drawing/2014/main" id="{88434D17-67F6-4625-A4CF-9AA80448D239}"/>
+                <a16:creationId xmlns:a16="http://schemas.microsoft.com/office/drawing/2014/main" id="{10E93FC0-83A9-4C12-8C74-D832702E96A3}"/>
               </a:ext>
             </a:extLst>
           </p:cNvPr>
@@ -8438,7 +9208,7 @@
           <p:cNvPr id="2" name="">
             <a:extLst xmlns:a="http://schemas.openxmlformats.org/drawingml/2006/main">
               <a:ext uri="{FF2B5EF4-FFF2-40B4-BE49-F238E27FC236}">
-                <a16:creationId xmlns:a16="http://schemas.microsoft.com/office/drawing/2014/main" id="{7564E0DC-6049-46BB-9DA8-75A2DBF4904E}"/>
+                <a16:creationId xmlns:a16="http://schemas.microsoft.com/office/drawing/2014/main" id="{1FD56A45-C3E0-4FDB-B721-11F297218B4B}"/>
               </a:ext>
             </a:extLst>
           </p:cNvPr>
@@ -8506,7 +9276,7 @@
           <p:cNvPr id="3" name="">
             <a:extLst xmlns:a="http://schemas.openxmlformats.org/drawingml/2006/main">
               <a:ext uri="{FF2B5EF4-FFF2-40B4-BE49-F238E27FC236}">
-                <a16:creationId xmlns:a16="http://schemas.microsoft.com/office/drawing/2014/main" id="{553F024B-B0D3-43A0-9018-D25FAA93E661}"/>
+                <a16:creationId xmlns:a16="http://schemas.microsoft.com/office/drawing/2014/main" id="{8C386267-59FF-4709-9B25-1022606149A6}"/>
               </a:ext>
             </a:extLst>
           </p:cNvPr>
@@ -8537,7 +9307,7 @@
           <p:cNvPr id="4" name="">
             <a:extLst xmlns:a="http://schemas.openxmlformats.org/drawingml/2006/main">
               <a:ext uri="{FF2B5EF4-FFF2-40B4-BE49-F238E27FC236}">
-                <a16:creationId xmlns:a16="http://schemas.microsoft.com/office/drawing/2014/main" id="{5398787D-EA52-4817-87D4-2A7EB6C77F2A}"/>
+                <a16:creationId xmlns:a16="http://schemas.microsoft.com/office/drawing/2014/main" id="{906B82DD-B1DB-48DC-87C4-25CC8DA5A311}"/>
               </a:ext>
             </a:extLst>
           </p:cNvPr>
@@ -8605,7 +9375,7 @@
           <p:cNvPr id="5" name="">
             <a:extLst xmlns:a="http://schemas.openxmlformats.org/drawingml/2006/main">
               <a:ext uri="{FF2B5EF4-FFF2-40B4-BE49-F238E27FC236}">
-                <a16:creationId xmlns:a16="http://schemas.microsoft.com/office/drawing/2014/main" id="{DE6C4D96-6FA6-4BF7-BDC3-18ACDF509E10}"/>
+                <a16:creationId xmlns:a16="http://schemas.microsoft.com/office/drawing/2014/main" id="{571559DC-FF3A-44C4-82E4-86D46DE3F02E}"/>
               </a:ext>
             </a:extLst>
           </p:cNvPr>
@@ -8673,7 +9443,7 @@
           <p:cNvPr id="6" name="">
             <a:extLst xmlns:a="http://schemas.openxmlformats.org/drawingml/2006/main">
               <a:ext uri="{FF2B5EF4-FFF2-40B4-BE49-F238E27FC236}">
-                <a16:creationId xmlns:a16="http://schemas.microsoft.com/office/drawing/2014/main" id="{40A95306-8AC6-44CB-A12F-BD0CC9F1D325}"/>
+                <a16:creationId xmlns:a16="http://schemas.microsoft.com/office/drawing/2014/main" id="{287A8F7F-7631-4135-A4F2-929D59BB8172}"/>
               </a:ext>
             </a:extLst>
           </p:cNvPr>
@@ -8741,7 +9511,7 @@
           <p:cNvPr id="7" name="">
             <a:extLst xmlns:a="http://schemas.openxmlformats.org/drawingml/2006/main">
               <a:ext uri="{FF2B5EF4-FFF2-40B4-BE49-F238E27FC236}">
-                <a16:creationId xmlns:a16="http://schemas.microsoft.com/office/drawing/2014/main" id="{67731033-9F21-4F40-8A1A-3901E32CC59B}"/>
+                <a16:creationId xmlns:a16="http://schemas.microsoft.com/office/drawing/2014/main" id="{58C39BA3-B8EF-48E9-87B1-B7835B6655D6}"/>
               </a:ext>
             </a:extLst>
           </p:cNvPr>
@@ -8771,7 +9541,7 @@
           <p:cNvPr id="8" name="">
             <a:extLst xmlns:a="http://schemas.openxmlformats.org/drawingml/2006/main">
               <a:ext uri="{FF2B5EF4-FFF2-40B4-BE49-F238E27FC236}">
-                <a16:creationId xmlns:a16="http://schemas.microsoft.com/office/drawing/2014/main" id="{029F7920-071C-443B-8539-6EEB9AEDD72D}"/>
+                <a16:creationId xmlns:a16="http://schemas.microsoft.com/office/drawing/2014/main" id="{447DD002-4481-4F4E-99E0-AEACD0A52BB6}"/>
               </a:ext>
             </a:extLst>
           </p:cNvPr>
@@ -8839,7 +9609,7 @@
           <p:cNvPr id="9" name="">
             <a:extLst xmlns:a="http://schemas.openxmlformats.org/drawingml/2006/main">
               <a:ext uri="{FF2B5EF4-FFF2-40B4-BE49-F238E27FC236}">
-                <a16:creationId xmlns:a16="http://schemas.microsoft.com/office/drawing/2014/main" id="{1DA367A3-715C-46F5-A8EF-B5C5AC761A18}"/>
+                <a16:creationId xmlns:a16="http://schemas.microsoft.com/office/drawing/2014/main" id="{F72B6E2D-7ABA-4EDE-A78A-755D377C63A3}"/>
               </a:ext>
             </a:extLst>
           </p:cNvPr>
@@ -8870,7 +9640,7 @@
           <p:cNvPr id="10" name="">
             <a:extLst xmlns:a="http://schemas.openxmlformats.org/drawingml/2006/main">
               <a:ext uri="{FF2B5EF4-FFF2-40B4-BE49-F238E27FC236}">
-                <a16:creationId xmlns:a16="http://schemas.microsoft.com/office/drawing/2014/main" id="{EE562B39-8439-4D29-99D9-68E8BC338284}"/>
+                <a16:creationId xmlns:a16="http://schemas.microsoft.com/office/drawing/2014/main" id="{7D6D0F91-6D2B-4949-844B-6796A387F721}"/>
               </a:ext>
             </a:extLst>
           </p:cNvPr>
@@ -8901,7 +9671,7 @@
           <p:cNvPr id="11" name="">
             <a:extLst xmlns:a="http://schemas.openxmlformats.org/drawingml/2006/main">
               <a:ext uri="{FF2B5EF4-FFF2-40B4-BE49-F238E27FC236}">
-                <a16:creationId xmlns:a16="http://schemas.microsoft.com/office/drawing/2014/main" id="{3E2C870D-C739-451F-B33B-1E15A6A240AD}"/>
+                <a16:creationId xmlns:a16="http://schemas.microsoft.com/office/drawing/2014/main" id="{32E0756B-1AB2-4C12-870D-B6E3B89303F3}"/>
               </a:ext>
             </a:extLst>
           </p:cNvPr>
@@ -8932,7 +9702,7 @@
           <p:cNvPr id="12" name="">
             <a:extLst xmlns:a="http://schemas.openxmlformats.org/drawingml/2006/main">
               <a:ext uri="{FF2B5EF4-FFF2-40B4-BE49-F238E27FC236}">
-                <a16:creationId xmlns:a16="http://schemas.microsoft.com/office/drawing/2014/main" id="{30B81552-FAD4-46C9-8837-D2A0895D21DA}"/>
+                <a16:creationId xmlns:a16="http://schemas.microsoft.com/office/drawing/2014/main" id="{D8691B0A-1380-4AA6-BE8F-65F314E7BE56}"/>
               </a:ext>
             </a:extLst>
           </p:cNvPr>
@@ -8962,7 +9732,7 @@
           <p:cNvPr id="13" name="">
             <a:extLst xmlns:a="http://schemas.openxmlformats.org/drawingml/2006/main">
               <a:ext uri="{FF2B5EF4-FFF2-40B4-BE49-F238E27FC236}">
-                <a16:creationId xmlns:a16="http://schemas.microsoft.com/office/drawing/2014/main" id="{884292A2-A49B-409E-A513-2D1F174F66A5}"/>
+                <a16:creationId xmlns:a16="http://schemas.microsoft.com/office/drawing/2014/main" id="{6A127B2F-DE48-42A6-9319-C8F5846CCA0B}"/>
               </a:ext>
             </a:extLst>
           </p:cNvPr>
@@ -9030,7 +9800,7 @@
           <p:cNvPr id="14" name="">
             <a:extLst xmlns:a="http://schemas.openxmlformats.org/drawingml/2006/main">
               <a:ext uri="{FF2B5EF4-FFF2-40B4-BE49-F238E27FC236}">
-                <a16:creationId xmlns:a16="http://schemas.microsoft.com/office/drawing/2014/main" id="{A63129CB-9E36-408F-B48E-9C52556AE880}"/>
+                <a16:creationId xmlns:a16="http://schemas.microsoft.com/office/drawing/2014/main" id="{CE856141-F188-4CE5-B2DD-BFB0FD7E60BD}"/>
               </a:ext>
             </a:extLst>
           </p:cNvPr>
@@ -9061,7 +9831,7 @@
           <p:cNvPr id="15" name="">
             <a:extLst xmlns:a="http://schemas.openxmlformats.org/drawingml/2006/main">
               <a:ext uri="{FF2B5EF4-FFF2-40B4-BE49-F238E27FC236}">
-                <a16:creationId xmlns:a16="http://schemas.microsoft.com/office/drawing/2014/main" id="{AD570B88-358F-4C9D-864D-47E744A06F1F}"/>
+                <a16:creationId xmlns:a16="http://schemas.microsoft.com/office/drawing/2014/main" id="{9AD81AE4-9D81-4038-927D-EB69656EAB1A}"/>
               </a:ext>
             </a:extLst>
           </p:cNvPr>
@@ -9092,7 +9862,7 @@
           <p:cNvPr id="16" name="">
             <a:extLst xmlns:a="http://schemas.openxmlformats.org/drawingml/2006/main">
               <a:ext uri="{FF2B5EF4-FFF2-40B4-BE49-F238E27FC236}">
-                <a16:creationId xmlns:a16="http://schemas.microsoft.com/office/drawing/2014/main" id="{A2878DBF-1ADD-4F2D-ABD3-9EEFA7120435}"/>
+                <a16:creationId xmlns:a16="http://schemas.microsoft.com/office/drawing/2014/main" id="{DDF85CCA-C680-487F-9966-4275C0F8D114}"/>
               </a:ext>
             </a:extLst>
           </p:cNvPr>
@@ -9123,7 +9893,7 @@
           <p:cNvPr id="17" name="">
             <a:extLst xmlns:a="http://schemas.openxmlformats.org/drawingml/2006/main">
               <a:ext uri="{FF2B5EF4-FFF2-40B4-BE49-F238E27FC236}">
-                <a16:creationId xmlns:a16="http://schemas.microsoft.com/office/drawing/2014/main" id="{82A0C3D5-0B44-44FC-A194-B19E8269BF0A}"/>
+                <a16:creationId xmlns:a16="http://schemas.microsoft.com/office/drawing/2014/main" id="{DDB36D2C-61A3-4753-A437-6B6C8D951269}"/>
               </a:ext>
             </a:extLst>
           </p:cNvPr>
@@ -9153,7 +9923,7 @@
           <p:cNvPr id="18" name="">
             <a:extLst xmlns:a="http://schemas.openxmlformats.org/drawingml/2006/main">
               <a:ext uri="{FF2B5EF4-FFF2-40B4-BE49-F238E27FC236}">
-                <a16:creationId xmlns:a16="http://schemas.microsoft.com/office/drawing/2014/main" id="{55F6812F-8DE3-49B8-B30A-8186A37BEF06}"/>
+                <a16:creationId xmlns:a16="http://schemas.microsoft.com/office/drawing/2014/main" id="{AEACE325-DEBC-4D2F-84A0-93739083B763}"/>
               </a:ext>
             </a:extLst>
           </p:cNvPr>
@@ -9221,7 +9991,7 @@
           <p:cNvPr id="19" name="">
             <a:extLst xmlns:a="http://schemas.openxmlformats.org/drawingml/2006/main">
               <a:ext uri="{FF2B5EF4-FFF2-40B4-BE49-F238E27FC236}">
-                <a16:creationId xmlns:a16="http://schemas.microsoft.com/office/drawing/2014/main" id="{6914C422-1FD7-4C78-A4F5-1EB2F385936C}"/>
+                <a16:creationId xmlns:a16="http://schemas.microsoft.com/office/drawing/2014/main" id="{070F8C36-EC1C-47B9-B2AC-012BFDA91979}"/>
               </a:ext>
             </a:extLst>
           </p:cNvPr>
@@ -9252,7 +10022,7 @@
           <p:cNvPr id="20" name="">
             <a:extLst xmlns:a="http://schemas.openxmlformats.org/drawingml/2006/main">
               <a:ext uri="{FF2B5EF4-FFF2-40B4-BE49-F238E27FC236}">
-                <a16:creationId xmlns:a16="http://schemas.microsoft.com/office/drawing/2014/main" id="{8B8410FB-F68E-4972-9AB7-3D12613199F4}"/>
+                <a16:creationId xmlns:a16="http://schemas.microsoft.com/office/drawing/2014/main" id="{EB524AF4-D77D-4BF4-9184-30C9C2D672C5}"/>
               </a:ext>
             </a:extLst>
           </p:cNvPr>
@@ -9283,7 +10053,7 @@
           <p:cNvPr id="21" name="">
             <a:extLst xmlns:a="http://schemas.openxmlformats.org/drawingml/2006/main">
               <a:ext uri="{FF2B5EF4-FFF2-40B4-BE49-F238E27FC236}">
-                <a16:creationId xmlns:a16="http://schemas.microsoft.com/office/drawing/2014/main" id="{00454A23-EA17-43A3-A767-D772B86458B9}"/>
+                <a16:creationId xmlns:a16="http://schemas.microsoft.com/office/drawing/2014/main" id="{39465E44-FC19-43CC-A98D-E4B41E897C85}"/>
               </a:ext>
             </a:extLst>
           </p:cNvPr>
@@ -9314,7 +10084,7 @@
           <p:cNvPr id="22" name="">
             <a:extLst xmlns:a="http://schemas.openxmlformats.org/drawingml/2006/main">
               <a:ext uri="{FF2B5EF4-FFF2-40B4-BE49-F238E27FC236}">
-                <a16:creationId xmlns:a16="http://schemas.microsoft.com/office/drawing/2014/main" id="{DBF87D83-F865-49B6-A801-48C626310958}"/>
+                <a16:creationId xmlns:a16="http://schemas.microsoft.com/office/drawing/2014/main" id="{C54F0E58-ACF8-454A-8CCC-3D095148319C}"/>
               </a:ext>
             </a:extLst>
           </p:cNvPr>
@@ -9344,7 +10114,7 @@
           <p:cNvPr id="23" name="">
             <a:extLst xmlns:a="http://schemas.openxmlformats.org/drawingml/2006/main">
               <a:ext uri="{FF2B5EF4-FFF2-40B4-BE49-F238E27FC236}">
-                <a16:creationId xmlns:a16="http://schemas.microsoft.com/office/drawing/2014/main" id="{B71DB5AF-14CF-438A-B26C-D6C91E5FD87E}"/>
+                <a16:creationId xmlns:a16="http://schemas.microsoft.com/office/drawing/2014/main" id="{319E9D83-319B-41EF-A973-C7C81EEF3505}"/>
               </a:ext>
             </a:extLst>
           </p:cNvPr>
@@ -9412,7 +10182,7 @@
           <p:cNvPr id="24" name="">
             <a:extLst xmlns:a="http://schemas.openxmlformats.org/drawingml/2006/main">
               <a:ext uri="{FF2B5EF4-FFF2-40B4-BE49-F238E27FC236}">
-                <a16:creationId xmlns:a16="http://schemas.microsoft.com/office/drawing/2014/main" id="{14D441CA-0196-48B0-8BF6-52107029B223}"/>
+                <a16:creationId xmlns:a16="http://schemas.microsoft.com/office/drawing/2014/main" id="{E0FB3C2A-0F3C-49C9-ADD7-B6F96BD33D39}"/>
               </a:ext>
             </a:extLst>
           </p:cNvPr>
@@ -9480,7 +10250,7 @@
           <p:cNvPr id="25" name="">
             <a:extLst xmlns:a="http://schemas.openxmlformats.org/drawingml/2006/main">
               <a:ext uri="{FF2B5EF4-FFF2-40B4-BE49-F238E27FC236}">
-                <a16:creationId xmlns:a16="http://schemas.microsoft.com/office/drawing/2014/main" id="{A0F8824C-2695-491E-AF71-6E1AB2890317}"/>
+                <a16:creationId xmlns:a16="http://schemas.microsoft.com/office/drawing/2014/main" id="{25D0E78B-811A-42DB-8D0A-21069681EAE6}"/>
               </a:ext>
             </a:extLst>
           </p:cNvPr>
@@ -9511,7 +10281,7 @@
           <p:cNvPr id="26" name="">
             <a:extLst xmlns:a="http://schemas.openxmlformats.org/drawingml/2006/main">
               <a:ext uri="{FF2B5EF4-FFF2-40B4-BE49-F238E27FC236}">
-                <a16:creationId xmlns:a16="http://schemas.microsoft.com/office/drawing/2014/main" id="{D18CC6B5-A1A5-4984-BDE7-02AE8C9676BE}"/>
+                <a16:creationId xmlns:a16="http://schemas.microsoft.com/office/drawing/2014/main" id="{2B9ECCAE-BAD0-4F10-886F-2172C3BAE5DB}"/>
               </a:ext>
             </a:extLst>
           </p:cNvPr>
@@ -9542,7 +10312,7 @@
           <p:cNvPr id="27" name="">
             <a:extLst xmlns:a="http://schemas.openxmlformats.org/drawingml/2006/main">
               <a:ext uri="{FF2B5EF4-FFF2-40B4-BE49-F238E27FC236}">
-                <a16:creationId xmlns:a16="http://schemas.microsoft.com/office/drawing/2014/main" id="{ECC9392E-9BCE-405F-8C89-8A5BD713B115}"/>
+                <a16:creationId xmlns:a16="http://schemas.microsoft.com/office/drawing/2014/main" id="{35719766-93A0-46E6-A33B-2988490FC840}"/>
               </a:ext>
             </a:extLst>
           </p:cNvPr>
@@ -9573,7 +10343,7 @@
           <p:cNvPr id="28" name="">
             <a:extLst xmlns:a="http://schemas.openxmlformats.org/drawingml/2006/main">
               <a:ext uri="{FF2B5EF4-FFF2-40B4-BE49-F238E27FC236}">
-                <a16:creationId xmlns:a16="http://schemas.microsoft.com/office/drawing/2014/main" id="{8B37C1B4-8977-40EC-BF16-4B18EA17B1AB}"/>
+                <a16:creationId xmlns:a16="http://schemas.microsoft.com/office/drawing/2014/main" id="{AF74F2D6-DE89-426B-B485-E712F04C9848}"/>
               </a:ext>
             </a:extLst>
           </p:cNvPr>
@@ -9641,7 +10411,7 @@
           <p:cNvPr id="29" name="">
             <a:extLst xmlns:a="http://schemas.openxmlformats.org/drawingml/2006/main">
               <a:ext uri="{FF2B5EF4-FFF2-40B4-BE49-F238E27FC236}">
-                <a16:creationId xmlns:a16="http://schemas.microsoft.com/office/drawing/2014/main" id="{9C156640-324D-4C76-9FAB-DC0388E2FE87}"/>
+                <a16:creationId xmlns:a16="http://schemas.microsoft.com/office/drawing/2014/main" id="{823BE8C5-5FF8-4C79-A6A7-5D3D6F0BB84F}"/>
               </a:ext>
             </a:extLst>
           </p:cNvPr>
@@ -9671,7 +10441,7 @@
           <p:cNvPr id="30" name="">
             <a:extLst xmlns:a="http://schemas.openxmlformats.org/drawingml/2006/main">
               <a:ext uri="{FF2B5EF4-FFF2-40B4-BE49-F238E27FC236}">
-                <a16:creationId xmlns:a16="http://schemas.microsoft.com/office/drawing/2014/main" id="{394D0771-DFAD-4F57-82BF-D3BA4BF15D17}"/>
+                <a16:creationId xmlns:a16="http://schemas.microsoft.com/office/drawing/2014/main" id="{E696721B-5EAD-4E1D-BB93-DFF611ADD407}"/>
               </a:ext>
             </a:extLst>
           </p:cNvPr>
@@ -9739,7 +10509,7 @@
           <p:cNvPr id="31" name="">
             <a:extLst xmlns:a="http://schemas.openxmlformats.org/drawingml/2006/main">
               <a:ext uri="{FF2B5EF4-FFF2-40B4-BE49-F238E27FC236}">
-                <a16:creationId xmlns:a16="http://schemas.microsoft.com/office/drawing/2014/main" id="{F6F62E72-0D9B-46F1-9953-C5AB4C0A0FEE}"/>
+                <a16:creationId xmlns:a16="http://schemas.microsoft.com/office/drawing/2014/main" id="{ECBCE200-815D-40F1-B70B-B86F0B25FB8D}"/>
               </a:ext>
             </a:extLst>
           </p:cNvPr>
@@ -9769,7 +10539,7 @@
           <p:cNvPr id="32" name="">
             <a:extLst xmlns:a="http://schemas.openxmlformats.org/drawingml/2006/main">
               <a:ext uri="{FF2B5EF4-FFF2-40B4-BE49-F238E27FC236}">
-                <a16:creationId xmlns:a16="http://schemas.microsoft.com/office/drawing/2014/main" id="{12DA16B7-EE9A-415C-AE68-660022EB2EB2}"/>
+                <a16:creationId xmlns:a16="http://schemas.microsoft.com/office/drawing/2014/main" id="{3DF41CAC-FFA4-4420-97B3-B2257695D857}"/>
               </a:ext>
             </a:extLst>
           </p:cNvPr>
@@ -9837,7 +10607,7 @@
           <p:cNvPr id="33" name="">
             <a:extLst xmlns:a="http://schemas.openxmlformats.org/drawingml/2006/main">
               <a:ext uri="{FF2B5EF4-FFF2-40B4-BE49-F238E27FC236}">
-                <a16:creationId xmlns:a16="http://schemas.microsoft.com/office/drawing/2014/main" id="{66C9C575-1588-45F4-AC90-CBB3E114D2C7}"/>
+                <a16:creationId xmlns:a16="http://schemas.microsoft.com/office/drawing/2014/main" id="{A5E6C76F-A4B7-4D35-B35F-978F9CB59636}"/>
               </a:ext>
             </a:extLst>
           </p:cNvPr>
@@ -9867,7 +10637,7 @@
           <p:cNvPr id="34" name="">
             <a:extLst xmlns:a="http://schemas.openxmlformats.org/drawingml/2006/main">
               <a:ext uri="{FF2B5EF4-FFF2-40B4-BE49-F238E27FC236}">
-                <a16:creationId xmlns:a16="http://schemas.microsoft.com/office/drawing/2014/main" id="{52CD8448-9CF4-4596-BCD5-5B78B8257556}"/>
+                <a16:creationId xmlns:a16="http://schemas.microsoft.com/office/drawing/2014/main" id="{0A712AFB-EF51-4E62-9BDA-7CB372E5BDA6}"/>
               </a:ext>
             </a:extLst>
           </p:cNvPr>
@@ -9935,7 +10705,7 @@
           <p:cNvPr id="35" name="">
             <a:extLst xmlns:a="http://schemas.openxmlformats.org/drawingml/2006/main">
               <a:ext uri="{FF2B5EF4-FFF2-40B4-BE49-F238E27FC236}">
-                <a16:creationId xmlns:a16="http://schemas.microsoft.com/office/drawing/2014/main" id="{14A27A29-2FEB-4B32-8DA1-2EB9027CF5C2}"/>
+                <a16:creationId xmlns:a16="http://schemas.microsoft.com/office/drawing/2014/main" id="{F23A4B7E-ED3E-4B57-9E43-E47ABDE6DAAB}"/>
               </a:ext>
             </a:extLst>
           </p:cNvPr>
@@ -9965,7 +10735,7 @@
           <p:cNvPr id="36" name="">
             <a:extLst xmlns:a="http://schemas.openxmlformats.org/drawingml/2006/main">
               <a:ext uri="{FF2B5EF4-FFF2-40B4-BE49-F238E27FC236}">
-                <a16:creationId xmlns:a16="http://schemas.microsoft.com/office/drawing/2014/main" id="{E616C789-05BD-4975-8D07-7C9EA2D34AC5}"/>
+                <a16:creationId xmlns:a16="http://schemas.microsoft.com/office/drawing/2014/main" id="{D1CC2479-0AB4-4D0D-9489-090F26931A7F}"/>
               </a:ext>
             </a:extLst>
           </p:cNvPr>
@@ -10033,7 +10803,7 @@
           <p:cNvPr id="37" name="">
             <a:extLst xmlns:a="http://schemas.openxmlformats.org/drawingml/2006/main">
               <a:ext uri="{FF2B5EF4-FFF2-40B4-BE49-F238E27FC236}">
-                <a16:creationId xmlns:a16="http://schemas.microsoft.com/office/drawing/2014/main" id="{6085ECE6-162E-4C6B-849C-F6B39F56F862}"/>
+                <a16:creationId xmlns:a16="http://schemas.microsoft.com/office/drawing/2014/main" id="{259159E1-18EE-4FA5-BD63-A89D9EDEB6B7}"/>
               </a:ext>
             </a:extLst>
           </p:cNvPr>
@@ -10064,7 +10834,7 @@
           <p:cNvPr id="38" name="">
             <a:extLst xmlns:a="http://schemas.openxmlformats.org/drawingml/2006/main">
               <a:ext uri="{FF2B5EF4-FFF2-40B4-BE49-F238E27FC236}">
-                <a16:creationId xmlns:a16="http://schemas.microsoft.com/office/drawing/2014/main" id="{7E592FDE-ED11-4ADB-9E06-22B99CBB485B}"/>
+                <a16:creationId xmlns:a16="http://schemas.microsoft.com/office/drawing/2014/main" id="{FB8ABDD7-B1CB-4E19-BCCB-14B6D4358CCE}"/>
               </a:ext>
             </a:extLst>
           </p:cNvPr>
@@ -10095,7 +10865,7 @@
           <p:cNvPr id="39" name="">
             <a:extLst xmlns:a="http://schemas.openxmlformats.org/drawingml/2006/main">
               <a:ext uri="{FF2B5EF4-FFF2-40B4-BE49-F238E27FC236}">
-                <a16:creationId xmlns:a16="http://schemas.microsoft.com/office/drawing/2014/main" id="{46BC0C27-4E8A-4CAB-AF9D-1D3767353DE3}"/>
+                <a16:creationId xmlns:a16="http://schemas.microsoft.com/office/drawing/2014/main" id="{A089F42D-7140-4EF3-8A8A-7E6828C4773E}"/>
               </a:ext>
             </a:extLst>
           </p:cNvPr>
@@ -10126,7 +10896,7 @@
           <p:cNvPr id="40" name="">
             <a:extLst xmlns:a="http://schemas.openxmlformats.org/drawingml/2006/main">
               <a:ext uri="{FF2B5EF4-FFF2-40B4-BE49-F238E27FC236}">
-                <a16:creationId xmlns:a16="http://schemas.microsoft.com/office/drawing/2014/main" id="{EC3F2924-4201-4214-A061-3AD61CC8FA90}"/>
+                <a16:creationId xmlns:a16="http://schemas.microsoft.com/office/drawing/2014/main" id="{DDE72086-C1F0-44C4-953D-35FB50699036}"/>
               </a:ext>
             </a:extLst>
           </p:cNvPr>
@@ -10157,7 +10927,7 @@
           <p:cNvPr id="41" name="">
             <a:extLst xmlns:a="http://schemas.openxmlformats.org/drawingml/2006/main">
               <a:ext uri="{FF2B5EF4-FFF2-40B4-BE49-F238E27FC236}">
-                <a16:creationId xmlns:a16="http://schemas.microsoft.com/office/drawing/2014/main" id="{A2F6E8C7-6C42-4129-8ECF-DE8F7945C2C2}"/>
+                <a16:creationId xmlns:a16="http://schemas.microsoft.com/office/drawing/2014/main" id="{10A83ABA-6FCD-4C94-9D06-E73185905059}"/>
               </a:ext>
             </a:extLst>
           </p:cNvPr>
@@ -10188,7 +10958,7 @@
           <p:cNvPr id="42" name="">
             <a:extLst xmlns:a="http://schemas.openxmlformats.org/drawingml/2006/main">
               <a:ext uri="{FF2B5EF4-FFF2-40B4-BE49-F238E27FC236}">
-                <a16:creationId xmlns:a16="http://schemas.microsoft.com/office/drawing/2014/main" id="{80090505-41D6-4FB9-9530-D5F4D726BEC6}"/>
+                <a16:creationId xmlns:a16="http://schemas.microsoft.com/office/drawing/2014/main" id="{904A1473-B4B6-4EAA-8882-D9ED08366C4F}"/>
               </a:ext>
             </a:extLst>
           </p:cNvPr>
@@ -10219,7 +10989,7 @@
           <p:cNvPr id="43" name="">
             <a:extLst xmlns:a="http://schemas.openxmlformats.org/drawingml/2006/main">
               <a:ext uri="{FF2B5EF4-FFF2-40B4-BE49-F238E27FC236}">
-                <a16:creationId xmlns:a16="http://schemas.microsoft.com/office/drawing/2014/main" id="{0E51042C-2367-4974-ADB6-5408969DE8C1}"/>
+                <a16:creationId xmlns:a16="http://schemas.microsoft.com/office/drawing/2014/main" id="{71C07911-BBBA-45EB-9137-9B11BC3E4B6D}"/>
               </a:ext>
             </a:extLst>
           </p:cNvPr>
@@ -10285,7 +11055,7 @@
     </p:spTree>
     <p:extLst>
       <p:ext uri="{BB962C8B-B14F-4D97-AF65-F5344CB8AC3E}">
-        <p14:creationId xmlns:p14="http://schemas.microsoft.com/office/powerpoint/2010/main" val="1520218072"/>
+        <p14:creationId xmlns:p14="http://schemas.microsoft.com/office/powerpoint/2010/main" val="970530908"/>
       </p:ext>
     </p:extLst>
   </p:cSld>
@@ -10316,7 +11086,7 @@
           <p:cNvPr id="42" name="">
             <a:extLst xmlns:a="http://schemas.openxmlformats.org/drawingml/2006/main">
               <a:ext uri="{FF2B5EF4-FFF2-40B4-BE49-F238E27FC236}">
-                <a16:creationId xmlns:a16="http://schemas.microsoft.com/office/drawing/2014/main" id="{8952018C-F976-438C-BFA3-8AAE0753554D}"/>
+                <a16:creationId xmlns:a16="http://schemas.microsoft.com/office/drawing/2014/main" id="{1716A665-79F6-4817-87A8-B8E619B8C913}"/>
               </a:ext>
             </a:extLst>
           </p:cNvPr>
@@ -10384,7 +11154,7 @@
           <p:cNvPr id="2" name="">
             <a:extLst xmlns:a="http://schemas.openxmlformats.org/drawingml/2006/main">
               <a:ext uri="{FF2B5EF4-FFF2-40B4-BE49-F238E27FC236}">
-                <a16:creationId xmlns:a16="http://schemas.microsoft.com/office/drawing/2014/main" id="{1EBFAD92-22E0-45BA-BCE3-C3E776D73FF3}"/>
+                <a16:creationId xmlns:a16="http://schemas.microsoft.com/office/drawing/2014/main" id="{68A4ADA0-1D39-45DD-BCDE-8C5ABF3410D4}"/>
               </a:ext>
             </a:extLst>
           </p:cNvPr>
@@ -10452,7 +11222,7 @@
           <p:cNvPr id="3" name="">
             <a:extLst xmlns:a="http://schemas.openxmlformats.org/drawingml/2006/main">
               <a:ext uri="{FF2B5EF4-FFF2-40B4-BE49-F238E27FC236}">
-                <a16:creationId xmlns:a16="http://schemas.microsoft.com/office/drawing/2014/main" id="{00ADDA51-A401-4261-A008-5ADFA2192A0D}"/>
+                <a16:creationId xmlns:a16="http://schemas.microsoft.com/office/drawing/2014/main" id="{2FAC8D31-0149-449A-B470-6892BBD66D7A}"/>
               </a:ext>
             </a:extLst>
           </p:cNvPr>
@@ -10483,7 +11253,7 @@
           <p:cNvPr id="4" name="">
             <a:extLst xmlns:a="http://schemas.openxmlformats.org/drawingml/2006/main">
               <a:ext uri="{FF2B5EF4-FFF2-40B4-BE49-F238E27FC236}">
-                <a16:creationId xmlns:a16="http://schemas.microsoft.com/office/drawing/2014/main" id="{34990537-5761-4DFF-A2B3-DD1CE3BC4232}"/>
+                <a16:creationId xmlns:a16="http://schemas.microsoft.com/office/drawing/2014/main" id="{E6EE51F3-BD0E-468C-8E54-11D7E08F3AD8}"/>
               </a:ext>
             </a:extLst>
           </p:cNvPr>
@@ -10551,7 +11321,7 @@
           <p:cNvPr id="5" name="">
             <a:extLst xmlns:a="http://schemas.openxmlformats.org/drawingml/2006/main">
               <a:ext uri="{FF2B5EF4-FFF2-40B4-BE49-F238E27FC236}">
-                <a16:creationId xmlns:a16="http://schemas.microsoft.com/office/drawing/2014/main" id="{9EC29F14-C09D-42F8-BAE4-DF0EB0BE629A}"/>
+                <a16:creationId xmlns:a16="http://schemas.microsoft.com/office/drawing/2014/main" id="{99DC8F24-1197-45A1-9690-4609AAF0E984}"/>
               </a:ext>
             </a:extLst>
           </p:cNvPr>
@@ -10619,7 +11389,7 @@
           <p:cNvPr id="6" name="">
             <a:extLst xmlns:a="http://schemas.openxmlformats.org/drawingml/2006/main">
               <a:ext uri="{FF2B5EF4-FFF2-40B4-BE49-F238E27FC236}">
-                <a16:creationId xmlns:a16="http://schemas.microsoft.com/office/drawing/2014/main" id="{666AABD0-3610-4B93-B54F-87D265F92448}"/>
+                <a16:creationId xmlns:a16="http://schemas.microsoft.com/office/drawing/2014/main" id="{01DC0073-5D66-4FD3-A092-5CD3F62CEC92}"/>
               </a:ext>
             </a:extLst>
           </p:cNvPr>
@@ -10649,7 +11419,7 @@
           <p:cNvPr id="7" name="">
             <a:extLst xmlns:a="http://schemas.openxmlformats.org/drawingml/2006/main">
               <a:ext uri="{FF2B5EF4-FFF2-40B4-BE49-F238E27FC236}">
-                <a16:creationId xmlns:a16="http://schemas.microsoft.com/office/drawing/2014/main" id="{F29FE6BD-915D-49C4-BB02-EEE7E44FBE3F}"/>
+                <a16:creationId xmlns:a16="http://schemas.microsoft.com/office/drawing/2014/main" id="{091515D2-E9C1-4EF5-B845-FA0C193FE050}"/>
               </a:ext>
             </a:extLst>
           </p:cNvPr>
@@ -10740,7 +11510,7 @@
           <p:cNvPr id="8" name="">
             <a:extLst xmlns:a="http://schemas.openxmlformats.org/drawingml/2006/main">
               <a:ext uri="{FF2B5EF4-FFF2-40B4-BE49-F238E27FC236}">
-                <a16:creationId xmlns:a16="http://schemas.microsoft.com/office/drawing/2014/main" id="{064BC24E-47D3-45AC-B4CB-938654A6F9DE}"/>
+                <a16:creationId xmlns:a16="http://schemas.microsoft.com/office/drawing/2014/main" id="{EEF77014-2171-4382-A3F2-914F4135A730}"/>
               </a:ext>
             </a:extLst>
           </p:cNvPr>
@@ -10770,7 +11540,7 @@
           <p:cNvPr id="9" name="">
             <a:extLst xmlns:a="http://schemas.openxmlformats.org/drawingml/2006/main">
               <a:ext uri="{FF2B5EF4-FFF2-40B4-BE49-F238E27FC236}">
-                <a16:creationId xmlns:a16="http://schemas.microsoft.com/office/drawing/2014/main" id="{C69D2CA8-D9B0-4AE1-B1A2-450776D050A5}"/>
+                <a16:creationId xmlns:a16="http://schemas.microsoft.com/office/drawing/2014/main" id="{73AF25E1-7D67-4F60-BC46-B139646E0C65}"/>
               </a:ext>
             </a:extLst>
           </p:cNvPr>
@@ -10861,7 +11631,7 @@
           <p:cNvPr id="10" name="">
             <a:extLst xmlns:a="http://schemas.openxmlformats.org/drawingml/2006/main">
               <a:ext uri="{FF2B5EF4-FFF2-40B4-BE49-F238E27FC236}">
-                <a16:creationId xmlns:a16="http://schemas.microsoft.com/office/drawing/2014/main" id="{F3A62130-EB86-476A-B900-EB107CD98121}"/>
+                <a16:creationId xmlns:a16="http://schemas.microsoft.com/office/drawing/2014/main" id="{B0DABAD3-C42B-46D7-B038-E5253FDDB184}"/>
               </a:ext>
             </a:extLst>
           </p:cNvPr>
@@ -10891,7 +11661,7 @@
           <p:cNvPr id="11" name="">
             <a:extLst xmlns:a="http://schemas.openxmlformats.org/drawingml/2006/main">
               <a:ext uri="{FF2B5EF4-FFF2-40B4-BE49-F238E27FC236}">
-                <a16:creationId xmlns:a16="http://schemas.microsoft.com/office/drawing/2014/main" id="{46EE6C1C-23E0-4EE7-8EEF-87F9E670FCED}"/>
+                <a16:creationId xmlns:a16="http://schemas.microsoft.com/office/drawing/2014/main" id="{D3237D35-8C81-4F28-976E-27EE5E9C9161}"/>
               </a:ext>
             </a:extLst>
           </p:cNvPr>
@@ -10982,7 +11752,7 @@
           <p:cNvPr id="12" name="">
             <a:extLst xmlns:a="http://schemas.openxmlformats.org/drawingml/2006/main">
               <a:ext uri="{FF2B5EF4-FFF2-40B4-BE49-F238E27FC236}">
-                <a16:creationId xmlns:a16="http://schemas.microsoft.com/office/drawing/2014/main" id="{5F997511-FD9B-453F-ADAA-CF2F3076D5BC}"/>
+                <a16:creationId xmlns:a16="http://schemas.microsoft.com/office/drawing/2014/main" id="{E989B25F-DE95-4395-922F-4AAD60F1EAD4}"/>
               </a:ext>
             </a:extLst>
           </p:cNvPr>
@@ -11012,7 +11782,7 @@
           <p:cNvPr id="13" name="">
             <a:extLst xmlns:a="http://schemas.openxmlformats.org/drawingml/2006/main">
               <a:ext uri="{FF2B5EF4-FFF2-40B4-BE49-F238E27FC236}">
-                <a16:creationId xmlns:a16="http://schemas.microsoft.com/office/drawing/2014/main" id="{28F643DB-491E-4ABE-BE5B-01B846CA8845}"/>
+                <a16:creationId xmlns:a16="http://schemas.microsoft.com/office/drawing/2014/main" id="{6E2B64A5-9EED-40D3-9CB9-FA2C1AB34202}"/>
               </a:ext>
             </a:extLst>
           </p:cNvPr>
@@ -11103,7 +11873,7 @@
           <p:cNvPr id="14" name="">
             <a:extLst xmlns:a="http://schemas.openxmlformats.org/drawingml/2006/main">
               <a:ext uri="{FF2B5EF4-FFF2-40B4-BE49-F238E27FC236}">
-                <a16:creationId xmlns:a16="http://schemas.microsoft.com/office/drawing/2014/main" id="{408E2175-9467-4B2A-B16A-65D8FA7B1238}"/>
+                <a16:creationId xmlns:a16="http://schemas.microsoft.com/office/drawing/2014/main" id="{10EF27F7-08DD-45DF-9D0E-7BEFACEA30CD}"/>
               </a:ext>
             </a:extLst>
           </p:cNvPr>
@@ -11134,7 +11904,7 @@
           <p:cNvPr id="15" name="">
             <a:extLst xmlns:a="http://schemas.openxmlformats.org/drawingml/2006/main">
               <a:ext uri="{FF2B5EF4-FFF2-40B4-BE49-F238E27FC236}">
-                <a16:creationId xmlns:a16="http://schemas.microsoft.com/office/drawing/2014/main" id="{1392B839-CAA2-43D7-8683-CE2D51E4F6F6}"/>
+                <a16:creationId xmlns:a16="http://schemas.microsoft.com/office/drawing/2014/main" id="{F9E12C6F-CC6E-499F-BB16-8CFCFD9B7AE6}"/>
               </a:ext>
             </a:extLst>
           </p:cNvPr>
@@ -11165,7 +11935,7 @@
           <p:cNvPr id="16" name="">
             <a:extLst xmlns:a="http://schemas.openxmlformats.org/drawingml/2006/main">
               <a:ext uri="{FF2B5EF4-FFF2-40B4-BE49-F238E27FC236}">
-                <a16:creationId xmlns:a16="http://schemas.microsoft.com/office/drawing/2014/main" id="{C7FDBFB2-4A7C-47EF-A54F-E3128C240569}"/>
+                <a16:creationId xmlns:a16="http://schemas.microsoft.com/office/drawing/2014/main" id="{A5B2115E-E025-4BCA-A861-F49E65EC8F8F}"/>
               </a:ext>
             </a:extLst>
           </p:cNvPr>
@@ -11196,7 +11966,7 @@
           <p:cNvPr id="17" name="">
             <a:extLst xmlns:a="http://schemas.openxmlformats.org/drawingml/2006/main">
               <a:ext uri="{FF2B5EF4-FFF2-40B4-BE49-F238E27FC236}">
-                <a16:creationId xmlns:a16="http://schemas.microsoft.com/office/drawing/2014/main" id="{5669F17C-BBA1-4780-876C-0590A2221694}"/>
+                <a16:creationId xmlns:a16="http://schemas.microsoft.com/office/drawing/2014/main" id="{42ED1467-E9FA-4FD6-92AD-C941B902BD7F}"/>
               </a:ext>
             </a:extLst>
           </p:cNvPr>
@@ -11227,7 +11997,7 @@
           <p:cNvPr id="18" name="">
             <a:extLst xmlns:a="http://schemas.openxmlformats.org/drawingml/2006/main">
               <a:ext uri="{FF2B5EF4-FFF2-40B4-BE49-F238E27FC236}">
-                <a16:creationId xmlns:a16="http://schemas.microsoft.com/office/drawing/2014/main" id="{6504BFFD-9A9A-4B4D-B0E9-D73225C84B61}"/>
+                <a16:creationId xmlns:a16="http://schemas.microsoft.com/office/drawing/2014/main" id="{F7444F7A-BDAD-43C1-9D48-2D465ABFB4E1}"/>
               </a:ext>
             </a:extLst>
           </p:cNvPr>
@@ -11258,7 +12028,7 @@
           <p:cNvPr id="19" name="">
             <a:extLst xmlns:a="http://schemas.openxmlformats.org/drawingml/2006/main">
               <a:ext uri="{FF2B5EF4-FFF2-40B4-BE49-F238E27FC236}">
-                <a16:creationId xmlns:a16="http://schemas.microsoft.com/office/drawing/2014/main" id="{81B9F589-95E0-4945-8A79-8E48DB01C390}"/>
+                <a16:creationId xmlns:a16="http://schemas.microsoft.com/office/drawing/2014/main" id="{410802A9-3C80-44D8-9877-92125E2E13C5}"/>
               </a:ext>
             </a:extLst>
           </p:cNvPr>
@@ -11289,7 +12059,7 @@
           <p:cNvPr id="20" name="">
             <a:extLst xmlns:a="http://schemas.openxmlformats.org/drawingml/2006/main">
               <a:ext uri="{FF2B5EF4-FFF2-40B4-BE49-F238E27FC236}">
-                <a16:creationId xmlns:a16="http://schemas.microsoft.com/office/drawing/2014/main" id="{9A4FA680-88AF-4B66-9653-05C305F23312}"/>
+                <a16:creationId xmlns:a16="http://schemas.microsoft.com/office/drawing/2014/main" id="{805A63F0-4421-4DD2-BA9F-3DB292246093}"/>
               </a:ext>
             </a:extLst>
           </p:cNvPr>
@@ -11320,7 +12090,7 @@
           <p:cNvPr id="21" name="">
             <a:extLst xmlns:a="http://schemas.openxmlformats.org/drawingml/2006/main">
               <a:ext uri="{FF2B5EF4-FFF2-40B4-BE49-F238E27FC236}">
-                <a16:creationId xmlns:a16="http://schemas.microsoft.com/office/drawing/2014/main" id="{CE3CD864-562B-4F91-9424-0005608B7723}"/>
+                <a16:creationId xmlns:a16="http://schemas.microsoft.com/office/drawing/2014/main" id="{1BF492F6-41AD-446C-A784-BA657816CD8C}"/>
               </a:ext>
             </a:extLst>
           </p:cNvPr>
@@ -11351,7 +12121,7 @@
           <p:cNvPr id="22" name="">
             <a:extLst xmlns:a="http://schemas.openxmlformats.org/drawingml/2006/main">
               <a:ext uri="{FF2B5EF4-FFF2-40B4-BE49-F238E27FC236}">
-                <a16:creationId xmlns:a16="http://schemas.microsoft.com/office/drawing/2014/main" id="{A14AC9A9-1CB3-45E9-AB56-6B9B89983325}"/>
+                <a16:creationId xmlns:a16="http://schemas.microsoft.com/office/drawing/2014/main" id="{5097C496-5DA1-4F33-8DAC-8E79387C6B49}"/>
               </a:ext>
             </a:extLst>
           </p:cNvPr>
@@ -11382,7 +12152,7 @@
           <p:cNvPr id="23" name="">
             <a:extLst xmlns:a="http://schemas.openxmlformats.org/drawingml/2006/main">
               <a:ext uri="{FF2B5EF4-FFF2-40B4-BE49-F238E27FC236}">
-                <a16:creationId xmlns:a16="http://schemas.microsoft.com/office/drawing/2014/main" id="{E612F5BB-D176-480E-8F85-EF9D511CFBED}"/>
+                <a16:creationId xmlns:a16="http://schemas.microsoft.com/office/drawing/2014/main" id="{07DAFB32-D76C-46EE-A0CF-E98CC645DCC6}"/>
               </a:ext>
             </a:extLst>
           </p:cNvPr>
@@ -11413,7 +12183,7 @@
           <p:cNvPr id="24" name="">
             <a:extLst xmlns:a="http://schemas.openxmlformats.org/drawingml/2006/main">
               <a:ext uri="{FF2B5EF4-FFF2-40B4-BE49-F238E27FC236}">
-                <a16:creationId xmlns:a16="http://schemas.microsoft.com/office/drawing/2014/main" id="{8312A215-2356-4243-A0BE-B564AADF9C3E}"/>
+                <a16:creationId xmlns:a16="http://schemas.microsoft.com/office/drawing/2014/main" id="{1FD95E88-9BF8-440E-83C3-48E5790D4DCA}"/>
               </a:ext>
             </a:extLst>
           </p:cNvPr>
@@ -11444,7 +12214,7 @@
           <p:cNvPr id="25" name="">
             <a:extLst xmlns:a="http://schemas.openxmlformats.org/drawingml/2006/main">
               <a:ext uri="{FF2B5EF4-FFF2-40B4-BE49-F238E27FC236}">
-                <a16:creationId xmlns:a16="http://schemas.microsoft.com/office/drawing/2014/main" id="{30B0ECF8-F3C3-4B38-A2E5-B46CA9E765C6}"/>
+                <a16:creationId xmlns:a16="http://schemas.microsoft.com/office/drawing/2014/main" id="{3923FB1E-EDDF-4AEA-AE3B-3987AB066BAB}"/>
               </a:ext>
             </a:extLst>
           </p:cNvPr>
@@ -11475,7 +12245,7 @@
           <p:cNvPr id="26" name="">
             <a:extLst xmlns:a="http://schemas.openxmlformats.org/drawingml/2006/main">
               <a:ext uri="{FF2B5EF4-FFF2-40B4-BE49-F238E27FC236}">
-                <a16:creationId xmlns:a16="http://schemas.microsoft.com/office/drawing/2014/main" id="{576E9F3D-412F-402A-B1DA-F900BE219114}"/>
+                <a16:creationId xmlns:a16="http://schemas.microsoft.com/office/drawing/2014/main" id="{5683CFE6-5166-4C16-8394-1967BCCBC71F}"/>
               </a:ext>
             </a:extLst>
           </p:cNvPr>
@@ -11506,7 +12276,7 @@
           <p:cNvPr id="27" name="">
             <a:extLst xmlns:a="http://schemas.openxmlformats.org/drawingml/2006/main">
               <a:ext uri="{FF2B5EF4-FFF2-40B4-BE49-F238E27FC236}">
-                <a16:creationId xmlns:a16="http://schemas.microsoft.com/office/drawing/2014/main" id="{1897271F-CDA5-4F3C-BC35-3F717DF20C7A}"/>
+                <a16:creationId xmlns:a16="http://schemas.microsoft.com/office/drawing/2014/main" id="{574AE142-0B20-4640-BC59-A1713677271C}"/>
               </a:ext>
             </a:extLst>
           </p:cNvPr>
@@ -11537,7 +12307,7 @@
           <p:cNvPr id="28" name="">
             <a:extLst xmlns:a="http://schemas.openxmlformats.org/drawingml/2006/main">
               <a:ext uri="{FF2B5EF4-FFF2-40B4-BE49-F238E27FC236}">
-                <a16:creationId xmlns:a16="http://schemas.microsoft.com/office/drawing/2014/main" id="{EC199951-B38B-4F14-95A1-B875D782F109}"/>
+                <a16:creationId xmlns:a16="http://schemas.microsoft.com/office/drawing/2014/main" id="{02408760-5386-4B68-8DE2-88A687169D92}"/>
               </a:ext>
             </a:extLst>
           </p:cNvPr>
@@ -11568,7 +12338,7 @@
           <p:cNvPr id="29" name="">
             <a:extLst xmlns:a="http://schemas.openxmlformats.org/drawingml/2006/main">
               <a:ext uri="{FF2B5EF4-FFF2-40B4-BE49-F238E27FC236}">
-                <a16:creationId xmlns:a16="http://schemas.microsoft.com/office/drawing/2014/main" id="{A194C895-4BBE-42EF-BFD0-32F7B6CF4ABF}"/>
+                <a16:creationId xmlns:a16="http://schemas.microsoft.com/office/drawing/2014/main" id="{F14858B9-005F-4BDB-92CA-0E3D0B839587}"/>
               </a:ext>
             </a:extLst>
           </p:cNvPr>
@@ -11636,7 +12406,7 @@
           <p:cNvPr id="30" name="">
             <a:extLst xmlns:a="http://schemas.openxmlformats.org/drawingml/2006/main">
               <a:ext uri="{FF2B5EF4-FFF2-40B4-BE49-F238E27FC236}">
-                <a16:creationId xmlns:a16="http://schemas.microsoft.com/office/drawing/2014/main" id="{B06A7426-3DA2-41CD-9E0D-D6C93FD3111C}"/>
+                <a16:creationId xmlns:a16="http://schemas.microsoft.com/office/drawing/2014/main" id="{025ABB30-3336-4723-8215-967F54A9A155}"/>
               </a:ext>
             </a:extLst>
           </p:cNvPr>
@@ -11704,7 +12474,7 @@
           <p:cNvPr id="31" name="">
             <a:extLst xmlns:a="http://schemas.openxmlformats.org/drawingml/2006/main">
               <a:ext uri="{FF2B5EF4-FFF2-40B4-BE49-F238E27FC236}">
-                <a16:creationId xmlns:a16="http://schemas.microsoft.com/office/drawing/2014/main" id="{2179BDBB-7D6C-4653-A004-4444B0B11D8C}"/>
+                <a16:creationId xmlns:a16="http://schemas.microsoft.com/office/drawing/2014/main" id="{0B6864DE-DDF2-4D57-9005-F91C35D5EB34}"/>
               </a:ext>
             </a:extLst>
           </p:cNvPr>
@@ -11772,7 +12542,7 @@
           <p:cNvPr id="32" name="">
             <a:extLst xmlns:a="http://schemas.openxmlformats.org/drawingml/2006/main">
               <a:ext uri="{FF2B5EF4-FFF2-40B4-BE49-F238E27FC236}">
-                <a16:creationId xmlns:a16="http://schemas.microsoft.com/office/drawing/2014/main" id="{9B9B486C-AAE7-4B97-9774-974145D1EAA9}"/>
+                <a16:creationId xmlns:a16="http://schemas.microsoft.com/office/drawing/2014/main" id="{9F202409-8E74-4C6F-89C3-5917B766D5AB}"/>
               </a:ext>
             </a:extLst>
           </p:cNvPr>
@@ -11803,7 +12573,7 @@
           <p:cNvPr id="33" name="">
             <a:extLst xmlns:a="http://schemas.openxmlformats.org/drawingml/2006/main">
               <a:ext uri="{FF2B5EF4-FFF2-40B4-BE49-F238E27FC236}">
-                <a16:creationId xmlns:a16="http://schemas.microsoft.com/office/drawing/2014/main" id="{3B8C45D6-1137-4784-A8AA-7E7758EF99C5}"/>
+                <a16:creationId xmlns:a16="http://schemas.microsoft.com/office/drawing/2014/main" id="{E1C91C98-1EE1-4605-A0F9-F0B0A44BF526}"/>
               </a:ext>
             </a:extLst>
           </p:cNvPr>
@@ -11834,7 +12604,7 @@
           <p:cNvPr id="34" name="">
             <a:extLst xmlns:a="http://schemas.openxmlformats.org/drawingml/2006/main">
               <a:ext uri="{FF2B5EF4-FFF2-40B4-BE49-F238E27FC236}">
-                <a16:creationId xmlns:a16="http://schemas.microsoft.com/office/drawing/2014/main" id="{29AC74C8-DEFA-4BCE-8BAC-CB98D24D7675}"/>
+                <a16:creationId xmlns:a16="http://schemas.microsoft.com/office/drawing/2014/main" id="{B1D8FFD9-3603-4E61-8FCE-C49663820918}"/>
               </a:ext>
             </a:extLst>
           </p:cNvPr>
@@ -11865,7 +12635,7 @@
           <p:cNvPr id="35" name="">
             <a:extLst xmlns:a="http://schemas.openxmlformats.org/drawingml/2006/main">
               <a:ext uri="{FF2B5EF4-FFF2-40B4-BE49-F238E27FC236}">
-                <a16:creationId xmlns:a16="http://schemas.microsoft.com/office/drawing/2014/main" id="{DEA4ED99-0A38-4D0F-8D5C-69AA0D221B6A}"/>
+                <a16:creationId xmlns:a16="http://schemas.microsoft.com/office/drawing/2014/main" id="{9FFE8EB2-75A1-4C25-A405-01DE1EDF5227}"/>
               </a:ext>
             </a:extLst>
           </p:cNvPr>
@@ -11933,7 +12703,7 @@
           <p:cNvPr id="36" name="">
             <a:extLst xmlns:a="http://schemas.openxmlformats.org/drawingml/2006/main">
               <a:ext uri="{FF2B5EF4-FFF2-40B4-BE49-F238E27FC236}">
-                <a16:creationId xmlns:a16="http://schemas.microsoft.com/office/drawing/2014/main" id="{57460904-D9DB-4A5C-B50C-F80A99DD7DF9}"/>
+                <a16:creationId xmlns:a16="http://schemas.microsoft.com/office/drawing/2014/main" id="{249A0490-BB56-43E5-899E-4BCAE2581B38}"/>
               </a:ext>
             </a:extLst>
           </p:cNvPr>
@@ -12001,7 +12771,7 @@
           <p:cNvPr id="37" name="">
             <a:extLst xmlns:a="http://schemas.openxmlformats.org/drawingml/2006/main">
               <a:ext uri="{FF2B5EF4-FFF2-40B4-BE49-F238E27FC236}">
-                <a16:creationId xmlns:a16="http://schemas.microsoft.com/office/drawing/2014/main" id="{2F5ADED4-E233-498D-AC57-7A151E89A99B}"/>
+                <a16:creationId xmlns:a16="http://schemas.microsoft.com/office/drawing/2014/main" id="{1C2E9C26-69F1-4689-B96F-62D264483F81}"/>
               </a:ext>
             </a:extLst>
           </p:cNvPr>
@@ -12032,7 +12802,7 @@
           <p:cNvPr id="38" name="">
             <a:extLst xmlns:a="http://schemas.openxmlformats.org/drawingml/2006/main">
               <a:ext uri="{FF2B5EF4-FFF2-40B4-BE49-F238E27FC236}">
-                <a16:creationId xmlns:a16="http://schemas.microsoft.com/office/drawing/2014/main" id="{F602F048-144C-4308-8E83-2E80206A56EC}"/>
+                <a16:creationId xmlns:a16="http://schemas.microsoft.com/office/drawing/2014/main" id="{F06E02F6-FFCB-48B3-AF47-DB4255ED5A5D}"/>
               </a:ext>
             </a:extLst>
           </p:cNvPr>
@@ -12063,7 +12833,7 @@
           <p:cNvPr id="39" name="">
             <a:extLst xmlns:a="http://schemas.openxmlformats.org/drawingml/2006/main">
               <a:ext uri="{FF2B5EF4-FFF2-40B4-BE49-F238E27FC236}">
-                <a16:creationId xmlns:a16="http://schemas.microsoft.com/office/drawing/2014/main" id="{D8AA7519-AA19-438B-927E-ECE6E6E6C76F}"/>
+                <a16:creationId xmlns:a16="http://schemas.microsoft.com/office/drawing/2014/main" id="{F1EDDCFC-C302-4836-93E8-01626A7335DE}"/>
               </a:ext>
             </a:extLst>
           </p:cNvPr>
@@ -12094,7 +12864,7 @@
           <p:cNvPr id="40" name="">
             <a:extLst xmlns:a="http://schemas.openxmlformats.org/drawingml/2006/main">
               <a:ext uri="{FF2B5EF4-FFF2-40B4-BE49-F238E27FC236}">
-                <a16:creationId xmlns:a16="http://schemas.microsoft.com/office/drawing/2014/main" id="{28703B98-8248-4ACC-89EE-77D15AADABB1}"/>
+                <a16:creationId xmlns:a16="http://schemas.microsoft.com/office/drawing/2014/main" id="{C929DF52-4CE2-437D-86F1-20AFD929B20F}"/>
               </a:ext>
             </a:extLst>
           </p:cNvPr>
@@ -12162,7 +12932,7 @@
           <p:cNvPr id="41" name="">
             <a:extLst xmlns:a="http://schemas.openxmlformats.org/drawingml/2006/main">
               <a:ext uri="{FF2B5EF4-FFF2-40B4-BE49-F238E27FC236}">
-                <a16:creationId xmlns:a16="http://schemas.microsoft.com/office/drawing/2014/main" id="{DE7FC673-1EAA-48CA-95DF-5FF2203334A5}"/>
+                <a16:creationId xmlns:a16="http://schemas.microsoft.com/office/drawing/2014/main" id="{D0EE605B-A0DD-4F81-A5C2-7F87030CC809}"/>
               </a:ext>
             </a:extLst>
           </p:cNvPr>
@@ -12228,7 +12998,7 @@
     </p:spTree>
     <p:extLst>
       <p:ext uri="{BB962C8B-B14F-4D97-AF65-F5344CB8AC3E}">
-        <p14:creationId xmlns:p14="http://schemas.microsoft.com/office/powerpoint/2010/main" val="1966443454"/>
+        <p14:creationId xmlns:p14="http://schemas.microsoft.com/office/powerpoint/2010/main" val="1633782594"/>
       </p:ext>
     </p:extLst>
   </p:cSld>
@@ -12259,7 +13029,7 @@
           <p:cNvPr id="37" name="">
             <a:extLst xmlns:a="http://schemas.openxmlformats.org/drawingml/2006/main">
               <a:ext uri="{FF2B5EF4-FFF2-40B4-BE49-F238E27FC236}">
-                <a16:creationId xmlns:a16="http://schemas.microsoft.com/office/drawing/2014/main" id="{5BEAF7EB-6C99-4B06-A37E-51CD228CFD0C}"/>
+                <a16:creationId xmlns:a16="http://schemas.microsoft.com/office/drawing/2014/main" id="{9F60BD56-E2E1-480B-8B1E-B7251F18C45F}"/>
               </a:ext>
             </a:extLst>
           </p:cNvPr>
@@ -12327,7 +13097,7 @@
           <p:cNvPr id="2" name="">
             <a:extLst xmlns:a="http://schemas.openxmlformats.org/drawingml/2006/main">
               <a:ext uri="{FF2B5EF4-FFF2-40B4-BE49-F238E27FC236}">
-                <a16:creationId xmlns:a16="http://schemas.microsoft.com/office/drawing/2014/main" id="{A021667A-64BD-4F44-A9D5-1D6DD855A2DE}"/>
+                <a16:creationId xmlns:a16="http://schemas.microsoft.com/office/drawing/2014/main" id="{60EC05F4-6E86-4FD0-A8A2-78FA653647D2}"/>
               </a:ext>
             </a:extLst>
           </p:cNvPr>
@@ -12395,7 +13165,7 @@
           <p:cNvPr id="3" name="">
             <a:extLst xmlns:a="http://schemas.openxmlformats.org/drawingml/2006/main">
               <a:ext uri="{FF2B5EF4-FFF2-40B4-BE49-F238E27FC236}">
-                <a16:creationId xmlns:a16="http://schemas.microsoft.com/office/drawing/2014/main" id="{98C2212E-AEA1-473F-9A48-7039A4A2E148}"/>
+                <a16:creationId xmlns:a16="http://schemas.microsoft.com/office/drawing/2014/main" id="{058F5E6F-2F1D-4FF4-95C6-5C76936B6523}"/>
               </a:ext>
             </a:extLst>
           </p:cNvPr>
@@ -12426,7 +13196,7 @@
           <p:cNvPr id="4" name="">
             <a:extLst xmlns:a="http://schemas.openxmlformats.org/drawingml/2006/main">
               <a:ext uri="{FF2B5EF4-FFF2-40B4-BE49-F238E27FC236}">
-                <a16:creationId xmlns:a16="http://schemas.microsoft.com/office/drawing/2014/main" id="{A8363611-F44E-4AE2-BE1B-56D340D177D1}"/>
+                <a16:creationId xmlns:a16="http://schemas.microsoft.com/office/drawing/2014/main" id="{3CE69217-08BA-45B7-B3DA-3D3AD2ED91A4}"/>
               </a:ext>
             </a:extLst>
           </p:cNvPr>
@@ -12494,7 +13264,7 @@
           <p:cNvPr id="5" name="">
             <a:extLst xmlns:a="http://schemas.openxmlformats.org/drawingml/2006/main">
               <a:ext uri="{FF2B5EF4-FFF2-40B4-BE49-F238E27FC236}">
-                <a16:creationId xmlns:a16="http://schemas.microsoft.com/office/drawing/2014/main" id="{F721DBAF-22E6-4BF9-A27D-6BFBD7A05E83}"/>
+                <a16:creationId xmlns:a16="http://schemas.microsoft.com/office/drawing/2014/main" id="{F57988DC-88A5-41A3-863C-CC8F4498B5E5}"/>
               </a:ext>
             </a:extLst>
           </p:cNvPr>
@@ -12562,7 +13332,7 @@
           <p:cNvPr id="6" name="">
             <a:extLst xmlns:a="http://schemas.openxmlformats.org/drawingml/2006/main">
               <a:ext uri="{FF2B5EF4-FFF2-40B4-BE49-F238E27FC236}">
-                <a16:creationId xmlns:a16="http://schemas.microsoft.com/office/drawing/2014/main" id="{2F0D0D62-B40F-43EB-833B-E640C9B8F623}"/>
+                <a16:creationId xmlns:a16="http://schemas.microsoft.com/office/drawing/2014/main" id="{5C3A047E-2EEF-4B43-8751-353C6A112814}"/>
               </a:ext>
             </a:extLst>
           </p:cNvPr>
@@ -12592,7 +13362,7 @@
           <p:cNvPr id="7" name="">
             <a:extLst xmlns:a="http://schemas.openxmlformats.org/drawingml/2006/main">
               <a:ext uri="{FF2B5EF4-FFF2-40B4-BE49-F238E27FC236}">
-                <a16:creationId xmlns:a16="http://schemas.microsoft.com/office/drawing/2014/main" id="{F6B76793-BDDB-4B07-9631-84EF7D816533}"/>
+                <a16:creationId xmlns:a16="http://schemas.microsoft.com/office/drawing/2014/main" id="{B5D0CEBE-09FB-4B09-A5D2-5185DA07C35F}"/>
               </a:ext>
             </a:extLst>
           </p:cNvPr>
@@ -12660,7 +13430,7 @@
           <p:cNvPr id="8" name="">
             <a:extLst xmlns:a="http://schemas.openxmlformats.org/drawingml/2006/main">
               <a:ext uri="{FF2B5EF4-FFF2-40B4-BE49-F238E27FC236}">
-                <a16:creationId xmlns:a16="http://schemas.microsoft.com/office/drawing/2014/main" id="{0602A394-5548-4EE5-871B-94B877380FF3}"/>
+                <a16:creationId xmlns:a16="http://schemas.microsoft.com/office/drawing/2014/main" id="{9CFEDD0E-6220-4546-8AC3-773542E9EE1E}"/>
               </a:ext>
             </a:extLst>
           </p:cNvPr>
@@ -12690,7 +13460,7 @@
           <p:cNvPr id="9" name="">
             <a:extLst xmlns:a="http://schemas.openxmlformats.org/drawingml/2006/main">
               <a:ext uri="{FF2B5EF4-FFF2-40B4-BE49-F238E27FC236}">
-                <a16:creationId xmlns:a16="http://schemas.microsoft.com/office/drawing/2014/main" id="{3E5E08EA-0710-483C-9163-3CF1C293DA96}"/>
+                <a16:creationId xmlns:a16="http://schemas.microsoft.com/office/drawing/2014/main" id="{DC4547F7-16FA-45CA-87BE-7048C2ECDD2D}"/>
               </a:ext>
             </a:extLst>
           </p:cNvPr>
@@ -12758,7 +13528,7 @@
           <p:cNvPr id="10" name="">
             <a:extLst xmlns:a="http://schemas.openxmlformats.org/drawingml/2006/main">
               <a:ext uri="{FF2B5EF4-FFF2-40B4-BE49-F238E27FC236}">
-                <a16:creationId xmlns:a16="http://schemas.microsoft.com/office/drawing/2014/main" id="{497A1EAE-1B7A-4204-848E-95D12A256D81}"/>
+                <a16:creationId xmlns:a16="http://schemas.microsoft.com/office/drawing/2014/main" id="{57B5F0B3-9DCA-4A47-A58C-C2119ACBA000}"/>
               </a:ext>
             </a:extLst>
           </p:cNvPr>
@@ -12788,7 +13558,7 @@
           <p:cNvPr id="11" name="">
             <a:extLst xmlns:a="http://schemas.openxmlformats.org/drawingml/2006/main">
               <a:ext uri="{FF2B5EF4-FFF2-40B4-BE49-F238E27FC236}">
-                <a16:creationId xmlns:a16="http://schemas.microsoft.com/office/drawing/2014/main" id="{D43BCBE8-99BA-4AC3-9E47-4AA7313B034C}"/>
+                <a16:creationId xmlns:a16="http://schemas.microsoft.com/office/drawing/2014/main" id="{0159F087-DD1D-4E0E-A336-A0B72E54F486}"/>
               </a:ext>
             </a:extLst>
           </p:cNvPr>
@@ -12879,7 +13649,7 @@
           <p:cNvPr id="12" name="">
             <a:extLst xmlns:a="http://schemas.openxmlformats.org/drawingml/2006/main">
               <a:ext uri="{FF2B5EF4-FFF2-40B4-BE49-F238E27FC236}">
-                <a16:creationId xmlns:a16="http://schemas.microsoft.com/office/drawing/2014/main" id="{DA6D4DC5-3F6C-40FE-9C66-B265CA67F15E}"/>
+                <a16:creationId xmlns:a16="http://schemas.microsoft.com/office/drawing/2014/main" id="{CFF753E8-0701-46A3-97EB-D77A93C2C431}"/>
               </a:ext>
             </a:extLst>
           </p:cNvPr>
@@ -12909,7 +13679,7 @@
           <p:cNvPr id="13" name="">
             <a:extLst xmlns:a="http://schemas.openxmlformats.org/drawingml/2006/main">
               <a:ext uri="{FF2B5EF4-FFF2-40B4-BE49-F238E27FC236}">
-                <a16:creationId xmlns:a16="http://schemas.microsoft.com/office/drawing/2014/main" id="{DF509978-6839-45BF-99CF-82A85C6CB7DA}"/>
+                <a16:creationId xmlns:a16="http://schemas.microsoft.com/office/drawing/2014/main" id="{6575C215-D855-4A52-B156-81B5C6E1D022}"/>
               </a:ext>
             </a:extLst>
           </p:cNvPr>
@@ -12977,7 +13747,7 @@
           <p:cNvPr id="14" name="">
             <a:extLst xmlns:a="http://schemas.openxmlformats.org/drawingml/2006/main">
               <a:ext uri="{FF2B5EF4-FFF2-40B4-BE49-F238E27FC236}">
-                <a16:creationId xmlns:a16="http://schemas.microsoft.com/office/drawing/2014/main" id="{D90DFBE3-3B07-446A-9309-B31A9AEC1E8F}"/>
+                <a16:creationId xmlns:a16="http://schemas.microsoft.com/office/drawing/2014/main" id="{048610D1-D209-4089-BC73-A81F2117E4B9}"/>
               </a:ext>
             </a:extLst>
           </p:cNvPr>
@@ -13007,7 +13777,7 @@
           <p:cNvPr id="15" name="">
             <a:extLst xmlns:a="http://schemas.openxmlformats.org/drawingml/2006/main">
               <a:ext uri="{FF2B5EF4-FFF2-40B4-BE49-F238E27FC236}">
-                <a16:creationId xmlns:a16="http://schemas.microsoft.com/office/drawing/2014/main" id="{EDD1EC1F-70EF-4F8E-8786-1D1DA7335DDF}"/>
+                <a16:creationId xmlns:a16="http://schemas.microsoft.com/office/drawing/2014/main" id="{AA586D1D-F78A-4B7A-93AC-8C10E68059B3}"/>
               </a:ext>
             </a:extLst>
           </p:cNvPr>
@@ -13098,7 +13868,7 @@
           <p:cNvPr id="16" name="">
             <a:extLst xmlns:a="http://schemas.openxmlformats.org/drawingml/2006/main">
               <a:ext uri="{FF2B5EF4-FFF2-40B4-BE49-F238E27FC236}">
-                <a16:creationId xmlns:a16="http://schemas.microsoft.com/office/drawing/2014/main" id="{D8DDB25B-141E-4D61-9545-BDE7DBEBD289}"/>
+                <a16:creationId xmlns:a16="http://schemas.microsoft.com/office/drawing/2014/main" id="{827FD575-10DD-41A9-9716-F76E459E986C}"/>
               </a:ext>
             </a:extLst>
           </p:cNvPr>
@@ -13130,7 +13900,7 @@
           <p:cNvPr id="17" name="">
             <a:extLst xmlns:a="http://schemas.openxmlformats.org/drawingml/2006/main">
               <a:ext uri="{FF2B5EF4-FFF2-40B4-BE49-F238E27FC236}">
-                <a16:creationId xmlns:a16="http://schemas.microsoft.com/office/drawing/2014/main" id="{D4F39AC9-0D8D-4C63-B333-2E810221D324}"/>
+                <a16:creationId xmlns:a16="http://schemas.microsoft.com/office/drawing/2014/main" id="{B20EA8EE-4972-4DC7-9019-C99300CA55F8}"/>
               </a:ext>
             </a:extLst>
           </p:cNvPr>
@@ -13198,7 +13968,7 @@
           <p:cNvPr id="18" name="">
             <a:extLst xmlns:a="http://schemas.openxmlformats.org/drawingml/2006/main">
               <a:ext uri="{FF2B5EF4-FFF2-40B4-BE49-F238E27FC236}">
-                <a16:creationId xmlns:a16="http://schemas.microsoft.com/office/drawing/2014/main" id="{5CF29829-36B8-4198-AFA9-D180DDB30508}"/>
+                <a16:creationId xmlns:a16="http://schemas.microsoft.com/office/drawing/2014/main" id="{349CC5A4-FD2E-4743-A915-0A29383D9571}"/>
               </a:ext>
             </a:extLst>
           </p:cNvPr>
@@ -13289,7 +14059,7 @@
           <p:cNvPr id="19" name="">
             <a:extLst xmlns:a="http://schemas.openxmlformats.org/drawingml/2006/main">
               <a:ext uri="{FF2B5EF4-FFF2-40B4-BE49-F238E27FC236}">
-                <a16:creationId xmlns:a16="http://schemas.microsoft.com/office/drawing/2014/main" id="{60272118-FEA0-41CE-B35F-E1D2C1B398D2}"/>
+                <a16:creationId xmlns:a16="http://schemas.microsoft.com/office/drawing/2014/main" id="{D55FEC64-6EE5-4993-9203-5CA2AB56374F}"/>
               </a:ext>
             </a:extLst>
           </p:cNvPr>
@@ -13320,7 +14090,7 @@
           <p:cNvPr id="20" name="">
             <a:extLst xmlns:a="http://schemas.openxmlformats.org/drawingml/2006/main">
               <a:ext uri="{FF2B5EF4-FFF2-40B4-BE49-F238E27FC236}">
-                <a16:creationId xmlns:a16="http://schemas.microsoft.com/office/drawing/2014/main" id="{3C677737-E7A4-4CB7-B679-4FE401DF2B21}"/>
+                <a16:creationId xmlns:a16="http://schemas.microsoft.com/office/drawing/2014/main" id="{4531030C-786A-40C7-B1D4-BAE1F270F4AE}"/>
               </a:ext>
             </a:extLst>
           </p:cNvPr>
@@ -13351,7 +14121,7 @@
           <p:cNvPr id="21" name="">
             <a:extLst xmlns:a="http://schemas.openxmlformats.org/drawingml/2006/main">
               <a:ext uri="{FF2B5EF4-FFF2-40B4-BE49-F238E27FC236}">
-                <a16:creationId xmlns:a16="http://schemas.microsoft.com/office/drawing/2014/main" id="{215AA3AD-C887-474F-B41E-10D77CFA64AA}"/>
+                <a16:creationId xmlns:a16="http://schemas.microsoft.com/office/drawing/2014/main" id="{5B314C27-6A79-4EB4-AA79-88A156CAD9DC}"/>
               </a:ext>
             </a:extLst>
           </p:cNvPr>
@@ -13382,7 +14152,7 @@
           <p:cNvPr id="22" name="">
             <a:extLst xmlns:a="http://schemas.openxmlformats.org/drawingml/2006/main">
               <a:ext uri="{FF2B5EF4-FFF2-40B4-BE49-F238E27FC236}">
-                <a16:creationId xmlns:a16="http://schemas.microsoft.com/office/drawing/2014/main" id="{22729DAC-F339-4C64-8271-2C2EF1BC7519}"/>
+                <a16:creationId xmlns:a16="http://schemas.microsoft.com/office/drawing/2014/main" id="{41698081-2403-4835-9C2E-7818394AA199}"/>
               </a:ext>
             </a:extLst>
           </p:cNvPr>
@@ -13413,7 +14183,7 @@
           <p:cNvPr id="23" name="">
             <a:extLst xmlns:a="http://schemas.openxmlformats.org/drawingml/2006/main">
               <a:ext uri="{FF2B5EF4-FFF2-40B4-BE49-F238E27FC236}">
-                <a16:creationId xmlns:a16="http://schemas.microsoft.com/office/drawing/2014/main" id="{D9A2C7F5-A92B-4205-8844-E345F593F7B9}"/>
+                <a16:creationId xmlns:a16="http://schemas.microsoft.com/office/drawing/2014/main" id="{8644AACA-0C65-43F9-8AE9-1A3804770CF2}"/>
               </a:ext>
             </a:extLst>
           </p:cNvPr>
@@ -13444,7 +14214,7 @@
           <p:cNvPr id="24" name="">
             <a:extLst xmlns:a="http://schemas.openxmlformats.org/drawingml/2006/main">
               <a:ext uri="{FF2B5EF4-FFF2-40B4-BE49-F238E27FC236}">
-                <a16:creationId xmlns:a16="http://schemas.microsoft.com/office/drawing/2014/main" id="{5CDA362F-9DD1-4A32-8DEE-039FD71EA2E0}"/>
+                <a16:creationId xmlns:a16="http://schemas.microsoft.com/office/drawing/2014/main" id="{487AAF4D-9627-4CD8-A1EC-1165B3B50ACA}"/>
               </a:ext>
             </a:extLst>
           </p:cNvPr>
@@ -13475,7 +14245,7 @@
           <p:cNvPr id="25" name="">
             <a:extLst xmlns:a="http://schemas.openxmlformats.org/drawingml/2006/main">
               <a:ext uri="{FF2B5EF4-FFF2-40B4-BE49-F238E27FC236}">
-                <a16:creationId xmlns:a16="http://schemas.microsoft.com/office/drawing/2014/main" id="{02FAB7B5-6BCD-46D7-AEC5-CF58119D01C0}"/>
+                <a16:creationId xmlns:a16="http://schemas.microsoft.com/office/drawing/2014/main" id="{E6330747-AD2A-4153-AEF6-43B55911590B}"/>
               </a:ext>
             </a:extLst>
           </p:cNvPr>
@@ -13543,7 +14313,7 @@
           <p:cNvPr id="26" name="">
             <a:extLst xmlns:a="http://schemas.openxmlformats.org/drawingml/2006/main">
               <a:ext uri="{FF2B5EF4-FFF2-40B4-BE49-F238E27FC236}">
-                <a16:creationId xmlns:a16="http://schemas.microsoft.com/office/drawing/2014/main" id="{E2EC51C7-A715-4E77-A2CA-B5CE3B14184A}"/>
+                <a16:creationId xmlns:a16="http://schemas.microsoft.com/office/drawing/2014/main" id="{52AF96B0-2615-4C0C-A3AA-04F2609CCFDF}"/>
               </a:ext>
             </a:extLst>
           </p:cNvPr>
@@ -13611,7 +14381,7 @@
           <p:cNvPr id="27" name="">
             <a:extLst xmlns:a="http://schemas.openxmlformats.org/drawingml/2006/main">
               <a:ext uri="{FF2B5EF4-FFF2-40B4-BE49-F238E27FC236}">
-                <a16:creationId xmlns:a16="http://schemas.microsoft.com/office/drawing/2014/main" id="{826F3DCB-4DE4-480A-9DBA-F97CA9CF2AC1}"/>
+                <a16:creationId xmlns:a16="http://schemas.microsoft.com/office/drawing/2014/main" id="{675D6BE2-28EC-435A-B4D1-06E5E880CC24}"/>
               </a:ext>
             </a:extLst>
           </p:cNvPr>
@@ -13642,7 +14412,7 @@
           <p:cNvPr id="28" name="">
             <a:extLst xmlns:a="http://schemas.openxmlformats.org/drawingml/2006/main">
               <a:ext uri="{FF2B5EF4-FFF2-40B4-BE49-F238E27FC236}">
-                <a16:creationId xmlns:a16="http://schemas.microsoft.com/office/drawing/2014/main" id="{F23EB720-2634-4ADA-BEDC-26E7B741B7BA}"/>
+                <a16:creationId xmlns:a16="http://schemas.microsoft.com/office/drawing/2014/main" id="{AD900619-4F7C-4D74-AD70-377195DADEDD}"/>
               </a:ext>
             </a:extLst>
           </p:cNvPr>
@@ -13673,7 +14443,7 @@
           <p:cNvPr id="29" name="">
             <a:extLst xmlns:a="http://schemas.openxmlformats.org/drawingml/2006/main">
               <a:ext uri="{FF2B5EF4-FFF2-40B4-BE49-F238E27FC236}">
-                <a16:creationId xmlns:a16="http://schemas.microsoft.com/office/drawing/2014/main" id="{F27CBF49-A928-431C-B839-D947DDA3F40E}"/>
+                <a16:creationId xmlns:a16="http://schemas.microsoft.com/office/drawing/2014/main" id="{F11FDE23-4F10-4D5F-996A-28D649961CBE}"/>
               </a:ext>
             </a:extLst>
           </p:cNvPr>
@@ -13704,7 +14474,7 @@
           <p:cNvPr id="30" name="">
             <a:extLst xmlns:a="http://schemas.openxmlformats.org/drawingml/2006/main">
               <a:ext uri="{FF2B5EF4-FFF2-40B4-BE49-F238E27FC236}">
-                <a16:creationId xmlns:a16="http://schemas.microsoft.com/office/drawing/2014/main" id="{77FFF5C4-E9AD-47C0-AE76-F2C7682DD73E}"/>
+                <a16:creationId xmlns:a16="http://schemas.microsoft.com/office/drawing/2014/main" id="{D28CC9B3-6E40-48BB-B096-2076CFFA2D8F}"/>
               </a:ext>
             </a:extLst>
           </p:cNvPr>
@@ -13735,7 +14505,7 @@
           <p:cNvPr id="31" name="">
             <a:extLst xmlns:a="http://schemas.openxmlformats.org/drawingml/2006/main">
               <a:ext uri="{FF2B5EF4-FFF2-40B4-BE49-F238E27FC236}">
-                <a16:creationId xmlns:a16="http://schemas.microsoft.com/office/drawing/2014/main" id="{BDB5FC2B-8B1C-4A63-9102-A27CFFB9D0B5}"/>
+                <a16:creationId xmlns:a16="http://schemas.microsoft.com/office/drawing/2014/main" id="{67B04673-612C-4B0D-93B0-F499F8ED9537}"/>
               </a:ext>
             </a:extLst>
           </p:cNvPr>
@@ -13766,7 +14536,7 @@
           <p:cNvPr id="32" name="">
             <a:extLst xmlns:a="http://schemas.openxmlformats.org/drawingml/2006/main">
               <a:ext uri="{FF2B5EF4-FFF2-40B4-BE49-F238E27FC236}">
-                <a16:creationId xmlns:a16="http://schemas.microsoft.com/office/drawing/2014/main" id="{E31DA49D-9DB4-469E-A0F8-118E9B1ECEAA}"/>
+                <a16:creationId xmlns:a16="http://schemas.microsoft.com/office/drawing/2014/main" id="{BC3238BA-41CA-4F58-9BE7-C5FD37B91BC8}"/>
               </a:ext>
             </a:extLst>
           </p:cNvPr>
@@ -13797,7 +14567,7 @@
           <p:cNvPr id="33" name="">
             <a:extLst xmlns:a="http://schemas.openxmlformats.org/drawingml/2006/main">
               <a:ext uri="{FF2B5EF4-FFF2-40B4-BE49-F238E27FC236}">
-                <a16:creationId xmlns:a16="http://schemas.microsoft.com/office/drawing/2014/main" id="{73F027FB-6DE8-447E-AD7B-EA1534639C2B}"/>
+                <a16:creationId xmlns:a16="http://schemas.microsoft.com/office/drawing/2014/main" id="{79B708BB-2E4D-4AB4-A0EA-712DB18152F8}"/>
               </a:ext>
             </a:extLst>
           </p:cNvPr>
@@ -13828,7 +14598,7 @@
           <p:cNvPr id="34" name="">
             <a:extLst xmlns:a="http://schemas.openxmlformats.org/drawingml/2006/main">
               <a:ext uri="{FF2B5EF4-FFF2-40B4-BE49-F238E27FC236}">
-                <a16:creationId xmlns:a16="http://schemas.microsoft.com/office/drawing/2014/main" id="{C42B962E-6B2B-4D32-AC23-A6E76B79D6B8}"/>
+                <a16:creationId xmlns:a16="http://schemas.microsoft.com/office/drawing/2014/main" id="{7F5AB623-26B5-48D1-85C2-20CD3A5E986B}"/>
               </a:ext>
             </a:extLst>
           </p:cNvPr>
@@ -13859,7 +14629,7 @@
           <p:cNvPr id="35" name="">
             <a:extLst xmlns:a="http://schemas.openxmlformats.org/drawingml/2006/main">
               <a:ext uri="{FF2B5EF4-FFF2-40B4-BE49-F238E27FC236}">
-                <a16:creationId xmlns:a16="http://schemas.microsoft.com/office/drawing/2014/main" id="{3F279794-FCBE-4FC0-BFD1-1F8D855A60E6}"/>
+                <a16:creationId xmlns:a16="http://schemas.microsoft.com/office/drawing/2014/main" id="{A16ECD09-4D67-4F51-A0F8-AF45646A35C2}"/>
               </a:ext>
             </a:extLst>
           </p:cNvPr>
@@ -13890,7 +14660,7 @@
           <p:cNvPr id="36" name="">
             <a:extLst xmlns:a="http://schemas.openxmlformats.org/drawingml/2006/main">
               <a:ext uri="{FF2B5EF4-FFF2-40B4-BE49-F238E27FC236}">
-                <a16:creationId xmlns:a16="http://schemas.microsoft.com/office/drawing/2014/main" id="{9C075D17-F67C-4337-8941-73B6E9D9E1FC}"/>
+                <a16:creationId xmlns:a16="http://schemas.microsoft.com/office/drawing/2014/main" id="{79548325-2CC2-4AE4-BCAA-24C8C6E88390}"/>
               </a:ext>
             </a:extLst>
           </p:cNvPr>
@@ -13956,7 +14726,7 @@
     </p:spTree>
     <p:extLst>
       <p:ext uri="{BB962C8B-B14F-4D97-AF65-F5344CB8AC3E}">
-        <p14:creationId xmlns:p14="http://schemas.microsoft.com/office/powerpoint/2010/main" val="1768299404"/>
+        <p14:creationId xmlns:p14="http://schemas.microsoft.com/office/powerpoint/2010/main" val="1764903778"/>
       </p:ext>
     </p:extLst>
   </p:cSld>
@@ -13987,7 +14757,7 @@
           <p:cNvPr id="12" name="">
             <a:extLst xmlns:a="http://schemas.openxmlformats.org/drawingml/2006/main">
               <a:ext uri="{FF2B5EF4-FFF2-40B4-BE49-F238E27FC236}">
-                <a16:creationId xmlns:a16="http://schemas.microsoft.com/office/drawing/2014/main" id="{38E57D73-0B40-4467-9267-C56C0CA6285D}"/>
+                <a16:creationId xmlns:a16="http://schemas.microsoft.com/office/drawing/2014/main" id="{E14EABAA-02EB-46D1-AAD6-831E9827B6CC}"/>
               </a:ext>
             </a:extLst>
           </p:cNvPr>
@@ -14055,7 +14825,7 @@
           <p:cNvPr id="2" name="">
             <a:extLst xmlns:a="http://schemas.openxmlformats.org/drawingml/2006/main">
               <a:ext uri="{FF2B5EF4-FFF2-40B4-BE49-F238E27FC236}">
-                <a16:creationId xmlns:a16="http://schemas.microsoft.com/office/drawing/2014/main" id="{A30A24C5-3737-47B9-9F49-83698C34797C}"/>
+                <a16:creationId xmlns:a16="http://schemas.microsoft.com/office/drawing/2014/main" id="{1D44DEFE-D6A2-4A95-AD53-FC8B6D411A33}"/>
               </a:ext>
             </a:extLst>
           </p:cNvPr>
@@ -14123,7 +14893,7 @@
           <p:cNvPr id="3" name="">
             <a:extLst xmlns:a="http://schemas.openxmlformats.org/drawingml/2006/main">
               <a:ext uri="{FF2B5EF4-FFF2-40B4-BE49-F238E27FC236}">
-                <a16:creationId xmlns:a16="http://schemas.microsoft.com/office/drawing/2014/main" id="{261EB8A7-C2FA-4B5B-94C7-4B41AEEEF56C}"/>
+                <a16:creationId xmlns:a16="http://schemas.microsoft.com/office/drawing/2014/main" id="{86637BB5-C93A-4422-B831-A393EC73283C}"/>
               </a:ext>
             </a:extLst>
           </p:cNvPr>
@@ -14154,7 +14924,7 @@
           <p:cNvPr id="4" name="">
             <a:extLst xmlns:a="http://schemas.openxmlformats.org/drawingml/2006/main">
               <a:ext uri="{FF2B5EF4-FFF2-40B4-BE49-F238E27FC236}">
-                <a16:creationId xmlns:a16="http://schemas.microsoft.com/office/drawing/2014/main" id="{95CD7F1A-D96B-4928-813D-BBB09C57CC92}"/>
+                <a16:creationId xmlns:a16="http://schemas.microsoft.com/office/drawing/2014/main" id="{52976804-5B53-4503-9EBC-8F616773E0C4}"/>
               </a:ext>
             </a:extLst>
           </p:cNvPr>
@@ -14222,7 +14992,7 @@
           <p:cNvPr id="5" name="">
             <a:extLst xmlns:a="http://schemas.openxmlformats.org/drawingml/2006/main">
               <a:ext uri="{FF2B5EF4-FFF2-40B4-BE49-F238E27FC236}">
-                <a16:creationId xmlns:a16="http://schemas.microsoft.com/office/drawing/2014/main" id="{52DF7110-7D52-42B7-94E1-051280FC792C}"/>
+                <a16:creationId xmlns:a16="http://schemas.microsoft.com/office/drawing/2014/main" id="{7D0C762E-3E32-4CAB-B587-83DA86CE0C39}"/>
               </a:ext>
             </a:extLst>
           </p:cNvPr>
@@ -14290,7 +15060,7 @@
           <p:cNvPr id="6" name="">
             <a:extLst xmlns:a="http://schemas.openxmlformats.org/drawingml/2006/main">
               <a:ext uri="{FF2B5EF4-FFF2-40B4-BE49-F238E27FC236}">
-                <a16:creationId xmlns:a16="http://schemas.microsoft.com/office/drawing/2014/main" id="{F96985F2-E562-4C1E-A1BB-30D63A444586}"/>
+                <a16:creationId xmlns:a16="http://schemas.microsoft.com/office/drawing/2014/main" id="{8629756A-F7A1-4F39-88AB-7F4B06759CF8}"/>
               </a:ext>
             </a:extLst>
           </p:cNvPr>
@@ -14812,7 +15582,7 @@
           <p:cNvPr id="7" name="">
             <a:extLst xmlns:a="http://schemas.openxmlformats.org/drawingml/2006/main">
               <a:ext uri="{FF2B5EF4-FFF2-40B4-BE49-F238E27FC236}">
-                <a16:creationId xmlns:a16="http://schemas.microsoft.com/office/drawing/2014/main" id="{88EC173E-929B-4FD9-96A9-D8E42AE41BB9}"/>
+                <a16:creationId xmlns:a16="http://schemas.microsoft.com/office/drawing/2014/main" id="{C7F87129-E36C-4EE9-B1C5-0EEAD79A61B7}"/>
               </a:ext>
             </a:extLst>
           </p:cNvPr>
@@ -14880,7 +15650,7 @@
           <p:cNvPr id="8" name="">
             <a:extLst xmlns:a="http://schemas.openxmlformats.org/drawingml/2006/main">
               <a:ext uri="{FF2B5EF4-FFF2-40B4-BE49-F238E27FC236}">
-                <a16:creationId xmlns:a16="http://schemas.microsoft.com/office/drawing/2014/main" id="{9B80D520-9531-4646-B1B8-D151FFF22399}"/>
+                <a16:creationId xmlns:a16="http://schemas.microsoft.com/office/drawing/2014/main" id="{058FE4F6-DEAB-4AB7-BDBF-3ED067CE4CBC}"/>
               </a:ext>
             </a:extLst>
           </p:cNvPr>
@@ -14948,7 +15718,7 @@
           <p:cNvPr id="9" name="">
             <a:extLst xmlns:a="http://schemas.openxmlformats.org/drawingml/2006/main">
               <a:ext uri="{FF2B5EF4-FFF2-40B4-BE49-F238E27FC236}">
-                <a16:creationId xmlns:a16="http://schemas.microsoft.com/office/drawing/2014/main" id="{7F14BC2F-DEAF-405F-82DC-D66BDB3C08E4}"/>
+                <a16:creationId xmlns:a16="http://schemas.microsoft.com/office/drawing/2014/main" id="{5E1F794C-29D6-492B-8C8C-4DC7FC0EA8A4}"/>
               </a:ext>
             </a:extLst>
           </p:cNvPr>
@@ -15016,7 +15786,7 @@
           <p:cNvPr id="10" name="">
             <a:extLst xmlns:a="http://schemas.openxmlformats.org/drawingml/2006/main">
               <a:ext uri="{FF2B5EF4-FFF2-40B4-BE49-F238E27FC236}">
-                <a16:creationId xmlns:a16="http://schemas.microsoft.com/office/drawing/2014/main" id="{80832695-ECF0-4152-8D44-41B7B64DD679}"/>
+                <a16:creationId xmlns:a16="http://schemas.microsoft.com/office/drawing/2014/main" id="{ED8E22ED-3130-4D47-9A50-4C12A638A18D}"/>
               </a:ext>
             </a:extLst>
           </p:cNvPr>
@@ -15084,7 +15854,7 @@
           <p:cNvPr id="11" name="">
             <a:extLst xmlns:a="http://schemas.openxmlformats.org/drawingml/2006/main">
               <a:ext uri="{FF2B5EF4-FFF2-40B4-BE49-F238E27FC236}">
-                <a16:creationId xmlns:a16="http://schemas.microsoft.com/office/drawing/2014/main" id="{68C41799-A62D-406C-8052-0A57DEEF311C}"/>
+                <a16:creationId xmlns:a16="http://schemas.microsoft.com/office/drawing/2014/main" id="{E54CAB12-ED75-4BA8-B8EF-1A51C5F429E2}"/>
               </a:ext>
             </a:extLst>
           </p:cNvPr>
@@ -15150,7 +15920,7 @@
     </p:spTree>
     <p:extLst>
       <p:ext uri="{BB962C8B-B14F-4D97-AF65-F5344CB8AC3E}">
-        <p14:creationId xmlns:p14="http://schemas.microsoft.com/office/powerpoint/2010/main" val="52846142"/>
+        <p14:creationId xmlns:p14="http://schemas.microsoft.com/office/powerpoint/2010/main" val="1810290118"/>
       </p:ext>
     </p:extLst>
   </p:cSld>
@@ -15181,7 +15951,7 @@
           <p:cNvPr id="7" name="">
             <a:extLst xmlns:a="http://schemas.openxmlformats.org/drawingml/2006/main">
               <a:ext uri="{FF2B5EF4-FFF2-40B4-BE49-F238E27FC236}">
-                <a16:creationId xmlns:a16="http://schemas.microsoft.com/office/drawing/2014/main" id="{D4BAD87E-648F-4761-8490-80D0FA139143}"/>
+                <a16:creationId xmlns:a16="http://schemas.microsoft.com/office/drawing/2014/main" id="{0CD23E4A-04DF-4D68-A6C2-E0C063B6E02C}"/>
               </a:ext>
             </a:extLst>
           </p:cNvPr>
@@ -15249,7 +16019,7 @@
           <p:cNvPr id="2" name="">
             <a:extLst xmlns:a="http://schemas.openxmlformats.org/drawingml/2006/main">
               <a:ext uri="{FF2B5EF4-FFF2-40B4-BE49-F238E27FC236}">
-                <a16:creationId xmlns:a16="http://schemas.microsoft.com/office/drawing/2014/main" id="{798E6855-9079-4C7D-B1B0-D0961F86E7CC}"/>
+                <a16:creationId xmlns:a16="http://schemas.microsoft.com/office/drawing/2014/main" id="{D516E593-35AC-4DB3-86FF-6E216DC6A959}"/>
               </a:ext>
             </a:extLst>
           </p:cNvPr>
@@ -15317,7 +16087,7 @@
           <p:cNvPr id="3" name="">
             <a:extLst xmlns:a="http://schemas.openxmlformats.org/drawingml/2006/main">
               <a:ext uri="{FF2B5EF4-FFF2-40B4-BE49-F238E27FC236}">
-                <a16:creationId xmlns:a16="http://schemas.microsoft.com/office/drawing/2014/main" id="{6551B54D-7CD7-4506-8202-4F79BB4527FF}"/>
+                <a16:creationId xmlns:a16="http://schemas.microsoft.com/office/drawing/2014/main" id="{276138B9-B581-43AE-AB9B-14B7CF695B12}"/>
               </a:ext>
             </a:extLst>
           </p:cNvPr>
@@ -15348,7 +16118,7 @@
           <p:cNvPr id="4" name="">
             <a:extLst xmlns:a="http://schemas.openxmlformats.org/drawingml/2006/main">
               <a:ext uri="{FF2B5EF4-FFF2-40B4-BE49-F238E27FC236}">
-                <a16:creationId xmlns:a16="http://schemas.microsoft.com/office/drawing/2014/main" id="{5C64A246-236F-42E5-99EA-8DBE6039348D}"/>
+                <a16:creationId xmlns:a16="http://schemas.microsoft.com/office/drawing/2014/main" id="{9E7B1C88-7AE5-46B5-9455-7927B563B891}"/>
               </a:ext>
             </a:extLst>
           </p:cNvPr>
@@ -15416,7 +16186,7 @@
           <p:cNvPr id="5" name="">
             <a:extLst xmlns:a="http://schemas.openxmlformats.org/drawingml/2006/main">
               <a:ext uri="{FF2B5EF4-FFF2-40B4-BE49-F238E27FC236}">
-                <a16:creationId xmlns:a16="http://schemas.microsoft.com/office/drawing/2014/main" id="{9F42581A-29CA-4D14-9930-0E16725B87D4}"/>
+                <a16:creationId xmlns:a16="http://schemas.microsoft.com/office/drawing/2014/main" id="{C41DE4C6-8AD2-4F8A-9C09-C8182FA87EAF}"/>
               </a:ext>
             </a:extLst>
           </p:cNvPr>
@@ -15484,7 +16254,7 @@
           <p:cNvPr id="6" name="">
             <a:extLst xmlns:a="http://schemas.openxmlformats.org/drawingml/2006/main">
               <a:ext uri="{FF2B5EF4-FFF2-40B4-BE49-F238E27FC236}">
-                <a16:creationId xmlns:a16="http://schemas.microsoft.com/office/drawing/2014/main" id="{6D6C79AF-46D6-4378-AC59-D977764E9CCA}"/>
+                <a16:creationId xmlns:a16="http://schemas.microsoft.com/office/drawing/2014/main" id="{51A3AE72-D48E-40C4-8193-2559BC59CDFE}"/>
               </a:ext>
             </a:extLst>
           </p:cNvPr>
@@ -15494,7 +16264,7 @@
           <p:nvPr/>
         </p:nvPicPr>
         <p:blipFill>
-          <a:blip xmlns:r="http://schemas.openxmlformats.org/officeDocument/2006/relationships" xmlns:a="http://schemas.openxmlformats.org/drawingml/2006/main" r:embed="R7870e9d87e404b0b"/>
+          <a:blip xmlns:r="http://schemas.openxmlformats.org/officeDocument/2006/relationships" xmlns:a="http://schemas.openxmlformats.org/drawingml/2006/main" r:embed="Rc037aa0c0e464c4d"/>
           <a:stretch xmlns:a="http://schemas.openxmlformats.org/drawingml/2006/main"/>
         </p:blipFill>
         <p:spPr>
@@ -15510,7 +16280,7 @@
     </p:spTree>
     <p:extLst>
       <p:ext uri="{BB962C8B-B14F-4D97-AF65-F5344CB8AC3E}">
-        <p14:creationId xmlns:p14="http://schemas.microsoft.com/office/powerpoint/2010/main" val="1044141992"/>
+        <p14:creationId xmlns:p14="http://schemas.microsoft.com/office/powerpoint/2010/main" val="1541967281"/>
       </p:ext>
     </p:extLst>
   </p:cSld>
@@ -15541,7 +16311,7 @@
           <p:cNvPr id="8" name="">
             <a:extLst xmlns:a="http://schemas.openxmlformats.org/drawingml/2006/main">
               <a:ext uri="{FF2B5EF4-FFF2-40B4-BE49-F238E27FC236}">
-                <a16:creationId xmlns:a16="http://schemas.microsoft.com/office/drawing/2014/main" id="{8C6565A3-ABF9-4BFD-A4E9-87F39EB23BEB}"/>
+                <a16:creationId xmlns:a16="http://schemas.microsoft.com/office/drawing/2014/main" id="{77B2DF70-B93D-417C-8BBA-813C7E4D9325}"/>
               </a:ext>
             </a:extLst>
           </p:cNvPr>
@@ -15609,7 +16379,7 @@
           <p:cNvPr id="2" name="">
             <a:extLst xmlns:a="http://schemas.openxmlformats.org/drawingml/2006/main">
               <a:ext uri="{FF2B5EF4-FFF2-40B4-BE49-F238E27FC236}">
-                <a16:creationId xmlns:a16="http://schemas.microsoft.com/office/drawing/2014/main" id="{6FE426CF-DE6F-43EC-BD43-6BA5B47B8BAF}"/>
+                <a16:creationId xmlns:a16="http://schemas.microsoft.com/office/drawing/2014/main" id="{6C5880D4-32A0-4913-BDE1-5DD892086DA8}"/>
               </a:ext>
             </a:extLst>
           </p:cNvPr>
@@ -15677,7 +16447,7 @@
           <p:cNvPr id="3" name="">
             <a:extLst xmlns:a="http://schemas.openxmlformats.org/drawingml/2006/main">
               <a:ext uri="{FF2B5EF4-FFF2-40B4-BE49-F238E27FC236}">
-                <a16:creationId xmlns:a16="http://schemas.microsoft.com/office/drawing/2014/main" id="{89748402-EBB4-45D0-9488-EB6579DFD0B3}"/>
+                <a16:creationId xmlns:a16="http://schemas.microsoft.com/office/drawing/2014/main" id="{AA6EB6DB-2D88-4540-85DA-F035E67AF294}"/>
               </a:ext>
             </a:extLst>
           </p:cNvPr>
@@ -15708,7 +16478,7 @@
           <p:cNvPr id="4" name="">
             <a:extLst xmlns:a="http://schemas.openxmlformats.org/drawingml/2006/main">
               <a:ext uri="{FF2B5EF4-FFF2-40B4-BE49-F238E27FC236}">
-                <a16:creationId xmlns:a16="http://schemas.microsoft.com/office/drawing/2014/main" id="{2A92A3D2-EEBB-4986-92F3-9A40F0CD14AA}"/>
+                <a16:creationId xmlns:a16="http://schemas.microsoft.com/office/drawing/2014/main" id="{638766D8-4B87-413B-9B99-97A8A9BF1A26}"/>
               </a:ext>
             </a:extLst>
           </p:cNvPr>
@@ -15776,7 +16546,7 @@
           <p:cNvPr id="5" name="">
             <a:extLst xmlns:a="http://schemas.openxmlformats.org/drawingml/2006/main">
               <a:ext uri="{FF2B5EF4-FFF2-40B4-BE49-F238E27FC236}">
-                <a16:creationId xmlns:a16="http://schemas.microsoft.com/office/drawing/2014/main" id="{8DEE81DB-7A6B-41BF-AF36-C20269CF9F0F}"/>
+                <a16:creationId xmlns:a16="http://schemas.microsoft.com/office/drawing/2014/main" id="{83E94EB9-BC1C-4781-9FFF-4B4CDB38C73A}"/>
               </a:ext>
             </a:extLst>
           </p:cNvPr>
@@ -15844,7 +16614,7 @@
           <p:cNvPr id="6" name="">
             <a:extLst xmlns:a="http://schemas.openxmlformats.org/drawingml/2006/main">
               <a:ext uri="{FF2B5EF4-FFF2-40B4-BE49-F238E27FC236}">
-                <a16:creationId xmlns:a16="http://schemas.microsoft.com/office/drawing/2014/main" id="{1B78EDA2-FD38-4B0F-A413-1F0A35A9A4C3}"/>
+                <a16:creationId xmlns:a16="http://schemas.microsoft.com/office/drawing/2014/main" id="{DC7F45B2-9CD7-40E4-9C67-11F971919984}"/>
               </a:ext>
             </a:extLst>
           </p:cNvPr>
@@ -16486,7 +17256,7 @@
           <p:cNvPr id="7" name="">
             <a:extLst xmlns:a="http://schemas.openxmlformats.org/drawingml/2006/main">
               <a:ext uri="{FF2B5EF4-FFF2-40B4-BE49-F238E27FC236}">
-                <a16:creationId xmlns:a16="http://schemas.microsoft.com/office/drawing/2014/main" id="{5C736002-7E94-4429-B879-85FA919E5E0A}"/>
+                <a16:creationId xmlns:a16="http://schemas.microsoft.com/office/drawing/2014/main" id="{C9BF8584-3A6C-4DD0-8FC9-EC2CD5CCB1BE}"/>
               </a:ext>
             </a:extLst>
           </p:cNvPr>
@@ -16552,7 +17322,7 @@
     </p:spTree>
     <p:extLst>
       <p:ext uri="{BB962C8B-B14F-4D97-AF65-F5344CB8AC3E}">
-        <p14:creationId xmlns:p14="http://schemas.microsoft.com/office/powerpoint/2010/main" val="1029308617"/>
+        <p14:creationId xmlns:p14="http://schemas.microsoft.com/office/powerpoint/2010/main" val="1614965643"/>
       </p:ext>
     </p:extLst>
   </p:cSld>
@@ -16583,7 +17353,7 @@
           <p:cNvPr id="60" name="">
             <a:extLst xmlns:a="http://schemas.openxmlformats.org/drawingml/2006/main">
               <a:ext uri="{FF2B5EF4-FFF2-40B4-BE49-F238E27FC236}">
-                <a16:creationId xmlns:a16="http://schemas.microsoft.com/office/drawing/2014/main" id="{A37409F9-2FE3-409F-BADB-01DF42416EC6}"/>
+                <a16:creationId xmlns:a16="http://schemas.microsoft.com/office/drawing/2014/main" id="{A993622C-E7BA-4A49-BC9F-BF17C315B9B5}"/>
               </a:ext>
             </a:extLst>
           </p:cNvPr>
@@ -16651,7 +17421,7 @@
           <p:cNvPr id="2" name="">
             <a:extLst xmlns:a="http://schemas.openxmlformats.org/drawingml/2006/main">
               <a:ext uri="{FF2B5EF4-FFF2-40B4-BE49-F238E27FC236}">
-                <a16:creationId xmlns:a16="http://schemas.microsoft.com/office/drawing/2014/main" id="{C564E6B6-D468-4F5F-9D52-B54BFAB24A0E}"/>
+                <a16:creationId xmlns:a16="http://schemas.microsoft.com/office/drawing/2014/main" id="{60C06A90-7489-4EBE-B140-2F50255846C8}"/>
               </a:ext>
             </a:extLst>
           </p:cNvPr>
@@ -16719,7 +17489,7 @@
           <p:cNvPr id="3" name="">
             <a:extLst xmlns:a="http://schemas.openxmlformats.org/drawingml/2006/main">
               <a:ext uri="{FF2B5EF4-FFF2-40B4-BE49-F238E27FC236}">
-                <a16:creationId xmlns:a16="http://schemas.microsoft.com/office/drawing/2014/main" id="{43CF8954-F641-40F7-BDB2-01658A75C613}"/>
+                <a16:creationId xmlns:a16="http://schemas.microsoft.com/office/drawing/2014/main" id="{028BA356-326D-4CC5-9CF2-84AB5394E73B}"/>
               </a:ext>
             </a:extLst>
           </p:cNvPr>
@@ -16750,7 +17520,7 @@
           <p:cNvPr id="4" name="">
             <a:extLst xmlns:a="http://schemas.openxmlformats.org/drawingml/2006/main">
               <a:ext uri="{FF2B5EF4-FFF2-40B4-BE49-F238E27FC236}">
-                <a16:creationId xmlns:a16="http://schemas.microsoft.com/office/drawing/2014/main" id="{E37E6135-E085-4917-B56F-62482A51E20E}"/>
+                <a16:creationId xmlns:a16="http://schemas.microsoft.com/office/drawing/2014/main" id="{7C505E2B-E992-4175-B708-490742CBD421}"/>
               </a:ext>
             </a:extLst>
           </p:cNvPr>
@@ -16818,7 +17588,7 @@
           <p:cNvPr id="5" name="">
             <a:extLst xmlns:a="http://schemas.openxmlformats.org/drawingml/2006/main">
               <a:ext uri="{FF2B5EF4-FFF2-40B4-BE49-F238E27FC236}">
-                <a16:creationId xmlns:a16="http://schemas.microsoft.com/office/drawing/2014/main" id="{6956A1DD-EA67-47D7-A60A-7B64910EA999}"/>
+                <a16:creationId xmlns:a16="http://schemas.microsoft.com/office/drawing/2014/main" id="{37CAD74D-D948-46A0-9CD2-BD681073B4BE}"/>
               </a:ext>
             </a:extLst>
           </p:cNvPr>
@@ -16886,7 +17656,7 @@
           <p:cNvPr id="6" name="">
             <a:extLst xmlns:a="http://schemas.openxmlformats.org/drawingml/2006/main">
               <a:ext uri="{FF2B5EF4-FFF2-40B4-BE49-F238E27FC236}">
-                <a16:creationId xmlns:a16="http://schemas.microsoft.com/office/drawing/2014/main" id="{822809BA-2459-41E5-B998-1875AEA123A7}"/>
+                <a16:creationId xmlns:a16="http://schemas.microsoft.com/office/drawing/2014/main" id="{5A9F2CB6-3607-4AEF-B172-DCB6C4E4B358}"/>
               </a:ext>
             </a:extLst>
           </p:cNvPr>
@@ -16916,7 +17686,7 @@
           <p:cNvPr id="7" name="">
             <a:extLst xmlns:a="http://schemas.openxmlformats.org/drawingml/2006/main">
               <a:ext uri="{FF2B5EF4-FFF2-40B4-BE49-F238E27FC236}">
-                <a16:creationId xmlns:a16="http://schemas.microsoft.com/office/drawing/2014/main" id="{16BDF698-0BB4-446E-9F3A-8F6F71B0D62A}"/>
+                <a16:creationId xmlns:a16="http://schemas.microsoft.com/office/drawing/2014/main" id="{87E8B350-49CC-4963-8392-13EA7F58DDCF}"/>
               </a:ext>
             </a:extLst>
           </p:cNvPr>
@@ -16984,7 +17754,7 @@
           <p:cNvPr id="8" name="">
             <a:extLst xmlns:a="http://schemas.openxmlformats.org/drawingml/2006/main">
               <a:ext uri="{FF2B5EF4-FFF2-40B4-BE49-F238E27FC236}">
-                <a16:creationId xmlns:a16="http://schemas.microsoft.com/office/drawing/2014/main" id="{F196ABE6-2D90-41C6-8B29-D2342299CE3E}"/>
+                <a16:creationId xmlns:a16="http://schemas.microsoft.com/office/drawing/2014/main" id="{102489C1-1967-4A49-AF03-D2ABD042AB61}"/>
               </a:ext>
             </a:extLst>
           </p:cNvPr>
@@ -17014,7 +17784,7 @@
           <p:cNvPr id="9" name="">
             <a:extLst xmlns:a="http://schemas.openxmlformats.org/drawingml/2006/main">
               <a:ext uri="{FF2B5EF4-FFF2-40B4-BE49-F238E27FC236}">
-                <a16:creationId xmlns:a16="http://schemas.microsoft.com/office/drawing/2014/main" id="{86C4342A-9DEE-47DD-A67F-75E268271883}"/>
+                <a16:creationId xmlns:a16="http://schemas.microsoft.com/office/drawing/2014/main" id="{FA168B6F-F73C-4E8D-BEBC-25D22B3A2734}"/>
               </a:ext>
             </a:extLst>
           </p:cNvPr>
@@ -17082,7 +17852,7 @@
           <p:cNvPr id="10" name="">
             <a:extLst xmlns:a="http://schemas.openxmlformats.org/drawingml/2006/main">
               <a:ext uri="{FF2B5EF4-FFF2-40B4-BE49-F238E27FC236}">
-                <a16:creationId xmlns:a16="http://schemas.microsoft.com/office/drawing/2014/main" id="{90920CB4-FD60-46AC-8BA0-9F0DA211D995}"/>
+                <a16:creationId xmlns:a16="http://schemas.microsoft.com/office/drawing/2014/main" id="{CD724DD0-7805-4630-BBC1-162B7F500CFC}"/>
               </a:ext>
             </a:extLst>
           </p:cNvPr>
@@ -17112,7 +17882,7 @@
           <p:cNvPr id="11" name="">
             <a:extLst xmlns:a="http://schemas.openxmlformats.org/drawingml/2006/main">
               <a:ext uri="{FF2B5EF4-FFF2-40B4-BE49-F238E27FC236}">
-                <a16:creationId xmlns:a16="http://schemas.microsoft.com/office/drawing/2014/main" id="{8D8AA159-14B9-4719-B74D-B15560BDCE34}"/>
+                <a16:creationId xmlns:a16="http://schemas.microsoft.com/office/drawing/2014/main" id="{CD5B9E63-263E-4FAC-A7FE-DED053A0621F}"/>
               </a:ext>
             </a:extLst>
           </p:cNvPr>
@@ -17180,7 +17950,7 @@
           <p:cNvPr id="12" name="">
             <a:extLst xmlns:a="http://schemas.openxmlformats.org/drawingml/2006/main">
               <a:ext uri="{FF2B5EF4-FFF2-40B4-BE49-F238E27FC236}">
-                <a16:creationId xmlns:a16="http://schemas.microsoft.com/office/drawing/2014/main" id="{5578409F-5B83-49A7-837B-EEAEE20394F5}"/>
+                <a16:creationId xmlns:a16="http://schemas.microsoft.com/office/drawing/2014/main" id="{AA218F1D-A088-4099-8438-E331462B4FFD}"/>
               </a:ext>
             </a:extLst>
           </p:cNvPr>
@@ -17210,7 +17980,7 @@
           <p:cNvPr id="13" name="">
             <a:extLst xmlns:a="http://schemas.openxmlformats.org/drawingml/2006/main">
               <a:ext uri="{FF2B5EF4-FFF2-40B4-BE49-F238E27FC236}">
-                <a16:creationId xmlns:a16="http://schemas.microsoft.com/office/drawing/2014/main" id="{5F27EA4F-C6B8-4C41-A92B-74FF4FDB9AA5}"/>
+                <a16:creationId xmlns:a16="http://schemas.microsoft.com/office/drawing/2014/main" id="{E9B7391D-CDB8-479E-9033-B6A7E529EBA2}"/>
               </a:ext>
             </a:extLst>
           </p:cNvPr>
@@ -17278,7 +18048,7 @@
           <p:cNvPr id="14" name="">
             <a:extLst xmlns:a="http://schemas.openxmlformats.org/drawingml/2006/main">
               <a:ext uri="{FF2B5EF4-FFF2-40B4-BE49-F238E27FC236}">
-                <a16:creationId xmlns:a16="http://schemas.microsoft.com/office/drawing/2014/main" id="{EABD7038-8B40-4F15-9825-3C10AF877ED1}"/>
+                <a16:creationId xmlns:a16="http://schemas.microsoft.com/office/drawing/2014/main" id="{98D0C8FE-9A1A-41FF-9767-D9BC370AF968}"/>
               </a:ext>
             </a:extLst>
           </p:cNvPr>
@@ -17309,7 +18079,7 @@
           <p:cNvPr id="15" name="">
             <a:extLst xmlns:a="http://schemas.openxmlformats.org/drawingml/2006/main">
               <a:ext uri="{FF2B5EF4-FFF2-40B4-BE49-F238E27FC236}">
-                <a16:creationId xmlns:a16="http://schemas.microsoft.com/office/drawing/2014/main" id="{DE11315F-2A71-4FF9-B51C-9A748525EA74}"/>
+                <a16:creationId xmlns:a16="http://schemas.microsoft.com/office/drawing/2014/main" id="{7C165797-E18C-4639-AA7C-749C070B3E97}"/>
               </a:ext>
             </a:extLst>
           </p:cNvPr>
@@ -17340,7 +18110,7 @@
           <p:cNvPr id="16" name="">
             <a:extLst xmlns:a="http://schemas.openxmlformats.org/drawingml/2006/main">
               <a:ext uri="{FF2B5EF4-FFF2-40B4-BE49-F238E27FC236}">
-                <a16:creationId xmlns:a16="http://schemas.microsoft.com/office/drawing/2014/main" id="{3215EC93-B43C-4E50-AE22-6C8D9E434CF5}"/>
+                <a16:creationId xmlns:a16="http://schemas.microsoft.com/office/drawing/2014/main" id="{F91CA4FA-3906-4179-A982-08823C59E9EB}"/>
               </a:ext>
             </a:extLst>
           </p:cNvPr>
@@ -17371,7 +18141,7 @@
           <p:cNvPr id="17" name="">
             <a:extLst xmlns:a="http://schemas.openxmlformats.org/drawingml/2006/main">
               <a:ext uri="{FF2B5EF4-FFF2-40B4-BE49-F238E27FC236}">
-                <a16:creationId xmlns:a16="http://schemas.microsoft.com/office/drawing/2014/main" id="{57BEDB51-92E0-4DF7-9F28-16032397F5DA}"/>
+                <a16:creationId xmlns:a16="http://schemas.microsoft.com/office/drawing/2014/main" id="{6DE52BA7-2263-4A54-AC84-656046FD525C}"/>
               </a:ext>
             </a:extLst>
           </p:cNvPr>
@@ -17401,7 +18171,7 @@
           <p:cNvPr id="18" name="">
             <a:extLst xmlns:a="http://schemas.openxmlformats.org/drawingml/2006/main">
               <a:ext uri="{FF2B5EF4-FFF2-40B4-BE49-F238E27FC236}">
-                <a16:creationId xmlns:a16="http://schemas.microsoft.com/office/drawing/2014/main" id="{87724C67-FBF6-4230-BB15-AAF0E2C8D105}"/>
+                <a16:creationId xmlns:a16="http://schemas.microsoft.com/office/drawing/2014/main" id="{13DD1083-9AB1-4619-AA2D-25DBA7262FD8}"/>
               </a:ext>
             </a:extLst>
           </p:cNvPr>
@@ -17469,7 +18239,7 @@
           <p:cNvPr id="19" name="">
             <a:extLst xmlns:a="http://schemas.openxmlformats.org/drawingml/2006/main">
               <a:ext uri="{FF2B5EF4-FFF2-40B4-BE49-F238E27FC236}">
-                <a16:creationId xmlns:a16="http://schemas.microsoft.com/office/drawing/2014/main" id="{6B674F83-EFC0-485B-AB03-D5831E2AF4F1}"/>
+                <a16:creationId xmlns:a16="http://schemas.microsoft.com/office/drawing/2014/main" id="{C9B6C498-6E64-4843-B78E-E0B17AED3EC9}"/>
               </a:ext>
             </a:extLst>
           </p:cNvPr>
@@ -17499,7 +18269,7 @@
           <p:cNvPr id="20" name="">
             <a:extLst xmlns:a="http://schemas.openxmlformats.org/drawingml/2006/main">
               <a:ext uri="{FF2B5EF4-FFF2-40B4-BE49-F238E27FC236}">
-                <a16:creationId xmlns:a16="http://schemas.microsoft.com/office/drawing/2014/main" id="{9178D03D-829D-4622-8645-0E8D22DC935D}"/>
+                <a16:creationId xmlns:a16="http://schemas.microsoft.com/office/drawing/2014/main" id="{691B28F6-5EF5-43B9-9CD7-5887AFF7E118}"/>
               </a:ext>
             </a:extLst>
           </p:cNvPr>
@@ -17567,7 +18337,7 @@
           <p:cNvPr id="21" name="">
             <a:extLst xmlns:a="http://schemas.openxmlformats.org/drawingml/2006/main">
               <a:ext uri="{FF2B5EF4-FFF2-40B4-BE49-F238E27FC236}">
-                <a16:creationId xmlns:a16="http://schemas.microsoft.com/office/drawing/2014/main" id="{8C25E772-D8B0-41FD-AE57-C47B1B4B9DD8}"/>
+                <a16:creationId xmlns:a16="http://schemas.microsoft.com/office/drawing/2014/main" id="{AB758B74-ED07-4AEB-B163-4369972A6FF7}"/>
               </a:ext>
             </a:extLst>
           </p:cNvPr>
@@ -17598,7 +18368,7 @@
           <p:cNvPr id="22" name="">
             <a:extLst xmlns:a="http://schemas.openxmlformats.org/drawingml/2006/main">
               <a:ext uri="{FF2B5EF4-FFF2-40B4-BE49-F238E27FC236}">
-                <a16:creationId xmlns:a16="http://schemas.microsoft.com/office/drawing/2014/main" id="{A3DD1AF6-C61F-4705-A578-F4B4601B5E7E}"/>
+                <a16:creationId xmlns:a16="http://schemas.microsoft.com/office/drawing/2014/main" id="{AF2D1722-EC39-4B22-9E57-D81908F247B2}"/>
               </a:ext>
             </a:extLst>
           </p:cNvPr>
@@ -17629,7 +18399,7 @@
           <p:cNvPr id="23" name="">
             <a:extLst xmlns:a="http://schemas.openxmlformats.org/drawingml/2006/main">
               <a:ext uri="{FF2B5EF4-FFF2-40B4-BE49-F238E27FC236}">
-                <a16:creationId xmlns:a16="http://schemas.microsoft.com/office/drawing/2014/main" id="{B49AE891-A4ED-4B57-9794-4576A75B2CAD}"/>
+                <a16:creationId xmlns:a16="http://schemas.microsoft.com/office/drawing/2014/main" id="{DA95A0B7-5BF3-4250-A3CB-6E6578829A54}"/>
               </a:ext>
             </a:extLst>
           </p:cNvPr>
@@ -17660,7 +18430,7 @@
           <p:cNvPr id="24" name="">
             <a:extLst xmlns:a="http://schemas.openxmlformats.org/drawingml/2006/main">
               <a:ext uri="{FF2B5EF4-FFF2-40B4-BE49-F238E27FC236}">
-                <a16:creationId xmlns:a16="http://schemas.microsoft.com/office/drawing/2014/main" id="{2787821D-3085-46DA-9C89-AC66C1E7BB4A}"/>
+                <a16:creationId xmlns:a16="http://schemas.microsoft.com/office/drawing/2014/main" id="{1D11758D-5E9A-4AD0-928E-F1BD64E2DA63}"/>
               </a:ext>
             </a:extLst>
           </p:cNvPr>
@@ -17728,7 +18498,7 @@
           <p:cNvPr id="25" name="">
             <a:extLst xmlns:a="http://schemas.openxmlformats.org/drawingml/2006/main">
               <a:ext uri="{FF2B5EF4-FFF2-40B4-BE49-F238E27FC236}">
-                <a16:creationId xmlns:a16="http://schemas.microsoft.com/office/drawing/2014/main" id="{FF66CB9A-A70C-47B5-9EDA-817E312D4906}"/>
+                <a16:creationId xmlns:a16="http://schemas.microsoft.com/office/drawing/2014/main" id="{7B84C7CF-B4D9-4E1A-B937-9A63E7598802}"/>
               </a:ext>
             </a:extLst>
           </p:cNvPr>
@@ -17759,7 +18529,7 @@
           <p:cNvPr id="26" name="">
             <a:extLst xmlns:a="http://schemas.openxmlformats.org/drawingml/2006/main">
               <a:ext uri="{FF2B5EF4-FFF2-40B4-BE49-F238E27FC236}">
-                <a16:creationId xmlns:a16="http://schemas.microsoft.com/office/drawing/2014/main" id="{7FD6C81C-7458-4918-A4E9-03CACB8C6DFD}"/>
+                <a16:creationId xmlns:a16="http://schemas.microsoft.com/office/drawing/2014/main" id="{B7EED9E1-454F-498C-A768-8675DB1E21AC}"/>
               </a:ext>
             </a:extLst>
           </p:cNvPr>
@@ -17790,7 +18560,7 @@
           <p:cNvPr id="27" name="">
             <a:extLst xmlns:a="http://schemas.openxmlformats.org/drawingml/2006/main">
               <a:ext uri="{FF2B5EF4-FFF2-40B4-BE49-F238E27FC236}">
-                <a16:creationId xmlns:a16="http://schemas.microsoft.com/office/drawing/2014/main" id="{AEC97A86-D967-4036-88AC-825479EEFEE3}"/>
+                <a16:creationId xmlns:a16="http://schemas.microsoft.com/office/drawing/2014/main" id="{6137228B-D600-4F29-AFD6-4357E267749E}"/>
               </a:ext>
             </a:extLst>
           </p:cNvPr>
@@ -17821,7 +18591,7 @@
           <p:cNvPr id="28" name="">
             <a:extLst xmlns:a="http://schemas.openxmlformats.org/drawingml/2006/main">
               <a:ext uri="{FF2B5EF4-FFF2-40B4-BE49-F238E27FC236}">
-                <a16:creationId xmlns:a16="http://schemas.microsoft.com/office/drawing/2014/main" id="{397ED61A-F46D-403D-B411-3FE2347CD52C}"/>
+                <a16:creationId xmlns:a16="http://schemas.microsoft.com/office/drawing/2014/main" id="{2E478E20-47FF-4C8E-B1F7-AB2877ACD4C5}"/>
               </a:ext>
             </a:extLst>
           </p:cNvPr>
@@ -17852,7 +18622,7 @@
           <p:cNvPr id="29" name="">
             <a:extLst xmlns:a="http://schemas.openxmlformats.org/drawingml/2006/main">
               <a:ext uri="{FF2B5EF4-FFF2-40B4-BE49-F238E27FC236}">
-                <a16:creationId xmlns:a16="http://schemas.microsoft.com/office/drawing/2014/main" id="{17BBC860-386D-4C2B-97C5-231908DF08EA}"/>
+                <a16:creationId xmlns:a16="http://schemas.microsoft.com/office/drawing/2014/main" id="{0A7A60AC-B5FD-4F69-AF1A-A5C1928C240A}"/>
               </a:ext>
             </a:extLst>
           </p:cNvPr>
@@ -17883,7 +18653,7 @@
           <p:cNvPr id="30" name="">
             <a:extLst xmlns:a="http://schemas.openxmlformats.org/drawingml/2006/main">
               <a:ext uri="{FF2B5EF4-FFF2-40B4-BE49-F238E27FC236}">
-                <a16:creationId xmlns:a16="http://schemas.microsoft.com/office/drawing/2014/main" id="{BED23690-B27D-41D4-9BE2-49C6F87256BA}"/>
+                <a16:creationId xmlns:a16="http://schemas.microsoft.com/office/drawing/2014/main" id="{ED6DBCE8-6622-4C81-9F06-8E75AFC96FC5}"/>
               </a:ext>
             </a:extLst>
           </p:cNvPr>
@@ -17951,7 +18721,7 @@
           <p:cNvPr id="31" name="">
             <a:extLst xmlns:a="http://schemas.openxmlformats.org/drawingml/2006/main">
               <a:ext uri="{FF2B5EF4-FFF2-40B4-BE49-F238E27FC236}">
-                <a16:creationId xmlns:a16="http://schemas.microsoft.com/office/drawing/2014/main" id="{BF2C5BDC-BEC9-4AA0-9A38-FB26E724C7BF}"/>
+                <a16:creationId xmlns:a16="http://schemas.microsoft.com/office/drawing/2014/main" id="{D0A67BD0-4F68-4A1E-B135-9AA3A2154375}"/>
               </a:ext>
             </a:extLst>
           </p:cNvPr>
@@ -17981,7 +18751,7 @@
           <p:cNvPr id="32" name="">
             <a:extLst xmlns:a="http://schemas.openxmlformats.org/drawingml/2006/main">
               <a:ext uri="{FF2B5EF4-FFF2-40B4-BE49-F238E27FC236}">
-                <a16:creationId xmlns:a16="http://schemas.microsoft.com/office/drawing/2014/main" id="{8E196570-4916-4F39-92B7-73DCF9CED8FF}"/>
+                <a16:creationId xmlns:a16="http://schemas.microsoft.com/office/drawing/2014/main" id="{9EE86948-B927-490A-9974-F0A75853EB62}"/>
               </a:ext>
             </a:extLst>
           </p:cNvPr>
@@ -18072,7 +18842,7 @@
           <p:cNvPr id="33" name="">
             <a:extLst xmlns:a="http://schemas.openxmlformats.org/drawingml/2006/main">
               <a:ext uri="{FF2B5EF4-FFF2-40B4-BE49-F238E27FC236}">
-                <a16:creationId xmlns:a16="http://schemas.microsoft.com/office/drawing/2014/main" id="{171CB0ED-7786-489E-8923-F31D5CB3614D}"/>
+                <a16:creationId xmlns:a16="http://schemas.microsoft.com/office/drawing/2014/main" id="{49ECFAC5-1899-42F2-A6A8-68D929E8D85A}"/>
               </a:ext>
             </a:extLst>
           </p:cNvPr>
@@ -18103,7 +18873,7 @@
           <p:cNvPr id="34" name="">
             <a:extLst xmlns:a="http://schemas.openxmlformats.org/drawingml/2006/main">
               <a:ext uri="{FF2B5EF4-FFF2-40B4-BE49-F238E27FC236}">
-                <a16:creationId xmlns:a16="http://schemas.microsoft.com/office/drawing/2014/main" id="{FC56DCF6-D1A9-4211-85AF-647FD84C7BDF}"/>
+                <a16:creationId xmlns:a16="http://schemas.microsoft.com/office/drawing/2014/main" id="{3EA7E5D1-EA01-41E2-BBF1-1068E4641CF9}"/>
               </a:ext>
             </a:extLst>
           </p:cNvPr>
@@ -18134,7 +18904,7 @@
           <p:cNvPr id="35" name="">
             <a:extLst xmlns:a="http://schemas.openxmlformats.org/drawingml/2006/main">
               <a:ext uri="{FF2B5EF4-FFF2-40B4-BE49-F238E27FC236}">
-                <a16:creationId xmlns:a16="http://schemas.microsoft.com/office/drawing/2014/main" id="{EA616189-80CC-4A52-9599-38258BD00723}"/>
+                <a16:creationId xmlns:a16="http://schemas.microsoft.com/office/drawing/2014/main" id="{C06107BA-FC57-425E-BF7B-AC2EC5D68815}"/>
               </a:ext>
             </a:extLst>
           </p:cNvPr>
@@ -18165,7 +18935,7 @@
           <p:cNvPr id="36" name="">
             <a:extLst xmlns:a="http://schemas.openxmlformats.org/drawingml/2006/main">
               <a:ext uri="{FF2B5EF4-FFF2-40B4-BE49-F238E27FC236}">
-                <a16:creationId xmlns:a16="http://schemas.microsoft.com/office/drawing/2014/main" id="{5893F259-E582-4E92-979A-4F1942CE9EC4}"/>
+                <a16:creationId xmlns:a16="http://schemas.microsoft.com/office/drawing/2014/main" id="{93838043-680A-4232-9D87-0648898CBA10}"/>
               </a:ext>
             </a:extLst>
           </p:cNvPr>
@@ -18196,7 +18966,7 @@
           <p:cNvPr id="37" name="">
             <a:extLst xmlns:a="http://schemas.openxmlformats.org/drawingml/2006/main">
               <a:ext uri="{FF2B5EF4-FFF2-40B4-BE49-F238E27FC236}">
-                <a16:creationId xmlns:a16="http://schemas.microsoft.com/office/drawing/2014/main" id="{B09F7F3E-DF23-48A1-B156-8E6214DB91F5}"/>
+                <a16:creationId xmlns:a16="http://schemas.microsoft.com/office/drawing/2014/main" id="{005D8437-88B2-468B-8ADE-77D73CC482FA}"/>
               </a:ext>
             </a:extLst>
           </p:cNvPr>
@@ -18227,7 +18997,7 @@
           <p:cNvPr id="38" name="">
             <a:extLst xmlns:a="http://schemas.openxmlformats.org/drawingml/2006/main">
               <a:ext uri="{FF2B5EF4-FFF2-40B4-BE49-F238E27FC236}">
-                <a16:creationId xmlns:a16="http://schemas.microsoft.com/office/drawing/2014/main" id="{88CDC5D9-2D7F-448E-89FC-35915880E0FB}"/>
+                <a16:creationId xmlns:a16="http://schemas.microsoft.com/office/drawing/2014/main" id="{EEB85FA9-334F-432B-A89F-CD960F339590}"/>
               </a:ext>
             </a:extLst>
           </p:cNvPr>
@@ -18295,7 +19065,7 @@
           <p:cNvPr id="39" name="">
             <a:extLst xmlns:a="http://schemas.openxmlformats.org/drawingml/2006/main">
               <a:ext uri="{FF2B5EF4-FFF2-40B4-BE49-F238E27FC236}">
-                <a16:creationId xmlns:a16="http://schemas.microsoft.com/office/drawing/2014/main" id="{5E8A7231-F64F-4BD6-BACB-91F10DF33DE6}"/>
+                <a16:creationId xmlns:a16="http://schemas.microsoft.com/office/drawing/2014/main" id="{4B79625C-F1A1-472C-8415-B75813AA580F}"/>
               </a:ext>
             </a:extLst>
           </p:cNvPr>
@@ -18325,7 +19095,7 @@
           <p:cNvPr id="40" name="">
             <a:extLst xmlns:a="http://schemas.openxmlformats.org/drawingml/2006/main">
               <a:ext uri="{FF2B5EF4-FFF2-40B4-BE49-F238E27FC236}">
-                <a16:creationId xmlns:a16="http://schemas.microsoft.com/office/drawing/2014/main" id="{45F710CC-4A1D-4074-B191-8F88A5CE6652}"/>
+                <a16:creationId xmlns:a16="http://schemas.microsoft.com/office/drawing/2014/main" id="{45381072-3741-42A7-B235-C3F3A10A3C32}"/>
               </a:ext>
             </a:extLst>
           </p:cNvPr>
@@ -18416,7 +19186,7 @@
           <p:cNvPr id="41" name="">
             <a:extLst xmlns:a="http://schemas.openxmlformats.org/drawingml/2006/main">
               <a:ext uri="{FF2B5EF4-FFF2-40B4-BE49-F238E27FC236}">
-                <a16:creationId xmlns:a16="http://schemas.microsoft.com/office/drawing/2014/main" id="{5A7F54FF-A74A-478E-960B-B47CD8B6094A}"/>
+                <a16:creationId xmlns:a16="http://schemas.microsoft.com/office/drawing/2014/main" id="{75FEB602-137D-4E10-B3E6-C7750E917367}"/>
               </a:ext>
             </a:extLst>
           </p:cNvPr>
@@ -18446,7 +19216,7 @@
           <p:cNvPr id="42" name="">
             <a:extLst xmlns:a="http://schemas.openxmlformats.org/drawingml/2006/main">
               <a:ext uri="{FF2B5EF4-FFF2-40B4-BE49-F238E27FC236}">
-                <a16:creationId xmlns:a16="http://schemas.microsoft.com/office/drawing/2014/main" id="{5AC7AD25-D649-4596-823A-30F7A14ACB5A}"/>
+                <a16:creationId xmlns:a16="http://schemas.microsoft.com/office/drawing/2014/main" id="{C264C442-588F-4468-81A2-9FAD2AC5E428}"/>
               </a:ext>
             </a:extLst>
           </p:cNvPr>
@@ -18537,7 +19307,7 @@
           <p:cNvPr id="43" name="">
             <a:extLst xmlns:a="http://schemas.openxmlformats.org/drawingml/2006/main">
               <a:ext uri="{FF2B5EF4-FFF2-40B4-BE49-F238E27FC236}">
-                <a16:creationId xmlns:a16="http://schemas.microsoft.com/office/drawing/2014/main" id="{0F354C95-D9B0-48BA-9DB8-DF192395138A}"/>
+                <a16:creationId xmlns:a16="http://schemas.microsoft.com/office/drawing/2014/main" id="{3C510E22-8D10-4BAE-AF12-34B60E3FCBBC}"/>
               </a:ext>
             </a:extLst>
           </p:cNvPr>
@@ -18568,7 +19338,7 @@
           <p:cNvPr id="44" name="">
             <a:extLst xmlns:a="http://schemas.openxmlformats.org/drawingml/2006/main">
               <a:ext uri="{FF2B5EF4-FFF2-40B4-BE49-F238E27FC236}">
-                <a16:creationId xmlns:a16="http://schemas.microsoft.com/office/drawing/2014/main" id="{E05A5C83-9E86-4E55-BFC7-E2F5FB976946}"/>
+                <a16:creationId xmlns:a16="http://schemas.microsoft.com/office/drawing/2014/main" id="{F10A3AE1-C9CA-4645-86D8-F04660B17DAE}"/>
               </a:ext>
             </a:extLst>
           </p:cNvPr>
@@ -18599,7 +19369,7 @@
           <p:cNvPr id="45" name="">
             <a:extLst xmlns:a="http://schemas.openxmlformats.org/drawingml/2006/main">
               <a:ext uri="{FF2B5EF4-FFF2-40B4-BE49-F238E27FC236}">
-                <a16:creationId xmlns:a16="http://schemas.microsoft.com/office/drawing/2014/main" id="{9E84CFA9-5ED8-4103-BC2D-FA4E750BA161}"/>
+                <a16:creationId xmlns:a16="http://schemas.microsoft.com/office/drawing/2014/main" id="{DCDB7A72-0005-4EEC-BD73-7791B005D8DA}"/>
               </a:ext>
             </a:extLst>
           </p:cNvPr>
@@ -18630,7 +19400,7 @@
           <p:cNvPr id="46" name="">
             <a:extLst xmlns:a="http://schemas.openxmlformats.org/drawingml/2006/main">
               <a:ext uri="{FF2B5EF4-FFF2-40B4-BE49-F238E27FC236}">
-                <a16:creationId xmlns:a16="http://schemas.microsoft.com/office/drawing/2014/main" id="{9A5F7EAB-82C1-45AF-9AF0-089B040AC1A0}"/>
+                <a16:creationId xmlns:a16="http://schemas.microsoft.com/office/drawing/2014/main" id="{B2AF6519-16E2-4DD8-AAFD-924FC58A8D28}"/>
               </a:ext>
             </a:extLst>
           </p:cNvPr>
@@ -18661,7 +19431,7 @@
           <p:cNvPr id="47" name="">
             <a:extLst xmlns:a="http://schemas.openxmlformats.org/drawingml/2006/main">
               <a:ext uri="{FF2B5EF4-FFF2-40B4-BE49-F238E27FC236}">
-                <a16:creationId xmlns:a16="http://schemas.microsoft.com/office/drawing/2014/main" id="{97B25E99-FA50-4027-BAE7-500E84117F11}"/>
+                <a16:creationId xmlns:a16="http://schemas.microsoft.com/office/drawing/2014/main" id="{23330F9B-E15D-4961-92E4-8BDB6E600262}"/>
               </a:ext>
             </a:extLst>
           </p:cNvPr>
@@ -18692,7 +19462,7 @@
           <p:cNvPr id="48" name="">
             <a:extLst xmlns:a="http://schemas.openxmlformats.org/drawingml/2006/main">
               <a:ext uri="{FF2B5EF4-FFF2-40B4-BE49-F238E27FC236}">
-                <a16:creationId xmlns:a16="http://schemas.microsoft.com/office/drawing/2014/main" id="{6BBCE47F-2ABB-4ECE-8247-BD5FB2B5BAFE}"/>
+                <a16:creationId xmlns:a16="http://schemas.microsoft.com/office/drawing/2014/main" id="{AF425457-D581-4167-8E6D-0B4965BD2971}"/>
               </a:ext>
             </a:extLst>
           </p:cNvPr>
@@ -18723,7 +19493,7 @@
           <p:cNvPr id="49" name="">
             <a:extLst xmlns:a="http://schemas.openxmlformats.org/drawingml/2006/main">
               <a:ext uri="{FF2B5EF4-FFF2-40B4-BE49-F238E27FC236}">
-                <a16:creationId xmlns:a16="http://schemas.microsoft.com/office/drawing/2014/main" id="{5B519DE9-F750-4663-A495-3315F6B79FE5}"/>
+                <a16:creationId xmlns:a16="http://schemas.microsoft.com/office/drawing/2014/main" id="{AC8B62A0-E979-470B-A0B6-2D6FAE2C4F54}"/>
               </a:ext>
             </a:extLst>
           </p:cNvPr>
@@ -18754,7 +19524,7 @@
           <p:cNvPr id="50" name="">
             <a:extLst xmlns:a="http://schemas.openxmlformats.org/drawingml/2006/main">
               <a:ext uri="{FF2B5EF4-FFF2-40B4-BE49-F238E27FC236}">
-                <a16:creationId xmlns:a16="http://schemas.microsoft.com/office/drawing/2014/main" id="{77B3E283-AB8C-4061-ACFC-7CE6A74F3240}"/>
+                <a16:creationId xmlns:a16="http://schemas.microsoft.com/office/drawing/2014/main" id="{6D691D04-DBC0-43A0-8116-017399217BD7}"/>
               </a:ext>
             </a:extLst>
           </p:cNvPr>
@@ -18785,7 +19555,7 @@
           <p:cNvPr id="51" name="">
             <a:extLst xmlns:a="http://schemas.openxmlformats.org/drawingml/2006/main">
               <a:ext uri="{FF2B5EF4-FFF2-40B4-BE49-F238E27FC236}">
-                <a16:creationId xmlns:a16="http://schemas.microsoft.com/office/drawing/2014/main" id="{EE29853A-95CC-4FA7-889C-9500F6B8BC6E}"/>
+                <a16:creationId xmlns:a16="http://schemas.microsoft.com/office/drawing/2014/main" id="{EDD89DB6-E457-437C-8DE7-CFBA89C16B63}"/>
               </a:ext>
             </a:extLst>
           </p:cNvPr>
@@ -18816,7 +19586,7 @@
           <p:cNvPr id="52" name="">
             <a:extLst xmlns:a="http://schemas.openxmlformats.org/drawingml/2006/main">
               <a:ext uri="{FF2B5EF4-FFF2-40B4-BE49-F238E27FC236}">
-                <a16:creationId xmlns:a16="http://schemas.microsoft.com/office/drawing/2014/main" id="{4D1A8457-98C9-4472-9D01-9C64983FCAC8}"/>
+                <a16:creationId xmlns:a16="http://schemas.microsoft.com/office/drawing/2014/main" id="{7FEA73F3-84F9-4D7F-84E9-79579C7B349F}"/>
               </a:ext>
             </a:extLst>
           </p:cNvPr>
@@ -18884,7 +19654,7 @@
           <p:cNvPr id="53" name="">
             <a:extLst xmlns:a="http://schemas.openxmlformats.org/drawingml/2006/main">
               <a:ext uri="{FF2B5EF4-FFF2-40B4-BE49-F238E27FC236}">
-                <a16:creationId xmlns:a16="http://schemas.microsoft.com/office/drawing/2014/main" id="{A8EA5EE6-8A16-43D9-97F7-408BAE1448F3}"/>
+                <a16:creationId xmlns:a16="http://schemas.microsoft.com/office/drawing/2014/main" id="{1742E73D-7A0A-4118-9FA8-804DF8066324}"/>
               </a:ext>
             </a:extLst>
           </p:cNvPr>
@@ -18915,7 +19685,7 @@
           <p:cNvPr id="54" name="">
             <a:extLst xmlns:a="http://schemas.openxmlformats.org/drawingml/2006/main">
               <a:ext uri="{FF2B5EF4-FFF2-40B4-BE49-F238E27FC236}">
-                <a16:creationId xmlns:a16="http://schemas.microsoft.com/office/drawing/2014/main" id="{3FCEA35B-119C-47B8-95E1-BB6FE653D2E1}"/>
+                <a16:creationId xmlns:a16="http://schemas.microsoft.com/office/drawing/2014/main" id="{68284A5E-76F3-421E-8958-8221DB0B6E6F}"/>
               </a:ext>
             </a:extLst>
           </p:cNvPr>
@@ -18946,7 +19716,7 @@
           <p:cNvPr id="55" name="">
             <a:extLst xmlns:a="http://schemas.openxmlformats.org/drawingml/2006/main">
               <a:ext uri="{FF2B5EF4-FFF2-40B4-BE49-F238E27FC236}">
-                <a16:creationId xmlns:a16="http://schemas.microsoft.com/office/drawing/2014/main" id="{48BF27F2-38C2-4314-A7F7-70DD7C5D7C50}"/>
+                <a16:creationId xmlns:a16="http://schemas.microsoft.com/office/drawing/2014/main" id="{7092AF35-C92A-4277-8B01-1751D55323AA}"/>
               </a:ext>
             </a:extLst>
           </p:cNvPr>
@@ -18977,7 +19747,7 @@
           <p:cNvPr id="56" name="">
             <a:extLst xmlns:a="http://schemas.openxmlformats.org/drawingml/2006/main">
               <a:ext uri="{FF2B5EF4-FFF2-40B4-BE49-F238E27FC236}">
-                <a16:creationId xmlns:a16="http://schemas.microsoft.com/office/drawing/2014/main" id="{2DC7D3D8-544B-413F-9D0B-74B30D3EBD8C}"/>
+                <a16:creationId xmlns:a16="http://schemas.microsoft.com/office/drawing/2014/main" id="{2DE64FB7-402B-4668-BA01-124FFB484938}"/>
               </a:ext>
             </a:extLst>
           </p:cNvPr>
@@ -19007,7 +19777,7 @@
           <p:cNvPr id="57" name="">
             <a:extLst xmlns:a="http://schemas.openxmlformats.org/drawingml/2006/main">
               <a:ext uri="{FF2B5EF4-FFF2-40B4-BE49-F238E27FC236}">
-                <a16:creationId xmlns:a16="http://schemas.microsoft.com/office/drawing/2014/main" id="{2D6F1C01-2487-44AA-BF3F-1E83AF2ADC1E}"/>
+                <a16:creationId xmlns:a16="http://schemas.microsoft.com/office/drawing/2014/main" id="{DD785565-86B4-46E3-A3AF-D3059427961F}"/>
               </a:ext>
             </a:extLst>
           </p:cNvPr>
@@ -19075,7 +19845,7 @@
           <p:cNvPr id="58" name="">
             <a:extLst xmlns:a="http://schemas.openxmlformats.org/drawingml/2006/main">
               <a:ext uri="{FF2B5EF4-FFF2-40B4-BE49-F238E27FC236}">
-                <a16:creationId xmlns:a16="http://schemas.microsoft.com/office/drawing/2014/main" id="{E9255172-4C41-4BB8-83E1-AA881A7F3C0D}"/>
+                <a16:creationId xmlns:a16="http://schemas.microsoft.com/office/drawing/2014/main" id="{55A14CCA-138C-437C-B05D-7EF9FCE2E291}"/>
               </a:ext>
             </a:extLst>
           </p:cNvPr>
@@ -19143,7 +19913,7 @@
           <p:cNvPr id="59" name="">
             <a:extLst xmlns:a="http://schemas.openxmlformats.org/drawingml/2006/main">
               <a:ext uri="{FF2B5EF4-FFF2-40B4-BE49-F238E27FC236}">
-                <a16:creationId xmlns:a16="http://schemas.microsoft.com/office/drawing/2014/main" id="{10247F03-0E84-4ED7-A850-19F58F4E67EC}"/>
+                <a16:creationId xmlns:a16="http://schemas.microsoft.com/office/drawing/2014/main" id="{FA9D4F9A-32AA-4611-8134-20D723781C40}"/>
               </a:ext>
             </a:extLst>
           </p:cNvPr>
@@ -19380,7 +20150,7 @@
     </p:spTree>
     <p:extLst>
       <p:ext uri="{BB962C8B-B14F-4D97-AF65-F5344CB8AC3E}">
-        <p14:creationId xmlns:p14="http://schemas.microsoft.com/office/powerpoint/2010/main" val="1482744867"/>
+        <p14:creationId xmlns:p14="http://schemas.microsoft.com/office/powerpoint/2010/main" val="519105218"/>
       </p:ext>
     </p:extLst>
   </p:cSld>
@@ -19411,7 +20181,7 @@
           <p:cNvPr id="48" name="">
             <a:extLst xmlns:a="http://schemas.openxmlformats.org/drawingml/2006/main">
               <a:ext uri="{FF2B5EF4-FFF2-40B4-BE49-F238E27FC236}">
-                <a16:creationId xmlns:a16="http://schemas.microsoft.com/office/drawing/2014/main" id="{0F02D657-2F42-412A-8F0B-972B0EB2A36B}"/>
+                <a16:creationId xmlns:a16="http://schemas.microsoft.com/office/drawing/2014/main" id="{948B51E3-E538-4CC4-B871-B3ACF07F598E}"/>
               </a:ext>
             </a:extLst>
           </p:cNvPr>
@@ -19479,7 +20249,7 @@
           <p:cNvPr id="2" name="">
             <a:extLst xmlns:a="http://schemas.openxmlformats.org/drawingml/2006/main">
               <a:ext uri="{FF2B5EF4-FFF2-40B4-BE49-F238E27FC236}">
-                <a16:creationId xmlns:a16="http://schemas.microsoft.com/office/drawing/2014/main" id="{49FDFD46-E639-4C3F-9954-267B9D2CCD77}"/>
+                <a16:creationId xmlns:a16="http://schemas.microsoft.com/office/drawing/2014/main" id="{74159747-6ECF-4D5B-B8BA-0E941AA0C2D0}"/>
               </a:ext>
             </a:extLst>
           </p:cNvPr>
@@ -19547,7 +20317,7 @@
           <p:cNvPr id="3" name="">
             <a:extLst xmlns:a="http://schemas.openxmlformats.org/drawingml/2006/main">
               <a:ext uri="{FF2B5EF4-FFF2-40B4-BE49-F238E27FC236}">
-                <a16:creationId xmlns:a16="http://schemas.microsoft.com/office/drawing/2014/main" id="{00009964-5C33-4D29-8381-110A461A0E20}"/>
+                <a16:creationId xmlns:a16="http://schemas.microsoft.com/office/drawing/2014/main" id="{68D88D22-CD39-4A98-9514-57F6FD337B1A}"/>
               </a:ext>
             </a:extLst>
           </p:cNvPr>
@@ -19578,7 +20348,7 @@
           <p:cNvPr id="4" name="">
             <a:extLst xmlns:a="http://schemas.openxmlformats.org/drawingml/2006/main">
               <a:ext uri="{FF2B5EF4-FFF2-40B4-BE49-F238E27FC236}">
-                <a16:creationId xmlns:a16="http://schemas.microsoft.com/office/drawing/2014/main" id="{C706CAA1-4DF1-4057-9B2C-D9D88321E225}"/>
+                <a16:creationId xmlns:a16="http://schemas.microsoft.com/office/drawing/2014/main" id="{A4D3530C-95B4-465A-B697-F5A24CEFB328}"/>
               </a:ext>
             </a:extLst>
           </p:cNvPr>
@@ -19646,7 +20416,7 @@
           <p:cNvPr id="5" name="">
             <a:extLst xmlns:a="http://schemas.openxmlformats.org/drawingml/2006/main">
               <a:ext uri="{FF2B5EF4-FFF2-40B4-BE49-F238E27FC236}">
-                <a16:creationId xmlns:a16="http://schemas.microsoft.com/office/drawing/2014/main" id="{030E6CF7-2AFD-4CCA-9FB3-03E28D80C759}"/>
+                <a16:creationId xmlns:a16="http://schemas.microsoft.com/office/drawing/2014/main" id="{86F1D3A2-5CBD-4ADB-9A4F-695E15106249}"/>
               </a:ext>
             </a:extLst>
           </p:cNvPr>
@@ -19714,7 +20484,7 @@
           <p:cNvPr id="6" name="">
             <a:extLst xmlns:a="http://schemas.openxmlformats.org/drawingml/2006/main">
               <a:ext uri="{FF2B5EF4-FFF2-40B4-BE49-F238E27FC236}">
-                <a16:creationId xmlns:a16="http://schemas.microsoft.com/office/drawing/2014/main" id="{D3BD4D67-DDA9-4508-976E-A37B4D4D9DD9}"/>
+                <a16:creationId xmlns:a16="http://schemas.microsoft.com/office/drawing/2014/main" id="{688280BD-689F-4769-BC94-C0F7DBF61A79}"/>
               </a:ext>
             </a:extLst>
           </p:cNvPr>
@@ -19744,7 +20514,7 @@
           <p:cNvPr id="7" name="">
             <a:extLst xmlns:a="http://schemas.openxmlformats.org/drawingml/2006/main">
               <a:ext uri="{FF2B5EF4-FFF2-40B4-BE49-F238E27FC236}">
-                <a16:creationId xmlns:a16="http://schemas.microsoft.com/office/drawing/2014/main" id="{78040185-3A15-4F18-96E6-35D9D4BBAF85}"/>
+                <a16:creationId xmlns:a16="http://schemas.microsoft.com/office/drawing/2014/main" id="{8D8EF1F6-F6D9-4875-B30F-75DCD0E6C973}"/>
               </a:ext>
             </a:extLst>
           </p:cNvPr>
@@ -19812,7 +20582,7 @@
           <p:cNvPr id="8" name="">
             <a:extLst xmlns:a="http://schemas.openxmlformats.org/drawingml/2006/main">
               <a:ext uri="{FF2B5EF4-FFF2-40B4-BE49-F238E27FC236}">
-                <a16:creationId xmlns:a16="http://schemas.microsoft.com/office/drawing/2014/main" id="{CF259FFF-023F-45F0-8818-431F87B7D59A}"/>
+                <a16:creationId xmlns:a16="http://schemas.microsoft.com/office/drawing/2014/main" id="{06CD5CDD-DBAD-498F-9A1A-566377B699E0}"/>
               </a:ext>
             </a:extLst>
           </p:cNvPr>
@@ -19842,7 +20612,7 @@
           <p:cNvPr id="9" name="">
             <a:extLst xmlns:a="http://schemas.openxmlformats.org/drawingml/2006/main">
               <a:ext uri="{FF2B5EF4-FFF2-40B4-BE49-F238E27FC236}">
-                <a16:creationId xmlns:a16="http://schemas.microsoft.com/office/drawing/2014/main" id="{EF7F9918-BFA5-420F-B1B5-9BCC8C5E936A}"/>
+                <a16:creationId xmlns:a16="http://schemas.microsoft.com/office/drawing/2014/main" id="{7052FB12-D69A-4A53-949B-96F603B70DEC}"/>
               </a:ext>
             </a:extLst>
           </p:cNvPr>
@@ -19910,7 +20680,7 @@
           <p:cNvPr id="10" name="">
             <a:extLst xmlns:a="http://schemas.openxmlformats.org/drawingml/2006/main">
               <a:ext uri="{FF2B5EF4-FFF2-40B4-BE49-F238E27FC236}">
-                <a16:creationId xmlns:a16="http://schemas.microsoft.com/office/drawing/2014/main" id="{68C0AAE1-148B-4D07-A0BD-50D24ABE6824}"/>
+                <a16:creationId xmlns:a16="http://schemas.microsoft.com/office/drawing/2014/main" id="{6BCC8756-580E-45AF-96E3-055BAA7472FA}"/>
               </a:ext>
             </a:extLst>
           </p:cNvPr>
@@ -19940,7 +20710,7 @@
           <p:cNvPr id="11" name="">
             <a:extLst xmlns:a="http://schemas.openxmlformats.org/drawingml/2006/main">
               <a:ext uri="{FF2B5EF4-FFF2-40B4-BE49-F238E27FC236}">
-                <a16:creationId xmlns:a16="http://schemas.microsoft.com/office/drawing/2014/main" id="{21FA781A-2E73-462D-8A5C-2F31F75AA442}"/>
+                <a16:creationId xmlns:a16="http://schemas.microsoft.com/office/drawing/2014/main" id="{0183CA08-6D62-4BEB-98F7-390EEC0C2DF6}"/>
               </a:ext>
             </a:extLst>
           </p:cNvPr>
@@ -20008,7 +20778,7 @@
           <p:cNvPr id="12" name="">
             <a:extLst xmlns:a="http://schemas.openxmlformats.org/drawingml/2006/main">
               <a:ext uri="{FF2B5EF4-FFF2-40B4-BE49-F238E27FC236}">
-                <a16:creationId xmlns:a16="http://schemas.microsoft.com/office/drawing/2014/main" id="{D71EBF90-CDF6-4060-BEA6-4FF1B51ACBB7}"/>
+                <a16:creationId xmlns:a16="http://schemas.microsoft.com/office/drawing/2014/main" id="{D052918E-BE32-41F3-9BC3-74A5527A0642}"/>
               </a:ext>
             </a:extLst>
           </p:cNvPr>
@@ -20038,7 +20808,7 @@
           <p:cNvPr id="13" name="">
             <a:extLst xmlns:a="http://schemas.openxmlformats.org/drawingml/2006/main">
               <a:ext uri="{FF2B5EF4-FFF2-40B4-BE49-F238E27FC236}">
-                <a16:creationId xmlns:a16="http://schemas.microsoft.com/office/drawing/2014/main" id="{8B628864-DF42-4997-8794-1F9A0C50FF11}"/>
+                <a16:creationId xmlns:a16="http://schemas.microsoft.com/office/drawing/2014/main" id="{335C376B-88E6-4D26-ADFB-F03B1FECCFAE}"/>
               </a:ext>
             </a:extLst>
           </p:cNvPr>
@@ -20106,7 +20876,7 @@
           <p:cNvPr id="14" name="">
             <a:extLst xmlns:a="http://schemas.openxmlformats.org/drawingml/2006/main">
               <a:ext uri="{FF2B5EF4-FFF2-40B4-BE49-F238E27FC236}">
-                <a16:creationId xmlns:a16="http://schemas.microsoft.com/office/drawing/2014/main" id="{D92A0BE7-AE0E-4802-B73E-5E7675204231}"/>
+                <a16:creationId xmlns:a16="http://schemas.microsoft.com/office/drawing/2014/main" id="{4512F850-FEEF-4AE9-B191-EA8B13DA137A}"/>
               </a:ext>
             </a:extLst>
           </p:cNvPr>
@@ -20136,7 +20906,7 @@
           <p:cNvPr id="15" name="">
             <a:extLst xmlns:a="http://schemas.openxmlformats.org/drawingml/2006/main">
               <a:ext uri="{FF2B5EF4-FFF2-40B4-BE49-F238E27FC236}">
-                <a16:creationId xmlns:a16="http://schemas.microsoft.com/office/drawing/2014/main" id="{2AEC131A-2DED-4A21-B763-2AB5A7C408E6}"/>
+                <a16:creationId xmlns:a16="http://schemas.microsoft.com/office/drawing/2014/main" id="{095E1A3B-5C14-4291-B638-A7BD84E73E0D}"/>
               </a:ext>
             </a:extLst>
           </p:cNvPr>
@@ -20204,7 +20974,7 @@
           <p:cNvPr id="16" name="">
             <a:extLst xmlns:a="http://schemas.openxmlformats.org/drawingml/2006/main">
               <a:ext uri="{FF2B5EF4-FFF2-40B4-BE49-F238E27FC236}">
-                <a16:creationId xmlns:a16="http://schemas.microsoft.com/office/drawing/2014/main" id="{CD134AE0-D4FD-4E1E-83F7-D0FA46530284}"/>
+                <a16:creationId xmlns:a16="http://schemas.microsoft.com/office/drawing/2014/main" id="{9390813A-B9D2-4440-A1D7-585790EAC0E7}"/>
               </a:ext>
             </a:extLst>
           </p:cNvPr>
@@ -20234,7 +21004,7 @@
           <p:cNvPr id="17" name="">
             <a:extLst xmlns:a="http://schemas.openxmlformats.org/drawingml/2006/main">
               <a:ext uri="{FF2B5EF4-FFF2-40B4-BE49-F238E27FC236}">
-                <a16:creationId xmlns:a16="http://schemas.microsoft.com/office/drawing/2014/main" id="{2F655008-2EA2-4726-9A95-060A8365C4D1}"/>
+                <a16:creationId xmlns:a16="http://schemas.microsoft.com/office/drawing/2014/main" id="{6D319240-F498-4F8C-8788-586BBD098FF9}"/>
               </a:ext>
             </a:extLst>
           </p:cNvPr>
@@ -20302,7 +21072,7 @@
           <p:cNvPr id="18" name="">
             <a:extLst xmlns:a="http://schemas.openxmlformats.org/drawingml/2006/main">
               <a:ext uri="{FF2B5EF4-FFF2-40B4-BE49-F238E27FC236}">
-                <a16:creationId xmlns:a16="http://schemas.microsoft.com/office/drawing/2014/main" id="{F07E0111-FA58-4C2F-B57C-528F41025781}"/>
+                <a16:creationId xmlns:a16="http://schemas.microsoft.com/office/drawing/2014/main" id="{ED967F8D-AB55-495C-AAE2-76F9BC5C4A80}"/>
               </a:ext>
             </a:extLst>
           </p:cNvPr>
@@ -20332,7 +21102,7 @@
           <p:cNvPr id="19" name="">
             <a:extLst xmlns:a="http://schemas.openxmlformats.org/drawingml/2006/main">
               <a:ext uri="{FF2B5EF4-FFF2-40B4-BE49-F238E27FC236}">
-                <a16:creationId xmlns:a16="http://schemas.microsoft.com/office/drawing/2014/main" id="{905C6908-0590-4FF4-87AB-51E5C0C6B242}"/>
+                <a16:creationId xmlns:a16="http://schemas.microsoft.com/office/drawing/2014/main" id="{F3C9CC7F-E215-423F-A733-F5CFEF84B693}"/>
               </a:ext>
             </a:extLst>
           </p:cNvPr>
@@ -20400,7 +21170,7 @@
           <p:cNvPr id="20" name="">
             <a:extLst xmlns:a="http://schemas.openxmlformats.org/drawingml/2006/main">
               <a:ext uri="{FF2B5EF4-FFF2-40B4-BE49-F238E27FC236}">
-                <a16:creationId xmlns:a16="http://schemas.microsoft.com/office/drawing/2014/main" id="{A05D090E-F3E8-4AF0-9AC2-F14A551AA562}"/>
+                <a16:creationId xmlns:a16="http://schemas.microsoft.com/office/drawing/2014/main" id="{F4C1B1F1-D058-445D-B1E1-D8837E3DF88F}"/>
               </a:ext>
             </a:extLst>
           </p:cNvPr>
@@ -20430,7 +21200,7 @@
           <p:cNvPr id="21" name="">
             <a:extLst xmlns:a="http://schemas.openxmlformats.org/drawingml/2006/main">
               <a:ext uri="{FF2B5EF4-FFF2-40B4-BE49-F238E27FC236}">
-                <a16:creationId xmlns:a16="http://schemas.microsoft.com/office/drawing/2014/main" id="{8B8878D4-87F3-4E1D-8D45-79D87319BD04}"/>
+                <a16:creationId xmlns:a16="http://schemas.microsoft.com/office/drawing/2014/main" id="{B5477A5F-CE6E-4CD8-902B-F5F04C47E347}"/>
               </a:ext>
             </a:extLst>
           </p:cNvPr>
@@ -20498,7 +21268,7 @@
           <p:cNvPr id="22" name="">
             <a:extLst xmlns:a="http://schemas.openxmlformats.org/drawingml/2006/main">
               <a:ext uri="{FF2B5EF4-FFF2-40B4-BE49-F238E27FC236}">
-                <a16:creationId xmlns:a16="http://schemas.microsoft.com/office/drawing/2014/main" id="{920D0B04-DB2F-48BE-A3CC-D65280399496}"/>
+                <a16:creationId xmlns:a16="http://schemas.microsoft.com/office/drawing/2014/main" id="{2016CF64-7DD4-4888-9B55-E65728F612F7}"/>
               </a:ext>
             </a:extLst>
           </p:cNvPr>
@@ -20529,7 +21299,7 @@
           <p:cNvPr id="23" name="">
             <a:extLst xmlns:a="http://schemas.openxmlformats.org/drawingml/2006/main">
               <a:ext uri="{FF2B5EF4-FFF2-40B4-BE49-F238E27FC236}">
-                <a16:creationId xmlns:a16="http://schemas.microsoft.com/office/drawing/2014/main" id="{E2E64652-8263-46E8-A35E-DD7A6315729C}"/>
+                <a16:creationId xmlns:a16="http://schemas.microsoft.com/office/drawing/2014/main" id="{BF9D9F52-5D6D-48ED-909B-0CAA81A0FC19}"/>
               </a:ext>
             </a:extLst>
           </p:cNvPr>
@@ -20560,7 +21330,7 @@
           <p:cNvPr id="24" name="">
             <a:extLst xmlns:a="http://schemas.openxmlformats.org/drawingml/2006/main">
               <a:ext uri="{FF2B5EF4-FFF2-40B4-BE49-F238E27FC236}">
-                <a16:creationId xmlns:a16="http://schemas.microsoft.com/office/drawing/2014/main" id="{0571C1C4-1457-46C7-8615-79668EEEAE01}"/>
+                <a16:creationId xmlns:a16="http://schemas.microsoft.com/office/drawing/2014/main" id="{09AE5EE8-35F1-4023-899B-999684A793FA}"/>
               </a:ext>
             </a:extLst>
           </p:cNvPr>
@@ -20591,7 +21361,7 @@
           <p:cNvPr id="25" name="">
             <a:extLst xmlns:a="http://schemas.openxmlformats.org/drawingml/2006/main">
               <a:ext uri="{FF2B5EF4-FFF2-40B4-BE49-F238E27FC236}">
-                <a16:creationId xmlns:a16="http://schemas.microsoft.com/office/drawing/2014/main" id="{7115E4B1-4CED-4F64-B432-5CAE2A857CD3}"/>
+                <a16:creationId xmlns:a16="http://schemas.microsoft.com/office/drawing/2014/main" id="{24E0624E-C62B-45CC-96EF-B20C6874D41F}"/>
               </a:ext>
             </a:extLst>
           </p:cNvPr>
@@ -20622,7 +21392,7 @@
           <p:cNvPr id="26" name="">
             <a:extLst xmlns:a="http://schemas.openxmlformats.org/drawingml/2006/main">
               <a:ext uri="{FF2B5EF4-FFF2-40B4-BE49-F238E27FC236}">
-                <a16:creationId xmlns:a16="http://schemas.microsoft.com/office/drawing/2014/main" id="{B5F6AF83-7FA9-4586-B10B-42635E4C3150}"/>
+                <a16:creationId xmlns:a16="http://schemas.microsoft.com/office/drawing/2014/main" id="{E956D0B8-14E5-4695-96EB-EF6315AD85CA}"/>
               </a:ext>
             </a:extLst>
           </p:cNvPr>
@@ -20653,7 +21423,7 @@
           <p:cNvPr id="27" name="">
             <a:extLst xmlns:a="http://schemas.openxmlformats.org/drawingml/2006/main">
               <a:ext uri="{FF2B5EF4-FFF2-40B4-BE49-F238E27FC236}">
-                <a16:creationId xmlns:a16="http://schemas.microsoft.com/office/drawing/2014/main" id="{765002AB-BA8C-4209-9AF6-E7BD79064008}"/>
+                <a16:creationId xmlns:a16="http://schemas.microsoft.com/office/drawing/2014/main" id="{EDCEEC83-1D0D-4CDB-96FD-B89F28F9817A}"/>
               </a:ext>
             </a:extLst>
           </p:cNvPr>
@@ -20684,7 +21454,7 @@
           <p:cNvPr id="28" name="">
             <a:extLst xmlns:a="http://schemas.openxmlformats.org/drawingml/2006/main">
               <a:ext uri="{FF2B5EF4-FFF2-40B4-BE49-F238E27FC236}">
-                <a16:creationId xmlns:a16="http://schemas.microsoft.com/office/drawing/2014/main" id="{8702FE04-C714-4930-B181-EE07D29820B2}"/>
+                <a16:creationId xmlns:a16="http://schemas.microsoft.com/office/drawing/2014/main" id="{6C1F9B06-6FD6-4EC9-98AE-8CF9E260AAB5}"/>
               </a:ext>
             </a:extLst>
           </p:cNvPr>
@@ -20715,7 +21485,7 @@
           <p:cNvPr id="29" name="">
             <a:extLst xmlns:a="http://schemas.openxmlformats.org/drawingml/2006/main">
               <a:ext uri="{FF2B5EF4-FFF2-40B4-BE49-F238E27FC236}">
-                <a16:creationId xmlns:a16="http://schemas.microsoft.com/office/drawing/2014/main" id="{BA41CB7B-AA60-4086-88EF-41C54082BAB3}"/>
+                <a16:creationId xmlns:a16="http://schemas.microsoft.com/office/drawing/2014/main" id="{138E5D96-1DE8-4096-9BE1-4F06F869225E}"/>
               </a:ext>
             </a:extLst>
           </p:cNvPr>
@@ -20746,7 +21516,7 @@
           <p:cNvPr id="30" name="">
             <a:extLst xmlns:a="http://schemas.openxmlformats.org/drawingml/2006/main">
               <a:ext uri="{FF2B5EF4-FFF2-40B4-BE49-F238E27FC236}">
-                <a16:creationId xmlns:a16="http://schemas.microsoft.com/office/drawing/2014/main" id="{973FD045-A53D-43B9-AD0A-A0387DC6186E}"/>
+                <a16:creationId xmlns:a16="http://schemas.microsoft.com/office/drawing/2014/main" id="{CC3F8FE5-B397-4D21-81A1-7AE725DB46FC}"/>
               </a:ext>
             </a:extLst>
           </p:cNvPr>
@@ -20777,7 +21547,7 @@
           <p:cNvPr id="31" name="">
             <a:extLst xmlns:a="http://schemas.openxmlformats.org/drawingml/2006/main">
               <a:ext uri="{FF2B5EF4-FFF2-40B4-BE49-F238E27FC236}">
-                <a16:creationId xmlns:a16="http://schemas.microsoft.com/office/drawing/2014/main" id="{ABC729DB-3C5E-4D11-AC6F-1817C48D53E7}"/>
+                <a16:creationId xmlns:a16="http://schemas.microsoft.com/office/drawing/2014/main" id="{1E6FD25C-4181-4E40-8EE4-7DC3DFE943CE}"/>
               </a:ext>
             </a:extLst>
           </p:cNvPr>
@@ -20808,7 +21578,7 @@
           <p:cNvPr id="32" name="">
             <a:extLst xmlns:a="http://schemas.openxmlformats.org/drawingml/2006/main">
               <a:ext uri="{FF2B5EF4-FFF2-40B4-BE49-F238E27FC236}">
-                <a16:creationId xmlns:a16="http://schemas.microsoft.com/office/drawing/2014/main" id="{7A8F945D-30D8-44B3-B395-D6B89E48FD31}"/>
+                <a16:creationId xmlns:a16="http://schemas.microsoft.com/office/drawing/2014/main" id="{477C1072-BB4A-42BA-BD8B-A8D70FFC9C66}"/>
               </a:ext>
             </a:extLst>
           </p:cNvPr>
@@ -20839,7 +21609,7 @@
           <p:cNvPr id="33" name="">
             <a:extLst xmlns:a="http://schemas.openxmlformats.org/drawingml/2006/main">
               <a:ext uri="{FF2B5EF4-FFF2-40B4-BE49-F238E27FC236}">
-                <a16:creationId xmlns:a16="http://schemas.microsoft.com/office/drawing/2014/main" id="{5903DA98-2632-4D52-A212-7535048AE4D1}"/>
+                <a16:creationId xmlns:a16="http://schemas.microsoft.com/office/drawing/2014/main" id="{0752A395-3EB2-469D-AE2C-50653BCFC94B}"/>
               </a:ext>
             </a:extLst>
           </p:cNvPr>
@@ -20870,7 +21640,7 @@
           <p:cNvPr id="34" name="">
             <a:extLst xmlns:a="http://schemas.openxmlformats.org/drawingml/2006/main">
               <a:ext uri="{FF2B5EF4-FFF2-40B4-BE49-F238E27FC236}">
-                <a16:creationId xmlns:a16="http://schemas.microsoft.com/office/drawing/2014/main" id="{E7A2B8FF-3FCF-4AF6-BBC4-9449E4E06784}"/>
+                <a16:creationId xmlns:a16="http://schemas.microsoft.com/office/drawing/2014/main" id="{70DF0D77-6D44-4657-9DC4-F3AB34E0B806}"/>
               </a:ext>
             </a:extLst>
           </p:cNvPr>
@@ -20901,7 +21671,7 @@
           <p:cNvPr id="35" name="">
             <a:extLst xmlns:a="http://schemas.openxmlformats.org/drawingml/2006/main">
               <a:ext uri="{FF2B5EF4-FFF2-40B4-BE49-F238E27FC236}">
-                <a16:creationId xmlns:a16="http://schemas.microsoft.com/office/drawing/2014/main" id="{25A662C4-8279-432A-8D0C-329DC4659DAF}"/>
+                <a16:creationId xmlns:a16="http://schemas.microsoft.com/office/drawing/2014/main" id="{0E0100BF-545B-4C2A-96CB-C087C8472891}"/>
               </a:ext>
             </a:extLst>
           </p:cNvPr>
@@ -20932,7 +21702,7 @@
           <p:cNvPr id="36" name="">
             <a:extLst xmlns:a="http://schemas.openxmlformats.org/drawingml/2006/main">
               <a:ext uri="{FF2B5EF4-FFF2-40B4-BE49-F238E27FC236}">
-                <a16:creationId xmlns:a16="http://schemas.microsoft.com/office/drawing/2014/main" id="{9D993C20-9868-438F-AB5B-D84E31EA4642}"/>
+                <a16:creationId xmlns:a16="http://schemas.microsoft.com/office/drawing/2014/main" id="{62185CC8-F167-40B0-98BF-067930A78E23}"/>
               </a:ext>
             </a:extLst>
           </p:cNvPr>
@@ -20963,7 +21733,7 @@
           <p:cNvPr id="37" name="">
             <a:extLst xmlns:a="http://schemas.openxmlformats.org/drawingml/2006/main">
               <a:ext uri="{FF2B5EF4-FFF2-40B4-BE49-F238E27FC236}">
-                <a16:creationId xmlns:a16="http://schemas.microsoft.com/office/drawing/2014/main" id="{B8655AED-9F48-4948-8ADA-44217EB69970}"/>
+                <a16:creationId xmlns:a16="http://schemas.microsoft.com/office/drawing/2014/main" id="{6CB792E5-8643-4AE5-9AC5-AE2E6DBA5AEF}"/>
               </a:ext>
             </a:extLst>
           </p:cNvPr>
@@ -20994,7 +21764,7 @@
           <p:cNvPr id="38" name="">
             <a:extLst xmlns:a="http://schemas.openxmlformats.org/drawingml/2006/main">
               <a:ext uri="{FF2B5EF4-FFF2-40B4-BE49-F238E27FC236}">
-                <a16:creationId xmlns:a16="http://schemas.microsoft.com/office/drawing/2014/main" id="{A34E16F3-4F81-4FDF-A036-FBD6B01801E4}"/>
+                <a16:creationId xmlns:a16="http://schemas.microsoft.com/office/drawing/2014/main" id="{76F79E20-5A07-490C-92F6-64D7EBF4283C}"/>
               </a:ext>
             </a:extLst>
           </p:cNvPr>
@@ -21025,7 +21795,7 @@
           <p:cNvPr id="39" name="">
             <a:extLst xmlns:a="http://schemas.openxmlformats.org/drawingml/2006/main">
               <a:ext uri="{FF2B5EF4-FFF2-40B4-BE49-F238E27FC236}">
-                <a16:creationId xmlns:a16="http://schemas.microsoft.com/office/drawing/2014/main" id="{2FFD63FB-CA23-4B0C-9E83-C4E1BEDF5617}"/>
+                <a16:creationId xmlns:a16="http://schemas.microsoft.com/office/drawing/2014/main" id="{9AF7A587-B03B-4750-A0EB-78950F51DDDB}"/>
               </a:ext>
             </a:extLst>
           </p:cNvPr>
@@ -21056,7 +21826,7 @@
           <p:cNvPr id="40" name="">
             <a:extLst xmlns:a="http://schemas.openxmlformats.org/drawingml/2006/main">
               <a:ext uri="{FF2B5EF4-FFF2-40B4-BE49-F238E27FC236}">
-                <a16:creationId xmlns:a16="http://schemas.microsoft.com/office/drawing/2014/main" id="{8C4892F3-65E2-48EA-B5DC-CBAA47A59E8E}"/>
+                <a16:creationId xmlns:a16="http://schemas.microsoft.com/office/drawing/2014/main" id="{E01C7200-8EAC-4971-80B6-CA9A9CB530B9}"/>
               </a:ext>
             </a:extLst>
           </p:cNvPr>
@@ -21124,7 +21894,7 @@
           <p:cNvPr id="41" name="">
             <a:extLst xmlns:a="http://schemas.openxmlformats.org/drawingml/2006/main">
               <a:ext uri="{FF2B5EF4-FFF2-40B4-BE49-F238E27FC236}">
-                <a16:creationId xmlns:a16="http://schemas.microsoft.com/office/drawing/2014/main" id="{26CE5790-E6B3-43F4-B857-D558C54F31CA}"/>
+                <a16:creationId xmlns:a16="http://schemas.microsoft.com/office/drawing/2014/main" id="{1AA63248-CD37-4779-9222-EBCE57187AAF}"/>
               </a:ext>
             </a:extLst>
           </p:cNvPr>
@@ -21154,7 +21924,7 @@
           <p:cNvPr id="42" name="">
             <a:extLst xmlns:a="http://schemas.openxmlformats.org/drawingml/2006/main">
               <a:ext uri="{FF2B5EF4-FFF2-40B4-BE49-F238E27FC236}">
-                <a16:creationId xmlns:a16="http://schemas.microsoft.com/office/drawing/2014/main" id="{9E0D41D5-211F-4C25-8A0C-A82B3FF3960F}"/>
+                <a16:creationId xmlns:a16="http://schemas.microsoft.com/office/drawing/2014/main" id="{F386C67E-4FA1-4AE1-939F-F50DF77E8EA5}"/>
               </a:ext>
             </a:extLst>
           </p:cNvPr>
@@ -21222,7 +21992,7 @@
           <p:cNvPr id="43" name="">
             <a:extLst xmlns:a="http://schemas.openxmlformats.org/drawingml/2006/main">
               <a:ext uri="{FF2B5EF4-FFF2-40B4-BE49-F238E27FC236}">
-                <a16:creationId xmlns:a16="http://schemas.microsoft.com/office/drawing/2014/main" id="{2B18B869-2756-4B42-BD86-636D0F31F13E}"/>
+                <a16:creationId xmlns:a16="http://schemas.microsoft.com/office/drawing/2014/main" id="{8D33594F-0EB5-4ADB-BF2F-AA006249E813}"/>
               </a:ext>
             </a:extLst>
           </p:cNvPr>
@@ -21252,7 +22022,7 @@
           <p:cNvPr id="44" name="">
             <a:extLst xmlns:a="http://schemas.openxmlformats.org/drawingml/2006/main">
               <a:ext uri="{FF2B5EF4-FFF2-40B4-BE49-F238E27FC236}">
-                <a16:creationId xmlns:a16="http://schemas.microsoft.com/office/drawing/2014/main" id="{3B695656-9DDD-4F9F-B101-771CEA463620}"/>
+                <a16:creationId xmlns:a16="http://schemas.microsoft.com/office/drawing/2014/main" id="{3DDA2625-1F45-4499-9AF4-00521CD2CD6B}"/>
               </a:ext>
             </a:extLst>
           </p:cNvPr>
@@ -21320,7 +22090,7 @@
           <p:cNvPr id="45" name="">
             <a:extLst xmlns:a="http://schemas.openxmlformats.org/drawingml/2006/main">
               <a:ext uri="{FF2B5EF4-FFF2-40B4-BE49-F238E27FC236}">
-                <a16:creationId xmlns:a16="http://schemas.microsoft.com/office/drawing/2014/main" id="{2CC3335D-D0DC-40DB-A387-6016AC934998}"/>
+                <a16:creationId xmlns:a16="http://schemas.microsoft.com/office/drawing/2014/main" id="{9363E277-8EF4-4CF1-BDE7-1B4DA3EFACA3}"/>
               </a:ext>
             </a:extLst>
           </p:cNvPr>
@@ -21388,7 +22158,7 @@
           <p:cNvPr id="46" name="">
             <a:extLst xmlns:a="http://schemas.openxmlformats.org/drawingml/2006/main">
               <a:ext uri="{FF2B5EF4-FFF2-40B4-BE49-F238E27FC236}">
-                <a16:creationId xmlns:a16="http://schemas.microsoft.com/office/drawing/2014/main" id="{7DA02576-0832-49C2-A07D-99BB9F9635E8}"/>
+                <a16:creationId xmlns:a16="http://schemas.microsoft.com/office/drawing/2014/main" id="{389B9108-CC49-4218-A7E3-E55993845AED}"/>
               </a:ext>
             </a:extLst>
           </p:cNvPr>
@@ -21456,7 +22226,7 @@
           <p:cNvPr id="47" name="">
             <a:extLst xmlns:a="http://schemas.openxmlformats.org/drawingml/2006/main">
               <a:ext uri="{FF2B5EF4-FFF2-40B4-BE49-F238E27FC236}">
-                <a16:creationId xmlns:a16="http://schemas.microsoft.com/office/drawing/2014/main" id="{D20CEA31-167E-4921-AB4B-872ABAE701BF}"/>
+                <a16:creationId xmlns:a16="http://schemas.microsoft.com/office/drawing/2014/main" id="{BCB647E9-97A4-4434-AAF6-7B1B7366AFD1}"/>
               </a:ext>
             </a:extLst>
           </p:cNvPr>
@@ -21716,7 +22486,7 @@
     </p:spTree>
     <p:extLst>
       <p:ext uri="{BB962C8B-B14F-4D97-AF65-F5344CB8AC3E}">
-        <p14:creationId xmlns:p14="http://schemas.microsoft.com/office/powerpoint/2010/main" val="335066093"/>
+        <p14:creationId xmlns:p14="http://schemas.microsoft.com/office/powerpoint/2010/main" val="238241248"/>
       </p:ext>
     </p:extLst>
   </p:cSld>
@@ -21747,7 +22517,7 @@
           <p:cNvPr id="40" name="">
             <a:extLst xmlns:a="http://schemas.openxmlformats.org/drawingml/2006/main">
               <a:ext uri="{FF2B5EF4-FFF2-40B4-BE49-F238E27FC236}">
-                <a16:creationId xmlns:a16="http://schemas.microsoft.com/office/drawing/2014/main" id="{9B70D352-8561-4ABE-BD32-6CF21C475301}"/>
+                <a16:creationId xmlns:a16="http://schemas.microsoft.com/office/drawing/2014/main" id="{5C5DE605-79E8-4799-BD48-9F0B45A38603}"/>
               </a:ext>
             </a:extLst>
           </p:cNvPr>
@@ -21815,7 +22585,7 @@
           <p:cNvPr id="2" name="">
             <a:extLst xmlns:a="http://schemas.openxmlformats.org/drawingml/2006/main">
               <a:ext uri="{FF2B5EF4-FFF2-40B4-BE49-F238E27FC236}">
-                <a16:creationId xmlns:a16="http://schemas.microsoft.com/office/drawing/2014/main" id="{D92D5B37-3A06-40BF-95B8-94F9B8418569}"/>
+                <a16:creationId xmlns:a16="http://schemas.microsoft.com/office/drawing/2014/main" id="{81A386BD-9AE3-429B-AB2B-8E23B9477800}"/>
               </a:ext>
             </a:extLst>
           </p:cNvPr>
@@ -21883,7 +22653,7 @@
           <p:cNvPr id="3" name="">
             <a:extLst xmlns:a="http://schemas.openxmlformats.org/drawingml/2006/main">
               <a:ext uri="{FF2B5EF4-FFF2-40B4-BE49-F238E27FC236}">
-                <a16:creationId xmlns:a16="http://schemas.microsoft.com/office/drawing/2014/main" id="{6E7F58F0-4276-4CD6-8731-51751443323C}"/>
+                <a16:creationId xmlns:a16="http://schemas.microsoft.com/office/drawing/2014/main" id="{8CD927D0-93A0-4299-A7C0-B27D5F4F2503}"/>
               </a:ext>
             </a:extLst>
           </p:cNvPr>
@@ -21914,7 +22684,7 @@
           <p:cNvPr id="4" name="">
             <a:extLst xmlns:a="http://schemas.openxmlformats.org/drawingml/2006/main">
               <a:ext uri="{FF2B5EF4-FFF2-40B4-BE49-F238E27FC236}">
-                <a16:creationId xmlns:a16="http://schemas.microsoft.com/office/drawing/2014/main" id="{A875EF9E-F4B5-464F-BB4F-05FE9D2590DB}"/>
+                <a16:creationId xmlns:a16="http://schemas.microsoft.com/office/drawing/2014/main" id="{76ECD381-1A88-4C69-9CE4-1B6F7693F5C8}"/>
               </a:ext>
             </a:extLst>
           </p:cNvPr>
@@ -21982,7 +22752,7 @@
           <p:cNvPr id="5" name="">
             <a:extLst xmlns:a="http://schemas.openxmlformats.org/drawingml/2006/main">
               <a:ext uri="{FF2B5EF4-FFF2-40B4-BE49-F238E27FC236}">
-                <a16:creationId xmlns:a16="http://schemas.microsoft.com/office/drawing/2014/main" id="{3B05CC68-2884-44AD-82AF-DC3EE0D47B97}"/>
+                <a16:creationId xmlns:a16="http://schemas.microsoft.com/office/drawing/2014/main" id="{F8587E06-3713-41B1-A726-AF164923310F}"/>
               </a:ext>
             </a:extLst>
           </p:cNvPr>
@@ -22050,7 +22820,7 @@
           <p:cNvPr id="6" name="">
             <a:extLst xmlns:a="http://schemas.openxmlformats.org/drawingml/2006/main">
               <a:ext uri="{FF2B5EF4-FFF2-40B4-BE49-F238E27FC236}">
-                <a16:creationId xmlns:a16="http://schemas.microsoft.com/office/drawing/2014/main" id="{42055B37-7159-488E-87BF-4A1A3843566E}"/>
+                <a16:creationId xmlns:a16="http://schemas.microsoft.com/office/drawing/2014/main" id="{66525CF4-4A48-4747-847E-113D14F25EE1}"/>
               </a:ext>
             </a:extLst>
           </p:cNvPr>
@@ -22080,7 +22850,7 @@
           <p:cNvPr id="7" name="">
             <a:extLst xmlns:a="http://schemas.openxmlformats.org/drawingml/2006/main">
               <a:ext uri="{FF2B5EF4-FFF2-40B4-BE49-F238E27FC236}">
-                <a16:creationId xmlns:a16="http://schemas.microsoft.com/office/drawing/2014/main" id="{C5F2664B-124D-485B-BF72-326B7893E232}"/>
+                <a16:creationId xmlns:a16="http://schemas.microsoft.com/office/drawing/2014/main" id="{49D5BC8D-B08C-46E0-A22E-F80C6D642BB3}"/>
               </a:ext>
             </a:extLst>
           </p:cNvPr>
@@ -22171,7 +22941,7 @@
           <p:cNvPr id="8" name="">
             <a:extLst xmlns:a="http://schemas.openxmlformats.org/drawingml/2006/main">
               <a:ext uri="{FF2B5EF4-FFF2-40B4-BE49-F238E27FC236}">
-                <a16:creationId xmlns:a16="http://schemas.microsoft.com/office/drawing/2014/main" id="{5182D6BA-9CC7-4A6A-B4A1-40E8907AC951}"/>
+                <a16:creationId xmlns:a16="http://schemas.microsoft.com/office/drawing/2014/main" id="{8BCD7E0B-F71A-4A48-90F8-78739B70A01F}"/>
               </a:ext>
             </a:extLst>
           </p:cNvPr>
@@ -22201,7 +22971,7 @@
           <p:cNvPr id="9" name="">
             <a:extLst xmlns:a="http://schemas.openxmlformats.org/drawingml/2006/main">
               <a:ext uri="{FF2B5EF4-FFF2-40B4-BE49-F238E27FC236}">
-                <a16:creationId xmlns:a16="http://schemas.microsoft.com/office/drawing/2014/main" id="{D46E0D65-C424-4570-A829-3C282D562FA7}"/>
+                <a16:creationId xmlns:a16="http://schemas.microsoft.com/office/drawing/2014/main" id="{08F9717C-3343-4094-9289-142FC4B8D4B7}"/>
               </a:ext>
             </a:extLst>
           </p:cNvPr>
@@ -22292,7 +23062,7 @@
           <p:cNvPr id="10" name="">
             <a:extLst xmlns:a="http://schemas.openxmlformats.org/drawingml/2006/main">
               <a:ext uri="{FF2B5EF4-FFF2-40B4-BE49-F238E27FC236}">
-                <a16:creationId xmlns:a16="http://schemas.microsoft.com/office/drawing/2014/main" id="{2FD13EDA-803B-457A-97E2-6C90605AD929}"/>
+                <a16:creationId xmlns:a16="http://schemas.microsoft.com/office/drawing/2014/main" id="{DA119DFD-F83A-45D6-8190-C32D207AC10B}"/>
               </a:ext>
             </a:extLst>
           </p:cNvPr>
@@ -22323,7 +23093,7 @@
           <p:cNvPr id="11" name="">
             <a:extLst xmlns:a="http://schemas.openxmlformats.org/drawingml/2006/main">
               <a:ext uri="{FF2B5EF4-FFF2-40B4-BE49-F238E27FC236}">
-                <a16:creationId xmlns:a16="http://schemas.microsoft.com/office/drawing/2014/main" id="{D9EF7935-4439-49CD-A16B-8415BD395B2E}"/>
+                <a16:creationId xmlns:a16="http://schemas.microsoft.com/office/drawing/2014/main" id="{37AB6787-A0B8-486F-943E-332BFA55EE85}"/>
               </a:ext>
             </a:extLst>
           </p:cNvPr>
@@ -22354,7 +23124,7 @@
           <p:cNvPr id="12" name="">
             <a:extLst xmlns:a="http://schemas.openxmlformats.org/drawingml/2006/main">
               <a:ext uri="{FF2B5EF4-FFF2-40B4-BE49-F238E27FC236}">
-                <a16:creationId xmlns:a16="http://schemas.microsoft.com/office/drawing/2014/main" id="{7297C829-5CC3-47D2-90C8-24B611B40055}"/>
+                <a16:creationId xmlns:a16="http://schemas.microsoft.com/office/drawing/2014/main" id="{A01704E8-D708-4DFF-A2D7-1ADD6CE27AC9}"/>
               </a:ext>
             </a:extLst>
           </p:cNvPr>
@@ -22385,7 +23155,7 @@
           <p:cNvPr id="13" name="">
             <a:extLst xmlns:a="http://schemas.openxmlformats.org/drawingml/2006/main">
               <a:ext uri="{FF2B5EF4-FFF2-40B4-BE49-F238E27FC236}">
-                <a16:creationId xmlns:a16="http://schemas.microsoft.com/office/drawing/2014/main" id="{36EEDE90-787D-47BD-9BDE-0847832BFF21}"/>
+                <a16:creationId xmlns:a16="http://schemas.microsoft.com/office/drawing/2014/main" id="{FC0DB5FF-4A04-4E7B-A595-2ED559B13117}"/>
               </a:ext>
             </a:extLst>
           </p:cNvPr>
@@ -22453,7 +23223,7 @@
           <p:cNvPr id="14" name="">
             <a:extLst xmlns:a="http://schemas.openxmlformats.org/drawingml/2006/main">
               <a:ext uri="{FF2B5EF4-FFF2-40B4-BE49-F238E27FC236}">
-                <a16:creationId xmlns:a16="http://schemas.microsoft.com/office/drawing/2014/main" id="{7764BD00-D95A-4319-9493-616BD0C990C9}"/>
+                <a16:creationId xmlns:a16="http://schemas.microsoft.com/office/drawing/2014/main" id="{79D1C793-B79B-4635-BCC8-123889F27B47}"/>
               </a:ext>
             </a:extLst>
           </p:cNvPr>
@@ -22483,7 +23253,7 @@
           <p:cNvPr id="15" name="">
             <a:extLst xmlns:a="http://schemas.openxmlformats.org/drawingml/2006/main">
               <a:ext uri="{FF2B5EF4-FFF2-40B4-BE49-F238E27FC236}">
-                <a16:creationId xmlns:a16="http://schemas.microsoft.com/office/drawing/2014/main" id="{E51D90BE-7CDF-4EF6-AE51-6CD0E03F1637}"/>
+                <a16:creationId xmlns:a16="http://schemas.microsoft.com/office/drawing/2014/main" id="{DAF13F2D-95A2-4032-B769-C43F18071C1D}"/>
               </a:ext>
             </a:extLst>
           </p:cNvPr>
@@ -22551,7 +23321,7 @@
           <p:cNvPr id="16" name="">
             <a:extLst xmlns:a="http://schemas.openxmlformats.org/drawingml/2006/main">
               <a:ext uri="{FF2B5EF4-FFF2-40B4-BE49-F238E27FC236}">
-                <a16:creationId xmlns:a16="http://schemas.microsoft.com/office/drawing/2014/main" id="{D4572864-4688-448A-BB6A-9C00D86DEF82}"/>
+                <a16:creationId xmlns:a16="http://schemas.microsoft.com/office/drawing/2014/main" id="{DEDFFEBD-24FB-46AC-AE01-4D41DBEA9D85}"/>
               </a:ext>
             </a:extLst>
           </p:cNvPr>
@@ -22581,7 +23351,7 @@
           <p:cNvPr id="17" name="">
             <a:extLst xmlns:a="http://schemas.openxmlformats.org/drawingml/2006/main">
               <a:ext uri="{FF2B5EF4-FFF2-40B4-BE49-F238E27FC236}">
-                <a16:creationId xmlns:a16="http://schemas.microsoft.com/office/drawing/2014/main" id="{B19477A6-C395-4CBD-A52B-FA613A6616DB}"/>
+                <a16:creationId xmlns:a16="http://schemas.microsoft.com/office/drawing/2014/main" id="{0E026814-4088-44E8-85AA-19772E4859DB}"/>
               </a:ext>
             </a:extLst>
           </p:cNvPr>
@@ -22672,7 +23442,7 @@
           <p:cNvPr id="18" name="">
             <a:extLst xmlns:a="http://schemas.openxmlformats.org/drawingml/2006/main">
               <a:ext uri="{FF2B5EF4-FFF2-40B4-BE49-F238E27FC236}">
-                <a16:creationId xmlns:a16="http://schemas.microsoft.com/office/drawing/2014/main" id="{40ECBD25-2AA2-41A8-9DD6-ED74EA9C1990}"/>
+                <a16:creationId xmlns:a16="http://schemas.microsoft.com/office/drawing/2014/main" id="{6B6F5377-B9D6-4CEF-BAC9-10FA754047C9}"/>
               </a:ext>
             </a:extLst>
           </p:cNvPr>
@@ -22702,7 +23472,7 @@
           <p:cNvPr id="19" name="">
             <a:extLst xmlns:a="http://schemas.openxmlformats.org/drawingml/2006/main">
               <a:ext uri="{FF2B5EF4-FFF2-40B4-BE49-F238E27FC236}">
-                <a16:creationId xmlns:a16="http://schemas.microsoft.com/office/drawing/2014/main" id="{FDD94C76-099C-4DC7-A16B-B29EBC4D7195}"/>
+                <a16:creationId xmlns:a16="http://schemas.microsoft.com/office/drawing/2014/main" id="{98F32345-A658-413E-8AE0-ABA44FA626D4}"/>
               </a:ext>
             </a:extLst>
           </p:cNvPr>
@@ -22793,7 +23563,7 @@
           <p:cNvPr id="20" name="">
             <a:extLst xmlns:a="http://schemas.openxmlformats.org/drawingml/2006/main">
               <a:ext uri="{FF2B5EF4-FFF2-40B4-BE49-F238E27FC236}">
-                <a16:creationId xmlns:a16="http://schemas.microsoft.com/office/drawing/2014/main" id="{E5EB872A-202C-4206-A434-20A09556B58B}"/>
+                <a16:creationId xmlns:a16="http://schemas.microsoft.com/office/drawing/2014/main" id="{86E773E0-C067-4624-BA9E-042439F28C27}"/>
               </a:ext>
             </a:extLst>
           </p:cNvPr>
@@ -22823,7 +23593,7 @@
           <p:cNvPr id="21" name="">
             <a:extLst xmlns:a="http://schemas.openxmlformats.org/drawingml/2006/main">
               <a:ext uri="{FF2B5EF4-FFF2-40B4-BE49-F238E27FC236}">
-                <a16:creationId xmlns:a16="http://schemas.microsoft.com/office/drawing/2014/main" id="{139C863D-5C8C-4A52-B656-5282C49731E7}"/>
+                <a16:creationId xmlns:a16="http://schemas.microsoft.com/office/drawing/2014/main" id="{93A25245-D5D5-45BF-A803-7D587743696E}"/>
               </a:ext>
             </a:extLst>
           </p:cNvPr>
@@ -22914,7 +23684,7 @@
           <p:cNvPr id="22" name="">
             <a:extLst xmlns:a="http://schemas.openxmlformats.org/drawingml/2006/main">
               <a:ext uri="{FF2B5EF4-FFF2-40B4-BE49-F238E27FC236}">
-                <a16:creationId xmlns:a16="http://schemas.microsoft.com/office/drawing/2014/main" id="{F23DE5EF-9061-43CB-BEDD-0B66A22A281E}"/>
+                <a16:creationId xmlns:a16="http://schemas.microsoft.com/office/drawing/2014/main" id="{20C52E29-4A1B-4C2D-8793-53DFE0E91455}"/>
               </a:ext>
             </a:extLst>
           </p:cNvPr>
@@ -22944,7 +23714,7 @@
           <p:cNvPr id="23" name="">
             <a:extLst xmlns:a="http://schemas.openxmlformats.org/drawingml/2006/main">
               <a:ext uri="{FF2B5EF4-FFF2-40B4-BE49-F238E27FC236}">
-                <a16:creationId xmlns:a16="http://schemas.microsoft.com/office/drawing/2014/main" id="{31E1670A-7909-49B3-81B0-5019AC5E7B09}"/>
+                <a16:creationId xmlns:a16="http://schemas.microsoft.com/office/drawing/2014/main" id="{FE1F065C-0D2C-4ACB-A893-CE99F020D975}"/>
               </a:ext>
             </a:extLst>
           </p:cNvPr>
@@ -23012,7 +23782,7 @@
           <p:cNvPr id="24" name="">
             <a:extLst xmlns:a="http://schemas.openxmlformats.org/drawingml/2006/main">
               <a:ext uri="{FF2B5EF4-FFF2-40B4-BE49-F238E27FC236}">
-                <a16:creationId xmlns:a16="http://schemas.microsoft.com/office/drawing/2014/main" id="{AC644A20-6DBF-46EE-94B8-68A5A86FED69}"/>
+                <a16:creationId xmlns:a16="http://schemas.microsoft.com/office/drawing/2014/main" id="{79304165-3AE4-4421-8F83-6A309FCD469D}"/>
               </a:ext>
             </a:extLst>
           </p:cNvPr>
@@ -23043,7 +23813,7 @@
           <p:cNvPr id="25" name="">
             <a:extLst xmlns:a="http://schemas.openxmlformats.org/drawingml/2006/main">
               <a:ext uri="{FF2B5EF4-FFF2-40B4-BE49-F238E27FC236}">
-                <a16:creationId xmlns:a16="http://schemas.microsoft.com/office/drawing/2014/main" id="{EF760B7E-C2D3-4D4F-82E4-A543ECD50595}"/>
+                <a16:creationId xmlns:a16="http://schemas.microsoft.com/office/drawing/2014/main" id="{A04712AD-D4F1-404D-AAB6-EA163D4E3A07}"/>
               </a:ext>
             </a:extLst>
           </p:cNvPr>
@@ -23074,7 +23844,7 @@
           <p:cNvPr id="26" name="">
             <a:extLst xmlns:a="http://schemas.openxmlformats.org/drawingml/2006/main">
               <a:ext uri="{FF2B5EF4-FFF2-40B4-BE49-F238E27FC236}">
-                <a16:creationId xmlns:a16="http://schemas.microsoft.com/office/drawing/2014/main" id="{FA27DA86-A655-4F7F-BC4D-5546ADDE4AB0}"/>
+                <a16:creationId xmlns:a16="http://schemas.microsoft.com/office/drawing/2014/main" id="{644ADA87-EC71-4B31-8F3E-5B1BFB961365}"/>
               </a:ext>
             </a:extLst>
           </p:cNvPr>
@@ -23105,7 +23875,7 @@
           <p:cNvPr id="27" name="">
             <a:extLst xmlns:a="http://schemas.openxmlformats.org/drawingml/2006/main">
               <a:ext uri="{FF2B5EF4-FFF2-40B4-BE49-F238E27FC236}">
-                <a16:creationId xmlns:a16="http://schemas.microsoft.com/office/drawing/2014/main" id="{E3B69ABC-ED06-4569-82E3-CC61A8FC9532}"/>
+                <a16:creationId xmlns:a16="http://schemas.microsoft.com/office/drawing/2014/main" id="{ADCCA94C-D018-4812-B85E-48E83F422AA4}"/>
               </a:ext>
             </a:extLst>
           </p:cNvPr>
@@ -23136,7 +23906,7 @@
           <p:cNvPr id="28" name="">
             <a:extLst xmlns:a="http://schemas.openxmlformats.org/drawingml/2006/main">
               <a:ext uri="{FF2B5EF4-FFF2-40B4-BE49-F238E27FC236}">
-                <a16:creationId xmlns:a16="http://schemas.microsoft.com/office/drawing/2014/main" id="{5A9FC23C-33A0-45FB-9F58-EA3C4D62A1C5}"/>
+                <a16:creationId xmlns:a16="http://schemas.microsoft.com/office/drawing/2014/main" id="{681A64D2-716D-42A8-B564-79C6AAA584F4}"/>
               </a:ext>
             </a:extLst>
           </p:cNvPr>
@@ -23167,7 +23937,7 @@
           <p:cNvPr id="29" name="">
             <a:extLst xmlns:a="http://schemas.openxmlformats.org/drawingml/2006/main">
               <a:ext uri="{FF2B5EF4-FFF2-40B4-BE49-F238E27FC236}">
-                <a16:creationId xmlns:a16="http://schemas.microsoft.com/office/drawing/2014/main" id="{3B707DF0-FEFB-4F7F-AFDD-7222A44E239F}"/>
+                <a16:creationId xmlns:a16="http://schemas.microsoft.com/office/drawing/2014/main" id="{778EE9B1-5151-4560-A1B0-7F9750975382}"/>
               </a:ext>
             </a:extLst>
           </p:cNvPr>
@@ -23198,7 +23968,7 @@
           <p:cNvPr id="30" name="">
             <a:extLst xmlns:a="http://schemas.openxmlformats.org/drawingml/2006/main">
               <a:ext uri="{FF2B5EF4-FFF2-40B4-BE49-F238E27FC236}">
-                <a16:creationId xmlns:a16="http://schemas.microsoft.com/office/drawing/2014/main" id="{57712808-0190-4A07-AC41-7C5E5B6DAB2F}"/>
+                <a16:creationId xmlns:a16="http://schemas.microsoft.com/office/drawing/2014/main" id="{E6BD9E66-ABC0-4E67-A2DC-81DBC3D78BE8}"/>
               </a:ext>
             </a:extLst>
           </p:cNvPr>
@@ -23229,7 +23999,7 @@
           <p:cNvPr id="31" name="">
             <a:extLst xmlns:a="http://schemas.openxmlformats.org/drawingml/2006/main">
               <a:ext uri="{FF2B5EF4-FFF2-40B4-BE49-F238E27FC236}">
-                <a16:creationId xmlns:a16="http://schemas.microsoft.com/office/drawing/2014/main" id="{93EE4E5E-0F03-4D32-AAEF-43172C822F1A}"/>
+                <a16:creationId xmlns:a16="http://schemas.microsoft.com/office/drawing/2014/main" id="{7ED7F6AA-8713-4273-BE54-E570AFFD1E72}"/>
               </a:ext>
             </a:extLst>
           </p:cNvPr>
@@ -23260,7 +24030,7 @@
           <p:cNvPr id="32" name="">
             <a:extLst xmlns:a="http://schemas.openxmlformats.org/drawingml/2006/main">
               <a:ext uri="{FF2B5EF4-FFF2-40B4-BE49-F238E27FC236}">
-                <a16:creationId xmlns:a16="http://schemas.microsoft.com/office/drawing/2014/main" id="{637C05A3-D71B-4162-A65A-F7F07BBBD1A4}"/>
+                <a16:creationId xmlns:a16="http://schemas.microsoft.com/office/drawing/2014/main" id="{39E61F0D-1C74-4826-8C99-BFB55110DA1F}"/>
               </a:ext>
             </a:extLst>
           </p:cNvPr>
@@ -23291,7 +24061,7 @@
           <p:cNvPr id="33" name="">
             <a:extLst xmlns:a="http://schemas.openxmlformats.org/drawingml/2006/main">
               <a:ext uri="{FF2B5EF4-FFF2-40B4-BE49-F238E27FC236}">
-                <a16:creationId xmlns:a16="http://schemas.microsoft.com/office/drawing/2014/main" id="{25F9615E-60C9-4D1B-B3ED-A03E3B300EA7}"/>
+                <a16:creationId xmlns:a16="http://schemas.microsoft.com/office/drawing/2014/main" id="{13E921CB-C1C6-4BFB-B2C2-BACD31CDEBA8}"/>
               </a:ext>
             </a:extLst>
           </p:cNvPr>
@@ -23322,7 +24092,7 @@
           <p:cNvPr id="34" name="">
             <a:extLst xmlns:a="http://schemas.openxmlformats.org/drawingml/2006/main">
               <a:ext uri="{FF2B5EF4-FFF2-40B4-BE49-F238E27FC236}">
-                <a16:creationId xmlns:a16="http://schemas.microsoft.com/office/drawing/2014/main" id="{EBE1FDF4-C735-4F7F-95FA-27225EB0FCAF}"/>
+                <a16:creationId xmlns:a16="http://schemas.microsoft.com/office/drawing/2014/main" id="{D36E64F6-F033-4EEF-9D0E-6FB46BAD5E43}"/>
               </a:ext>
             </a:extLst>
           </p:cNvPr>
@@ -23353,7 +24123,7 @@
           <p:cNvPr id="35" name="">
             <a:extLst xmlns:a="http://schemas.openxmlformats.org/drawingml/2006/main">
               <a:ext uri="{FF2B5EF4-FFF2-40B4-BE49-F238E27FC236}">
-                <a16:creationId xmlns:a16="http://schemas.microsoft.com/office/drawing/2014/main" id="{80A2A0E5-546C-4F81-A4C3-D4DE97CDFEFC}"/>
+                <a16:creationId xmlns:a16="http://schemas.microsoft.com/office/drawing/2014/main" id="{D26AA201-22D5-49E8-A42B-951A0315575A}"/>
               </a:ext>
             </a:extLst>
           </p:cNvPr>
@@ -23384,7 +24154,7 @@
           <p:cNvPr id="36" name="">
             <a:extLst xmlns:a="http://schemas.openxmlformats.org/drawingml/2006/main">
               <a:ext uri="{FF2B5EF4-FFF2-40B4-BE49-F238E27FC236}">
-                <a16:creationId xmlns:a16="http://schemas.microsoft.com/office/drawing/2014/main" id="{84BEBDC9-B84A-4FA2-BAF4-B1A6C0A0C943}"/>
+                <a16:creationId xmlns:a16="http://schemas.microsoft.com/office/drawing/2014/main" id="{DA5284B9-4C69-4EED-9FC2-141B9670FE67}"/>
               </a:ext>
             </a:extLst>
           </p:cNvPr>
@@ -23452,7 +24222,7 @@
           <p:cNvPr id="37" name="">
             <a:extLst xmlns:a="http://schemas.openxmlformats.org/drawingml/2006/main">
               <a:ext uri="{FF2B5EF4-FFF2-40B4-BE49-F238E27FC236}">
-                <a16:creationId xmlns:a16="http://schemas.microsoft.com/office/drawing/2014/main" id="{2BAD0FED-4AD9-41B5-B95A-6302AFC282F5}"/>
+                <a16:creationId xmlns:a16="http://schemas.microsoft.com/office/drawing/2014/main" id="{54E28DF4-71D1-4A41-B770-D997CAF3CE69}"/>
               </a:ext>
             </a:extLst>
           </p:cNvPr>
@@ -23520,7 +24290,7 @@
           <p:cNvPr id="38" name="">
             <a:extLst xmlns:a="http://schemas.openxmlformats.org/drawingml/2006/main">
               <a:ext uri="{FF2B5EF4-FFF2-40B4-BE49-F238E27FC236}">
-                <a16:creationId xmlns:a16="http://schemas.microsoft.com/office/drawing/2014/main" id="{171DCB19-4E27-4D1B-9F7A-CEA94C9904BD}"/>
+                <a16:creationId xmlns:a16="http://schemas.microsoft.com/office/drawing/2014/main" id="{7306B607-98C1-4472-AE04-29E766901EA3}"/>
               </a:ext>
             </a:extLst>
           </p:cNvPr>
@@ -23588,7 +24358,7 @@
           <p:cNvPr id="39" name="">
             <a:extLst xmlns:a="http://schemas.openxmlformats.org/drawingml/2006/main">
               <a:ext uri="{FF2B5EF4-FFF2-40B4-BE49-F238E27FC236}">
-                <a16:creationId xmlns:a16="http://schemas.microsoft.com/office/drawing/2014/main" id="{82BA501C-88D6-49E3-9A2B-6BA0867CDE4F}"/>
+                <a16:creationId xmlns:a16="http://schemas.microsoft.com/office/drawing/2014/main" id="{BC34DA77-B925-4D31-874E-51F6CBD1D83F}"/>
               </a:ext>
             </a:extLst>
           </p:cNvPr>
@@ -23848,7 +24618,7 @@
     </p:spTree>
     <p:extLst>
       <p:ext uri="{BB962C8B-B14F-4D97-AF65-F5344CB8AC3E}">
-        <p14:creationId xmlns:p14="http://schemas.microsoft.com/office/powerpoint/2010/main" val="1305453324"/>
+        <p14:creationId xmlns:p14="http://schemas.microsoft.com/office/powerpoint/2010/main" val="1996111819"/>
       </p:ext>
     </p:extLst>
   </p:cSld>
@@ -23879,7 +24649,7 @@
           <p:cNvPr id="7" name="">
             <a:extLst xmlns:a="http://schemas.openxmlformats.org/drawingml/2006/main">
               <a:ext uri="{FF2B5EF4-FFF2-40B4-BE49-F238E27FC236}">
-                <a16:creationId xmlns:a16="http://schemas.microsoft.com/office/drawing/2014/main" id="{8C95C553-E354-42B0-BACB-5D01337455A3}"/>
+                <a16:creationId xmlns:a16="http://schemas.microsoft.com/office/drawing/2014/main" id="{69B3B1B2-D862-4EA3-9897-5473C47354A9}"/>
               </a:ext>
             </a:extLst>
           </p:cNvPr>
@@ -23947,7 +24717,7 @@
           <p:cNvPr id="2" name="">
             <a:extLst xmlns:a="http://schemas.openxmlformats.org/drawingml/2006/main">
               <a:ext uri="{FF2B5EF4-FFF2-40B4-BE49-F238E27FC236}">
-                <a16:creationId xmlns:a16="http://schemas.microsoft.com/office/drawing/2014/main" id="{D2DC2114-1CCA-4721-AE5F-0598B673C64D}"/>
+                <a16:creationId xmlns:a16="http://schemas.microsoft.com/office/drawing/2014/main" id="{A73FDA7D-0168-4564-9338-E11C9DF34F19}"/>
               </a:ext>
             </a:extLst>
           </p:cNvPr>
@@ -24015,7 +24785,7 @@
           <p:cNvPr id="3" name="">
             <a:extLst xmlns:a="http://schemas.openxmlformats.org/drawingml/2006/main">
               <a:ext uri="{FF2B5EF4-FFF2-40B4-BE49-F238E27FC236}">
-                <a16:creationId xmlns:a16="http://schemas.microsoft.com/office/drawing/2014/main" id="{2AA32EB1-80E3-4170-A2FE-47B18EAE6E73}"/>
+                <a16:creationId xmlns:a16="http://schemas.microsoft.com/office/drawing/2014/main" id="{99E4589D-39DB-49BA-AC71-E0745B96A114}"/>
               </a:ext>
             </a:extLst>
           </p:cNvPr>
@@ -24046,7 +24816,7 @@
           <p:cNvPr id="4" name="">
             <a:extLst xmlns:a="http://schemas.openxmlformats.org/drawingml/2006/main">
               <a:ext uri="{FF2B5EF4-FFF2-40B4-BE49-F238E27FC236}">
-                <a16:creationId xmlns:a16="http://schemas.microsoft.com/office/drawing/2014/main" id="{2650E5DE-2482-4A3D-B4F5-5D4556991821}"/>
+                <a16:creationId xmlns:a16="http://schemas.microsoft.com/office/drawing/2014/main" id="{E053A907-45A8-46A4-BC2E-769C201BB139}"/>
               </a:ext>
             </a:extLst>
           </p:cNvPr>
@@ -24114,7 +24884,7 @@
           <p:cNvPr id="5" name="">
             <a:extLst xmlns:a="http://schemas.openxmlformats.org/drawingml/2006/main">
               <a:ext uri="{FF2B5EF4-FFF2-40B4-BE49-F238E27FC236}">
-                <a16:creationId xmlns:a16="http://schemas.microsoft.com/office/drawing/2014/main" id="{EFB9EEE9-33E2-4FF9-BB9C-7F60E1913D23}"/>
+                <a16:creationId xmlns:a16="http://schemas.microsoft.com/office/drawing/2014/main" id="{120B2B67-0572-4A56-A69B-46C526913753}"/>
               </a:ext>
             </a:extLst>
           </p:cNvPr>
@@ -24182,7 +24952,7 @@
           <p:cNvPr id="6" name="">
             <a:extLst xmlns:a="http://schemas.openxmlformats.org/drawingml/2006/main">
               <a:ext uri="{FF2B5EF4-FFF2-40B4-BE49-F238E27FC236}">
-                <a16:creationId xmlns:a16="http://schemas.microsoft.com/office/drawing/2014/main" id="{33D1946C-CFB9-4562-8798-64A396842B79}"/>
+                <a16:creationId xmlns:a16="http://schemas.microsoft.com/office/drawing/2014/main" id="{DDD12FE7-7B47-4565-B166-B122184948F3}"/>
               </a:ext>
             </a:extLst>
           </p:cNvPr>
@@ -25679,7 +26449,7 @@
     </p:spTree>
     <p:extLst>
       <p:ext uri="{BB962C8B-B14F-4D97-AF65-F5344CB8AC3E}">
-        <p14:creationId xmlns:p14="http://schemas.microsoft.com/office/powerpoint/2010/main" val="1639761278"/>
+        <p14:creationId xmlns:p14="http://schemas.microsoft.com/office/powerpoint/2010/main" val="502273994"/>
       </p:ext>
     </p:extLst>
   </p:cSld>
@@ -25710,7 +26480,7 @@
           <p:cNvPr id="8" name="">
             <a:extLst xmlns:a="http://schemas.openxmlformats.org/drawingml/2006/main">
               <a:ext uri="{FF2B5EF4-FFF2-40B4-BE49-F238E27FC236}">
-                <a16:creationId xmlns:a16="http://schemas.microsoft.com/office/drawing/2014/main" id="{2621D939-C6A8-4E4A-9A6C-DCFB8CCC6659}"/>
+                <a16:creationId xmlns:a16="http://schemas.microsoft.com/office/drawing/2014/main" id="{7751E201-DBE5-4256-921D-E42E9BF588D4}"/>
               </a:ext>
             </a:extLst>
           </p:cNvPr>
@@ -25778,7 +26548,7 @@
           <p:cNvPr id="2" name="">
             <a:extLst xmlns:a="http://schemas.openxmlformats.org/drawingml/2006/main">
               <a:ext uri="{FF2B5EF4-FFF2-40B4-BE49-F238E27FC236}">
-                <a16:creationId xmlns:a16="http://schemas.microsoft.com/office/drawing/2014/main" id="{1F2BDDCE-FAC0-4B03-9C49-A134F4E9B935}"/>
+                <a16:creationId xmlns:a16="http://schemas.microsoft.com/office/drawing/2014/main" id="{1F762665-B751-4009-B9B8-2775163942D8}"/>
               </a:ext>
             </a:extLst>
           </p:cNvPr>
@@ -25846,7 +26616,7 @@
           <p:cNvPr id="3" name="">
             <a:extLst xmlns:a="http://schemas.openxmlformats.org/drawingml/2006/main">
               <a:ext uri="{FF2B5EF4-FFF2-40B4-BE49-F238E27FC236}">
-                <a16:creationId xmlns:a16="http://schemas.microsoft.com/office/drawing/2014/main" id="{65ABB925-B641-4A01-82CB-58892797B4E6}"/>
+                <a16:creationId xmlns:a16="http://schemas.microsoft.com/office/drawing/2014/main" id="{95201B94-A4E2-4B7C-BE2F-F1875D322D25}"/>
               </a:ext>
             </a:extLst>
           </p:cNvPr>
@@ -25877,7 +26647,7 @@
           <p:cNvPr id="4" name="">
             <a:extLst xmlns:a="http://schemas.openxmlformats.org/drawingml/2006/main">
               <a:ext uri="{FF2B5EF4-FFF2-40B4-BE49-F238E27FC236}">
-                <a16:creationId xmlns:a16="http://schemas.microsoft.com/office/drawing/2014/main" id="{350F2568-CDCE-49FF-BA92-71691877FC9C}"/>
+                <a16:creationId xmlns:a16="http://schemas.microsoft.com/office/drawing/2014/main" id="{A775DA8F-7434-45AD-817B-B9EEE8B6E8F0}"/>
               </a:ext>
             </a:extLst>
           </p:cNvPr>
@@ -25945,7 +26715,7 @@
           <p:cNvPr id="5" name="">
             <a:extLst xmlns:a="http://schemas.openxmlformats.org/drawingml/2006/main">
               <a:ext uri="{FF2B5EF4-FFF2-40B4-BE49-F238E27FC236}">
-                <a16:creationId xmlns:a16="http://schemas.microsoft.com/office/drawing/2014/main" id="{E77F49F5-586A-4C2E-8F6D-641D65277FEB}"/>
+                <a16:creationId xmlns:a16="http://schemas.microsoft.com/office/drawing/2014/main" id="{56FC4320-8B7D-4D3F-B699-849EC9A6AB66}"/>
               </a:ext>
             </a:extLst>
           </p:cNvPr>
@@ -26013,7 +26783,7 @@
           <p:cNvPr id="6" name="">
             <a:extLst xmlns:a="http://schemas.openxmlformats.org/drawingml/2006/main">
               <a:ext uri="{FF2B5EF4-FFF2-40B4-BE49-F238E27FC236}">
-                <a16:creationId xmlns:a16="http://schemas.microsoft.com/office/drawing/2014/main" id="{2186E545-B9CE-4341-9A16-217D1214D793}"/>
+                <a16:creationId xmlns:a16="http://schemas.microsoft.com/office/drawing/2014/main" id="{4C89A964-22D5-41F2-9057-A624E46612CA}"/>
               </a:ext>
             </a:extLst>
           </p:cNvPr>
@@ -26023,7 +26793,7 @@
           <p:nvPr/>
         </p:nvPicPr>
         <p:blipFill>
-          <a:blip xmlns:r="http://schemas.openxmlformats.org/officeDocument/2006/relationships" xmlns:a="http://schemas.openxmlformats.org/drawingml/2006/main" r:embed="R93447a9da07c4f02"/>
+          <a:blip xmlns:r="http://schemas.openxmlformats.org/officeDocument/2006/relationships" xmlns:a="http://schemas.openxmlformats.org/drawingml/2006/main" r:embed="Rde1cd9049dbc4db2"/>
           <a:stretch xmlns:a="http://schemas.openxmlformats.org/drawingml/2006/main"/>
         </p:blipFill>
         <p:spPr>
@@ -26041,7 +26811,7 @@
           <p:cNvPr id="7" name="">
             <a:extLst xmlns:a="http://schemas.openxmlformats.org/drawingml/2006/main">
               <a:ext uri="{FF2B5EF4-FFF2-40B4-BE49-F238E27FC236}">
-                <a16:creationId xmlns:a16="http://schemas.microsoft.com/office/drawing/2014/main" id="{9FABA45B-CF87-4100-9F05-758A845E0908}"/>
+                <a16:creationId xmlns:a16="http://schemas.microsoft.com/office/drawing/2014/main" id="{25AD92D0-C7F2-4B3F-89CE-FC1AF540BDE2}"/>
               </a:ext>
             </a:extLst>
           </p:cNvPr>
@@ -26107,7 +26877,7 @@
     </p:spTree>
     <p:extLst>
       <p:ext uri="{BB962C8B-B14F-4D97-AF65-F5344CB8AC3E}">
-        <p14:creationId xmlns:p14="http://schemas.microsoft.com/office/powerpoint/2010/main" val="1389778940"/>
+        <p14:creationId xmlns:p14="http://schemas.microsoft.com/office/powerpoint/2010/main" val="1381676913"/>
       </p:ext>
     </p:extLst>
   </p:cSld>
@@ -26138,7 +26908,7 @@
           <p:cNvPr id="28" name="">
             <a:extLst xmlns:a="http://schemas.openxmlformats.org/drawingml/2006/main">
               <a:ext uri="{FF2B5EF4-FFF2-40B4-BE49-F238E27FC236}">
-                <a16:creationId xmlns:a16="http://schemas.microsoft.com/office/drawing/2014/main" id="{CEB80483-4F39-40C0-BA6A-F317A0BAAEE4}"/>
+                <a16:creationId xmlns:a16="http://schemas.microsoft.com/office/drawing/2014/main" id="{13FE8B78-FBF3-44F9-B9EB-3CD3063A4C6E}"/>
               </a:ext>
             </a:extLst>
           </p:cNvPr>
@@ -26206,7 +26976,7 @@
           <p:cNvPr id="2" name="">
             <a:extLst xmlns:a="http://schemas.openxmlformats.org/drawingml/2006/main">
               <a:ext uri="{FF2B5EF4-FFF2-40B4-BE49-F238E27FC236}">
-                <a16:creationId xmlns:a16="http://schemas.microsoft.com/office/drawing/2014/main" id="{4C0FF06B-5C2E-421E-8632-19A614790CA5}"/>
+                <a16:creationId xmlns:a16="http://schemas.microsoft.com/office/drawing/2014/main" id="{D52F2FDA-E91F-49EA-9AF6-B00624CCBCC4}"/>
               </a:ext>
             </a:extLst>
           </p:cNvPr>
@@ -26274,7 +27044,7 @@
           <p:cNvPr id="3" name="">
             <a:extLst xmlns:a="http://schemas.openxmlformats.org/drawingml/2006/main">
               <a:ext uri="{FF2B5EF4-FFF2-40B4-BE49-F238E27FC236}">
-                <a16:creationId xmlns:a16="http://schemas.microsoft.com/office/drawing/2014/main" id="{1AC1FEA3-D641-418D-B388-4B4A4E4BD7E7}"/>
+                <a16:creationId xmlns:a16="http://schemas.microsoft.com/office/drawing/2014/main" id="{3CE03DB6-408E-45B1-ABE0-401231C9D80A}"/>
               </a:ext>
             </a:extLst>
           </p:cNvPr>
@@ -26305,7 +27075,7 @@
           <p:cNvPr id="4" name="">
             <a:extLst xmlns:a="http://schemas.openxmlformats.org/drawingml/2006/main">
               <a:ext uri="{FF2B5EF4-FFF2-40B4-BE49-F238E27FC236}">
-                <a16:creationId xmlns:a16="http://schemas.microsoft.com/office/drawing/2014/main" id="{7795BC21-3277-456F-82A0-A4D77980B4F0}"/>
+                <a16:creationId xmlns:a16="http://schemas.microsoft.com/office/drawing/2014/main" id="{214C391D-8EF2-4AB2-B953-C73546C278EC}"/>
               </a:ext>
             </a:extLst>
           </p:cNvPr>
@@ -26373,7 +27143,7 @@
           <p:cNvPr id="5" name="">
             <a:extLst xmlns:a="http://schemas.openxmlformats.org/drawingml/2006/main">
               <a:ext uri="{FF2B5EF4-FFF2-40B4-BE49-F238E27FC236}">
-                <a16:creationId xmlns:a16="http://schemas.microsoft.com/office/drawing/2014/main" id="{D71940FE-58A5-470F-9DBC-43744383E796}"/>
+                <a16:creationId xmlns:a16="http://schemas.microsoft.com/office/drawing/2014/main" id="{4C48C511-F506-4331-BE1A-56955A1E1C48}"/>
               </a:ext>
             </a:extLst>
           </p:cNvPr>
@@ -26441,7 +27211,7 @@
           <p:cNvPr id="6" name="">
             <a:extLst xmlns:a="http://schemas.openxmlformats.org/drawingml/2006/main">
               <a:ext uri="{FF2B5EF4-FFF2-40B4-BE49-F238E27FC236}">
-                <a16:creationId xmlns:a16="http://schemas.microsoft.com/office/drawing/2014/main" id="{CF4E32ED-40BE-460C-B499-C358F5A4DC3E}"/>
+                <a16:creationId xmlns:a16="http://schemas.microsoft.com/office/drawing/2014/main" id="{C410B0DF-AA11-43EB-8B73-4ED4121AD199}"/>
               </a:ext>
             </a:extLst>
           </p:cNvPr>
@@ -26451,7 +27221,7 @@
           <p:nvPr/>
         </p:nvPicPr>
         <p:blipFill>
-          <a:blip xmlns:r="http://schemas.openxmlformats.org/officeDocument/2006/relationships" xmlns:a="http://schemas.openxmlformats.org/drawingml/2006/main" r:embed="R6f7b0919a3d44e82"/>
+          <a:blip xmlns:r="http://schemas.openxmlformats.org/officeDocument/2006/relationships" xmlns:a="http://schemas.openxmlformats.org/drawingml/2006/main" r:embed="R41b95a8941524b66"/>
           <a:stretch xmlns:a="http://schemas.openxmlformats.org/drawingml/2006/main"/>
         </p:blipFill>
         <p:spPr>
@@ -26469,7 +27239,7 @@
           <p:cNvPr id="7" name="">
             <a:extLst xmlns:a="http://schemas.openxmlformats.org/drawingml/2006/main">
               <a:ext uri="{FF2B5EF4-FFF2-40B4-BE49-F238E27FC236}">
-                <a16:creationId xmlns:a16="http://schemas.microsoft.com/office/drawing/2014/main" id="{7B9300C1-9E98-4CB2-8CB6-281AB312B4BC}"/>
+                <a16:creationId xmlns:a16="http://schemas.microsoft.com/office/drawing/2014/main" id="{6E82A2E5-60C1-49F8-9B35-4AB2970C1DD9}"/>
               </a:ext>
             </a:extLst>
           </p:cNvPr>
@@ -26537,7 +27307,7 @@
           <p:cNvPr id="8" name="">
             <a:extLst xmlns:a="http://schemas.openxmlformats.org/drawingml/2006/main">
               <a:ext uri="{FF2B5EF4-FFF2-40B4-BE49-F238E27FC236}">
-                <a16:creationId xmlns:a16="http://schemas.microsoft.com/office/drawing/2014/main" id="{2F60B037-555E-4BFD-89EF-F032D09B8EAA}"/>
+                <a16:creationId xmlns:a16="http://schemas.microsoft.com/office/drawing/2014/main" id="{787AC928-F877-4BFA-B2A4-210F077D9008}"/>
               </a:ext>
             </a:extLst>
           </p:cNvPr>
@@ -26651,7 +27421,7 @@
           <p:cNvPr id="9" name="">
             <a:extLst xmlns:a="http://schemas.openxmlformats.org/drawingml/2006/main">
               <a:ext uri="{FF2B5EF4-FFF2-40B4-BE49-F238E27FC236}">
-                <a16:creationId xmlns:a16="http://schemas.microsoft.com/office/drawing/2014/main" id="{A9E7DA3D-5FE7-4D9D-9A25-2590991F2DF7}"/>
+                <a16:creationId xmlns:a16="http://schemas.microsoft.com/office/drawing/2014/main" id="{DE4784DC-8351-4461-BB85-4465B3CF0A3D}"/>
               </a:ext>
             </a:extLst>
           </p:cNvPr>
@@ -26719,7 +27489,7 @@
           <p:cNvPr id="10" name="">
             <a:extLst xmlns:a="http://schemas.openxmlformats.org/drawingml/2006/main">
               <a:ext uri="{FF2B5EF4-FFF2-40B4-BE49-F238E27FC236}">
-                <a16:creationId xmlns:a16="http://schemas.microsoft.com/office/drawing/2014/main" id="{1362537D-75CB-4E99-B0C7-45B8EACD35B7}"/>
+                <a16:creationId xmlns:a16="http://schemas.microsoft.com/office/drawing/2014/main" id="{11CA20BE-7190-4181-B499-CE0A98D2EBD3}"/>
               </a:ext>
             </a:extLst>
           </p:cNvPr>
@@ -26749,7 +27519,7 @@
           <p:cNvPr id="11" name="">
             <a:extLst xmlns:a="http://schemas.openxmlformats.org/drawingml/2006/main">
               <a:ext uri="{FF2B5EF4-FFF2-40B4-BE49-F238E27FC236}">
-                <a16:creationId xmlns:a16="http://schemas.microsoft.com/office/drawing/2014/main" id="{0921957E-B723-4E99-B40E-E20A64236BFD}"/>
+                <a16:creationId xmlns:a16="http://schemas.microsoft.com/office/drawing/2014/main" id="{86617FE6-B0E5-441F-9257-83CAB7869788}"/>
               </a:ext>
             </a:extLst>
           </p:cNvPr>
@@ -26817,7 +27587,7 @@
           <p:cNvPr id="12" name="">
             <a:extLst xmlns:a="http://schemas.openxmlformats.org/drawingml/2006/main">
               <a:ext uri="{FF2B5EF4-FFF2-40B4-BE49-F238E27FC236}">
-                <a16:creationId xmlns:a16="http://schemas.microsoft.com/office/drawing/2014/main" id="{20DF55A6-D95D-48E7-8725-5F040FEC3792}"/>
+                <a16:creationId xmlns:a16="http://schemas.microsoft.com/office/drawing/2014/main" id="{1FBF5A17-F73B-4D04-9631-214AF8D27963}"/>
               </a:ext>
             </a:extLst>
           </p:cNvPr>
@@ -26848,7 +27618,7 @@
           <p:cNvPr id="13" name="">
             <a:extLst xmlns:a="http://schemas.openxmlformats.org/drawingml/2006/main">
               <a:ext uri="{FF2B5EF4-FFF2-40B4-BE49-F238E27FC236}">
-                <a16:creationId xmlns:a16="http://schemas.microsoft.com/office/drawing/2014/main" id="{8F9A427C-A575-4825-AB24-F8F75C1A32BF}"/>
+                <a16:creationId xmlns:a16="http://schemas.microsoft.com/office/drawing/2014/main" id="{78F4FD56-32CF-4126-9438-E3C001DA33B0}"/>
               </a:ext>
             </a:extLst>
           </p:cNvPr>
@@ -26879,7 +27649,7 @@
           <p:cNvPr id="14" name="">
             <a:extLst xmlns:a="http://schemas.openxmlformats.org/drawingml/2006/main">
               <a:ext uri="{FF2B5EF4-FFF2-40B4-BE49-F238E27FC236}">
-                <a16:creationId xmlns:a16="http://schemas.microsoft.com/office/drawing/2014/main" id="{6C727B83-5758-4EA1-8547-5745923DFBCC}"/>
+                <a16:creationId xmlns:a16="http://schemas.microsoft.com/office/drawing/2014/main" id="{E79EFA6C-F47D-4475-B0C5-B9AF9FF9028D}"/>
               </a:ext>
             </a:extLst>
           </p:cNvPr>
@@ -26910,7 +27680,7 @@
           <p:cNvPr id="15" name="">
             <a:extLst xmlns:a="http://schemas.openxmlformats.org/drawingml/2006/main">
               <a:ext uri="{FF2B5EF4-FFF2-40B4-BE49-F238E27FC236}">
-                <a16:creationId xmlns:a16="http://schemas.microsoft.com/office/drawing/2014/main" id="{0C2CC8D4-A3B8-4A44-B794-FF0A23FEADEF}"/>
+                <a16:creationId xmlns:a16="http://schemas.microsoft.com/office/drawing/2014/main" id="{54ACE5B5-0913-460B-AE9F-EDDE84C031E5}"/>
               </a:ext>
             </a:extLst>
           </p:cNvPr>
@@ -26940,7 +27710,7 @@
           <p:cNvPr id="16" name="">
             <a:extLst xmlns:a="http://schemas.openxmlformats.org/drawingml/2006/main">
               <a:ext uri="{FF2B5EF4-FFF2-40B4-BE49-F238E27FC236}">
-                <a16:creationId xmlns:a16="http://schemas.microsoft.com/office/drawing/2014/main" id="{D787B2A2-E2EB-4B3B-8B84-BDC1BBD27B47}"/>
+                <a16:creationId xmlns:a16="http://schemas.microsoft.com/office/drawing/2014/main" id="{37A28807-A683-40AE-8065-98F6A5696DA8}"/>
               </a:ext>
             </a:extLst>
           </p:cNvPr>
@@ -27008,7 +27778,7 @@
           <p:cNvPr id="17" name="">
             <a:extLst xmlns:a="http://schemas.openxmlformats.org/drawingml/2006/main">
               <a:ext uri="{FF2B5EF4-FFF2-40B4-BE49-F238E27FC236}">
-                <a16:creationId xmlns:a16="http://schemas.microsoft.com/office/drawing/2014/main" id="{1E24DD12-55FD-4333-8824-740F20DB59F3}"/>
+                <a16:creationId xmlns:a16="http://schemas.microsoft.com/office/drawing/2014/main" id="{6C6EB5A0-A3F4-467C-B7FF-4283C1BF32FF}"/>
               </a:ext>
             </a:extLst>
           </p:cNvPr>
@@ -27039,7 +27809,7 @@
           <p:cNvPr id="18" name="">
             <a:extLst xmlns:a="http://schemas.openxmlformats.org/drawingml/2006/main">
               <a:ext uri="{FF2B5EF4-FFF2-40B4-BE49-F238E27FC236}">
-                <a16:creationId xmlns:a16="http://schemas.microsoft.com/office/drawing/2014/main" id="{BD71F77B-9A4F-4893-A818-0A69EC0AD1E3}"/>
+                <a16:creationId xmlns:a16="http://schemas.microsoft.com/office/drawing/2014/main" id="{27CBD176-2FCF-4883-A5F2-065478C7C6A0}"/>
               </a:ext>
             </a:extLst>
           </p:cNvPr>
@@ -27070,7 +27840,7 @@
           <p:cNvPr id="19" name="">
             <a:extLst xmlns:a="http://schemas.openxmlformats.org/drawingml/2006/main">
               <a:ext uri="{FF2B5EF4-FFF2-40B4-BE49-F238E27FC236}">
-                <a16:creationId xmlns:a16="http://schemas.microsoft.com/office/drawing/2014/main" id="{152569B8-4A30-4C64-8E2E-B2C9E14A0EEC}"/>
+                <a16:creationId xmlns:a16="http://schemas.microsoft.com/office/drawing/2014/main" id="{30C64B46-1A73-4003-96FC-C8F07664F634}"/>
               </a:ext>
             </a:extLst>
           </p:cNvPr>
@@ -27101,7 +27871,7 @@
           <p:cNvPr id="20" name="">
             <a:extLst xmlns:a="http://schemas.openxmlformats.org/drawingml/2006/main">
               <a:ext uri="{FF2B5EF4-FFF2-40B4-BE49-F238E27FC236}">
-                <a16:creationId xmlns:a16="http://schemas.microsoft.com/office/drawing/2014/main" id="{93A5C0D3-475C-4C17-A6B8-BF98B6A27CC7}"/>
+                <a16:creationId xmlns:a16="http://schemas.microsoft.com/office/drawing/2014/main" id="{C1588A5F-B0F4-45EE-930E-71740C0A372F}"/>
               </a:ext>
             </a:extLst>
           </p:cNvPr>
@@ -27131,7 +27901,7 @@
           <p:cNvPr id="21" name="">
             <a:extLst xmlns:a="http://schemas.openxmlformats.org/drawingml/2006/main">
               <a:ext uri="{FF2B5EF4-FFF2-40B4-BE49-F238E27FC236}">
-                <a16:creationId xmlns:a16="http://schemas.microsoft.com/office/drawing/2014/main" id="{876A3AC8-9A75-44AE-835D-E7C54E6B5D24}"/>
+                <a16:creationId xmlns:a16="http://schemas.microsoft.com/office/drawing/2014/main" id="{ED2394B6-88DC-4D23-8E4B-799BA076CB04}"/>
               </a:ext>
             </a:extLst>
           </p:cNvPr>
@@ -27199,7 +27969,7 @@
           <p:cNvPr id="22" name="">
             <a:extLst xmlns:a="http://schemas.openxmlformats.org/drawingml/2006/main">
               <a:ext uri="{FF2B5EF4-FFF2-40B4-BE49-F238E27FC236}">
-                <a16:creationId xmlns:a16="http://schemas.microsoft.com/office/drawing/2014/main" id="{DD1BB1AC-99EA-4507-BDC6-69B7C4DD9092}"/>
+                <a16:creationId xmlns:a16="http://schemas.microsoft.com/office/drawing/2014/main" id="{D791DDEB-DA36-4A02-B4F6-CB94E532FF9D}"/>
               </a:ext>
             </a:extLst>
           </p:cNvPr>
@@ -27230,7 +28000,7 @@
           <p:cNvPr id="23" name="">
             <a:extLst xmlns:a="http://schemas.openxmlformats.org/drawingml/2006/main">
               <a:ext uri="{FF2B5EF4-FFF2-40B4-BE49-F238E27FC236}">
-                <a16:creationId xmlns:a16="http://schemas.microsoft.com/office/drawing/2014/main" id="{59A12B67-BF7E-43CD-8C72-5A8A25F4AE1D}"/>
+                <a16:creationId xmlns:a16="http://schemas.microsoft.com/office/drawing/2014/main" id="{F3A15C55-77FF-43F2-9B55-B2F8997DD27B}"/>
               </a:ext>
             </a:extLst>
           </p:cNvPr>
@@ -27261,7 +28031,7 @@
           <p:cNvPr id="24" name="">
             <a:extLst xmlns:a="http://schemas.openxmlformats.org/drawingml/2006/main">
               <a:ext uri="{FF2B5EF4-FFF2-40B4-BE49-F238E27FC236}">
-                <a16:creationId xmlns:a16="http://schemas.microsoft.com/office/drawing/2014/main" id="{B56C2E45-511E-400A-B0A4-2C8A3088925E}"/>
+                <a16:creationId xmlns:a16="http://schemas.microsoft.com/office/drawing/2014/main" id="{E8C840FF-FCF6-49BA-B4FF-F9F23AA5D1EA}"/>
               </a:ext>
             </a:extLst>
           </p:cNvPr>
@@ -27292,7 +28062,7 @@
           <p:cNvPr id="25" name="">
             <a:extLst xmlns:a="http://schemas.openxmlformats.org/drawingml/2006/main">
               <a:ext uri="{FF2B5EF4-FFF2-40B4-BE49-F238E27FC236}">
-                <a16:creationId xmlns:a16="http://schemas.microsoft.com/office/drawing/2014/main" id="{8C4EB912-31AD-44AA-BD4F-B44E2836E037}"/>
+                <a16:creationId xmlns:a16="http://schemas.microsoft.com/office/drawing/2014/main" id="{11E02FEF-E695-4794-B3C7-41A2252F8765}"/>
               </a:ext>
             </a:extLst>
           </p:cNvPr>
@@ -27322,7 +28092,7 @@
           <p:cNvPr id="26" name="">
             <a:extLst xmlns:a="http://schemas.openxmlformats.org/drawingml/2006/main">
               <a:ext uri="{FF2B5EF4-FFF2-40B4-BE49-F238E27FC236}">
-                <a16:creationId xmlns:a16="http://schemas.microsoft.com/office/drawing/2014/main" id="{C0A8F265-CE96-4C5E-838B-E1E02984481C}"/>
+                <a16:creationId xmlns:a16="http://schemas.microsoft.com/office/drawing/2014/main" id="{C7003148-E22E-4663-B207-FBFDFBCE210E}"/>
               </a:ext>
             </a:extLst>
           </p:cNvPr>
@@ -27390,7 +28160,7 @@
           <p:cNvPr id="27" name="">
             <a:extLst xmlns:a="http://schemas.openxmlformats.org/drawingml/2006/main">
               <a:ext uri="{FF2B5EF4-FFF2-40B4-BE49-F238E27FC236}">
-                <a16:creationId xmlns:a16="http://schemas.microsoft.com/office/drawing/2014/main" id="{BD993C85-1D46-420E-B68F-DDD7D88FD5AF}"/>
+                <a16:creationId xmlns:a16="http://schemas.microsoft.com/office/drawing/2014/main" id="{AF45C006-14EB-401A-8127-B060C20B7BF2}"/>
               </a:ext>
             </a:extLst>
           </p:cNvPr>
@@ -27456,7 +28226,7 @@
     </p:spTree>
     <p:extLst>
       <p:ext uri="{BB962C8B-B14F-4D97-AF65-F5344CB8AC3E}">
-        <p14:creationId xmlns:p14="http://schemas.microsoft.com/office/powerpoint/2010/main" val="874902542"/>
+        <p14:creationId xmlns:p14="http://schemas.microsoft.com/office/powerpoint/2010/main" val="280622270"/>
       </p:ext>
     </p:extLst>
   </p:cSld>
@@ -27487,7 +28257,7 @@
           <p:cNvPr id="52" name="">
             <a:extLst xmlns:a="http://schemas.openxmlformats.org/drawingml/2006/main">
               <a:ext uri="{FF2B5EF4-FFF2-40B4-BE49-F238E27FC236}">
-                <a16:creationId xmlns:a16="http://schemas.microsoft.com/office/drawing/2014/main" id="{0744CFCF-3F89-4856-AE5D-3BA81FE6831A}"/>
+                <a16:creationId xmlns:a16="http://schemas.microsoft.com/office/drawing/2014/main" id="{57158DC1-9695-4BEA-8340-22CC5B9ADD56}"/>
               </a:ext>
             </a:extLst>
           </p:cNvPr>
@@ -27555,7 +28325,7 @@
           <p:cNvPr id="2" name="">
             <a:extLst xmlns:a="http://schemas.openxmlformats.org/drawingml/2006/main">
               <a:ext uri="{FF2B5EF4-FFF2-40B4-BE49-F238E27FC236}">
-                <a16:creationId xmlns:a16="http://schemas.microsoft.com/office/drawing/2014/main" id="{4767E7DD-5279-4892-8E66-2765D3D2D0AB}"/>
+                <a16:creationId xmlns:a16="http://schemas.microsoft.com/office/drawing/2014/main" id="{4154B645-A10E-41C6-881D-9CF6EAC58E21}"/>
               </a:ext>
             </a:extLst>
           </p:cNvPr>
@@ -27623,7 +28393,7 @@
           <p:cNvPr id="3" name="">
             <a:extLst xmlns:a="http://schemas.openxmlformats.org/drawingml/2006/main">
               <a:ext uri="{FF2B5EF4-FFF2-40B4-BE49-F238E27FC236}">
-                <a16:creationId xmlns:a16="http://schemas.microsoft.com/office/drawing/2014/main" id="{3F230D2D-19CE-47D9-9C3E-FC5D851FC83A}"/>
+                <a16:creationId xmlns:a16="http://schemas.microsoft.com/office/drawing/2014/main" id="{EDC4EC21-302E-4C48-BFD5-5F6EAEC9B590}"/>
               </a:ext>
             </a:extLst>
           </p:cNvPr>
@@ -27654,7 +28424,7 @@
           <p:cNvPr id="4" name="">
             <a:extLst xmlns:a="http://schemas.openxmlformats.org/drawingml/2006/main">
               <a:ext uri="{FF2B5EF4-FFF2-40B4-BE49-F238E27FC236}">
-                <a16:creationId xmlns:a16="http://schemas.microsoft.com/office/drawing/2014/main" id="{CCCE8573-4AD0-48B5-AA7F-15E25B71740E}"/>
+                <a16:creationId xmlns:a16="http://schemas.microsoft.com/office/drawing/2014/main" id="{A94635F9-CBFC-47AC-AFB0-D5E312362BB3}"/>
               </a:ext>
             </a:extLst>
           </p:cNvPr>
@@ -27722,7 +28492,7 @@
           <p:cNvPr id="5" name="">
             <a:extLst xmlns:a="http://schemas.openxmlformats.org/drawingml/2006/main">
               <a:ext uri="{FF2B5EF4-FFF2-40B4-BE49-F238E27FC236}">
-                <a16:creationId xmlns:a16="http://schemas.microsoft.com/office/drawing/2014/main" id="{B6847DA3-22E4-4245-86B3-6F3C2236D255}"/>
+                <a16:creationId xmlns:a16="http://schemas.microsoft.com/office/drawing/2014/main" id="{B6AF0691-A04B-4B05-8F2D-E984FB6BA80C}"/>
               </a:ext>
             </a:extLst>
           </p:cNvPr>
@@ -27790,7 +28560,7 @@
           <p:cNvPr id="6" name="">
             <a:extLst xmlns:a="http://schemas.openxmlformats.org/drawingml/2006/main">
               <a:ext uri="{FF2B5EF4-FFF2-40B4-BE49-F238E27FC236}">
-                <a16:creationId xmlns:a16="http://schemas.microsoft.com/office/drawing/2014/main" id="{A4DDC533-2462-46E0-8855-EA822FC726CD}"/>
+                <a16:creationId xmlns:a16="http://schemas.microsoft.com/office/drawing/2014/main" id="{7AA4E6AA-4E88-469C-B1B4-BD4E543728D1}"/>
               </a:ext>
             </a:extLst>
           </p:cNvPr>
@@ -27858,7 +28628,7 @@
           <p:cNvPr id="7" name="">
             <a:extLst xmlns:a="http://schemas.openxmlformats.org/drawingml/2006/main">
               <a:ext uri="{FF2B5EF4-FFF2-40B4-BE49-F238E27FC236}">
-                <a16:creationId xmlns:a16="http://schemas.microsoft.com/office/drawing/2014/main" id="{5D2941B9-074E-45B1-BA6C-8C38EC5FA913}"/>
+                <a16:creationId xmlns:a16="http://schemas.microsoft.com/office/drawing/2014/main" id="{68FC6247-42DF-4C6F-80BE-A0545F947A81}"/>
               </a:ext>
             </a:extLst>
           </p:cNvPr>
@@ -27926,7 +28696,7 @@
           <p:cNvPr id="8" name="">
             <a:extLst xmlns:a="http://schemas.openxmlformats.org/drawingml/2006/main">
               <a:ext uri="{FF2B5EF4-FFF2-40B4-BE49-F238E27FC236}">
-                <a16:creationId xmlns:a16="http://schemas.microsoft.com/office/drawing/2014/main" id="{DB5DA05D-F82D-4457-B0A6-9BF507955E8F}"/>
+                <a16:creationId xmlns:a16="http://schemas.microsoft.com/office/drawing/2014/main" id="{17F28259-F74F-4C8D-8FE5-17C3968EF566}"/>
               </a:ext>
             </a:extLst>
           </p:cNvPr>
@@ -27957,7 +28727,7 @@
           <p:cNvPr id="9" name="">
             <a:extLst xmlns:a="http://schemas.openxmlformats.org/drawingml/2006/main">
               <a:ext uri="{FF2B5EF4-FFF2-40B4-BE49-F238E27FC236}">
-                <a16:creationId xmlns:a16="http://schemas.microsoft.com/office/drawing/2014/main" id="{57EF3D2F-6C65-48C1-8F1E-156DD52CE551}"/>
+                <a16:creationId xmlns:a16="http://schemas.microsoft.com/office/drawing/2014/main" id="{C999A22C-A0A7-4A90-A35E-31D3F0F83466}"/>
               </a:ext>
             </a:extLst>
           </p:cNvPr>
@@ -28025,7 +28795,7 @@
           <p:cNvPr id="10" name="">
             <a:extLst xmlns:a="http://schemas.openxmlformats.org/drawingml/2006/main">
               <a:ext uri="{FF2B5EF4-FFF2-40B4-BE49-F238E27FC236}">
-                <a16:creationId xmlns:a16="http://schemas.microsoft.com/office/drawing/2014/main" id="{BA54AE83-CF39-4D05-BD78-E0EDAA96F336}"/>
+                <a16:creationId xmlns:a16="http://schemas.microsoft.com/office/drawing/2014/main" id="{1DA9729A-E1F3-4405-8CEE-3A70AC2EFCFC}"/>
               </a:ext>
             </a:extLst>
           </p:cNvPr>
@@ -28056,7 +28826,7 @@
           <p:cNvPr id="11" name="">
             <a:extLst xmlns:a="http://schemas.openxmlformats.org/drawingml/2006/main">
               <a:ext uri="{FF2B5EF4-FFF2-40B4-BE49-F238E27FC236}">
-                <a16:creationId xmlns:a16="http://schemas.microsoft.com/office/drawing/2014/main" id="{A0948E9E-B2A3-4A32-83B1-41F0E50DABB8}"/>
+                <a16:creationId xmlns:a16="http://schemas.microsoft.com/office/drawing/2014/main" id="{C4CB3975-A48A-4D6F-8EDE-315122B966FC}"/>
               </a:ext>
             </a:extLst>
           </p:cNvPr>
@@ -28124,7 +28894,7 @@
           <p:cNvPr id="12" name="">
             <a:extLst xmlns:a="http://schemas.openxmlformats.org/drawingml/2006/main">
               <a:ext uri="{FF2B5EF4-FFF2-40B4-BE49-F238E27FC236}">
-                <a16:creationId xmlns:a16="http://schemas.microsoft.com/office/drawing/2014/main" id="{FA3DCFDD-7041-404C-9F0F-B7FB46E654F3}"/>
+                <a16:creationId xmlns:a16="http://schemas.microsoft.com/office/drawing/2014/main" id="{5FF02E69-F826-4716-B859-A75BEFDBD6DB}"/>
               </a:ext>
             </a:extLst>
           </p:cNvPr>
@@ -28155,7 +28925,7 @@
           <p:cNvPr id="13" name="">
             <a:extLst xmlns:a="http://schemas.openxmlformats.org/drawingml/2006/main">
               <a:ext uri="{FF2B5EF4-FFF2-40B4-BE49-F238E27FC236}">
-                <a16:creationId xmlns:a16="http://schemas.microsoft.com/office/drawing/2014/main" id="{23E9AE10-9816-4718-9ED4-A5C9AD43789C}"/>
+                <a16:creationId xmlns:a16="http://schemas.microsoft.com/office/drawing/2014/main" id="{A5673E36-7074-4AE9-BCC1-324727058F81}"/>
               </a:ext>
             </a:extLst>
           </p:cNvPr>
@@ -28223,7 +28993,7 @@
           <p:cNvPr id="14" name="">
             <a:extLst xmlns:a="http://schemas.openxmlformats.org/drawingml/2006/main">
               <a:ext uri="{FF2B5EF4-FFF2-40B4-BE49-F238E27FC236}">
-                <a16:creationId xmlns:a16="http://schemas.microsoft.com/office/drawing/2014/main" id="{644C1FC9-9510-45C0-A36D-1A92EB4C9984}"/>
+                <a16:creationId xmlns:a16="http://schemas.microsoft.com/office/drawing/2014/main" id="{8D607DB4-6782-4793-8370-1B574343C9DA}"/>
               </a:ext>
             </a:extLst>
           </p:cNvPr>
@@ -28254,7 +29024,7 @@
           <p:cNvPr id="15" name="">
             <a:extLst xmlns:a="http://schemas.openxmlformats.org/drawingml/2006/main">
               <a:ext uri="{FF2B5EF4-FFF2-40B4-BE49-F238E27FC236}">
-                <a16:creationId xmlns:a16="http://schemas.microsoft.com/office/drawing/2014/main" id="{4DE28BD5-98FD-48E8-B740-CFC0C33A1FB4}"/>
+                <a16:creationId xmlns:a16="http://schemas.microsoft.com/office/drawing/2014/main" id="{CC8C6377-B1C2-44D8-8C35-915D9E3AD67B}"/>
               </a:ext>
             </a:extLst>
           </p:cNvPr>
@@ -28322,7 +29092,7 @@
           <p:cNvPr id="16" name="">
             <a:extLst xmlns:a="http://schemas.openxmlformats.org/drawingml/2006/main">
               <a:ext uri="{FF2B5EF4-FFF2-40B4-BE49-F238E27FC236}">
-                <a16:creationId xmlns:a16="http://schemas.microsoft.com/office/drawing/2014/main" id="{278879C9-2492-415B-841A-CDB5DB1C71C9}"/>
+                <a16:creationId xmlns:a16="http://schemas.microsoft.com/office/drawing/2014/main" id="{8C432C36-2411-4EDA-A0B9-A990413A52B7}"/>
               </a:ext>
             </a:extLst>
           </p:cNvPr>
@@ -28353,7 +29123,7 @@
           <p:cNvPr id="17" name="">
             <a:extLst xmlns:a="http://schemas.openxmlformats.org/drawingml/2006/main">
               <a:ext uri="{FF2B5EF4-FFF2-40B4-BE49-F238E27FC236}">
-                <a16:creationId xmlns:a16="http://schemas.microsoft.com/office/drawing/2014/main" id="{3E5A26A6-D4B5-42AC-8776-A84D62AC4437}"/>
+                <a16:creationId xmlns:a16="http://schemas.microsoft.com/office/drawing/2014/main" id="{FFC0039F-9FD3-46A0-9747-EF4ED3C731E2}"/>
               </a:ext>
             </a:extLst>
           </p:cNvPr>
@@ -28421,7 +29191,7 @@
           <p:cNvPr id="18" name="">
             <a:extLst xmlns:a="http://schemas.openxmlformats.org/drawingml/2006/main">
               <a:ext uri="{FF2B5EF4-FFF2-40B4-BE49-F238E27FC236}">
-                <a16:creationId xmlns:a16="http://schemas.microsoft.com/office/drawing/2014/main" id="{5B8C2120-21A8-4DE2-8AB3-DD8074933385}"/>
+                <a16:creationId xmlns:a16="http://schemas.microsoft.com/office/drawing/2014/main" id="{9DDC5A44-A7F9-4A69-B7E9-B911CBCE4B8A}"/>
               </a:ext>
             </a:extLst>
           </p:cNvPr>
@@ -28452,7 +29222,7 @@
           <p:cNvPr id="19" name="">
             <a:extLst xmlns:a="http://schemas.openxmlformats.org/drawingml/2006/main">
               <a:ext uri="{FF2B5EF4-FFF2-40B4-BE49-F238E27FC236}">
-                <a16:creationId xmlns:a16="http://schemas.microsoft.com/office/drawing/2014/main" id="{B792778F-A479-4377-93C8-375D42DD16F9}"/>
+                <a16:creationId xmlns:a16="http://schemas.microsoft.com/office/drawing/2014/main" id="{05AD18CB-AC9B-4DFF-B57E-AA4571CA3DEA}"/>
               </a:ext>
             </a:extLst>
           </p:cNvPr>
@@ -28520,7 +29290,7 @@
           <p:cNvPr id="20" name="">
             <a:extLst xmlns:a="http://schemas.openxmlformats.org/drawingml/2006/main">
               <a:ext uri="{FF2B5EF4-FFF2-40B4-BE49-F238E27FC236}">
-                <a16:creationId xmlns:a16="http://schemas.microsoft.com/office/drawing/2014/main" id="{5CC81E2C-D073-46B3-B025-9C1ADAAEFAED}"/>
+                <a16:creationId xmlns:a16="http://schemas.microsoft.com/office/drawing/2014/main" id="{2378920E-7357-4A71-8235-A478DD54C0C0}"/>
               </a:ext>
             </a:extLst>
           </p:cNvPr>
@@ -28551,7 +29321,7 @@
           <p:cNvPr id="21" name="">
             <a:extLst xmlns:a="http://schemas.openxmlformats.org/drawingml/2006/main">
               <a:ext uri="{FF2B5EF4-FFF2-40B4-BE49-F238E27FC236}">
-                <a16:creationId xmlns:a16="http://schemas.microsoft.com/office/drawing/2014/main" id="{82C1C271-D7BC-4A3F-918F-3C524BA61BC8}"/>
+                <a16:creationId xmlns:a16="http://schemas.microsoft.com/office/drawing/2014/main" id="{1241EB4B-DAEC-4FCF-B534-AE5670B5AC65}"/>
               </a:ext>
             </a:extLst>
           </p:cNvPr>
@@ -28619,7 +29389,7 @@
           <p:cNvPr id="22" name="">
             <a:extLst xmlns:a="http://schemas.openxmlformats.org/drawingml/2006/main">
               <a:ext uri="{FF2B5EF4-FFF2-40B4-BE49-F238E27FC236}">
-                <a16:creationId xmlns:a16="http://schemas.microsoft.com/office/drawing/2014/main" id="{3EA9E505-979D-47D6-B996-267DC1A8C9A4}"/>
+                <a16:creationId xmlns:a16="http://schemas.microsoft.com/office/drawing/2014/main" id="{612B6C86-D464-4A09-B432-E65FD981B11A}"/>
               </a:ext>
             </a:extLst>
           </p:cNvPr>
@@ -28650,7 +29420,7 @@
           <p:cNvPr id="23" name="">
             <a:extLst xmlns:a="http://schemas.openxmlformats.org/drawingml/2006/main">
               <a:ext uri="{FF2B5EF4-FFF2-40B4-BE49-F238E27FC236}">
-                <a16:creationId xmlns:a16="http://schemas.microsoft.com/office/drawing/2014/main" id="{2AF2E11F-B053-4773-B76E-492E909F0F49}"/>
+                <a16:creationId xmlns:a16="http://schemas.microsoft.com/office/drawing/2014/main" id="{94A878FE-6C15-48C8-A457-8A4713559ACE}"/>
               </a:ext>
             </a:extLst>
           </p:cNvPr>
@@ -28718,7 +29488,7 @@
           <p:cNvPr id="24" name="">
             <a:extLst xmlns:a="http://schemas.openxmlformats.org/drawingml/2006/main">
               <a:ext uri="{FF2B5EF4-FFF2-40B4-BE49-F238E27FC236}">
-                <a16:creationId xmlns:a16="http://schemas.microsoft.com/office/drawing/2014/main" id="{2DCA24F9-9D24-44E1-8EF8-797FD86D5E0A}"/>
+                <a16:creationId xmlns:a16="http://schemas.microsoft.com/office/drawing/2014/main" id="{FF241791-DA8B-4616-BB80-404AC3E461EC}"/>
               </a:ext>
             </a:extLst>
           </p:cNvPr>
@@ -28749,7 +29519,7 @@
           <p:cNvPr id="25" name="">
             <a:extLst xmlns:a="http://schemas.openxmlformats.org/drawingml/2006/main">
               <a:ext uri="{FF2B5EF4-FFF2-40B4-BE49-F238E27FC236}">
-                <a16:creationId xmlns:a16="http://schemas.microsoft.com/office/drawing/2014/main" id="{142528B9-18B0-4A02-8E06-6B8A436E10AA}"/>
+                <a16:creationId xmlns:a16="http://schemas.microsoft.com/office/drawing/2014/main" id="{D3A18C5F-0A02-4D29-837F-5A10C3F3F67A}"/>
               </a:ext>
             </a:extLst>
           </p:cNvPr>
@@ -28817,7 +29587,7 @@
           <p:cNvPr id="26" name="">
             <a:extLst xmlns:a="http://schemas.openxmlformats.org/drawingml/2006/main">
               <a:ext uri="{FF2B5EF4-FFF2-40B4-BE49-F238E27FC236}">
-                <a16:creationId xmlns:a16="http://schemas.microsoft.com/office/drawing/2014/main" id="{ADFAB269-4BDD-4101-8045-BDECC98058A6}"/>
+                <a16:creationId xmlns:a16="http://schemas.microsoft.com/office/drawing/2014/main" id="{5ECDEA19-B86B-4109-9EA5-01CE23D9BC82}"/>
               </a:ext>
             </a:extLst>
           </p:cNvPr>
@@ -28847,7 +29617,7 @@
           <p:cNvPr id="27" name="">
             <a:extLst xmlns:a="http://schemas.openxmlformats.org/drawingml/2006/main">
               <a:ext uri="{FF2B5EF4-FFF2-40B4-BE49-F238E27FC236}">
-                <a16:creationId xmlns:a16="http://schemas.microsoft.com/office/drawing/2014/main" id="{E2233E19-0461-40F5-B8C7-292CED2251F1}"/>
+                <a16:creationId xmlns:a16="http://schemas.microsoft.com/office/drawing/2014/main" id="{93273938-ACF9-4D56-B849-CB2BCCCECE9C}"/>
               </a:ext>
             </a:extLst>
           </p:cNvPr>
@@ -28915,7 +29685,7 @@
           <p:cNvPr id="28" name="">
             <a:extLst xmlns:a="http://schemas.openxmlformats.org/drawingml/2006/main">
               <a:ext uri="{FF2B5EF4-FFF2-40B4-BE49-F238E27FC236}">
-                <a16:creationId xmlns:a16="http://schemas.microsoft.com/office/drawing/2014/main" id="{9FD2EA5F-14B4-4142-98C5-1DD503501737}"/>
+                <a16:creationId xmlns:a16="http://schemas.microsoft.com/office/drawing/2014/main" id="{4C76819E-0D8F-4FF7-B0F0-5480BF2DCBBE}"/>
               </a:ext>
             </a:extLst>
           </p:cNvPr>
@@ -28945,7 +29715,7 @@
           <p:cNvPr id="29" name="">
             <a:extLst xmlns:a="http://schemas.openxmlformats.org/drawingml/2006/main">
               <a:ext uri="{FF2B5EF4-FFF2-40B4-BE49-F238E27FC236}">
-                <a16:creationId xmlns:a16="http://schemas.microsoft.com/office/drawing/2014/main" id="{4446DA3E-A0C5-4F91-87BD-009C7BBAC83C}"/>
+                <a16:creationId xmlns:a16="http://schemas.microsoft.com/office/drawing/2014/main" id="{34B443C6-47D2-4E6E-B0CD-87B182F124B8}"/>
               </a:ext>
             </a:extLst>
           </p:cNvPr>
@@ -29013,7 +29783,7 @@
           <p:cNvPr id="30" name="">
             <a:extLst xmlns:a="http://schemas.openxmlformats.org/drawingml/2006/main">
               <a:ext uri="{FF2B5EF4-FFF2-40B4-BE49-F238E27FC236}">
-                <a16:creationId xmlns:a16="http://schemas.microsoft.com/office/drawing/2014/main" id="{9716781D-4D56-470D-9D5C-70AD5B4EABA9}"/>
+                <a16:creationId xmlns:a16="http://schemas.microsoft.com/office/drawing/2014/main" id="{802194DE-DCFA-4196-98E0-2DAF003A18CD}"/>
               </a:ext>
             </a:extLst>
           </p:cNvPr>
@@ -29043,7 +29813,7 @@
           <p:cNvPr id="31" name="">
             <a:extLst xmlns:a="http://schemas.openxmlformats.org/drawingml/2006/main">
               <a:ext uri="{FF2B5EF4-FFF2-40B4-BE49-F238E27FC236}">
-                <a16:creationId xmlns:a16="http://schemas.microsoft.com/office/drawing/2014/main" id="{492381DD-E46C-4DBB-9BC7-3A8A7F82B09B}"/>
+                <a16:creationId xmlns:a16="http://schemas.microsoft.com/office/drawing/2014/main" id="{6D685831-7B26-4830-BF91-3EDA749A22E6}"/>
               </a:ext>
             </a:extLst>
           </p:cNvPr>
@@ -29111,7 +29881,7 @@
           <p:cNvPr id="32" name="">
             <a:extLst xmlns:a="http://schemas.openxmlformats.org/drawingml/2006/main">
               <a:ext uri="{FF2B5EF4-FFF2-40B4-BE49-F238E27FC236}">
-                <a16:creationId xmlns:a16="http://schemas.microsoft.com/office/drawing/2014/main" id="{1E4F1495-CBA7-4C15-A7F3-50912DC873D9}"/>
+                <a16:creationId xmlns:a16="http://schemas.microsoft.com/office/drawing/2014/main" id="{010B03A6-B512-4158-86B3-3823C956181E}"/>
               </a:ext>
             </a:extLst>
           </p:cNvPr>
@@ -29141,7 +29911,7 @@
           <p:cNvPr id="33" name="">
             <a:extLst xmlns:a="http://schemas.openxmlformats.org/drawingml/2006/main">
               <a:ext uri="{FF2B5EF4-FFF2-40B4-BE49-F238E27FC236}">
-                <a16:creationId xmlns:a16="http://schemas.microsoft.com/office/drawing/2014/main" id="{DD0A9767-1D42-4FF4-A722-0BFD48F85C05}"/>
+                <a16:creationId xmlns:a16="http://schemas.microsoft.com/office/drawing/2014/main" id="{69F09B4E-3DF4-4125-9C12-F10C3A99B104}"/>
               </a:ext>
             </a:extLst>
           </p:cNvPr>
@@ -29209,7 +29979,7 @@
           <p:cNvPr id="34" name="">
             <a:extLst xmlns:a="http://schemas.openxmlformats.org/drawingml/2006/main">
               <a:ext uri="{FF2B5EF4-FFF2-40B4-BE49-F238E27FC236}">
-                <a16:creationId xmlns:a16="http://schemas.microsoft.com/office/drawing/2014/main" id="{16365576-DC4E-4355-AB81-6E4801DCD8F4}"/>
+                <a16:creationId xmlns:a16="http://schemas.microsoft.com/office/drawing/2014/main" id="{E220B63E-C423-4E2E-9BD7-7793888AF1CF}"/>
               </a:ext>
             </a:extLst>
           </p:cNvPr>
@@ -29277,7 +30047,7 @@
           <p:cNvPr id="35" name="">
             <a:extLst xmlns:a="http://schemas.openxmlformats.org/drawingml/2006/main">
               <a:ext uri="{FF2B5EF4-FFF2-40B4-BE49-F238E27FC236}">
-                <a16:creationId xmlns:a16="http://schemas.microsoft.com/office/drawing/2014/main" id="{2B9ACF82-48E5-4301-8FC9-91FFB6CD9859}"/>
+                <a16:creationId xmlns:a16="http://schemas.microsoft.com/office/drawing/2014/main" id="{00805655-6C6B-4E81-9437-D2C0E6625B45}"/>
               </a:ext>
             </a:extLst>
           </p:cNvPr>
@@ -29345,7 +30115,7 @@
           <p:cNvPr id="36" name="">
             <a:extLst xmlns:a="http://schemas.openxmlformats.org/drawingml/2006/main">
               <a:ext uri="{FF2B5EF4-FFF2-40B4-BE49-F238E27FC236}">
-                <a16:creationId xmlns:a16="http://schemas.microsoft.com/office/drawing/2014/main" id="{B7F3E8F2-29F3-43EB-8593-0D8F778FF59D}"/>
+                <a16:creationId xmlns:a16="http://schemas.microsoft.com/office/drawing/2014/main" id="{AAD742E8-372A-4C29-931B-0F95F15D5694}"/>
               </a:ext>
             </a:extLst>
           </p:cNvPr>
@@ -29413,7 +30183,7 @@
           <p:cNvPr id="37" name="">
             <a:extLst xmlns:a="http://schemas.openxmlformats.org/drawingml/2006/main">
               <a:ext uri="{FF2B5EF4-FFF2-40B4-BE49-F238E27FC236}">
-                <a16:creationId xmlns:a16="http://schemas.microsoft.com/office/drawing/2014/main" id="{109D46D6-AEE4-45E4-85A5-070185F9865C}"/>
+                <a16:creationId xmlns:a16="http://schemas.microsoft.com/office/drawing/2014/main" id="{CDF886DE-B3D4-4680-898F-75729FAE76B0}"/>
               </a:ext>
             </a:extLst>
           </p:cNvPr>
@@ -29444,7 +30214,7 @@
           <p:cNvPr id="38" name="">
             <a:extLst xmlns:a="http://schemas.openxmlformats.org/drawingml/2006/main">
               <a:ext uri="{FF2B5EF4-FFF2-40B4-BE49-F238E27FC236}">
-                <a16:creationId xmlns:a16="http://schemas.microsoft.com/office/drawing/2014/main" id="{C02A5C61-5E6D-477A-96D3-E5BA21565C6D}"/>
+                <a16:creationId xmlns:a16="http://schemas.microsoft.com/office/drawing/2014/main" id="{F2E966AE-CF32-4CCA-B964-38E58C18A623}"/>
               </a:ext>
             </a:extLst>
           </p:cNvPr>
@@ -29475,7 +30245,7 @@
           <p:cNvPr id="39" name="">
             <a:extLst xmlns:a="http://schemas.openxmlformats.org/drawingml/2006/main">
               <a:ext uri="{FF2B5EF4-FFF2-40B4-BE49-F238E27FC236}">
-                <a16:creationId xmlns:a16="http://schemas.microsoft.com/office/drawing/2014/main" id="{F04262E9-F07C-4655-A49C-FC7B9A5B0B45}"/>
+                <a16:creationId xmlns:a16="http://schemas.microsoft.com/office/drawing/2014/main" id="{EF0F04CB-8C2F-4956-B50A-2BBAD03373E4}"/>
               </a:ext>
             </a:extLst>
           </p:cNvPr>
@@ -29505,7 +30275,7 @@
           <p:cNvPr id="40" name="">
             <a:extLst xmlns:a="http://schemas.openxmlformats.org/drawingml/2006/main">
               <a:ext uri="{FF2B5EF4-FFF2-40B4-BE49-F238E27FC236}">
-                <a16:creationId xmlns:a16="http://schemas.microsoft.com/office/drawing/2014/main" id="{D687A40F-CED1-438E-B3A5-08CBAB5A024A}"/>
+                <a16:creationId xmlns:a16="http://schemas.microsoft.com/office/drawing/2014/main" id="{03D20D58-6BD4-4B00-8D00-011B24A3BC0F}"/>
               </a:ext>
             </a:extLst>
           </p:cNvPr>
@@ -29573,7 +30343,7 @@
           <p:cNvPr id="41" name="">
             <a:extLst xmlns:a="http://schemas.openxmlformats.org/drawingml/2006/main">
               <a:ext uri="{FF2B5EF4-FFF2-40B4-BE49-F238E27FC236}">
-                <a16:creationId xmlns:a16="http://schemas.microsoft.com/office/drawing/2014/main" id="{EE8F457D-2D42-4CA0-9601-304D0EC043CE}"/>
+                <a16:creationId xmlns:a16="http://schemas.microsoft.com/office/drawing/2014/main" id="{C47DFEC9-0FAB-4CB7-B7C4-9CBBEEB90C9B}"/>
               </a:ext>
             </a:extLst>
           </p:cNvPr>
@@ -29603,7 +30373,7 @@
           <p:cNvPr id="42" name="">
             <a:extLst xmlns:a="http://schemas.openxmlformats.org/drawingml/2006/main">
               <a:ext uri="{FF2B5EF4-FFF2-40B4-BE49-F238E27FC236}">
-                <a16:creationId xmlns:a16="http://schemas.microsoft.com/office/drawing/2014/main" id="{B5348E4C-BB3E-44C9-BFFF-8A70019D7FC5}"/>
+                <a16:creationId xmlns:a16="http://schemas.microsoft.com/office/drawing/2014/main" id="{DDB10604-BE01-4398-ABB5-6A661C86E681}"/>
               </a:ext>
             </a:extLst>
           </p:cNvPr>
@@ -29671,7 +30441,7 @@
           <p:cNvPr id="43" name="">
             <a:extLst xmlns:a="http://schemas.openxmlformats.org/drawingml/2006/main">
               <a:ext uri="{FF2B5EF4-FFF2-40B4-BE49-F238E27FC236}">
-                <a16:creationId xmlns:a16="http://schemas.microsoft.com/office/drawing/2014/main" id="{42D7F1E6-AA7B-4619-84B8-A622CA3ED57D}"/>
+                <a16:creationId xmlns:a16="http://schemas.microsoft.com/office/drawing/2014/main" id="{BF08DB9E-39F8-4141-BD11-4B78D560F3DA}"/>
               </a:ext>
             </a:extLst>
           </p:cNvPr>
@@ -29701,7 +30471,7 @@
           <p:cNvPr id="44" name="">
             <a:extLst xmlns:a="http://schemas.openxmlformats.org/drawingml/2006/main">
               <a:ext uri="{FF2B5EF4-FFF2-40B4-BE49-F238E27FC236}">
-                <a16:creationId xmlns:a16="http://schemas.microsoft.com/office/drawing/2014/main" id="{183C4CA0-7F8B-4304-B730-ABB5F8B11789}"/>
+                <a16:creationId xmlns:a16="http://schemas.microsoft.com/office/drawing/2014/main" id="{5B18DE0C-826F-4941-8C09-661CC0AE8AAD}"/>
               </a:ext>
             </a:extLst>
           </p:cNvPr>
@@ -29769,7 +30539,7 @@
           <p:cNvPr id="45" name="">
             <a:extLst xmlns:a="http://schemas.openxmlformats.org/drawingml/2006/main">
               <a:ext uri="{FF2B5EF4-FFF2-40B4-BE49-F238E27FC236}">
-                <a16:creationId xmlns:a16="http://schemas.microsoft.com/office/drawing/2014/main" id="{B9CA0EDC-3FCC-49EE-AB22-72DC45BEDC64}"/>
+                <a16:creationId xmlns:a16="http://schemas.microsoft.com/office/drawing/2014/main" id="{E492A13F-D253-472F-B37D-1BB9F30A6384}"/>
               </a:ext>
             </a:extLst>
           </p:cNvPr>
@@ -29799,7 +30569,7 @@
           <p:cNvPr id="46" name="">
             <a:extLst xmlns:a="http://schemas.openxmlformats.org/drawingml/2006/main">
               <a:ext uri="{FF2B5EF4-FFF2-40B4-BE49-F238E27FC236}">
-                <a16:creationId xmlns:a16="http://schemas.microsoft.com/office/drawing/2014/main" id="{2F7DECE0-7F92-43FF-98DF-2391E3A3F322}"/>
+                <a16:creationId xmlns:a16="http://schemas.microsoft.com/office/drawing/2014/main" id="{4A58AD67-4655-4FD6-AD8F-D2694B21DC7E}"/>
               </a:ext>
             </a:extLst>
           </p:cNvPr>
@@ -29867,7 +30637,7 @@
           <p:cNvPr id="47" name="">
             <a:extLst xmlns:a="http://schemas.openxmlformats.org/drawingml/2006/main">
               <a:ext uri="{FF2B5EF4-FFF2-40B4-BE49-F238E27FC236}">
-                <a16:creationId xmlns:a16="http://schemas.microsoft.com/office/drawing/2014/main" id="{3F61B5BB-9317-4C71-B75F-CA384781A55A}"/>
+                <a16:creationId xmlns:a16="http://schemas.microsoft.com/office/drawing/2014/main" id="{84BE6791-513C-42F4-8BA5-45EAADEC4231}"/>
               </a:ext>
             </a:extLst>
           </p:cNvPr>
@@ -29935,7 +30705,7 @@
           <p:cNvPr id="48" name="">
             <a:extLst xmlns:a="http://schemas.openxmlformats.org/drawingml/2006/main">
               <a:ext uri="{FF2B5EF4-FFF2-40B4-BE49-F238E27FC236}">
-                <a16:creationId xmlns:a16="http://schemas.microsoft.com/office/drawing/2014/main" id="{8F18145B-D84C-4FE3-9941-7BFD69E54FAA}"/>
+                <a16:creationId xmlns:a16="http://schemas.microsoft.com/office/drawing/2014/main" id="{8A2D7838-EB8D-440A-A4B8-F587F80A843A}"/>
               </a:ext>
             </a:extLst>
           </p:cNvPr>
@@ -30003,7 +30773,7 @@
           <p:cNvPr id="49" name="">
             <a:extLst xmlns:a="http://schemas.openxmlformats.org/drawingml/2006/main">
               <a:ext uri="{FF2B5EF4-FFF2-40B4-BE49-F238E27FC236}">
-                <a16:creationId xmlns:a16="http://schemas.microsoft.com/office/drawing/2014/main" id="{25637AFB-1617-4AE2-8632-F05F9B111510}"/>
+                <a16:creationId xmlns:a16="http://schemas.microsoft.com/office/drawing/2014/main" id="{197AB0CE-D84B-4AAF-8AFE-AE068C4A1682}"/>
               </a:ext>
             </a:extLst>
           </p:cNvPr>
@@ -30071,7 +30841,7 @@
           <p:cNvPr id="50" name="">
             <a:extLst xmlns:a="http://schemas.openxmlformats.org/drawingml/2006/main">
               <a:ext uri="{FF2B5EF4-FFF2-40B4-BE49-F238E27FC236}">
-                <a16:creationId xmlns:a16="http://schemas.microsoft.com/office/drawing/2014/main" id="{A0873240-B01F-48D6-9C03-ED890ED70F66}"/>
+                <a16:creationId xmlns:a16="http://schemas.microsoft.com/office/drawing/2014/main" id="{977EE033-6346-4679-BF1E-84F67AAC70EB}"/>
               </a:ext>
             </a:extLst>
           </p:cNvPr>
@@ -30162,7 +30932,7 @@
           <p:cNvPr id="51" name="">
             <a:extLst xmlns:a="http://schemas.openxmlformats.org/drawingml/2006/main">
               <a:ext uri="{FF2B5EF4-FFF2-40B4-BE49-F238E27FC236}">
-                <a16:creationId xmlns:a16="http://schemas.microsoft.com/office/drawing/2014/main" id="{B0AD5E1A-566C-488B-B4AA-7BAD52489107}"/>
+                <a16:creationId xmlns:a16="http://schemas.microsoft.com/office/drawing/2014/main" id="{B1D451F1-AD35-4811-A504-43ECCA9821FB}"/>
               </a:ext>
             </a:extLst>
           </p:cNvPr>
@@ -30228,7 +30998,7 @@
     </p:spTree>
     <p:extLst>
       <p:ext uri="{BB962C8B-B14F-4D97-AF65-F5344CB8AC3E}">
-        <p14:creationId xmlns:p14="http://schemas.microsoft.com/office/powerpoint/2010/main" val="1177188161"/>
+        <p14:creationId xmlns:p14="http://schemas.microsoft.com/office/powerpoint/2010/main" val="1852189528"/>
       </p:ext>
     </p:extLst>
   </p:cSld>
